--- a/docs/huong-dan-diem-danh-bo-sung-hoc-vien.pptx
+++ b/docs/huong-dan-diem-danh-bo-sung-hoc-vien.pptx
@@ -11,9 +11,12 @@
     <p:sldId id="259" r:id="rId5"/>
     <p:sldId id="260" r:id="rId6"/>
     <p:sldId id="261" r:id="rId7"/>
+    <p:sldId id="262" r:id="rId8"/>
+    <p:sldId id="263" r:id="rId9"/>
+    <p:sldId id="264" r:id="rId10"/>
   </p:sldIdLst>
   <p:notesMasterIdLst>
-    <p:notesMasterId r:id="rId8"/>
+    <p:notesMasterId r:id="rId11"/>
   </p:notesMasterIdLst>
   <p:sldSz cx="9144000" cy="5143500"/>
   <p:notesSz cx="5143500" cy="9144000"/>
@@ -112,22 +115,29 @@
   <p:extLst>
     <p:ext uri="{521415D9-36F7-43E2-AB2F-B90AF26B5E84}">
       <p14:sectionLst xmlns:p14="http://schemas.microsoft.com/office/powerpoint/2010/main">
-        <p14:section name="Mở đầu" id="{d2414092-2da7-be69-2d19-e79502af7a6b}">
+        <p14:section name="Mở đầu" id="{655928b9-579a-6a03-3cfb-96287cff8bbf}">
           <p14:sldIdLst>
             <p14:sldId id="256"/>
           </p14:sldIdLst>
         </p14:section>
-        <p14:section name="Các bước" id="{a300b51f-e848-46dd-eebe-4ee0361447ac}">
+        <p14:section name="Kiểm tra" id="{05e6acf1-97f6-a52a-1432-22e24c61f39d}">
           <p14:sldIdLst>
             <p14:sldId id="257"/>
             <p14:sldId id="258"/>
+          </p14:sldIdLst>
+        </p14:section>
+        <p14:section name="Gửi minh chứng" id="{b846cd29-05b0-4941-620c-b285ee32f0cc}">
+          <p14:sldIdLst>
             <p14:sldId id="259"/>
             <p14:sldId id="260"/>
+            <p14:sldId id="261"/>
+            <p14:sldId id="262"/>
           </p14:sldIdLst>
         </p14:section>
-        <p14:section name="Phòng tránh" id="{ebb241fa-fa03-54e0-d578-ce3d0b6e5eb4}">
+        <p14:section name="Kết quả" id="{9fcd1b88-f1c6-456d-6484-9cc8e26eb97f}">
           <p14:sldIdLst>
-            <p14:sldId id="261"/>
+            <p14:sldId id="263"/>
+            <p14:sldId id="264"/>
           </p14:sldIdLst>
         </p14:section>
       </p14:sectionLst>
@@ -534,7 +544,7 @@
           <a:p>
             <a:r>
               <a:rPr lang="en-US" dirty="0"/>
-              <a:t>Bộ hướng dẫn 3 bước: kiểm tra trạng thái, chuẩn bị minh chứng, gửi cho người hỗ trợ.</a:t>
+              <a:t>4 bước: kiểm tra trạng thái, chuẩn bị minh chứng, gửi cho người hỗ trợ (Zalo hoặc mục Hỗ trợ kèm link Google Drive), xem lại kết quả. Ảnh minh họa dùng dữ liệu giả.</a:t>
             </a:r>
             <a:endParaRPr lang="en-US" dirty="0"/>
           </a:p>
@@ -998,6 +1008,270 @@
             <a:fld id="{F7021451-1387-4CA6-816F-3879F97B5CBC}" type="slidenum">
               <a:rPr lang="en-US"/>
               <a:t>6</a:t>
+            </a:fld>
+            <a:endParaRPr lang="en-US"/>
+          </a:p>
+        </p:txBody>
+      </p:sp>
+    </p:spTree>
+    <p:extLst>
+      <p:ext uri="{BB962C8B-B14F-4D97-AF65-F5344CB8AC3E}">
+        <p14:creationId xmlns:p14="http://schemas.microsoft.com/office/powerpoint/2010/main" val="1024086991"/>
+      </p:ext>
+    </p:extLst>
+  </p:cSld>
+  <p:clrMapOvr>
+    <a:masterClrMapping/>
+  </p:clrMapOvr>
+</p:notes>
+</file>
+
+<file path=ppt/notesSlides/notesSlide7.xml><?xml version="1.0" encoding="utf-8"?>
+<p:notes xmlns:a="http://schemas.openxmlformats.org/drawingml/2006/main" xmlns:r="http://schemas.openxmlformats.org/officeDocument/2006/relationships" xmlns:p="http://schemas.openxmlformats.org/presentationml/2006/main">
+  <p:cSld>
+    <p:spTree>
+      <p:nvGrpSpPr>
+        <p:cNvPr id="1" name=""/>
+        <p:cNvGrpSpPr/>
+        <p:nvPr/>
+      </p:nvGrpSpPr>
+      <p:grpSpPr>
+        <a:xfrm>
+          <a:off x="0" y="0"/>
+          <a:ext cx="0" cy="0"/>
+          <a:chOff x="0" y="0"/>
+          <a:chExt cx="0" cy="0"/>
+        </a:xfrm>
+      </p:grpSpPr>
+      <p:sp>
+        <p:nvSpPr>
+          <p:cNvPr id="2" name="Slide Image Placeholder 1"/>
+          <p:cNvSpPr>
+            <a:spLocks noGrp="1" noRot="1" noChangeAspect="1"/>
+          </p:cNvSpPr>
+          <p:nvPr>
+            <p:ph type="sldImg"/>
+          </p:nvPr>
+        </p:nvSpPr>
+        <p:spPr/>
+      </p:sp>
+      <p:sp>
+        <p:nvSpPr>
+          <p:cNvPr id="3" name="Notes Placeholder 2"/>
+          <p:cNvSpPr>
+            <a:spLocks noGrp="1"/>
+          </p:cNvSpPr>
+          <p:nvPr>
+            <p:ph type="body" idx="1"/>
+          </p:nvPr>
+        </p:nvSpPr>
+        <p:spPr/>
+        <p:txBody>
+          <a:bodyPr/>
+          <a:lstStyle/>
+          <a:p>
+            <a:r>
+              <a:rPr lang="en-US" dirty="0"/>
+              <a:t/>
+            </a:r>
+            <a:endParaRPr lang="en-US" dirty="0"/>
+          </a:p>
+        </p:txBody>
+      </p:sp>
+      <p:sp>
+        <p:nvSpPr>
+          <p:cNvPr id="4" name="Slide Number Placeholder 3"/>
+          <p:cNvSpPr>
+            <a:spLocks noGrp="1"/>
+          </p:cNvSpPr>
+          <p:nvPr>
+            <p:ph type="sldNum" sz="quarter" idx="10"/>
+          </p:nvPr>
+        </p:nvSpPr>
+        <p:spPr/>
+        <p:txBody>
+          <a:bodyPr/>
+          <a:lstStyle/>
+          <a:p>
+            <a:fld id="{F7021451-1387-4CA6-816F-3879F97B5CBC}" type="slidenum">
+              <a:rPr lang="en-US"/>
+              <a:t>7</a:t>
+            </a:fld>
+            <a:endParaRPr lang="en-US"/>
+          </a:p>
+        </p:txBody>
+      </p:sp>
+    </p:spTree>
+    <p:extLst>
+      <p:ext uri="{BB962C8B-B14F-4D97-AF65-F5344CB8AC3E}">
+        <p14:creationId xmlns:p14="http://schemas.microsoft.com/office/powerpoint/2010/main" val="1024086991"/>
+      </p:ext>
+    </p:extLst>
+  </p:cSld>
+  <p:clrMapOvr>
+    <a:masterClrMapping/>
+  </p:clrMapOvr>
+</p:notes>
+</file>
+
+<file path=ppt/notesSlides/notesSlide8.xml><?xml version="1.0" encoding="utf-8"?>
+<p:notes xmlns:a="http://schemas.openxmlformats.org/drawingml/2006/main" xmlns:r="http://schemas.openxmlformats.org/officeDocument/2006/relationships" xmlns:p="http://schemas.openxmlformats.org/presentationml/2006/main">
+  <p:cSld>
+    <p:spTree>
+      <p:nvGrpSpPr>
+        <p:cNvPr id="1" name=""/>
+        <p:cNvGrpSpPr/>
+        <p:nvPr/>
+      </p:nvGrpSpPr>
+      <p:grpSpPr>
+        <a:xfrm>
+          <a:off x="0" y="0"/>
+          <a:ext cx="0" cy="0"/>
+          <a:chOff x="0" y="0"/>
+          <a:chExt cx="0" cy="0"/>
+        </a:xfrm>
+      </p:grpSpPr>
+      <p:sp>
+        <p:nvSpPr>
+          <p:cNvPr id="2" name="Slide Image Placeholder 1"/>
+          <p:cNvSpPr>
+            <a:spLocks noGrp="1" noRot="1" noChangeAspect="1"/>
+          </p:cNvSpPr>
+          <p:nvPr>
+            <p:ph type="sldImg"/>
+          </p:nvPr>
+        </p:nvSpPr>
+        <p:spPr/>
+      </p:sp>
+      <p:sp>
+        <p:nvSpPr>
+          <p:cNvPr id="3" name="Notes Placeholder 2"/>
+          <p:cNvSpPr>
+            <a:spLocks noGrp="1"/>
+          </p:cNvSpPr>
+          <p:nvPr>
+            <p:ph type="body" idx="1"/>
+          </p:nvPr>
+        </p:nvSpPr>
+        <p:spPr/>
+        <p:txBody>
+          <a:bodyPr/>
+          <a:lstStyle/>
+          <a:p>
+            <a:r>
+              <a:rPr lang="en-US" dirty="0"/>
+              <a:t/>
+            </a:r>
+            <a:endParaRPr lang="en-US" dirty="0"/>
+          </a:p>
+        </p:txBody>
+      </p:sp>
+      <p:sp>
+        <p:nvSpPr>
+          <p:cNvPr id="4" name="Slide Number Placeholder 3"/>
+          <p:cNvSpPr>
+            <a:spLocks noGrp="1"/>
+          </p:cNvSpPr>
+          <p:nvPr>
+            <p:ph type="sldNum" sz="quarter" idx="10"/>
+          </p:nvPr>
+        </p:nvSpPr>
+        <p:spPr/>
+        <p:txBody>
+          <a:bodyPr/>
+          <a:lstStyle/>
+          <a:p>
+            <a:fld id="{F7021451-1387-4CA6-816F-3879F97B5CBC}" type="slidenum">
+              <a:rPr lang="en-US"/>
+              <a:t>8</a:t>
+            </a:fld>
+            <a:endParaRPr lang="en-US"/>
+          </a:p>
+        </p:txBody>
+      </p:sp>
+    </p:spTree>
+    <p:extLst>
+      <p:ext uri="{BB962C8B-B14F-4D97-AF65-F5344CB8AC3E}">
+        <p14:creationId xmlns:p14="http://schemas.microsoft.com/office/powerpoint/2010/main" val="1024086991"/>
+      </p:ext>
+    </p:extLst>
+  </p:cSld>
+  <p:clrMapOvr>
+    <a:masterClrMapping/>
+  </p:clrMapOvr>
+</p:notes>
+</file>
+
+<file path=ppt/notesSlides/notesSlide9.xml><?xml version="1.0" encoding="utf-8"?>
+<p:notes xmlns:a="http://schemas.openxmlformats.org/drawingml/2006/main" xmlns:r="http://schemas.openxmlformats.org/officeDocument/2006/relationships" xmlns:p="http://schemas.openxmlformats.org/presentationml/2006/main">
+  <p:cSld>
+    <p:spTree>
+      <p:nvGrpSpPr>
+        <p:cNvPr id="1" name=""/>
+        <p:cNvGrpSpPr/>
+        <p:nvPr/>
+      </p:nvGrpSpPr>
+      <p:grpSpPr>
+        <a:xfrm>
+          <a:off x="0" y="0"/>
+          <a:ext cx="0" cy="0"/>
+          <a:chOff x="0" y="0"/>
+          <a:chExt cx="0" cy="0"/>
+        </a:xfrm>
+      </p:grpSpPr>
+      <p:sp>
+        <p:nvSpPr>
+          <p:cNvPr id="2" name="Slide Image Placeholder 1"/>
+          <p:cNvSpPr>
+            <a:spLocks noGrp="1" noRot="1" noChangeAspect="1"/>
+          </p:cNvSpPr>
+          <p:nvPr>
+            <p:ph type="sldImg"/>
+          </p:nvPr>
+        </p:nvSpPr>
+        <p:spPr/>
+      </p:sp>
+      <p:sp>
+        <p:nvSpPr>
+          <p:cNvPr id="3" name="Notes Placeholder 2"/>
+          <p:cNvSpPr>
+            <a:spLocks noGrp="1"/>
+          </p:cNvSpPr>
+          <p:nvPr>
+            <p:ph type="body" idx="1"/>
+          </p:nvPr>
+        </p:nvSpPr>
+        <p:spPr/>
+        <p:txBody>
+          <a:bodyPr/>
+          <a:lstStyle/>
+          <a:p>
+            <a:r>
+              <a:rPr lang="en-US" dirty="0"/>
+              <a:t/>
+            </a:r>
+            <a:endParaRPr lang="en-US" dirty="0"/>
+          </a:p>
+        </p:txBody>
+      </p:sp>
+      <p:sp>
+        <p:nvSpPr>
+          <p:cNvPr id="4" name="Slide Number Placeholder 3"/>
+          <p:cNvSpPr>
+            <a:spLocks noGrp="1"/>
+          </p:cNvSpPr>
+          <p:nvPr>
+            <p:ph type="sldNum" sz="quarter" idx="10"/>
+          </p:nvPr>
+        </p:nvSpPr>
+        <p:spPr/>
+        <p:txBody>
+          <a:bodyPr/>
+          <a:lstStyle/>
+          <a:p>
+            <a:fld id="{F7021451-1387-4CA6-816F-3879F97B5CBC}" type="slidenum">
+              <a:rPr lang="en-US"/>
+              <a:t>9</a:t>
             </a:fld>
             <a:endParaRPr lang="en-US"/>
           </a:p>
@@ -2191,7 +2465,7 @@
         </p:nvSpPr>
         <p:spPr>
           <a:xfrm>
-            <a:off x="457200" y="1188720"/>
+            <a:off x="457200" y="1143000"/>
             <a:ext cx="365760" cy="365760"/>
           </a:xfrm>
           <a:prstGeom prst="ellipse">
@@ -2211,7 +2485,7 @@
         </p:nvSpPr>
         <p:spPr>
           <a:xfrm>
-            <a:off x="457200" y="1188720"/>
+            <a:off x="457200" y="1143000"/>
             <a:ext cx="365760" cy="365760"/>
           </a:xfrm>
           <a:prstGeom prst="rect">
@@ -2247,8 +2521,8 @@
         </p:nvSpPr>
         <p:spPr>
           <a:xfrm>
-            <a:off x="960120" y="1152144"/>
-            <a:ext cx="3520440" cy="603504"/>
+            <a:off x="960120" y="1106424"/>
+            <a:ext cx="3520440" cy="475488"/>
           </a:xfrm>
           <a:prstGeom prst="rect">
             <a:avLst/>
@@ -2264,25 +2538,47 @@
               <a:buNone/>
             </a:pPr>
             <a:r>
-              <a:rPr lang="en-US" sz="1500" dirty="0">
+              <a:rPr lang="en-US" sz="1400" dirty="0">
                 <a:solidFill>
                   <a:schemeClr val="tx1"/>
                 </a:solidFill>
               </a:rPr>
-              <a:t>Đăng nhập </a:t>
-            </a:r>
-            <a:pPr indent="0" marL="0">
-              <a:buNone/>
-            </a:pPr>
-            <a:r>
-              <a:rPr lang="en-US" sz="1500" b="1" dirty="0">
+              <a:t>Bấm menu </a:t>
+            </a:r>
+            <a:pPr indent="0" marL="0">
+              <a:buNone/>
+            </a:pPr>
+            <a:r>
+              <a:rPr lang="en-US" sz="1400" b="1" dirty="0">
                 <a:solidFill>
                   <a:schemeClr val="tx1"/>
                 </a:solidFill>
               </a:rPr>
-              <a:t>cổng học viên</a:t>
-            </a:r>
-            <a:endParaRPr lang="en-US" sz="1500" dirty="0"/>
+              <a:t>☰</a:t>
+            </a:r>
+            <a:pPr indent="0" marL="0">
+              <a:buNone/>
+            </a:pPr>
+            <a:r>
+              <a:rPr lang="en-US" sz="1400" dirty="0">
+                <a:solidFill>
+                  <a:schemeClr val="tx1"/>
+                </a:solidFill>
+              </a:rPr>
+              <a:t> (góc phải trên) → </a:t>
+            </a:r>
+            <a:pPr indent="0" marL="0">
+              <a:buNone/>
+            </a:pPr>
+            <a:r>
+              <a:rPr lang="en-US" sz="1400" b="1" dirty="0">
+                <a:solidFill>
+                  <a:schemeClr val="tx1"/>
+                </a:solidFill>
+              </a:rPr>
+              <a:t>Lớp học</a:t>
+            </a:r>
+            <a:endParaRPr lang="en-US" sz="1400" dirty="0"/>
           </a:p>
         </p:txBody>
       </p:sp>
@@ -2294,7 +2590,7 @@
         </p:nvSpPr>
         <p:spPr>
           <a:xfrm>
-            <a:off x="457200" y="1847088"/>
+            <a:off x="457200" y="1673352"/>
             <a:ext cx="365760" cy="365760"/>
           </a:xfrm>
           <a:prstGeom prst="ellipse">
@@ -2314,7 +2610,7 @@
         </p:nvSpPr>
         <p:spPr>
           <a:xfrm>
-            <a:off x="457200" y="1847088"/>
+            <a:off x="457200" y="1673352"/>
             <a:ext cx="365760" cy="365760"/>
           </a:xfrm>
           <a:prstGeom prst="rect">
@@ -2350,8 +2646,8 @@
         </p:nvSpPr>
         <p:spPr>
           <a:xfrm>
-            <a:off x="960120" y="1810512"/>
-            <a:ext cx="3520440" cy="603504"/>
+            <a:off x="960120" y="1636776"/>
+            <a:ext cx="3520440" cy="475488"/>
           </a:xfrm>
           <a:prstGeom prst="rect">
             <a:avLst/>
@@ -2367,25 +2663,25 @@
               <a:buNone/>
             </a:pPr>
             <a:r>
-              <a:rPr lang="en-US" sz="1500" dirty="0">
+              <a:rPr lang="en-US" sz="1400" dirty="0">
                 <a:solidFill>
                   <a:schemeClr val="tx1"/>
                 </a:solidFill>
               </a:rPr>
-              <a:t>Mở mục </a:t>
-            </a:r>
-            <a:pPr indent="0" marL="0">
-              <a:buNone/>
-            </a:pPr>
-            <a:r>
-              <a:rPr lang="en-US" sz="1500" b="1" dirty="0">
+              <a:t>Cuộn tới </a:t>
+            </a:r>
+            <a:pPr indent="0" marL="0">
+              <a:buNone/>
+            </a:pPr>
+            <a:r>
+              <a:rPr lang="en-US" sz="1400" b="1" dirty="0">
                 <a:solidFill>
                   <a:schemeClr val="tx1"/>
                 </a:solidFill>
               </a:rPr>
-              <a:t>Thông tin lớp học</a:t>
-            </a:r>
-            <a:endParaRPr lang="en-US" sz="1500" dirty="0"/>
+              <a:t>giai đoạn đang học</a:t>
+            </a:r>
+            <a:endParaRPr lang="en-US" sz="1400" dirty="0"/>
           </a:p>
         </p:txBody>
       </p:sp>
@@ -2397,7 +2693,7 @@
         </p:nvSpPr>
         <p:spPr>
           <a:xfrm>
-            <a:off x="457200" y="2505456"/>
+            <a:off x="457200" y="2203704"/>
             <a:ext cx="365760" cy="365760"/>
           </a:xfrm>
           <a:prstGeom prst="ellipse">
@@ -2417,7 +2713,7 @@
         </p:nvSpPr>
         <p:spPr>
           <a:xfrm>
-            <a:off x="457200" y="2505456"/>
+            <a:off x="457200" y="2203704"/>
             <a:ext cx="365760" cy="365760"/>
           </a:xfrm>
           <a:prstGeom prst="rect">
@@ -2453,8 +2749,8 @@
         </p:nvSpPr>
         <p:spPr>
           <a:xfrm>
-            <a:off x="960120" y="2468880"/>
-            <a:ext cx="3520440" cy="603504"/>
+            <a:off x="960120" y="2167128"/>
+            <a:ext cx="3520440" cy="475488"/>
           </a:xfrm>
           <a:prstGeom prst="rect">
             <a:avLst/>
@@ -2470,210 +2766,38 @@
               <a:buNone/>
             </a:pPr>
             <a:r>
-              <a:rPr lang="en-US" sz="1500" dirty="0">
+              <a:rPr lang="en-US" sz="1400" dirty="0">
                 <a:solidFill>
                   <a:schemeClr val="tx1"/>
                 </a:solidFill>
               </a:rPr>
-              <a:t>Xem nhãn dưới </a:t>
-            </a:r>
-            <a:pPr indent="0" marL="0">
-              <a:buNone/>
-            </a:pPr>
-            <a:r>
-              <a:rPr lang="en-US" sz="1500" b="1" dirty="0">
+              <a:t>Xem </a:t>
+            </a:r>
+            <a:pPr indent="0" marL="0">
+              <a:buNone/>
+            </a:pPr>
+            <a:r>
+              <a:rPr lang="en-US" sz="1400" b="1" dirty="0">
                 <a:solidFill>
                   <a:schemeClr val="tx1"/>
                 </a:solidFill>
               </a:rPr>
-              <a:t>từng buổi</a:t>
-            </a:r>
-            <a:pPr indent="0" marL="0">
-              <a:buNone/>
-            </a:pPr>
-            <a:r>
-              <a:rPr lang="en-US" sz="1500" dirty="0">
-                <a:solidFill>
-                  <a:schemeClr val="tx1"/>
-                </a:solidFill>
-              </a:rPr>
-              <a:t> đã học</a:t>
-            </a:r>
-            <a:endParaRPr lang="en-US" sz="1500" dirty="0"/>
-          </a:p>
-        </p:txBody>
-      </p:sp>
-      <p:sp>
-        <p:nvSpPr>
-          <p:cNvPr id="12" name="So 4"/>
+              <a:t>nhãn cạnh số buổi</a:t>
+            </a:r>
+            <a:endParaRPr lang="en-US" sz="1400" dirty="0"/>
+          </a:p>
+        </p:txBody>
+      </p:sp>
+      <p:sp>
+        <p:nvSpPr>
+          <p:cNvPr id="12" name="Nhan Có mặt"/>
           <p:cNvSpPr/>
           <p:nvPr/>
         </p:nvSpPr>
         <p:spPr>
           <a:xfrm>
-            <a:off x="457200" y="3163824"/>
-            <a:ext cx="365760" cy="365760"/>
-          </a:xfrm>
-          <a:prstGeom prst="ellipse">
-            <a:avLst/>
-          </a:prstGeom>
-          <a:solidFill>
-            <a:schemeClr val="tx2"/>
-          </a:solidFill>
-          <a:ln/>
-        </p:spPr>
-      </p:sp>
-      <p:sp>
-        <p:nvSpPr>
-          <p:cNvPr id="13" name="Text 11"/>
-          <p:cNvSpPr txBox="1"/>
-          <p:nvPr/>
-        </p:nvSpPr>
-        <p:spPr>
-          <a:xfrm>
-            <a:off x="457200" y="3163824"/>
-            <a:ext cx="365760" cy="365760"/>
-          </a:xfrm>
-          <a:prstGeom prst="rect">
-            <a:avLst/>
-          </a:prstGeom>
-          <a:noFill/>
-          <a:ln/>
-        </p:spPr>
-        <p:txBody>
-          <a:bodyPr wrap="square" lIns="0" tIns="0" rIns="0" bIns="0" rtlCol="0" anchor="ctr"/>
-          <a:lstStyle/>
-          <a:p>
-            <a:pPr algn="ctr" indent="0" marL="0">
-              <a:buNone/>
-            </a:pPr>
-            <a:r>
-              <a:rPr lang="en-US" sz="1600" b="1" dirty="0">
-                <a:solidFill>
-                  <a:schemeClr val="bg1"/>
-                </a:solidFill>
-              </a:rPr>
-              <a:t>4</a:t>
-            </a:r>
-            <a:endParaRPr lang="en-US" sz="1600" dirty="0"/>
-          </a:p>
-        </p:txBody>
-      </p:sp>
-      <p:sp>
-        <p:nvSpPr>
-          <p:cNvPr id="14" name="Text 12"/>
-          <p:cNvSpPr txBox="1"/>
-          <p:nvPr/>
-        </p:nvSpPr>
-        <p:spPr>
-          <a:xfrm>
-            <a:off x="960120" y="3127248"/>
-            <a:ext cx="3520440" cy="603504"/>
-          </a:xfrm>
-          <a:prstGeom prst="rect">
-            <a:avLst/>
-          </a:prstGeom>
-          <a:noFill/>
-          <a:ln/>
-        </p:spPr>
-        <p:txBody>
-          <a:bodyPr wrap="square" lIns="0" tIns="0" rIns="0" bIns="0" rtlCol="0" anchor="t"/>
-          <a:lstStyle/>
-          <a:p>
-            <a:pPr indent="0" marL="0">
-              <a:buNone/>
-            </a:pPr>
-            <a:r>
-              <a:rPr lang="en-US" sz="1500" dirty="0">
-                <a:solidFill>
-                  <a:schemeClr val="tx1"/>
-                </a:solidFill>
-              </a:rPr>
-              <a:t>Buổi bị sai → làm tiếp </a:t>
-            </a:r>
-            <a:pPr indent="0" marL="0">
-              <a:buNone/>
-            </a:pPr>
-            <a:r>
-              <a:rPr lang="en-US" sz="1500" b="1" dirty="0">
-                <a:solidFill>
-                  <a:schemeClr val="tx1"/>
-                </a:solidFill>
-              </a:rPr>
-              <a:t>Bước 2</a:t>
-            </a:r>
-            <a:endParaRPr lang="en-US" sz="1500" dirty="0"/>
-          </a:p>
-        </p:txBody>
-      </p:sp>
-      <p:sp>
-        <p:nvSpPr>
-          <p:cNvPr id="15" name="Bang nhan"/>
-          <p:cNvSpPr/>
-          <p:nvPr/>
-        </p:nvSpPr>
-        <p:spPr>
-          <a:xfrm>
-            <a:off x="4663440" y="1097280"/>
-            <a:ext cx="4023360" cy="3383280"/>
-          </a:xfrm>
-          <a:prstGeom prst="roundRect">
-            <a:avLst>
-              <a:gd name="adj" fmla="val 2162"/>
-            </a:avLst>
-          </a:prstGeom>
-          <a:solidFill>
-            <a:schemeClr val="bg2"/>
-          </a:solidFill>
-          <a:ln/>
-        </p:spPr>
-      </p:sp>
-      <p:sp>
-        <p:nvSpPr>
-          <p:cNvPr id="16" name="Text 14"/>
-          <p:cNvSpPr txBox="1"/>
-          <p:nvPr/>
-        </p:nvSpPr>
-        <p:spPr>
-          <a:xfrm>
-            <a:off x="4846320" y="1207008"/>
-            <a:ext cx="3657600" cy="320040"/>
-          </a:xfrm>
-          <a:prstGeom prst="rect">
-            <a:avLst/>
-          </a:prstGeom>
-          <a:noFill/>
-          <a:ln/>
-        </p:spPr>
-        <p:txBody>
-          <a:bodyPr wrap="square" lIns="0" tIns="0" rIns="0" bIns="0" rtlCol="0" anchor="ctr"/>
-          <a:lstStyle/>
-          <a:p>
-            <a:pPr indent="0" marL="0">
-              <a:buNone/>
-            </a:pPr>
-            <a:r>
-              <a:rPr lang="en-US" sz="1600" b="1" dirty="0">
-                <a:solidFill>
-                  <a:schemeClr val="tx2"/>
-                </a:solidFill>
-              </a:rPr>
-              <a:t>Ý nghĩa nhãn</a:t>
-            </a:r>
-            <a:endParaRPr lang="en-US" sz="1600" dirty="0"/>
-          </a:p>
-        </p:txBody>
-      </p:sp>
-      <p:sp>
-        <p:nvSpPr>
-          <p:cNvPr id="17" name="Nhan Có mặt"/>
-          <p:cNvSpPr/>
-          <p:nvPr/>
-        </p:nvSpPr>
-        <p:spPr>
-          <a:xfrm>
-            <a:off x="4846320" y="1691640"/>
-            <a:ext cx="1325880" cy="310896"/>
+            <a:off x="457200" y="2880360"/>
+            <a:ext cx="1234440" cy="292608"/>
           </a:xfrm>
           <a:prstGeom prst="roundRect">
             <a:avLst>
@@ -2695,14 +2819,14 @@
       </p:sp>
       <p:sp>
         <p:nvSpPr>
-          <p:cNvPr id="18" name="Text 16"/>
+          <p:cNvPr id="13" name="Text 11"/>
           <p:cNvSpPr txBox="1"/>
           <p:nvPr/>
         </p:nvSpPr>
         <p:spPr>
           <a:xfrm>
-            <a:off x="4846320" y="1691640"/>
-            <a:ext cx="1325880" cy="310896"/>
+            <a:off x="457200" y="2880360"/>
+            <a:ext cx="1234440" cy="292608"/>
           </a:xfrm>
           <a:prstGeom prst="rect">
             <a:avLst/>
@@ -2731,14 +2855,14 @@
       </p:sp>
       <p:sp>
         <p:nvSpPr>
-          <p:cNvPr id="19" name="Text 17"/>
+          <p:cNvPr id="14" name="Text 12"/>
           <p:cNvSpPr txBox="1"/>
           <p:nvPr/>
         </p:nvSpPr>
         <p:spPr>
           <a:xfrm>
-            <a:off x="6309360" y="1600200"/>
-            <a:ext cx="2240280" cy="548640"/>
+            <a:off x="1828800" y="2843784"/>
+            <a:ext cx="2651760" cy="365760"/>
           </a:xfrm>
           <a:prstGeom prst="rect">
             <a:avLst/>
@@ -2759,7 +2883,7 @@
                   <a:schemeClr val="tx1"/>
                 </a:solidFill>
               </a:rPr>
-              <a:t>Đã được ghi nhận – không cần làm gì</a:t>
+              <a:t>Đã ghi nhận</a:t>
             </a:r>
             <a:endParaRPr lang="en-US" sz="1300" dirty="0"/>
           </a:p>
@@ -2767,14 +2891,115 @@
       </p:sp>
       <p:sp>
         <p:nvSpPr>
-          <p:cNvPr id="20" name="Nhan Vắng có phép"/>
+          <p:cNvPr id="15" name="Nhan Vắng"/>
           <p:cNvSpPr/>
           <p:nvPr/>
         </p:nvSpPr>
         <p:spPr>
           <a:xfrm>
-            <a:off x="4846320" y="2377440"/>
-            <a:ext cx="1325880" cy="310896"/>
+            <a:off x="457200" y="3291840"/>
+            <a:ext cx="1234440" cy="292608"/>
+          </a:xfrm>
+          <a:prstGeom prst="roundRect">
+            <a:avLst>
+              <a:gd name="adj" fmla="val 50000"/>
+            </a:avLst>
+          </a:prstGeom>
+          <a:solidFill>
+            <a:schemeClr val="accent3">
+              <a:alpha val="22000"/>
+            </a:schemeClr>
+          </a:solidFill>
+          <a:ln w="12700">
+            <a:solidFill>
+              <a:schemeClr val="accent3"/>
+            </a:solidFill>
+            <a:prstDash val="solid"/>
+          </a:ln>
+        </p:spPr>
+      </p:sp>
+      <p:sp>
+        <p:nvSpPr>
+          <p:cNvPr id="16" name="Text 14"/>
+          <p:cNvSpPr txBox="1"/>
+          <p:nvPr/>
+        </p:nvSpPr>
+        <p:spPr>
+          <a:xfrm>
+            <a:off x="457200" y="3291840"/>
+            <a:ext cx="1234440" cy="292608"/>
+          </a:xfrm>
+          <a:prstGeom prst="rect">
+            <a:avLst/>
+          </a:prstGeom>
+          <a:noFill/>
+          <a:ln/>
+        </p:spPr>
+        <p:txBody>
+          <a:bodyPr wrap="square" lIns="0" tIns="0" rIns="0" bIns="0" rtlCol="0" anchor="ctr"/>
+          <a:lstStyle/>
+          <a:p>
+            <a:pPr algn="ctr" indent="0" marL="0">
+              <a:buNone/>
+            </a:pPr>
+            <a:r>
+              <a:rPr lang="en-US" sz="1200" b="1" dirty="0">
+                <a:solidFill>
+                  <a:schemeClr val="accent3"/>
+                </a:solidFill>
+              </a:rPr>
+              <a:t>Vắng</a:t>
+            </a:r>
+            <a:endParaRPr lang="en-US" sz="1200" dirty="0"/>
+          </a:p>
+        </p:txBody>
+      </p:sp>
+      <p:sp>
+        <p:nvSpPr>
+          <p:cNvPr id="17" name="Text 15"/>
+          <p:cNvSpPr txBox="1"/>
+          <p:nvPr/>
+        </p:nvSpPr>
+        <p:spPr>
+          <a:xfrm>
+            <a:off x="1828800" y="3255264"/>
+            <a:ext cx="2651760" cy="365760"/>
+          </a:xfrm>
+          <a:prstGeom prst="rect">
+            <a:avLst/>
+          </a:prstGeom>
+          <a:noFill/>
+          <a:ln/>
+        </p:spPr>
+        <p:txBody>
+          <a:bodyPr wrap="square" lIns="0" tIns="0" rIns="0" bIns="0" rtlCol="0" anchor="ctr"/>
+          <a:lstStyle/>
+          <a:p>
+            <a:pPr indent="0" marL="0">
+              <a:buNone/>
+            </a:pPr>
+            <a:r>
+              <a:rPr lang="en-US" sz="1300" dirty="0">
+                <a:solidFill>
+                  <a:schemeClr val="tx1"/>
+                </a:solidFill>
+              </a:rPr>
+              <a:t>Đã học thật → đề nghị bổ sung</a:t>
+            </a:r>
+            <a:endParaRPr lang="en-US" sz="1300" dirty="0"/>
+          </a:p>
+        </p:txBody>
+      </p:sp>
+      <p:sp>
+        <p:nvSpPr>
+          <p:cNvPr id="18" name="Nhan Vắng có phép"/>
+          <p:cNvSpPr/>
+          <p:nvPr/>
+        </p:nvSpPr>
+        <p:spPr>
+          <a:xfrm>
+            <a:off x="457200" y="3703320"/>
+            <a:ext cx="1234440" cy="292608"/>
           </a:xfrm>
           <a:prstGeom prst="roundRect">
             <a:avLst>
@@ -2796,14 +3021,14 @@
       </p:sp>
       <p:sp>
         <p:nvSpPr>
-          <p:cNvPr id="21" name="Text 19"/>
+          <p:cNvPr id="19" name="Text 17"/>
           <p:cNvSpPr txBox="1"/>
           <p:nvPr/>
         </p:nvSpPr>
         <p:spPr>
           <a:xfrm>
-            <a:off x="4846320" y="2377440"/>
-            <a:ext cx="1325880" cy="310896"/>
+            <a:off x="457200" y="3703320"/>
+            <a:ext cx="1234440" cy="292608"/>
           </a:xfrm>
           <a:prstGeom prst="rect">
             <a:avLst/>
@@ -2832,14 +3057,14 @@
       </p:sp>
       <p:sp>
         <p:nvSpPr>
-          <p:cNvPr id="22" name="Text 20"/>
+          <p:cNvPr id="20" name="Text 18"/>
           <p:cNvSpPr txBox="1"/>
           <p:nvPr/>
         </p:nvSpPr>
         <p:spPr>
           <a:xfrm>
-            <a:off x="6309360" y="2286000"/>
-            <a:ext cx="2240280" cy="548640"/>
+            <a:off x="1828800" y="3666744"/>
+            <a:ext cx="2651760" cy="365760"/>
           </a:xfrm>
           <a:prstGeom prst="rect">
             <a:avLst/>
@@ -2860,7 +3085,7 @@
                   <a:schemeClr val="tx1"/>
                 </a:solidFill>
               </a:rPr>
-              <a:t>Vắng có lý do đã được chấp nhận</a:t>
+              <a:t>Lý do vắng đã được chấp nhận</a:t>
             </a:r>
             <a:endParaRPr lang="en-US" sz="1300" dirty="0"/>
           </a:p>
@@ -2868,115 +3093,14 @@
       </p:sp>
       <p:sp>
         <p:nvSpPr>
-          <p:cNvPr id="23" name="Nhan Vắng"/>
+          <p:cNvPr id="21" name="Nhan Không nhãn"/>
           <p:cNvSpPr/>
           <p:nvPr/>
         </p:nvSpPr>
         <p:spPr>
           <a:xfrm>
-            <a:off x="4846320" y="3063240"/>
-            <a:ext cx="1325880" cy="310896"/>
-          </a:xfrm>
-          <a:prstGeom prst="roundRect">
-            <a:avLst>
-              <a:gd name="adj" fmla="val 50000"/>
-            </a:avLst>
-          </a:prstGeom>
-          <a:solidFill>
-            <a:schemeClr val="accent3">
-              <a:alpha val="22000"/>
-            </a:schemeClr>
-          </a:solidFill>
-          <a:ln w="12700">
-            <a:solidFill>
-              <a:schemeClr val="accent3"/>
-            </a:solidFill>
-            <a:prstDash val="solid"/>
-          </a:ln>
-        </p:spPr>
-      </p:sp>
-      <p:sp>
-        <p:nvSpPr>
-          <p:cNvPr id="24" name="Text 22"/>
-          <p:cNvSpPr txBox="1"/>
-          <p:nvPr/>
-        </p:nvSpPr>
-        <p:spPr>
-          <a:xfrm>
-            <a:off x="4846320" y="3063240"/>
-            <a:ext cx="1325880" cy="310896"/>
-          </a:xfrm>
-          <a:prstGeom prst="rect">
-            <a:avLst/>
-          </a:prstGeom>
-          <a:noFill/>
-          <a:ln/>
-        </p:spPr>
-        <p:txBody>
-          <a:bodyPr wrap="square" lIns="0" tIns="0" rIns="0" bIns="0" rtlCol="0" anchor="ctr"/>
-          <a:lstStyle/>
-          <a:p>
-            <a:pPr algn="ctr" indent="0" marL="0">
-              <a:buNone/>
-            </a:pPr>
-            <a:r>
-              <a:rPr lang="en-US" sz="1200" b="1" dirty="0">
-                <a:solidFill>
-                  <a:schemeClr val="accent3"/>
-                </a:solidFill>
-              </a:rPr>
-              <a:t>Vắng</a:t>
-            </a:r>
-            <a:endParaRPr lang="en-US" sz="1200" dirty="0"/>
-          </a:p>
-        </p:txBody>
-      </p:sp>
-      <p:sp>
-        <p:nvSpPr>
-          <p:cNvPr id="25" name="Text 23"/>
-          <p:cNvSpPr txBox="1"/>
-          <p:nvPr/>
-        </p:nvSpPr>
-        <p:spPr>
-          <a:xfrm>
-            <a:off x="6309360" y="2971800"/>
-            <a:ext cx="2240280" cy="548640"/>
-          </a:xfrm>
-          <a:prstGeom prst="rect">
-            <a:avLst/>
-          </a:prstGeom>
-          <a:noFill/>
-          <a:ln/>
-        </p:spPr>
-        <p:txBody>
-          <a:bodyPr wrap="square" lIns="0" tIns="0" rIns="0" bIns="0" rtlCol="0" anchor="ctr"/>
-          <a:lstStyle/>
-          <a:p>
-            <a:pPr indent="0" marL="0">
-              <a:buNone/>
-            </a:pPr>
-            <a:r>
-              <a:rPr lang="en-US" sz="1300" dirty="0">
-                <a:solidFill>
-                  <a:schemeClr val="tx1"/>
-                </a:solidFill>
-              </a:rPr>
-              <a:t>Đã học thực tế → đề nghị bổ sung</a:t>
-            </a:r>
-            <a:endParaRPr lang="en-US" sz="1300" dirty="0"/>
-          </a:p>
-        </p:txBody>
-      </p:sp>
-      <p:sp>
-        <p:nvSpPr>
-          <p:cNvPr id="26" name="Nhan (không nhãn)"/>
-          <p:cNvSpPr/>
-          <p:nvPr/>
-        </p:nvSpPr>
-        <p:spPr>
-          <a:xfrm>
-            <a:off x="4846320" y="3749040"/>
-            <a:ext cx="1325880" cy="310896"/>
+            <a:off x="457200" y="4114800"/>
+            <a:ext cx="1234440" cy="292608"/>
           </a:xfrm>
           <a:prstGeom prst="roundRect">
             <a:avLst>
@@ -2998,14 +3122,14 @@
       </p:sp>
       <p:sp>
         <p:nvSpPr>
-          <p:cNvPr id="27" name="Text 25"/>
+          <p:cNvPr id="22" name="Text 20"/>
           <p:cNvSpPr txBox="1"/>
           <p:nvPr/>
         </p:nvSpPr>
         <p:spPr>
           <a:xfrm>
-            <a:off x="4846320" y="3749040"/>
-            <a:ext cx="1325880" cy="310896"/>
+            <a:off x="457200" y="4114800"/>
+            <a:ext cx="1234440" cy="292608"/>
           </a:xfrm>
           <a:prstGeom prst="rect">
             <a:avLst/>
@@ -3026,7 +3150,7 @@
                   <a:schemeClr val="accent5"/>
                 </a:solidFill>
               </a:rPr>
-              <a:t>(không nhãn)</a:t>
+              <a:t>Không nhãn</a:t>
             </a:r>
             <a:endParaRPr lang="en-US" sz="1200" dirty="0"/>
           </a:p>
@@ -3034,14 +3158,14 @@
       </p:sp>
       <p:sp>
         <p:nvSpPr>
-          <p:cNvPr id="28" name="Text 26"/>
+          <p:cNvPr id="23" name="Text 21"/>
           <p:cNvSpPr txBox="1"/>
           <p:nvPr/>
         </p:nvSpPr>
         <p:spPr>
           <a:xfrm>
-            <a:off x="6309360" y="3657600"/>
-            <a:ext cx="2240280" cy="548640"/>
+            <a:off x="1828800" y="4078224"/>
+            <a:ext cx="2651760" cy="365760"/>
           </a:xfrm>
           <a:prstGeom prst="rect">
             <a:avLst/>
@@ -3062,7 +3186,245 @@
                   <a:schemeClr val="tx1"/>
                 </a:solidFill>
               </a:rPr>
-              <a:t>Chưa có kết quả – buổi chưa được nhập điểm danh</a:t>
+              <a:t>Chưa có kết quả điểm danh</a:t>
+            </a:r>
+            <a:endParaRPr lang="en-US" sz="1300" dirty="0"/>
+          </a:p>
+        </p:txBody>
+      </p:sp>
+      <p:sp>
+        <p:nvSpPr>
+          <p:cNvPr id="24" name="Khung hv-menu"/>
+          <p:cNvSpPr/>
+          <p:nvPr/>
+        </p:nvSpPr>
+        <p:spPr>
+          <a:xfrm>
+            <a:off x="4736592" y="1078992"/>
+            <a:ext cx="1728216" cy="2302647"/>
+          </a:xfrm>
+          <a:prstGeom prst="roundRect">
+            <a:avLst>
+              <a:gd name="adj" fmla="val 6349"/>
+            </a:avLst>
+          </a:prstGeom>
+          <a:solidFill>
+            <a:schemeClr val="tx1"/>
+          </a:solidFill>
+          <a:ln/>
+          <a:effectLst>
+            <a:outerShdw sx="100000" sy="100000" kx="0" ky="0" algn="bl" rotWithShape="0" blurRad="76200" dist="25400" dir="5400000">
+              <a:srgbClr val="1B2A2F">
+                <a:alpha val="25000"/>
+              </a:srgbClr>
+            </a:outerShdw>
+          </a:effectLst>
+        </p:spPr>
+      </p:sp>
+      <p:pic>
+        <p:nvPicPr>
+          <p:cNvPr id="25" name="Anh hv-menu" descr="Menu cổng học viên, mục Lớp học">    </p:cNvPr>
+          <p:cNvPicPr>
+            <a:picLocks noChangeAspect="1"/>
+          </p:cNvPicPr>
+          <p:nvPr/>
+        </p:nvPicPr>
+        <p:blipFill>
+          <a:blip r:embed="rId1"/>
+          <a:stretch>
+            <a:fillRect/>
+          </a:stretch>
+        </p:blipFill>
+        <p:spPr>
+          <a:xfrm>
+            <a:off x="4800600" y="1143000"/>
+            <a:ext cx="1600200" cy="2174631"/>
+          </a:xfrm>
+          <a:prstGeom prst="rect">
+            <a:avLst/>
+          </a:prstGeom>
+        </p:spPr>
+      </p:pic>
+      <p:sp>
+        <p:nvSpPr>
+          <p:cNvPr id="26" name="So 1"/>
+          <p:cNvSpPr/>
+          <p:nvPr/>
+        </p:nvSpPr>
+        <p:spPr>
+          <a:xfrm>
+            <a:off x="4379976" y="1779563"/>
+            <a:ext cx="292608" cy="292608"/>
+          </a:xfrm>
+          <a:prstGeom prst="ellipse">
+            <a:avLst/>
+          </a:prstGeom>
+          <a:solidFill>
+            <a:schemeClr val="accent2"/>
+          </a:solidFill>
+          <a:ln/>
+        </p:spPr>
+      </p:sp>
+      <p:sp>
+        <p:nvSpPr>
+          <p:cNvPr id="27" name="Text 24"/>
+          <p:cNvSpPr txBox="1"/>
+          <p:nvPr/>
+        </p:nvSpPr>
+        <p:spPr>
+          <a:xfrm>
+            <a:off x="4379976" y="1779563"/>
+            <a:ext cx="292608" cy="292608"/>
+          </a:xfrm>
+          <a:prstGeom prst="rect">
+            <a:avLst/>
+          </a:prstGeom>
+          <a:noFill/>
+          <a:ln/>
+        </p:spPr>
+        <p:txBody>
+          <a:bodyPr wrap="square" lIns="0" tIns="0" rIns="0" bIns="0" rtlCol="0" anchor="ctr"/>
+          <a:lstStyle/>
+          <a:p>
+            <a:pPr algn="ctr" indent="0" marL="0">
+              <a:buNone/>
+            </a:pPr>
+            <a:r>
+              <a:rPr lang="en-US" sz="1300" b="1" dirty="0">
+                <a:solidFill>
+                  <a:schemeClr val="bg1"/>
+                </a:solidFill>
+              </a:rPr>
+              <a:t>1</a:t>
+            </a:r>
+            <a:endParaRPr lang="en-US" sz="1300" dirty="0"/>
+          </a:p>
+        </p:txBody>
+      </p:sp>
+      <p:sp>
+        <p:nvSpPr>
+          <p:cNvPr id="28" name="Mui ten"/>
+          <p:cNvSpPr/>
+          <p:nvPr/>
+        </p:nvSpPr>
+        <p:spPr>
+          <a:xfrm>
+            <a:off x="6510528" y="2103120"/>
+            <a:ext cx="320040" cy="274320"/>
+          </a:xfrm>
+          <a:prstGeom prst="rightArrow">
+            <a:avLst/>
+          </a:prstGeom>
+          <a:solidFill>
+            <a:schemeClr val="accent6"/>
+          </a:solidFill>
+          <a:ln/>
+        </p:spPr>
+      </p:sp>
+      <p:sp>
+        <p:nvSpPr>
+          <p:cNvPr id="29" name="Khung hv-lop-hoc"/>
+          <p:cNvSpPr/>
+          <p:nvPr/>
+        </p:nvSpPr>
+        <p:spPr>
+          <a:xfrm>
+            <a:off x="6885432" y="987552"/>
+            <a:ext cx="1682496" cy="2772952"/>
+          </a:xfrm>
+          <a:prstGeom prst="roundRect">
+            <a:avLst>
+              <a:gd name="adj" fmla="val 6522"/>
+            </a:avLst>
+          </a:prstGeom>
+          <a:solidFill>
+            <a:schemeClr val="tx1"/>
+          </a:solidFill>
+          <a:ln/>
+          <a:effectLst>
+            <a:outerShdw sx="100000" sy="100000" kx="0" ky="0" algn="bl" rotWithShape="0" blurRad="76200" dist="25400" dir="5400000">
+              <a:srgbClr val="1B2A2F">
+                <a:alpha val="25000"/>
+              </a:srgbClr>
+            </a:outerShdw>
+          </a:effectLst>
+        </p:spPr>
+      </p:sp>
+      <p:pic>
+        <p:nvPicPr>
+          <p:cNvPr id="30" name="Anh hv-lop-hoc" descr="Trang Lớp học: Buổi 1 có mặt, Buổi 2 vắng, Buổi 3 chưa có nhãn">    </p:cNvPr>
+          <p:cNvPicPr>
+            <a:picLocks noChangeAspect="1"/>
+          </p:cNvPicPr>
+          <p:nvPr/>
+        </p:nvPicPr>
+        <p:blipFill>
+          <a:blip r:embed="rId2"/>
+          <a:stretch>
+            <a:fillRect/>
+          </a:stretch>
+        </p:blipFill>
+        <p:spPr>
+          <a:xfrm>
+            <a:off x="6949440" y="1051560"/>
+            <a:ext cx="1554480" cy="2644936"/>
+          </a:xfrm>
+          <a:prstGeom prst="rect">
+            <a:avLst/>
+          </a:prstGeom>
+        </p:spPr>
+      </p:pic>
+      <p:sp>
+        <p:nvSpPr>
+          <p:cNvPr id="31" name="So 3"/>
+          <p:cNvSpPr/>
+          <p:nvPr/>
+        </p:nvSpPr>
+        <p:spPr>
+          <a:xfrm>
+            <a:off x="8631936" y="1883882"/>
+            <a:ext cx="292608" cy="292608"/>
+          </a:xfrm>
+          <a:prstGeom prst="ellipse">
+            <a:avLst/>
+          </a:prstGeom>
+          <a:solidFill>
+            <a:schemeClr val="accent2"/>
+          </a:solidFill>
+          <a:ln/>
+        </p:spPr>
+      </p:sp>
+      <p:sp>
+        <p:nvSpPr>
+          <p:cNvPr id="32" name="Text 28"/>
+          <p:cNvSpPr txBox="1"/>
+          <p:nvPr/>
+        </p:nvSpPr>
+        <p:spPr>
+          <a:xfrm>
+            <a:off x="8631936" y="1883882"/>
+            <a:ext cx="292608" cy="292608"/>
+          </a:xfrm>
+          <a:prstGeom prst="rect">
+            <a:avLst/>
+          </a:prstGeom>
+          <a:noFill/>
+          <a:ln/>
+        </p:spPr>
+        <p:txBody>
+          <a:bodyPr wrap="square" lIns="0" tIns="0" rIns="0" bIns="0" rtlCol="0" anchor="ctr"/>
+          <a:lstStyle/>
+          <a:p>
+            <a:pPr algn="ctr" indent="0" marL="0">
+              <a:buNone/>
+            </a:pPr>
+            <a:r>
+              <a:rPr lang="en-US" sz="1300" b="1" dirty="0">
+                <a:solidFill>
+                  <a:schemeClr val="bg1"/>
+                </a:solidFill>
+              </a:rPr>
+              <a:t>3</a:t>
             </a:r>
             <a:endParaRPr lang="en-US" sz="1300" dirty="0"/>
           </a:p>
@@ -3926,7 +4288,7 @@
                   <a:schemeClr val="tx1"/>
                 </a:solidFill>
               </a:rPr>
-              <a:t>Em là Nguyễn Văn A, mã MOET 79xxxxxx, trường THCS …</a:t>
+              <a:t>Em là Nguyễn Văn An, mã MOET 79xxxxxx, trường THPT …</a:t>
             </a:r>
             <a:endParaRPr lang="en-US" sz="1400" dirty="0"/>
           </a:p>
@@ -3943,7 +4305,7 @@
                   <a:schemeClr val="tx1"/>
                 </a:solidFill>
               </a:rPr>
-              <a:t>Lớp … – GĐ 2 – Buổi 3 – ngày 15/10.</a:t>
+              <a:t>Lớp … – GĐ 2 – Buổi 2 – ngày 17/10.</a:t>
             </a:r>
             <a:endParaRPr lang="en-US" sz="1400" dirty="0"/>
           </a:p>
@@ -3977,7 +4339,7 @@
                   <a:schemeClr val="accent5"/>
                 </a:solidFill>
               </a:rPr>
-              <a:t>Minh chứng: ảnh Zoom đính kèm.</a:t>
+              <a:t>Minh chứng: ảnh Zoom đính kèm (hoặc link Drive).</a:t>
             </a:r>
             <a:endParaRPr lang="en-US" sz="1400" dirty="0"/>
           </a:p>
@@ -4085,7 +4447,7 @@
                   <a:schemeClr val="tx2"/>
                 </a:solidFill>
               </a:rPr>
-              <a:t>Bước 3 – Gửi cho người hỗ trợ và theo dõi</a:t>
+              <a:t>Bước 3 – Gửi minh chứng: chọn 1 trong 2 cách</a:t>
             </a:r>
             <a:endParaRPr lang="en-US" sz="2800" dirty="0"/>
           </a:p>
@@ -4093,18 +4455,18 @@
       </p:sp>
       <p:sp>
         <p:nvSpPr>
-          <p:cNvPr id="3" name="Buoc 1"/>
+          <p:cNvPr id="3" name="Cách 1 · Zalo (nhanh nhất)"/>
           <p:cNvSpPr/>
           <p:nvPr/>
         </p:nvSpPr>
         <p:spPr>
           <a:xfrm>
-            <a:off x="457200" y="1188720"/>
-            <a:ext cx="1920240" cy="2331720"/>
+            <a:off x="457200" y="1097280"/>
+            <a:ext cx="3977640" cy="2103120"/>
           </a:xfrm>
           <a:prstGeom prst="roundRect">
             <a:avLst>
-              <a:gd name="adj" fmla="val 3810"/>
+              <a:gd name="adj" fmla="val 3478"/>
             </a:avLst>
           </a:prstGeom>
           <a:solidFill>
@@ -4115,146 +4477,111 @@
       </p:sp>
       <p:sp>
         <p:nvSpPr>
-          <p:cNvPr id="4" name="So 1"/>
+          <p:cNvPr id="4" name="Text 2"/>
+          <p:cNvSpPr txBox="1"/>
+          <p:nvPr/>
+        </p:nvSpPr>
+        <p:spPr>
+          <a:xfrm>
+            <a:off x="594360" y="1207008"/>
+            <a:ext cx="3703320" cy="1883664"/>
+          </a:xfrm>
+          <a:prstGeom prst="rect">
+            <a:avLst/>
+          </a:prstGeom>
+          <a:noFill/>
+          <a:ln/>
+        </p:spPr>
+        <p:txBody>
+          <a:bodyPr wrap="square" lIns="0" tIns="0" rIns="0" bIns="0" rtlCol="0" anchor="t"/>
+          <a:lstStyle/>
+          <a:p>
+            <a:pPr indent="0" marL="0">
+              <a:spcAft>
+                <a:spcPts val="600"/>
+              </a:spcAft>
+              <a:buNone/>
+            </a:pPr>
+            <a:r>
+              <a:rPr lang="en-US" sz="1600" b="1" dirty="0">
+                <a:solidFill>
+                  <a:schemeClr val="accent1"/>
+                </a:solidFill>
+              </a:rPr>
+              <a:t>Cách 1 · Zalo (nhanh nhất)</a:t>
+            </a:r>
+            <a:endParaRPr lang="en-US" sz="1600" dirty="0"/>
+          </a:p>
+          <a:p>
+            <a:pPr marL="177800" indent="-177800">
+              <a:spcAft>
+                <a:spcPts val="400"/>
+              </a:spcAft>
+              <a:buSzPct val="100000"/>
+              <a:buChar char="•"/>
+            </a:pPr>
+            <a:r>
+              <a:rPr lang="en-US" sz="1400" dirty="0">
+                <a:solidFill>
+                  <a:schemeClr val="tx1"/>
+                </a:solidFill>
+              </a:rPr>
+              <a:t>Nhắn người hỗ trợ lớp/cụm theo tin nhắn mẫu</a:t>
+            </a:r>
+            <a:endParaRPr lang="en-US" sz="1600" dirty="0"/>
+          </a:p>
+          <a:p>
+            <a:pPr marL="177800" indent="-177800">
+              <a:spcAft>
+                <a:spcPts val="400"/>
+              </a:spcAft>
+              <a:buSzPct val="100000"/>
+              <a:buChar char="•"/>
+            </a:pPr>
+            <a:r>
+              <a:rPr lang="en-US" sz="1400" dirty="0">
+                <a:solidFill>
+                  <a:schemeClr val="tx1"/>
+                </a:solidFill>
+              </a:rPr>
+              <a:t>Gửi ảnh trực tiếp trong Zalo – không cần chia sẻ quyền</a:t>
+            </a:r>
+            <a:endParaRPr lang="en-US" sz="1600" dirty="0"/>
+          </a:p>
+          <a:p>
+            <a:pPr marL="177800" indent="-177800">
+              <a:spcAft>
+                <a:spcPts val="400"/>
+              </a:spcAft>
+              <a:buSzPct val="100000"/>
+              <a:buChar char="•"/>
+            </a:pPr>
+            <a:r>
+              <a:rPr lang="en-US" sz="1400" dirty="0">
+                <a:solidFill>
+                  <a:schemeClr val="tx1"/>
+                </a:solidFill>
+              </a:rPr>
+              <a:t>Người hỗ trợ trả lời ngay trên Zalo</a:t>
+            </a:r>
+            <a:endParaRPr lang="en-US" sz="1600" dirty="0"/>
+          </a:p>
+        </p:txBody>
+      </p:sp>
+      <p:sp>
+        <p:nvSpPr>
+          <p:cNvPr id="5" name="Cách 2 · Mục Hỗ trợ trên cổng"/>
           <p:cNvSpPr/>
           <p:nvPr/>
         </p:nvSpPr>
         <p:spPr>
           <a:xfrm>
-            <a:off x="594360" y="1325880"/>
-            <a:ext cx="384048" cy="384048"/>
-          </a:xfrm>
-          <a:prstGeom prst="ellipse">
-            <a:avLst/>
-          </a:prstGeom>
-          <a:solidFill>
-            <a:schemeClr val="tx2"/>
-          </a:solidFill>
-          <a:ln/>
-        </p:spPr>
-      </p:sp>
-      <p:sp>
-        <p:nvSpPr>
-          <p:cNvPr id="5" name="Text 3"/>
-          <p:cNvSpPr txBox="1"/>
-          <p:nvPr/>
-        </p:nvSpPr>
-        <p:spPr>
-          <a:xfrm>
-            <a:off x="594360" y="1325880"/>
-            <a:ext cx="384048" cy="384048"/>
-          </a:xfrm>
-          <a:prstGeom prst="rect">
-            <a:avLst/>
-          </a:prstGeom>
-          <a:noFill/>
-          <a:ln/>
-        </p:spPr>
-        <p:txBody>
-          <a:bodyPr wrap="square" lIns="0" tIns="0" rIns="0" bIns="0" rtlCol="0" anchor="ctr"/>
-          <a:lstStyle/>
-          <a:p>
-            <a:pPr algn="ctr" indent="0" marL="0">
-              <a:buNone/>
-            </a:pPr>
-            <a:r>
-              <a:rPr lang="en-US" sz="1600" b="1" dirty="0">
-                <a:solidFill>
-                  <a:schemeClr val="bg1"/>
-                </a:solidFill>
-              </a:rPr>
-              <a:t>1</a:t>
-            </a:r>
-            <a:endParaRPr lang="en-US" sz="1600" dirty="0"/>
-          </a:p>
-        </p:txBody>
-      </p:sp>
-      <p:sp>
-        <p:nvSpPr>
-          <p:cNvPr id="6" name="Text 4"/>
-          <p:cNvSpPr txBox="1"/>
-          <p:nvPr/>
-        </p:nvSpPr>
-        <p:spPr>
-          <a:xfrm>
-            <a:off x="594360" y="1828800"/>
-            <a:ext cx="1645920" cy="457200"/>
-          </a:xfrm>
-          <a:prstGeom prst="rect">
-            <a:avLst/>
-          </a:prstGeom>
-          <a:noFill/>
-          <a:ln/>
-        </p:spPr>
-        <p:txBody>
-          <a:bodyPr wrap="square" lIns="0" tIns="0" rIns="0" bIns="0" rtlCol="0" anchor="t"/>
-          <a:lstStyle/>
-          <a:p>
-            <a:pPr indent="0" marL="0">
-              <a:buNone/>
-            </a:pPr>
-            <a:r>
-              <a:rPr lang="en-US" sz="1500" b="1" dirty="0">
-                <a:solidFill>
-                  <a:schemeClr val="tx2"/>
-                </a:solidFill>
-              </a:rPr>
-              <a:t>Gửi qua Zalo</a:t>
-            </a:r>
-            <a:endParaRPr lang="en-US" sz="1500" dirty="0"/>
-          </a:p>
-        </p:txBody>
-      </p:sp>
-      <p:sp>
-        <p:nvSpPr>
-          <p:cNvPr id="7" name="Text 5"/>
-          <p:cNvSpPr txBox="1"/>
-          <p:nvPr/>
-        </p:nvSpPr>
-        <p:spPr>
-          <a:xfrm>
-            <a:off x="594360" y="2286000"/>
-            <a:ext cx="1645920" cy="1143000"/>
-          </a:xfrm>
-          <a:prstGeom prst="rect">
-            <a:avLst/>
-          </a:prstGeom>
-          <a:noFill/>
-          <a:ln/>
-        </p:spPr>
-        <p:txBody>
-          <a:bodyPr wrap="square" lIns="0" tIns="0" rIns="0" bIns="0" rtlCol="0" anchor="t"/>
-          <a:lstStyle/>
-          <a:p>
-            <a:pPr indent="0" marL="0">
-              <a:buNone/>
-            </a:pPr>
-            <a:r>
-              <a:rPr lang="en-US" sz="1300" dirty="0">
-                <a:solidFill>
-                  <a:schemeClr val="tx1"/>
-                </a:solidFill>
-              </a:rPr>
-              <a:t>Nhóm lớp/cụm hoặc người hỗ trợ – gửi kèm ảnh</a:t>
-            </a:r>
-            <a:endParaRPr lang="en-US" sz="1300" dirty="0"/>
-          </a:p>
-        </p:txBody>
-      </p:sp>
-      <p:sp>
-        <p:nvSpPr>
-          <p:cNvPr id="8" name="Buoc 2"/>
-          <p:cNvSpPr/>
-          <p:nvPr/>
-        </p:nvSpPr>
-        <p:spPr>
-          <a:xfrm>
-            <a:off x="2560320" y="1188720"/>
-            <a:ext cx="1920240" cy="2331720"/>
+            <a:off x="4709160" y="1097280"/>
+            <a:ext cx="3977640" cy="2103120"/>
           </a:xfrm>
           <a:prstGeom prst="roundRect">
             <a:avLst>
-              <a:gd name="adj" fmla="val 3810"/>
+              <a:gd name="adj" fmla="val 3478"/>
             </a:avLst>
           </a:prstGeom>
           <a:solidFill>
@@ -4265,451 +4592,116 @@
       </p:sp>
       <p:sp>
         <p:nvSpPr>
-          <p:cNvPr id="9" name="So 2"/>
+          <p:cNvPr id="6" name="Text 4"/>
+          <p:cNvSpPr txBox="1"/>
+          <p:nvPr/>
+        </p:nvSpPr>
+        <p:spPr>
+          <a:xfrm>
+            <a:off x="4846320" y="1207008"/>
+            <a:ext cx="3703320" cy="1883664"/>
+          </a:xfrm>
+          <a:prstGeom prst="rect">
+            <a:avLst/>
+          </a:prstGeom>
+          <a:noFill/>
+          <a:ln/>
+        </p:spPr>
+        <p:txBody>
+          <a:bodyPr wrap="square" lIns="0" tIns="0" rIns="0" bIns="0" rtlCol="0" anchor="t"/>
+          <a:lstStyle/>
+          <a:p>
+            <a:pPr indent="0" marL="0">
+              <a:spcAft>
+                <a:spcPts val="600"/>
+              </a:spcAft>
+              <a:buNone/>
+            </a:pPr>
+            <a:r>
+              <a:rPr lang="en-US" sz="1600" b="1" dirty="0">
+                <a:solidFill>
+                  <a:schemeClr val="tx2"/>
+                </a:solidFill>
+              </a:rPr>
+              <a:t>Cách 2 · Mục Hỗ trợ trên cổng</a:t>
+            </a:r>
+            <a:endParaRPr lang="en-US" sz="1600" dirty="0"/>
+          </a:p>
+          <a:p>
+            <a:pPr marL="177800" indent="-177800">
+              <a:spcAft>
+                <a:spcPts val="400"/>
+              </a:spcAft>
+              <a:buSzPct val="100000"/>
+              <a:buChar char="•"/>
+            </a:pPr>
+            <a:r>
+              <a:rPr lang="en-US" sz="1400" dirty="0">
+                <a:solidFill>
+                  <a:schemeClr val="tx1"/>
+                </a:solidFill>
+              </a:rPr>
+              <a:t>Ô nội dung chỉ nhận chữ – không đính kèm ảnh</a:t>
+            </a:r>
+            <a:endParaRPr lang="en-US" sz="1600" dirty="0"/>
+          </a:p>
+          <a:p>
+            <a:pPr marL="177800" indent="-177800">
+              <a:spcAft>
+                <a:spcPts val="400"/>
+              </a:spcAft>
+              <a:buSzPct val="100000"/>
+              <a:buChar char="•"/>
+            </a:pPr>
+            <a:r>
+              <a:rPr lang="en-US" sz="1400" dirty="0">
+                <a:solidFill>
+                  <a:schemeClr val="tx1"/>
+                </a:solidFill>
+              </a:rPr>
+              <a:t>Tải ảnh lên Google Drive, mở chia sẻ, dán link vào nội dung (trang sau)</a:t>
+            </a:r>
+            <a:endParaRPr lang="en-US" sz="1600" dirty="0"/>
+          </a:p>
+          <a:p>
+            <a:pPr marL="177800" indent="-177800">
+              <a:spcAft>
+                <a:spcPts val="400"/>
+              </a:spcAft>
+              <a:buSzPct val="100000"/>
+              <a:buChar char="•"/>
+            </a:pPr>
+            <a:r>
+              <a:rPr lang="en-US" sz="1400" dirty="0">
+                <a:solidFill>
+                  <a:schemeClr val="tx1"/>
+                </a:solidFill>
+              </a:rPr>
+              <a:t>Câu trả lời hiện ngay trong mục Hỗ trợ</a:t>
+            </a:r>
+            <a:endParaRPr lang="en-US" sz="1600" dirty="0"/>
+          </a:p>
+        </p:txBody>
+      </p:sp>
+      <p:sp>
+        <p:nvSpPr>
+          <p:cNvPr id="7" name="Canh bao giay to"/>
           <p:cNvSpPr/>
           <p:nvPr/>
         </p:nvSpPr>
         <p:spPr>
           <a:xfrm>
-            <a:off x="2697480" y="1325880"/>
-            <a:ext cx="384048" cy="384048"/>
-          </a:xfrm>
-          <a:prstGeom prst="ellipse">
-            <a:avLst/>
-          </a:prstGeom>
-          <a:solidFill>
-            <a:schemeClr val="tx2"/>
-          </a:solidFill>
-          <a:ln/>
-        </p:spPr>
-      </p:sp>
-      <p:sp>
-        <p:nvSpPr>
-          <p:cNvPr id="10" name="Text 8"/>
-          <p:cNvSpPr txBox="1"/>
-          <p:nvPr/>
-        </p:nvSpPr>
-        <p:spPr>
-          <a:xfrm>
-            <a:off x="2697480" y="1325880"/>
-            <a:ext cx="384048" cy="384048"/>
-          </a:xfrm>
-          <a:prstGeom prst="rect">
-            <a:avLst/>
-          </a:prstGeom>
-          <a:noFill/>
-          <a:ln/>
-        </p:spPr>
-        <p:txBody>
-          <a:bodyPr wrap="square" lIns="0" tIns="0" rIns="0" bIns="0" rtlCol="0" anchor="ctr"/>
-          <a:lstStyle/>
-          <a:p>
-            <a:pPr algn="ctr" indent="0" marL="0">
-              <a:buNone/>
-            </a:pPr>
-            <a:r>
-              <a:rPr lang="en-US" sz="1600" b="1" dirty="0">
-                <a:solidFill>
-                  <a:schemeClr val="bg1"/>
-                </a:solidFill>
-              </a:rPr>
-              <a:t>2</a:t>
-            </a:r>
-            <a:endParaRPr lang="en-US" sz="1600" dirty="0"/>
-          </a:p>
-        </p:txBody>
-      </p:sp>
-      <p:sp>
-        <p:nvSpPr>
-          <p:cNvPr id="11" name="Text 9"/>
-          <p:cNvSpPr txBox="1"/>
-          <p:nvPr/>
-        </p:nvSpPr>
-        <p:spPr>
-          <a:xfrm>
-            <a:off x="2697480" y="1828800"/>
-            <a:ext cx="1645920" cy="457200"/>
-          </a:xfrm>
-          <a:prstGeom prst="rect">
-            <a:avLst/>
-          </a:prstGeom>
-          <a:noFill/>
-          <a:ln/>
-        </p:spPr>
-        <p:txBody>
-          <a:bodyPr wrap="square" lIns="0" tIns="0" rIns="0" bIns="0" rtlCol="0" anchor="t"/>
-          <a:lstStyle/>
-          <a:p>
-            <a:pPr indent="0" marL="0">
-              <a:buNone/>
-            </a:pPr>
-            <a:r>
-              <a:rPr lang="en-US" sz="1500" b="1" dirty="0">
-                <a:solidFill>
-                  <a:schemeClr val="tx2"/>
-                </a:solidFill>
-              </a:rPr>
-              <a:t>Hoặc trên cổng</a:t>
-            </a:r>
-            <a:endParaRPr lang="en-US" sz="1500" dirty="0"/>
-          </a:p>
-        </p:txBody>
-      </p:sp>
-      <p:sp>
-        <p:nvSpPr>
-          <p:cNvPr id="12" name="Text 10"/>
-          <p:cNvSpPr txBox="1"/>
-          <p:nvPr/>
-        </p:nvSpPr>
-        <p:spPr>
-          <a:xfrm>
-            <a:off x="2697480" y="2286000"/>
-            <a:ext cx="1645920" cy="1143000"/>
-          </a:xfrm>
-          <a:prstGeom prst="rect">
-            <a:avLst/>
-          </a:prstGeom>
-          <a:noFill/>
-          <a:ln/>
-        </p:spPr>
-        <p:txBody>
-          <a:bodyPr wrap="square" lIns="0" tIns="0" rIns="0" bIns="0" rtlCol="0" anchor="t"/>
-          <a:lstStyle/>
-          <a:p>
-            <a:pPr indent="0" marL="0">
-              <a:buNone/>
-            </a:pPr>
-            <a:r>
-              <a:rPr lang="en-US" sz="1300" dirty="0">
-                <a:solidFill>
-                  <a:schemeClr val="tx1"/>
-                </a:solidFill>
-              </a:rPr>
-              <a:t>Mục Hỗ trợ → “Vấn đề khác”; mô tả rõ buổi (mục này không đính kèm ảnh)</a:t>
-            </a:r>
-            <a:endParaRPr lang="en-US" sz="1300" dirty="0"/>
-          </a:p>
-        </p:txBody>
-      </p:sp>
-      <p:sp>
-        <p:nvSpPr>
-          <p:cNvPr id="13" name="Buoc 3"/>
-          <p:cNvSpPr/>
-          <p:nvPr/>
-        </p:nvSpPr>
-        <p:spPr>
-          <a:xfrm>
-            <a:off x="4663440" y="1188720"/>
-            <a:ext cx="1920240" cy="2331720"/>
+            <a:off x="457200" y="3429000"/>
+            <a:ext cx="8229600" cy="685800"/>
           </a:xfrm>
           <a:prstGeom prst="roundRect">
             <a:avLst>
-              <a:gd name="adj" fmla="val 3810"/>
+              <a:gd name="adj" fmla="val 10667"/>
             </a:avLst>
           </a:prstGeom>
           <a:solidFill>
-            <a:schemeClr val="bg2"/>
-          </a:solidFill>
-          <a:ln/>
-        </p:spPr>
-      </p:sp>
-      <p:sp>
-        <p:nvSpPr>
-          <p:cNvPr id="14" name="So 3"/>
-          <p:cNvSpPr/>
-          <p:nvPr/>
-        </p:nvSpPr>
-        <p:spPr>
-          <a:xfrm>
-            <a:off x="4800600" y="1325880"/>
-            <a:ext cx="384048" cy="384048"/>
-          </a:xfrm>
-          <a:prstGeom prst="ellipse">
-            <a:avLst/>
-          </a:prstGeom>
-          <a:solidFill>
-            <a:schemeClr val="tx2"/>
-          </a:solidFill>
-          <a:ln/>
-        </p:spPr>
-      </p:sp>
-      <p:sp>
-        <p:nvSpPr>
-          <p:cNvPr id="15" name="Text 13"/>
-          <p:cNvSpPr txBox="1"/>
-          <p:nvPr/>
-        </p:nvSpPr>
-        <p:spPr>
-          <a:xfrm>
-            <a:off x="4800600" y="1325880"/>
-            <a:ext cx="384048" cy="384048"/>
-          </a:xfrm>
-          <a:prstGeom prst="rect">
-            <a:avLst/>
-          </a:prstGeom>
-          <a:noFill/>
-          <a:ln/>
-        </p:spPr>
-        <p:txBody>
-          <a:bodyPr wrap="square" lIns="0" tIns="0" rIns="0" bIns="0" rtlCol="0" anchor="ctr"/>
-          <a:lstStyle/>
-          <a:p>
-            <a:pPr algn="ctr" indent="0" marL="0">
-              <a:buNone/>
-            </a:pPr>
-            <a:r>
-              <a:rPr lang="en-US" sz="1600" b="1" dirty="0">
-                <a:solidFill>
-                  <a:schemeClr val="bg1"/>
-                </a:solidFill>
-              </a:rPr>
-              <a:t>3</a:t>
-            </a:r>
-            <a:endParaRPr lang="en-US" sz="1600" dirty="0"/>
-          </a:p>
-        </p:txBody>
-      </p:sp>
-      <p:sp>
-        <p:nvSpPr>
-          <p:cNvPr id="16" name="Text 14"/>
-          <p:cNvSpPr txBox="1"/>
-          <p:nvPr/>
-        </p:nvSpPr>
-        <p:spPr>
-          <a:xfrm>
-            <a:off x="4800600" y="1828800"/>
-            <a:ext cx="1645920" cy="457200"/>
-          </a:xfrm>
-          <a:prstGeom prst="rect">
-            <a:avLst/>
-          </a:prstGeom>
-          <a:noFill/>
-          <a:ln/>
-        </p:spPr>
-        <p:txBody>
-          <a:bodyPr wrap="square" lIns="0" tIns="0" rIns="0" bIns="0" rtlCol="0" anchor="t"/>
-          <a:lstStyle/>
-          <a:p>
-            <a:pPr indent="0" marL="0">
-              <a:buNone/>
-            </a:pPr>
-            <a:r>
-              <a:rPr lang="en-US" sz="1500" b="1" dirty="0">
-                <a:solidFill>
-                  <a:schemeClr val="tx2"/>
-                </a:solidFill>
-              </a:rPr>
-              <a:t>Hỗ trợ kiểm tra</a:t>
-            </a:r>
-            <a:endParaRPr lang="en-US" sz="1500" dirty="0"/>
-          </a:p>
-        </p:txBody>
-      </p:sp>
-      <p:sp>
-        <p:nvSpPr>
-          <p:cNvPr id="17" name="Text 15"/>
-          <p:cNvSpPr txBox="1"/>
-          <p:nvPr/>
-        </p:nvSpPr>
-        <p:spPr>
-          <a:xfrm>
-            <a:off x="4800600" y="2286000"/>
-            <a:ext cx="1645920" cy="1143000"/>
-          </a:xfrm>
-          <a:prstGeom prst="rect">
-            <a:avLst/>
-          </a:prstGeom>
-          <a:noFill/>
-          <a:ln/>
-        </p:spPr>
-        <p:txBody>
-          <a:bodyPr wrap="square" lIns="0" tIns="0" rIns="0" bIns="0" rtlCol="0" anchor="t"/>
-          <a:lstStyle/>
-          <a:p>
-            <a:pPr indent="0" marL="0">
-              <a:buNone/>
-            </a:pPr>
-            <a:r>
-              <a:rPr lang="en-US" sz="1300" dirty="0">
-                <a:solidFill>
-                  <a:schemeClr val="tx1"/>
-                </a:solidFill>
-              </a:rPr>
-              <a:t>Đối chiếu minh chứng, cập nhật “Có mặt” hoặc “Vắng có phép”</a:t>
-            </a:r>
-            <a:endParaRPr lang="en-US" sz="1300" dirty="0"/>
-          </a:p>
-        </p:txBody>
-      </p:sp>
-      <p:sp>
-        <p:nvSpPr>
-          <p:cNvPr id="18" name="Buoc 4"/>
-          <p:cNvSpPr/>
-          <p:nvPr/>
-        </p:nvSpPr>
-        <p:spPr>
-          <a:xfrm>
-            <a:off x="6766560" y="1188720"/>
-            <a:ext cx="1920240" cy="2331720"/>
-          </a:xfrm>
-          <a:prstGeom prst="roundRect">
-            <a:avLst>
-              <a:gd name="adj" fmla="val 3810"/>
-            </a:avLst>
-          </a:prstGeom>
-          <a:solidFill>
-            <a:schemeClr val="tx2"/>
-          </a:solidFill>
-          <a:ln/>
-        </p:spPr>
-      </p:sp>
-      <p:sp>
-        <p:nvSpPr>
-          <p:cNvPr id="19" name="So 4"/>
-          <p:cNvSpPr/>
-          <p:nvPr/>
-        </p:nvSpPr>
-        <p:spPr>
-          <a:xfrm>
-            <a:off x="6903720" y="1325880"/>
-            <a:ext cx="384048" cy="384048"/>
-          </a:xfrm>
-          <a:prstGeom prst="ellipse">
-            <a:avLst/>
-          </a:prstGeom>
-          <a:solidFill>
-            <a:schemeClr val="accent6"/>
-          </a:solidFill>
-          <a:ln/>
-        </p:spPr>
-      </p:sp>
-      <p:sp>
-        <p:nvSpPr>
-          <p:cNvPr id="20" name="Text 18"/>
-          <p:cNvSpPr txBox="1"/>
-          <p:nvPr/>
-        </p:nvSpPr>
-        <p:spPr>
-          <a:xfrm>
-            <a:off x="6903720" y="1325880"/>
-            <a:ext cx="384048" cy="384048"/>
-          </a:xfrm>
-          <a:prstGeom prst="rect">
-            <a:avLst/>
-          </a:prstGeom>
-          <a:noFill/>
-          <a:ln/>
-        </p:spPr>
-        <p:txBody>
-          <a:bodyPr wrap="square" lIns="0" tIns="0" rIns="0" bIns="0" rtlCol="0" anchor="ctr"/>
-          <a:lstStyle/>
-          <a:p>
-            <a:pPr algn="ctr" indent="0" marL="0">
-              <a:buNone/>
-            </a:pPr>
-            <a:r>
-              <a:rPr lang="en-US" sz="1600" b="1" dirty="0">
-                <a:solidFill>
-                  <a:schemeClr val="tx2"/>
-                </a:solidFill>
-              </a:rPr>
-              <a:t>4</a:t>
-            </a:r>
-            <a:endParaRPr lang="en-US" sz="1600" dirty="0"/>
-          </a:p>
-        </p:txBody>
-      </p:sp>
-      <p:sp>
-        <p:nvSpPr>
-          <p:cNvPr id="21" name="Text 19"/>
-          <p:cNvSpPr txBox="1"/>
-          <p:nvPr/>
-        </p:nvSpPr>
-        <p:spPr>
-          <a:xfrm>
-            <a:off x="6903720" y="1828800"/>
-            <a:ext cx="1645920" cy="457200"/>
-          </a:xfrm>
-          <a:prstGeom prst="rect">
-            <a:avLst/>
-          </a:prstGeom>
-          <a:noFill/>
-          <a:ln/>
-        </p:spPr>
-        <p:txBody>
-          <a:bodyPr wrap="square" lIns="0" tIns="0" rIns="0" bIns="0" rtlCol="0" anchor="t"/>
-          <a:lstStyle/>
-          <a:p>
-            <a:pPr indent="0" marL="0">
-              <a:buNone/>
-            </a:pPr>
-            <a:r>
-              <a:rPr lang="en-US" sz="1500" b="1" dirty="0">
-                <a:solidFill>
-                  <a:schemeClr val="bg1"/>
-                </a:solidFill>
-              </a:rPr>
-              <a:t>Xem lại kết quả</a:t>
-            </a:r>
-            <a:endParaRPr lang="en-US" sz="1500" dirty="0"/>
-          </a:p>
-        </p:txBody>
-      </p:sp>
-      <p:sp>
-        <p:nvSpPr>
-          <p:cNvPr id="22" name="Text 20"/>
-          <p:cNvSpPr txBox="1"/>
-          <p:nvPr/>
-        </p:nvSpPr>
-        <p:spPr>
-          <a:xfrm>
-            <a:off x="6903720" y="2286000"/>
-            <a:ext cx="1645920" cy="1143000"/>
-          </a:xfrm>
-          <a:prstGeom prst="rect">
-            <a:avLst/>
-          </a:prstGeom>
-          <a:noFill/>
-          <a:ln/>
-        </p:spPr>
-        <p:txBody>
-          <a:bodyPr wrap="square" lIns="0" tIns="0" rIns="0" bIns="0" rtlCol="0" anchor="t"/>
-          <a:lstStyle/>
-          <a:p>
-            <a:pPr indent="0" marL="0">
-              <a:buNone/>
-            </a:pPr>
-            <a:r>
-              <a:rPr lang="en-US" sz="1300" dirty="0">
-                <a:solidFill>
-                  <a:schemeClr val="bg2"/>
-                </a:solidFill>
-              </a:rPr>
-              <a:t>Mở Thông tin lớp học – nhãn của buổi đã đổi</a:t>
-            </a:r>
-            <a:endParaRPr lang="en-US" sz="1300" dirty="0"/>
-          </a:p>
-        </p:txBody>
-      </p:sp>
-      <p:sp>
-        <p:nvSpPr>
-          <p:cNvPr id="23" name="Luu y thoi gian"/>
-          <p:cNvSpPr/>
-          <p:nvPr/>
-        </p:nvSpPr>
-        <p:spPr>
-          <a:xfrm>
-            <a:off x="457200" y="3749040"/>
-            <a:ext cx="8229600" cy="731520"/>
-          </a:xfrm>
-          <a:prstGeom prst="roundRect">
-            <a:avLst>
-              <a:gd name="adj" fmla="val 10000"/>
-            </a:avLst>
-          </a:prstGeom>
-          <a:solidFill>
-            <a:schemeClr val="accent2">
-              <a:alpha val="18000"/>
+            <a:schemeClr val="accent3">
+              <a:alpha val="15000"/>
             </a:schemeClr>
           </a:solidFill>
           <a:ln/>
@@ -4717,14 +4709,14 @@
       </p:sp>
       <p:sp>
         <p:nvSpPr>
-          <p:cNvPr id="24" name="Text 22"/>
+          <p:cNvPr id="8" name="Text 6"/>
           <p:cNvSpPr txBox="1"/>
           <p:nvPr/>
         </p:nvSpPr>
         <p:spPr>
           <a:xfrm>
-            <a:off x="640080" y="3749040"/>
-            <a:ext cx="7863840" cy="731520"/>
+            <a:off x="640080" y="3429000"/>
+            <a:ext cx="7863840" cy="685800"/>
           </a:xfrm>
           <a:prstGeom prst="rect">
             <a:avLst/>
@@ -4742,21 +4734,21 @@
             <a:r>
               <a:rPr lang="en-US" sz="1400" b="1" dirty="0">
                 <a:solidFill>
+                  <a:schemeClr val="accent3"/>
+                </a:solidFill>
+              </a:rPr>
+              <a:t>Không gửi ảnh CCCD hay giấy tờ tùy thân. </a:t>
+            </a:r>
+            <a:pPr indent="0" marL="0">
+              <a:buNone/>
+            </a:pPr>
+            <a:r>
+              <a:rPr lang="en-US" sz="1400" dirty="0">
+                <a:solidFill>
                   <a:schemeClr val="tx1"/>
                 </a:solidFill>
               </a:rPr>
-              <a:t>Không giới hạn thời gian đề nghị, </a:t>
-            </a:r>
-            <a:pPr indent="0" marL="0">
-              <a:buNone/>
-            </a:pPr>
-            <a:r>
-              <a:rPr lang="en-US" sz="1400" dirty="0">
-                <a:solidFill>
-                  <a:schemeClr val="tx1"/>
-                </a:solidFill>
-              </a:rPr>
-              <a:t>nhưng nên gửi sớm (trong tuần học) để người hỗ trợ dễ đối chiếu với giảng viên.</a:t>
+              <a:t>Chỉ cần ảnh chứng minh đã tham gia buổi học hoặc lý do vắng.</a:t>
             </a:r>
             <a:endParaRPr lang="en-US" sz="1400" dirty="0"/>
           </a:p>
@@ -4818,6 +4810,2404 @@
 <file path=ppt/slides/slide6.xml><?xml version="1.0" encoding="utf-8"?>
 <p:sld xmlns:a="http://schemas.openxmlformats.org/drawingml/2006/main" xmlns:r="http://schemas.openxmlformats.org/officeDocument/2006/relationships" xmlns:p="http://schemas.openxmlformats.org/presentationml/2006/main">
   <p:cSld name="Slide 6">
+    <p:spTree>
+      <p:nvGrpSpPr>
+        <p:cNvPr id="1" name=""/>
+        <p:cNvGrpSpPr/>
+        <p:nvPr/>
+      </p:nvGrpSpPr>
+      <p:grpSpPr>
+        <a:xfrm>
+          <a:off x="0" y="0"/>
+          <a:ext cx="0" cy="0"/>
+          <a:chOff x="0" y="0"/>
+          <a:chExt cx="0" cy="0"/>
+        </a:xfrm>
+      </p:grpSpPr>
+      <p:sp>
+        <p:nvSpPr>
+          <p:cNvPr id="2" name="Text 1"/>
+          <p:cNvSpPr/>
+          <p:nvPr>
+            <p:ph idx="101" type="title" hasCustomPrompt="1"/>
+          </p:nvPr>
+        </p:nvSpPr>
+        <p:spPr>
+          <a:xfrm>
+            <a:off x="457200" y="274320"/>
+            <a:ext cx="8229600" cy="640080"/>
+          </a:xfrm>
+          <a:prstGeom prst="rect">
+            <a:avLst/>
+          </a:prstGeom>
+          <a:noFill/>
+          <a:ln/>
+        </p:spPr>
+        <p:txBody>
+          <a:bodyPr wrap="square" lIns="0" tIns="0" rIns="0" bIns="0" rtlCol="0" anchor="ctr"/>
+          <a:lstStyle/>
+          <a:p>
+            <a:pPr algn="l" indent="0" marL="0">
+              <a:buNone/>
+            </a:pPr>
+            <a:r>
+              <a:rPr lang="en-US" sz="2800" b="1" dirty="0">
+                <a:solidFill>
+                  <a:schemeClr val="tx2"/>
+                </a:solidFill>
+              </a:rPr>
+              <a:t>Lấy link Google Drive đúng cách</a:t>
+            </a:r>
+            <a:endParaRPr lang="en-US" sz="2800" dirty="0"/>
+          </a:p>
+        </p:txBody>
+      </p:sp>
+      <p:sp>
+        <p:nvSpPr>
+          <p:cNvPr id="3" name="So 1"/>
+          <p:cNvSpPr/>
+          <p:nvPr/>
+        </p:nvSpPr>
+        <p:spPr>
+          <a:xfrm>
+            <a:off x="457200" y="1143000"/>
+            <a:ext cx="365760" cy="365760"/>
+          </a:xfrm>
+          <a:prstGeom prst="ellipse">
+            <a:avLst/>
+          </a:prstGeom>
+          <a:solidFill>
+            <a:schemeClr val="tx2"/>
+          </a:solidFill>
+          <a:ln/>
+        </p:spPr>
+      </p:sp>
+      <p:sp>
+        <p:nvSpPr>
+          <p:cNvPr id="4" name="Text 2"/>
+          <p:cNvSpPr txBox="1"/>
+          <p:nvPr/>
+        </p:nvSpPr>
+        <p:spPr>
+          <a:xfrm>
+            <a:off x="457200" y="1143000"/>
+            <a:ext cx="365760" cy="365760"/>
+          </a:xfrm>
+          <a:prstGeom prst="rect">
+            <a:avLst/>
+          </a:prstGeom>
+          <a:noFill/>
+          <a:ln/>
+        </p:spPr>
+        <p:txBody>
+          <a:bodyPr wrap="square" lIns="0" tIns="0" rIns="0" bIns="0" rtlCol="0" anchor="ctr"/>
+          <a:lstStyle/>
+          <a:p>
+            <a:pPr algn="ctr" indent="0" marL="0">
+              <a:buNone/>
+            </a:pPr>
+            <a:r>
+              <a:rPr lang="en-US" sz="1600" b="1" dirty="0">
+                <a:solidFill>
+                  <a:schemeClr val="bg1"/>
+                </a:solidFill>
+              </a:rPr>
+              <a:t>1</a:t>
+            </a:r>
+            <a:endParaRPr lang="en-US" sz="1600" dirty="0"/>
+          </a:p>
+        </p:txBody>
+      </p:sp>
+      <p:sp>
+        <p:nvSpPr>
+          <p:cNvPr id="5" name="Text 3"/>
+          <p:cNvSpPr txBox="1"/>
+          <p:nvPr/>
+        </p:nvSpPr>
+        <p:spPr>
+          <a:xfrm>
+            <a:off x="960120" y="1106424"/>
+            <a:ext cx="3611880" cy="548640"/>
+          </a:xfrm>
+          <a:prstGeom prst="rect">
+            <a:avLst/>
+          </a:prstGeom>
+          <a:noFill/>
+          <a:ln/>
+        </p:spPr>
+        <p:txBody>
+          <a:bodyPr wrap="square" lIns="0" tIns="0" rIns="0" bIns="0" rtlCol="0" anchor="t"/>
+          <a:lstStyle/>
+          <a:p>
+            <a:pPr indent="0" marL="0">
+              <a:buNone/>
+            </a:pPr>
+            <a:r>
+              <a:rPr lang="en-US" sz="1400" dirty="0">
+                <a:solidFill>
+                  <a:schemeClr val="tx1"/>
+                </a:solidFill>
+              </a:rPr>
+              <a:t>Google Drive → </a:t>
+            </a:r>
+            <a:pPr indent="0" marL="0">
+              <a:buNone/>
+            </a:pPr>
+            <a:r>
+              <a:rPr lang="en-US" sz="1400" b="1" dirty="0">
+                <a:solidFill>
+                  <a:schemeClr val="tx1"/>
+                </a:solidFill>
+              </a:rPr>
+              <a:t>+ Mới → Tải tệp lên</a:t>
+            </a:r>
+            <a:pPr indent="0" marL="0">
+              <a:buNone/>
+            </a:pPr>
+            <a:r>
+              <a:rPr lang="en-US" sz="1400" dirty="0">
+                <a:solidFill>
+                  <a:schemeClr val="tx1"/>
+                </a:solidFill>
+              </a:rPr>
+              <a:t> → chọn ảnh</a:t>
+            </a:r>
+            <a:endParaRPr lang="en-US" sz="1400" dirty="0"/>
+          </a:p>
+        </p:txBody>
+      </p:sp>
+      <p:sp>
+        <p:nvSpPr>
+          <p:cNvPr id="6" name="So 2"/>
+          <p:cNvSpPr/>
+          <p:nvPr/>
+        </p:nvSpPr>
+        <p:spPr>
+          <a:xfrm>
+            <a:off x="457200" y="1746504"/>
+            <a:ext cx="365760" cy="365760"/>
+          </a:xfrm>
+          <a:prstGeom prst="ellipse">
+            <a:avLst/>
+          </a:prstGeom>
+          <a:solidFill>
+            <a:schemeClr val="tx2"/>
+          </a:solidFill>
+          <a:ln/>
+        </p:spPr>
+      </p:sp>
+      <p:sp>
+        <p:nvSpPr>
+          <p:cNvPr id="7" name="Text 5"/>
+          <p:cNvSpPr txBox="1"/>
+          <p:nvPr/>
+        </p:nvSpPr>
+        <p:spPr>
+          <a:xfrm>
+            <a:off x="457200" y="1746504"/>
+            <a:ext cx="365760" cy="365760"/>
+          </a:xfrm>
+          <a:prstGeom prst="rect">
+            <a:avLst/>
+          </a:prstGeom>
+          <a:noFill/>
+          <a:ln/>
+        </p:spPr>
+        <p:txBody>
+          <a:bodyPr wrap="square" lIns="0" tIns="0" rIns="0" bIns="0" rtlCol="0" anchor="ctr"/>
+          <a:lstStyle/>
+          <a:p>
+            <a:pPr algn="ctr" indent="0" marL="0">
+              <a:buNone/>
+            </a:pPr>
+            <a:r>
+              <a:rPr lang="en-US" sz="1600" b="1" dirty="0">
+                <a:solidFill>
+                  <a:schemeClr val="bg1"/>
+                </a:solidFill>
+              </a:rPr>
+              <a:t>2</a:t>
+            </a:r>
+            <a:endParaRPr lang="en-US" sz="1600" dirty="0"/>
+          </a:p>
+        </p:txBody>
+      </p:sp>
+      <p:sp>
+        <p:nvSpPr>
+          <p:cNvPr id="8" name="Text 6"/>
+          <p:cNvSpPr txBox="1"/>
+          <p:nvPr/>
+        </p:nvSpPr>
+        <p:spPr>
+          <a:xfrm>
+            <a:off x="960120" y="1709928"/>
+            <a:ext cx="3611880" cy="548640"/>
+          </a:xfrm>
+          <a:prstGeom prst="rect">
+            <a:avLst/>
+          </a:prstGeom>
+          <a:noFill/>
+          <a:ln/>
+        </p:spPr>
+        <p:txBody>
+          <a:bodyPr wrap="square" lIns="0" tIns="0" rIns="0" bIns="0" rtlCol="0" anchor="t"/>
+          <a:lstStyle/>
+          <a:p>
+            <a:pPr indent="0" marL="0">
+              <a:buNone/>
+            </a:pPr>
+            <a:r>
+              <a:rPr lang="en-US" sz="1400" dirty="0">
+                <a:solidFill>
+                  <a:schemeClr val="tx1"/>
+                </a:solidFill>
+              </a:rPr>
+              <a:t>Chạm </a:t>
+            </a:r>
+            <a:pPr indent="0" marL="0">
+              <a:buNone/>
+            </a:pPr>
+            <a:r>
+              <a:rPr lang="en-US" sz="1400" b="1" dirty="0">
+                <a:solidFill>
+                  <a:schemeClr val="tx1"/>
+                </a:solidFill>
+              </a:rPr>
+              <a:t>⋮</a:t>
+            </a:r>
+            <a:pPr indent="0" marL="0">
+              <a:buNone/>
+            </a:pPr>
+            <a:r>
+              <a:rPr lang="en-US" sz="1400" dirty="0">
+                <a:solidFill>
+                  <a:schemeClr val="tx1"/>
+                </a:solidFill>
+              </a:rPr>
+              <a:t> cạnh ảnh → </a:t>
+            </a:r>
+            <a:pPr indent="0" marL="0">
+              <a:buNone/>
+            </a:pPr>
+            <a:r>
+              <a:rPr lang="en-US" sz="1400" b="1" dirty="0">
+                <a:solidFill>
+                  <a:schemeClr val="tx1"/>
+                </a:solidFill>
+              </a:rPr>
+              <a:t>Chia sẻ</a:t>
+            </a:r>
+            <a:endParaRPr lang="en-US" sz="1400" dirty="0"/>
+          </a:p>
+        </p:txBody>
+      </p:sp>
+      <p:sp>
+        <p:nvSpPr>
+          <p:cNvPr id="9" name="So 3"/>
+          <p:cNvSpPr/>
+          <p:nvPr/>
+        </p:nvSpPr>
+        <p:spPr>
+          <a:xfrm>
+            <a:off x="457200" y="2350008"/>
+            <a:ext cx="365760" cy="365760"/>
+          </a:xfrm>
+          <a:prstGeom prst="ellipse">
+            <a:avLst/>
+          </a:prstGeom>
+          <a:solidFill>
+            <a:schemeClr val="tx2"/>
+          </a:solidFill>
+          <a:ln/>
+        </p:spPr>
+      </p:sp>
+      <p:sp>
+        <p:nvSpPr>
+          <p:cNvPr id="10" name="Text 8"/>
+          <p:cNvSpPr txBox="1"/>
+          <p:nvPr/>
+        </p:nvSpPr>
+        <p:spPr>
+          <a:xfrm>
+            <a:off x="457200" y="2350008"/>
+            <a:ext cx="365760" cy="365760"/>
+          </a:xfrm>
+          <a:prstGeom prst="rect">
+            <a:avLst/>
+          </a:prstGeom>
+          <a:noFill/>
+          <a:ln/>
+        </p:spPr>
+        <p:txBody>
+          <a:bodyPr wrap="square" lIns="0" tIns="0" rIns="0" bIns="0" rtlCol="0" anchor="ctr"/>
+          <a:lstStyle/>
+          <a:p>
+            <a:pPr algn="ctr" indent="0" marL="0">
+              <a:buNone/>
+            </a:pPr>
+            <a:r>
+              <a:rPr lang="en-US" sz="1600" b="1" dirty="0">
+                <a:solidFill>
+                  <a:schemeClr val="bg1"/>
+                </a:solidFill>
+              </a:rPr>
+              <a:t>3</a:t>
+            </a:r>
+            <a:endParaRPr lang="en-US" sz="1600" dirty="0"/>
+          </a:p>
+        </p:txBody>
+      </p:sp>
+      <p:sp>
+        <p:nvSpPr>
+          <p:cNvPr id="11" name="Text 9"/>
+          <p:cNvSpPr txBox="1"/>
+          <p:nvPr/>
+        </p:nvSpPr>
+        <p:spPr>
+          <a:xfrm>
+            <a:off x="960120" y="2313432"/>
+            <a:ext cx="3611880" cy="548640"/>
+          </a:xfrm>
+          <a:prstGeom prst="rect">
+            <a:avLst/>
+          </a:prstGeom>
+          <a:noFill/>
+          <a:ln/>
+        </p:spPr>
+        <p:txBody>
+          <a:bodyPr wrap="square" lIns="0" tIns="0" rIns="0" bIns="0" rtlCol="0" anchor="t"/>
+          <a:lstStyle/>
+          <a:p>
+            <a:pPr indent="0" marL="0">
+              <a:buNone/>
+            </a:pPr>
+            <a:r>
+              <a:rPr lang="en-US" sz="1400" dirty="0">
+                <a:solidFill>
+                  <a:schemeClr val="tx1"/>
+                </a:solidFill>
+              </a:rPr>
+              <a:t>Mục </a:t>
+            </a:r>
+            <a:pPr indent="0" marL="0">
+              <a:buNone/>
+            </a:pPr>
+            <a:r>
+              <a:rPr lang="en-US" sz="1400" b="1" dirty="0">
+                <a:solidFill>
+                  <a:schemeClr val="tx1"/>
+                </a:solidFill>
+              </a:rPr>
+              <a:t>Quyền truy cập chung</a:t>
+            </a:r>
+            <a:pPr indent="0" marL="0">
+              <a:buNone/>
+            </a:pPr>
+            <a:r>
+              <a:rPr lang="en-US" sz="1400" dirty="0">
+                <a:solidFill>
+                  <a:schemeClr val="tx1"/>
+                </a:solidFill>
+              </a:rPr>
+              <a:t>: đổi “Bị hạn chế” thành </a:t>
+            </a:r>
+            <a:pPr indent="0" marL="0">
+              <a:buNone/>
+            </a:pPr>
+            <a:r>
+              <a:rPr lang="en-US" sz="1400" b="1" dirty="0">
+                <a:solidFill>
+                  <a:schemeClr val="tx1"/>
+                </a:solidFill>
+              </a:rPr>
+              <a:t>“Bất kỳ ai có đường liên kết”</a:t>
+            </a:r>
+            <a:endParaRPr lang="en-US" sz="1400" dirty="0"/>
+          </a:p>
+        </p:txBody>
+      </p:sp>
+      <p:sp>
+        <p:nvSpPr>
+          <p:cNvPr id="12" name="So 4"/>
+          <p:cNvSpPr/>
+          <p:nvPr/>
+        </p:nvSpPr>
+        <p:spPr>
+          <a:xfrm>
+            <a:off x="457200" y="2953512"/>
+            <a:ext cx="365760" cy="365760"/>
+          </a:xfrm>
+          <a:prstGeom prst="ellipse">
+            <a:avLst/>
+          </a:prstGeom>
+          <a:solidFill>
+            <a:schemeClr val="tx2"/>
+          </a:solidFill>
+          <a:ln/>
+        </p:spPr>
+      </p:sp>
+      <p:sp>
+        <p:nvSpPr>
+          <p:cNvPr id="13" name="Text 11"/>
+          <p:cNvSpPr txBox="1"/>
+          <p:nvPr/>
+        </p:nvSpPr>
+        <p:spPr>
+          <a:xfrm>
+            <a:off x="457200" y="2953512"/>
+            <a:ext cx="365760" cy="365760"/>
+          </a:xfrm>
+          <a:prstGeom prst="rect">
+            <a:avLst/>
+          </a:prstGeom>
+          <a:noFill/>
+          <a:ln/>
+        </p:spPr>
+        <p:txBody>
+          <a:bodyPr wrap="square" lIns="0" tIns="0" rIns="0" bIns="0" rtlCol="0" anchor="ctr"/>
+          <a:lstStyle/>
+          <a:p>
+            <a:pPr algn="ctr" indent="0" marL="0">
+              <a:buNone/>
+            </a:pPr>
+            <a:r>
+              <a:rPr lang="en-US" sz="1600" b="1" dirty="0">
+                <a:solidFill>
+                  <a:schemeClr val="bg1"/>
+                </a:solidFill>
+              </a:rPr>
+              <a:t>4</a:t>
+            </a:r>
+            <a:endParaRPr lang="en-US" sz="1600" dirty="0"/>
+          </a:p>
+        </p:txBody>
+      </p:sp>
+      <p:sp>
+        <p:nvSpPr>
+          <p:cNvPr id="14" name="Text 12"/>
+          <p:cNvSpPr txBox="1"/>
+          <p:nvPr/>
+        </p:nvSpPr>
+        <p:spPr>
+          <a:xfrm>
+            <a:off x="960120" y="2916936"/>
+            <a:ext cx="3611880" cy="548640"/>
+          </a:xfrm>
+          <a:prstGeom prst="rect">
+            <a:avLst/>
+          </a:prstGeom>
+          <a:noFill/>
+          <a:ln/>
+        </p:spPr>
+        <p:txBody>
+          <a:bodyPr wrap="square" lIns="0" tIns="0" rIns="0" bIns="0" rtlCol="0" anchor="t"/>
+          <a:lstStyle/>
+          <a:p>
+            <a:pPr indent="0" marL="0">
+              <a:buNone/>
+            </a:pPr>
+            <a:r>
+              <a:rPr lang="en-US" sz="1400" dirty="0">
+                <a:solidFill>
+                  <a:schemeClr val="tx1"/>
+                </a:solidFill>
+              </a:rPr>
+              <a:t>Bấm </a:t>
+            </a:r>
+            <a:pPr indent="0" marL="0">
+              <a:buNone/>
+            </a:pPr>
+            <a:r>
+              <a:rPr lang="en-US" sz="1400" b="1" dirty="0">
+                <a:solidFill>
+                  <a:schemeClr val="tx1"/>
+                </a:solidFill>
+              </a:rPr>
+              <a:t>Sao chép đường liên kết</a:t>
+            </a:r>
+            <a:pPr indent="0" marL="0">
+              <a:buNone/>
+            </a:pPr>
+            <a:r>
+              <a:rPr lang="en-US" sz="1400" dirty="0">
+                <a:solidFill>
+                  <a:schemeClr val="tx1"/>
+                </a:solidFill>
+              </a:rPr>
+              <a:t> → Xong</a:t>
+            </a:r>
+            <a:endParaRPr lang="en-US" sz="1400" dirty="0"/>
+          </a:p>
+        </p:txBody>
+      </p:sp>
+      <p:sp>
+        <p:nvSpPr>
+          <p:cNvPr id="15" name="So 5"/>
+          <p:cNvSpPr/>
+          <p:nvPr/>
+        </p:nvSpPr>
+        <p:spPr>
+          <a:xfrm>
+            <a:off x="457200" y="3557016"/>
+            <a:ext cx="365760" cy="365760"/>
+          </a:xfrm>
+          <a:prstGeom prst="ellipse">
+            <a:avLst/>
+          </a:prstGeom>
+          <a:solidFill>
+            <a:schemeClr val="tx2"/>
+          </a:solidFill>
+          <a:ln/>
+        </p:spPr>
+      </p:sp>
+      <p:sp>
+        <p:nvSpPr>
+          <p:cNvPr id="16" name="Text 14"/>
+          <p:cNvSpPr txBox="1"/>
+          <p:nvPr/>
+        </p:nvSpPr>
+        <p:spPr>
+          <a:xfrm>
+            <a:off x="457200" y="3557016"/>
+            <a:ext cx="365760" cy="365760"/>
+          </a:xfrm>
+          <a:prstGeom prst="rect">
+            <a:avLst/>
+          </a:prstGeom>
+          <a:noFill/>
+          <a:ln/>
+        </p:spPr>
+        <p:txBody>
+          <a:bodyPr wrap="square" lIns="0" tIns="0" rIns="0" bIns="0" rtlCol="0" anchor="ctr"/>
+          <a:lstStyle/>
+          <a:p>
+            <a:pPr algn="ctr" indent="0" marL="0">
+              <a:buNone/>
+            </a:pPr>
+            <a:r>
+              <a:rPr lang="en-US" sz="1600" b="1" dirty="0">
+                <a:solidFill>
+                  <a:schemeClr val="bg1"/>
+                </a:solidFill>
+              </a:rPr>
+              <a:t>5</a:t>
+            </a:r>
+            <a:endParaRPr lang="en-US" sz="1600" dirty="0"/>
+          </a:p>
+        </p:txBody>
+      </p:sp>
+      <p:sp>
+        <p:nvSpPr>
+          <p:cNvPr id="17" name="Text 15"/>
+          <p:cNvSpPr txBox="1"/>
+          <p:nvPr/>
+        </p:nvSpPr>
+        <p:spPr>
+          <a:xfrm>
+            <a:off x="960120" y="3520440"/>
+            <a:ext cx="3611880" cy="548640"/>
+          </a:xfrm>
+          <a:prstGeom prst="rect">
+            <a:avLst/>
+          </a:prstGeom>
+          <a:noFill/>
+          <a:ln/>
+        </p:spPr>
+        <p:txBody>
+          <a:bodyPr wrap="square" lIns="0" tIns="0" rIns="0" bIns="0" rtlCol="0" anchor="t"/>
+          <a:lstStyle/>
+          <a:p>
+            <a:pPr indent="0" marL="0">
+              <a:buNone/>
+            </a:pPr>
+            <a:r>
+              <a:rPr lang="en-US" sz="1400" dirty="0">
+                <a:solidFill>
+                  <a:schemeClr val="tx1"/>
+                </a:solidFill>
+              </a:rPr>
+              <a:t>Dán link vào nội dung yêu cầu hỗ trợ</a:t>
+            </a:r>
+            <a:endParaRPr lang="en-US" sz="1400" dirty="0"/>
+          </a:p>
+        </p:txBody>
+      </p:sp>
+      <p:sp>
+        <p:nvSpPr>
+          <p:cNvPr id="18" name="Text 16"/>
+          <p:cNvSpPr txBox="1"/>
+          <p:nvPr/>
+        </p:nvSpPr>
+        <p:spPr>
+          <a:xfrm>
+            <a:off x="4846320" y="1097280"/>
+            <a:ext cx="3840480" cy="274320"/>
+          </a:xfrm>
+          <a:prstGeom prst="rect">
+            <a:avLst/>
+          </a:prstGeom>
+          <a:noFill/>
+          <a:ln/>
+        </p:spPr>
+        <p:txBody>
+          <a:bodyPr wrap="square" lIns="0" tIns="0" rIns="0" bIns="0" rtlCol="0" anchor="ctr"/>
+          <a:lstStyle/>
+          <a:p>
+            <a:pPr indent="0" marL="0">
+              <a:buNone/>
+            </a:pPr>
+            <a:r>
+              <a:rPr lang="en-US" sz="1100" i="1" dirty="0">
+                <a:solidFill>
+                  <a:schemeClr val="accent5"/>
+                </a:solidFill>
+              </a:rPr>
+              <a:t>Minh họa hộp thoại Chia sẻ của Google Drive</a:t>
+            </a:r>
+            <a:endParaRPr lang="en-US" sz="1100" dirty="0"/>
+          </a:p>
+        </p:txBody>
+      </p:sp>
+      <p:sp>
+        <p:nvSpPr>
+          <p:cNvPr id="19" name="Hop thoai chia se"/>
+          <p:cNvSpPr/>
+          <p:nvPr/>
+        </p:nvSpPr>
+        <p:spPr>
+          <a:xfrm>
+            <a:off x="4846320" y="1417320"/>
+            <a:ext cx="3840480" cy="1965960"/>
+          </a:xfrm>
+          <a:prstGeom prst="roundRect">
+            <a:avLst>
+              <a:gd name="adj" fmla="val 4651"/>
+            </a:avLst>
+          </a:prstGeom>
+          <a:solidFill>
+            <a:schemeClr val="bg1"/>
+          </a:solidFill>
+          <a:ln w="12700">
+            <a:solidFill>
+              <a:schemeClr val="accent6"/>
+            </a:solidFill>
+            <a:prstDash val="solid"/>
+          </a:ln>
+          <a:effectLst>
+            <a:outerShdw sx="100000" sy="100000" kx="0" ky="0" algn="bl" rotWithShape="0" blurRad="101600" dist="25400" dir="5400000">
+              <a:srgbClr val="1B2A2F">
+                <a:alpha val="20000"/>
+              </a:srgbClr>
+            </a:outerShdw>
+          </a:effectLst>
+        </p:spPr>
+      </p:sp>
+      <p:sp>
+        <p:nvSpPr>
+          <p:cNvPr id="20" name="Text 18"/>
+          <p:cNvSpPr txBox="1"/>
+          <p:nvPr/>
+        </p:nvSpPr>
+        <p:spPr>
+          <a:xfrm>
+            <a:off x="5029200" y="1527048"/>
+            <a:ext cx="3474720" cy="320040"/>
+          </a:xfrm>
+          <a:prstGeom prst="rect">
+            <a:avLst/>
+          </a:prstGeom>
+          <a:noFill/>
+          <a:ln/>
+        </p:spPr>
+        <p:txBody>
+          <a:bodyPr wrap="square" lIns="0" tIns="0" rIns="0" bIns="0" rtlCol="0" anchor="ctr"/>
+          <a:lstStyle/>
+          <a:p>
+            <a:pPr indent="0" marL="0">
+              <a:buNone/>
+            </a:pPr>
+            <a:r>
+              <a:rPr lang="en-US" sz="1400" b="1" dirty="0">
+                <a:solidFill>
+                  <a:schemeClr val="tx1"/>
+                </a:solidFill>
+              </a:rPr>
+              <a:t>Chia sẻ “anh-zoom-buoi2.jpg”</a:t>
+            </a:r>
+            <a:endParaRPr lang="en-US" sz="1400" dirty="0"/>
+          </a:p>
+        </p:txBody>
+      </p:sp>
+      <p:sp>
+        <p:nvSpPr>
+          <p:cNvPr id="21" name="Text 19"/>
+          <p:cNvSpPr txBox="1"/>
+          <p:nvPr/>
+        </p:nvSpPr>
+        <p:spPr>
+          <a:xfrm>
+            <a:off x="5029200" y="1920240"/>
+            <a:ext cx="3474720" cy="228600"/>
+          </a:xfrm>
+          <a:prstGeom prst="rect">
+            <a:avLst/>
+          </a:prstGeom>
+          <a:noFill/>
+          <a:ln/>
+        </p:spPr>
+        <p:txBody>
+          <a:bodyPr wrap="square" lIns="0" tIns="0" rIns="0" bIns="0" rtlCol="0" anchor="ctr"/>
+          <a:lstStyle/>
+          <a:p>
+            <a:pPr indent="0" marL="0">
+              <a:buNone/>
+            </a:pPr>
+            <a:r>
+              <a:rPr lang="en-US" sz="1200" b="1" dirty="0">
+                <a:solidFill>
+                  <a:schemeClr val="tx1"/>
+                </a:solidFill>
+              </a:rPr>
+              <a:t>Quyền truy cập chung</a:t>
+            </a:r>
+            <a:endParaRPr lang="en-US" sz="1200" dirty="0"/>
+          </a:p>
+        </p:txBody>
+      </p:sp>
+      <p:sp>
+        <p:nvSpPr>
+          <p:cNvPr id="22" name="Bieu tuong"/>
+          <p:cNvSpPr/>
+          <p:nvPr/>
+        </p:nvSpPr>
+        <p:spPr>
+          <a:xfrm>
+            <a:off x="5029200" y="2240280"/>
+            <a:ext cx="329184" cy="329184"/>
+          </a:xfrm>
+          <a:prstGeom prst="ellipse">
+            <a:avLst/>
+          </a:prstGeom>
+          <a:solidFill>
+            <a:schemeClr val="accent1">
+              <a:alpha val="30000"/>
+            </a:schemeClr>
+          </a:solidFill>
+          <a:ln/>
+        </p:spPr>
+      </p:sp>
+      <p:sp>
+        <p:nvSpPr>
+          <p:cNvPr id="23" name="Chon quyen"/>
+          <p:cNvSpPr/>
+          <p:nvPr/>
+        </p:nvSpPr>
+        <p:spPr>
+          <a:xfrm>
+            <a:off x="5449824" y="2212848"/>
+            <a:ext cx="2331720" cy="329184"/>
+          </a:xfrm>
+          <a:prstGeom prst="roundRect">
+            <a:avLst>
+              <a:gd name="adj" fmla="val 13889"/>
+            </a:avLst>
+          </a:prstGeom>
+          <a:solidFill>
+            <a:schemeClr val="bg2"/>
+          </a:solidFill>
+          <a:ln w="25400">
+            <a:solidFill>
+              <a:schemeClr val="accent2"/>
+            </a:solidFill>
+            <a:prstDash val="solid"/>
+          </a:ln>
+        </p:spPr>
+      </p:sp>
+      <p:sp>
+        <p:nvSpPr>
+          <p:cNvPr id="24" name="Text 22"/>
+          <p:cNvSpPr txBox="1"/>
+          <p:nvPr/>
+        </p:nvSpPr>
+        <p:spPr>
+          <a:xfrm>
+            <a:off x="5504688" y="2212848"/>
+            <a:ext cx="2240280" cy="329184"/>
+          </a:xfrm>
+          <a:prstGeom prst="rect">
+            <a:avLst/>
+          </a:prstGeom>
+          <a:noFill/>
+          <a:ln/>
+        </p:spPr>
+        <p:txBody>
+          <a:bodyPr wrap="square" lIns="0" tIns="0" rIns="0" bIns="0" rtlCol="0" anchor="ctr"/>
+          <a:lstStyle/>
+          <a:p>
+            <a:pPr indent="0" marL="0">
+              <a:buNone/>
+            </a:pPr>
+            <a:r>
+              <a:rPr lang="en-US" sz="1200" b="1" dirty="0">
+                <a:solidFill>
+                  <a:schemeClr val="tx1"/>
+                </a:solidFill>
+              </a:rPr>
+              <a:t>Bất kỳ ai có đường liên kết ▾</a:t>
+            </a:r>
+            <a:endParaRPr lang="en-US" sz="1200" dirty="0"/>
+          </a:p>
+        </p:txBody>
+      </p:sp>
+      <p:sp>
+        <p:nvSpPr>
+          <p:cNvPr id="25" name="Text 23"/>
+          <p:cNvSpPr txBox="1"/>
+          <p:nvPr/>
+        </p:nvSpPr>
+        <p:spPr>
+          <a:xfrm>
+            <a:off x="7818120" y="2212848"/>
+            <a:ext cx="822960" cy="329184"/>
+          </a:xfrm>
+          <a:prstGeom prst="rect">
+            <a:avLst/>
+          </a:prstGeom>
+          <a:noFill/>
+          <a:ln/>
+        </p:spPr>
+        <p:txBody>
+          <a:bodyPr wrap="square" lIns="0" tIns="0" rIns="0" bIns="0" rtlCol="0" anchor="ctr"/>
+          <a:lstStyle/>
+          <a:p>
+            <a:pPr indent="0" marL="0">
+              <a:buNone/>
+            </a:pPr>
+            <a:r>
+              <a:rPr lang="en-US" sz="1100" dirty="0">
+                <a:solidFill>
+                  <a:schemeClr val="tx1"/>
+                </a:solidFill>
+              </a:rPr>
+              <a:t>Người xem ▾</a:t>
+            </a:r>
+            <a:endParaRPr lang="en-US" sz="1100" dirty="0"/>
+          </a:p>
+        </p:txBody>
+      </p:sp>
+      <p:sp>
+        <p:nvSpPr>
+          <p:cNvPr id="26" name="Text 24"/>
+          <p:cNvSpPr txBox="1"/>
+          <p:nvPr/>
+        </p:nvSpPr>
+        <p:spPr>
+          <a:xfrm>
+            <a:off x="5449824" y="2560320"/>
+            <a:ext cx="3108960" cy="228600"/>
+          </a:xfrm>
+          <a:prstGeom prst="rect">
+            <a:avLst/>
+          </a:prstGeom>
+          <a:noFill/>
+          <a:ln/>
+        </p:spPr>
+        <p:txBody>
+          <a:bodyPr wrap="square" lIns="0" tIns="0" rIns="0" bIns="0" rtlCol="0" anchor="ctr"/>
+          <a:lstStyle/>
+          <a:p>
+            <a:pPr indent="0" marL="0">
+              <a:buNone/>
+            </a:pPr>
+            <a:r>
+              <a:rPr lang="en-US" sz="1000" dirty="0">
+                <a:solidFill>
+                  <a:schemeClr val="accent5"/>
+                </a:solidFill>
+              </a:rPr>
+              <a:t>Bất kỳ ai có đường liên kết đều có thể xem</a:t>
+            </a:r>
+            <a:endParaRPr lang="en-US" sz="1000" dirty="0"/>
+          </a:p>
+        </p:txBody>
+      </p:sp>
+      <p:sp>
+        <p:nvSpPr>
+          <p:cNvPr id="27" name="Nut sao chep"/>
+          <p:cNvSpPr/>
+          <p:nvPr/>
+        </p:nvSpPr>
+        <p:spPr>
+          <a:xfrm>
+            <a:off x="5029200" y="2926080"/>
+            <a:ext cx="1920240" cy="329184"/>
+          </a:xfrm>
+          <a:prstGeom prst="roundRect">
+            <a:avLst>
+              <a:gd name="adj" fmla="val 50000"/>
+            </a:avLst>
+          </a:prstGeom>
+          <a:solidFill>
+            <a:schemeClr val="bg1"/>
+          </a:solidFill>
+          <a:ln w="25400">
+            <a:solidFill>
+              <a:schemeClr val="accent2"/>
+            </a:solidFill>
+            <a:prstDash val="solid"/>
+          </a:ln>
+        </p:spPr>
+      </p:sp>
+      <p:sp>
+        <p:nvSpPr>
+          <p:cNvPr id="28" name="Text 26"/>
+          <p:cNvSpPr txBox="1"/>
+          <p:nvPr/>
+        </p:nvSpPr>
+        <p:spPr>
+          <a:xfrm>
+            <a:off x="5029200" y="2926080"/>
+            <a:ext cx="1920240" cy="329184"/>
+          </a:xfrm>
+          <a:prstGeom prst="rect">
+            <a:avLst/>
+          </a:prstGeom>
+          <a:noFill/>
+          <a:ln/>
+        </p:spPr>
+        <p:txBody>
+          <a:bodyPr wrap="square" lIns="0" tIns="0" rIns="0" bIns="0" rtlCol="0" anchor="ctr"/>
+          <a:lstStyle/>
+          <a:p>
+            <a:pPr algn="ctr" indent="0" marL="0">
+              <a:buNone/>
+            </a:pPr>
+            <a:r>
+              <a:rPr lang="en-US" sz="1100" b="1" dirty="0">
+                <a:solidFill>
+                  <a:schemeClr val="tx2"/>
+                </a:solidFill>
+              </a:rPr>
+              <a:t>Sao chép đường liên kết</a:t>
+            </a:r>
+            <a:endParaRPr lang="en-US" sz="1100" dirty="0"/>
+          </a:p>
+        </p:txBody>
+      </p:sp>
+      <p:sp>
+        <p:nvSpPr>
+          <p:cNvPr id="29" name="Nut xong"/>
+          <p:cNvSpPr/>
+          <p:nvPr/>
+        </p:nvSpPr>
+        <p:spPr>
+          <a:xfrm>
+            <a:off x="7772400" y="2926080"/>
+            <a:ext cx="731520" cy="329184"/>
+          </a:xfrm>
+          <a:prstGeom prst="roundRect">
+            <a:avLst>
+              <a:gd name="adj" fmla="val 50000"/>
+            </a:avLst>
+          </a:prstGeom>
+          <a:solidFill>
+            <a:schemeClr val="tx2"/>
+          </a:solidFill>
+          <a:ln/>
+        </p:spPr>
+      </p:sp>
+      <p:sp>
+        <p:nvSpPr>
+          <p:cNvPr id="30" name="Text 28"/>
+          <p:cNvSpPr txBox="1"/>
+          <p:nvPr/>
+        </p:nvSpPr>
+        <p:spPr>
+          <a:xfrm>
+            <a:off x="7772400" y="2926080"/>
+            <a:ext cx="731520" cy="329184"/>
+          </a:xfrm>
+          <a:prstGeom prst="rect">
+            <a:avLst/>
+          </a:prstGeom>
+          <a:noFill/>
+          <a:ln/>
+        </p:spPr>
+        <p:txBody>
+          <a:bodyPr wrap="square" lIns="0" tIns="0" rIns="0" bIns="0" rtlCol="0" anchor="ctr"/>
+          <a:lstStyle/>
+          <a:p>
+            <a:pPr algn="ctr" indent="0" marL="0">
+              <a:buNone/>
+            </a:pPr>
+            <a:r>
+              <a:rPr lang="en-US" sz="1100" b="1" dirty="0">
+                <a:solidFill>
+                  <a:schemeClr val="bg1"/>
+                </a:solidFill>
+              </a:rPr>
+              <a:t>Xong</a:t>
+            </a:r>
+            <a:endParaRPr lang="en-US" sz="1100" dirty="0"/>
+          </a:p>
+        </p:txBody>
+      </p:sp>
+      <p:sp>
+        <p:nvSpPr>
+          <p:cNvPr id="31" name="Luu y chia se"/>
+          <p:cNvSpPr/>
+          <p:nvPr/>
+        </p:nvSpPr>
+        <p:spPr>
+          <a:xfrm>
+            <a:off x="4846320" y="3566160"/>
+            <a:ext cx="3840480" cy="960120"/>
+          </a:xfrm>
+          <a:prstGeom prst="roundRect">
+            <a:avLst>
+              <a:gd name="adj" fmla="val 7619"/>
+            </a:avLst>
+          </a:prstGeom>
+          <a:solidFill>
+            <a:schemeClr val="accent2">
+              <a:alpha val="18000"/>
+            </a:schemeClr>
+          </a:solidFill>
+          <a:ln/>
+        </p:spPr>
+      </p:sp>
+      <p:sp>
+        <p:nvSpPr>
+          <p:cNvPr id="32" name="Text 30"/>
+          <p:cNvSpPr txBox="1"/>
+          <p:nvPr/>
+        </p:nvSpPr>
+        <p:spPr>
+          <a:xfrm>
+            <a:off x="4983480" y="3566160"/>
+            <a:ext cx="3566160" cy="960120"/>
+          </a:xfrm>
+          <a:prstGeom prst="rect">
+            <a:avLst/>
+          </a:prstGeom>
+          <a:noFill/>
+          <a:ln/>
+        </p:spPr>
+        <p:txBody>
+          <a:bodyPr wrap="square" lIns="0" tIns="0" rIns="0" bIns="0" rtlCol="0" anchor="ctr"/>
+          <a:lstStyle/>
+          <a:p>
+            <a:pPr indent="0" marL="0">
+              <a:buNone/>
+            </a:pPr>
+            <a:r>
+              <a:rPr lang="en-US" sz="1200" b="1" dirty="0">
+                <a:solidFill>
+                  <a:schemeClr val="tx1"/>
+                </a:solidFill>
+              </a:rPr>
+              <a:t>Để “Bị hạn chế” thì người hỗ trợ không mở được ảnh.</a:t>
+            </a:r>
+            <a:endParaRPr lang="en-US" sz="1200" dirty="0"/>
+          </a:p>
+          <a:p>
+            <a:pPr indent="0" marL="0">
+              <a:buNone/>
+            </a:pPr>
+            <a:r>
+              <a:rPr lang="en-US" sz="1200" dirty="0">
+                <a:solidFill>
+                  <a:schemeClr val="tx1"/>
+                </a:solidFill>
+              </a:rPr>
+              <a:t>Tự kiểm tra: mở link trong tab ẩn danh. Xử lý xong có thể đổi lại “Bị hạn chế”.</a:t>
+            </a:r>
+            <a:endParaRPr lang="en-US" sz="1200" dirty="0"/>
+          </a:p>
+        </p:txBody>
+      </p:sp>
+      <p:sp>
+        <p:nvSpPr>
+          <p:cNvPr id="25" name="Slide Number Placeholder 0"/>
+          <p:cNvSpPr>
+            <a:spLocks noGrp="1"/>
+          </p:cNvSpPr>
+          <p:nvPr>
+            <p:ph type="sldNum" sz="quarter" idx="4294967295"/>
+          </p:nvPr>
+        </p:nvSpPr>
+        <p:spPr>
+          <a:xfrm>
+            <a:off x="8229600" y="4754880"/>
+            <a:ext cx="457200" cy="228600"/>
+          </a:xfrm>
+          <a:prstGeom prst="rect">
+            <a:avLst/>
+          </a:prstGeom>
+          <a:extLst>
+            <a:ext uri="{C572A759-6A51-4108-AA02-DFA0A04FC94B}">
+              <ma14:wrappingTextBoxFlag xmlns:ma14="http://schemas.microsoft.com/office/mac/drawingml/2011/main" val="0"/>
+            </a:ext>
+          </a:extLst>
+        </p:spPr>
+        <p:txBody>
+          <a:bodyPr/>
+          <a:lstStyle>
+            <a:lvl1pPr>
+              <a:defRPr sz="1000">
+                <a:solidFill>
+                  <a:schemeClr val="accent5"/>
+                </a:solidFill>
+              </a:defRPr>
+            </a:lvl1pPr>
+          </a:lstStyle>
+          <a:p>
+            <a:pPr algn="r"/>
+            <a:fld id="{F7021451-1387-4CA6-816F-3879F97B5CBC}" type="slidenum">
+              <a:rPr b="0" lang="en-US"/>
+              <a:t>6</a:t>
+            </a:fld>
+            <a:endParaRPr lang="en-US"/>
+          </a:p>
+        </p:txBody>
+      </p:sp>
+    </p:spTree>
+  </p:cSld>
+  <p:clrMapOvr>
+    <a:masterClrMapping/>
+  </p:clrMapOvr>
+</p:sld>
+</file>
+
+<file path=ppt/slides/slide7.xml><?xml version="1.0" encoding="utf-8"?>
+<p:sld xmlns:a="http://schemas.openxmlformats.org/drawingml/2006/main" xmlns:r="http://schemas.openxmlformats.org/officeDocument/2006/relationships" xmlns:p="http://schemas.openxmlformats.org/presentationml/2006/main">
+  <p:cSld name="Slide 7">
+    <p:spTree>
+      <p:nvGrpSpPr>
+        <p:cNvPr id="1" name=""/>
+        <p:cNvGrpSpPr/>
+        <p:nvPr/>
+      </p:nvGrpSpPr>
+      <p:grpSpPr>
+        <a:xfrm>
+          <a:off x="0" y="0"/>
+          <a:ext cx="0" cy="0"/>
+          <a:chOff x="0" y="0"/>
+          <a:chExt cx="0" cy="0"/>
+        </a:xfrm>
+      </p:grpSpPr>
+      <p:sp>
+        <p:nvSpPr>
+          <p:cNvPr id="2" name="Text 1"/>
+          <p:cNvSpPr/>
+          <p:nvPr>
+            <p:ph idx="101" type="title" hasCustomPrompt="1"/>
+          </p:nvPr>
+        </p:nvSpPr>
+        <p:spPr>
+          <a:xfrm>
+            <a:off x="457200" y="274320"/>
+            <a:ext cx="8229600" cy="640080"/>
+          </a:xfrm>
+          <a:prstGeom prst="rect">
+            <a:avLst/>
+          </a:prstGeom>
+          <a:noFill/>
+          <a:ln/>
+        </p:spPr>
+        <p:txBody>
+          <a:bodyPr wrap="square" lIns="0" tIns="0" rIns="0" bIns="0" rtlCol="0" anchor="ctr"/>
+          <a:lstStyle/>
+          <a:p>
+            <a:pPr algn="l" indent="0" marL="0">
+              <a:buNone/>
+            </a:pPr>
+            <a:r>
+              <a:rPr lang="en-US" sz="2800" b="1" dirty="0">
+                <a:solidFill>
+                  <a:schemeClr val="tx2"/>
+                </a:solidFill>
+              </a:rPr>
+              <a:t>Cách 2 – Gửi trên cổng, mục Hỗ trợ</a:t>
+            </a:r>
+            <a:endParaRPr lang="en-US" sz="2800" dirty="0"/>
+          </a:p>
+        </p:txBody>
+      </p:sp>
+      <p:sp>
+        <p:nvSpPr>
+          <p:cNvPr id="3" name="So 1"/>
+          <p:cNvSpPr/>
+          <p:nvPr/>
+        </p:nvSpPr>
+        <p:spPr>
+          <a:xfrm>
+            <a:off x="457200" y="1143000"/>
+            <a:ext cx="365760" cy="365760"/>
+          </a:xfrm>
+          <a:prstGeom prst="ellipse">
+            <a:avLst/>
+          </a:prstGeom>
+          <a:solidFill>
+            <a:schemeClr val="tx2"/>
+          </a:solidFill>
+          <a:ln/>
+        </p:spPr>
+      </p:sp>
+      <p:sp>
+        <p:nvSpPr>
+          <p:cNvPr id="4" name="Text 2"/>
+          <p:cNvSpPr txBox="1"/>
+          <p:nvPr/>
+        </p:nvSpPr>
+        <p:spPr>
+          <a:xfrm>
+            <a:off x="457200" y="1143000"/>
+            <a:ext cx="365760" cy="365760"/>
+          </a:xfrm>
+          <a:prstGeom prst="rect">
+            <a:avLst/>
+          </a:prstGeom>
+          <a:noFill/>
+          <a:ln/>
+        </p:spPr>
+        <p:txBody>
+          <a:bodyPr wrap="square" lIns="0" tIns="0" rIns="0" bIns="0" rtlCol="0" anchor="ctr"/>
+          <a:lstStyle/>
+          <a:p>
+            <a:pPr algn="ctr" indent="0" marL="0">
+              <a:buNone/>
+            </a:pPr>
+            <a:r>
+              <a:rPr lang="en-US" sz="1600" b="1" dirty="0">
+                <a:solidFill>
+                  <a:schemeClr val="bg1"/>
+                </a:solidFill>
+              </a:rPr>
+              <a:t>1</a:t>
+            </a:r>
+            <a:endParaRPr lang="en-US" sz="1600" dirty="0"/>
+          </a:p>
+        </p:txBody>
+      </p:sp>
+      <p:sp>
+        <p:nvSpPr>
+          <p:cNvPr id="5" name="Text 3"/>
+          <p:cNvSpPr txBox="1"/>
+          <p:nvPr/>
+        </p:nvSpPr>
+        <p:spPr>
+          <a:xfrm>
+            <a:off x="960120" y="1106424"/>
+            <a:ext cx="4343400" cy="658368"/>
+          </a:xfrm>
+          <a:prstGeom prst="rect">
+            <a:avLst/>
+          </a:prstGeom>
+          <a:noFill/>
+          <a:ln/>
+        </p:spPr>
+        <p:txBody>
+          <a:bodyPr wrap="square" lIns="0" tIns="0" rIns="0" bIns="0" rtlCol="0" anchor="t"/>
+          <a:lstStyle/>
+          <a:p>
+            <a:pPr indent="0" marL="0">
+              <a:buNone/>
+            </a:pPr>
+            <a:r>
+              <a:rPr lang="en-US" sz="1400" dirty="0">
+                <a:solidFill>
+                  <a:schemeClr val="tx1"/>
+                </a:solidFill>
+              </a:rPr>
+              <a:t>Bấm menu </a:t>
+            </a:r>
+            <a:pPr indent="0" marL="0">
+              <a:buNone/>
+            </a:pPr>
+            <a:r>
+              <a:rPr lang="en-US" sz="1400" b="1" dirty="0">
+                <a:solidFill>
+                  <a:schemeClr val="tx1"/>
+                </a:solidFill>
+              </a:rPr>
+              <a:t>☰</a:t>
+            </a:r>
+            <a:pPr indent="0" marL="0">
+              <a:buNone/>
+            </a:pPr>
+            <a:r>
+              <a:rPr lang="en-US" sz="1400" dirty="0">
+                <a:solidFill>
+                  <a:schemeClr val="tx1"/>
+                </a:solidFill>
+              </a:rPr>
+              <a:t> → </a:t>
+            </a:r>
+            <a:pPr indent="0" marL="0">
+              <a:buNone/>
+            </a:pPr>
+            <a:r>
+              <a:rPr lang="en-US" sz="1400" b="1" dirty="0">
+                <a:solidFill>
+                  <a:schemeClr val="tx1"/>
+                </a:solidFill>
+              </a:rPr>
+              <a:t>Hỗ trợ</a:t>
+            </a:r>
+            <a:endParaRPr lang="en-US" sz="1400" dirty="0"/>
+          </a:p>
+        </p:txBody>
+      </p:sp>
+      <p:sp>
+        <p:nvSpPr>
+          <p:cNvPr id="6" name="So 2"/>
+          <p:cNvSpPr/>
+          <p:nvPr/>
+        </p:nvSpPr>
+        <p:spPr>
+          <a:xfrm>
+            <a:off x="457200" y="1856232"/>
+            <a:ext cx="365760" cy="365760"/>
+          </a:xfrm>
+          <a:prstGeom prst="ellipse">
+            <a:avLst/>
+          </a:prstGeom>
+          <a:solidFill>
+            <a:schemeClr val="tx2"/>
+          </a:solidFill>
+          <a:ln/>
+        </p:spPr>
+      </p:sp>
+      <p:sp>
+        <p:nvSpPr>
+          <p:cNvPr id="7" name="Text 5"/>
+          <p:cNvSpPr txBox="1"/>
+          <p:nvPr/>
+        </p:nvSpPr>
+        <p:spPr>
+          <a:xfrm>
+            <a:off x="457200" y="1856232"/>
+            <a:ext cx="365760" cy="365760"/>
+          </a:xfrm>
+          <a:prstGeom prst="rect">
+            <a:avLst/>
+          </a:prstGeom>
+          <a:noFill/>
+          <a:ln/>
+        </p:spPr>
+        <p:txBody>
+          <a:bodyPr wrap="square" lIns="0" tIns="0" rIns="0" bIns="0" rtlCol="0" anchor="ctr"/>
+          <a:lstStyle/>
+          <a:p>
+            <a:pPr algn="ctr" indent="0" marL="0">
+              <a:buNone/>
+            </a:pPr>
+            <a:r>
+              <a:rPr lang="en-US" sz="1600" b="1" dirty="0">
+                <a:solidFill>
+                  <a:schemeClr val="bg1"/>
+                </a:solidFill>
+              </a:rPr>
+              <a:t>2</a:t>
+            </a:r>
+            <a:endParaRPr lang="en-US" sz="1600" dirty="0"/>
+          </a:p>
+        </p:txBody>
+      </p:sp>
+      <p:sp>
+        <p:nvSpPr>
+          <p:cNvPr id="8" name="Text 6"/>
+          <p:cNvSpPr txBox="1"/>
+          <p:nvPr/>
+        </p:nvSpPr>
+        <p:spPr>
+          <a:xfrm>
+            <a:off x="960120" y="1819656"/>
+            <a:ext cx="4343400" cy="658368"/>
+          </a:xfrm>
+          <a:prstGeom prst="rect">
+            <a:avLst/>
+          </a:prstGeom>
+          <a:noFill/>
+          <a:ln/>
+        </p:spPr>
+        <p:txBody>
+          <a:bodyPr wrap="square" lIns="0" tIns="0" rIns="0" bIns="0" rtlCol="0" anchor="t"/>
+          <a:lstStyle/>
+          <a:p>
+            <a:pPr indent="0" marL="0">
+              <a:buNone/>
+            </a:pPr>
+            <a:r>
+              <a:rPr lang="en-US" sz="1400" dirty="0">
+                <a:solidFill>
+                  <a:schemeClr val="tx1"/>
+                </a:solidFill>
+              </a:rPr>
+              <a:t>Ô “Vấn đề Thầy/Cô đang gặp”: gõ </a:t>
+            </a:r>
+            <a:pPr indent="0" marL="0">
+              <a:buNone/>
+            </a:pPr>
+            <a:r>
+              <a:rPr lang="en-US" sz="1400" b="1" dirty="0">
+                <a:solidFill>
+                  <a:schemeClr val="tx1"/>
+                </a:solidFill>
+              </a:rPr>
+              <a:t>khác</a:t>
+            </a:r>
+            <a:pPr indent="0" marL="0">
+              <a:buNone/>
+            </a:pPr>
+            <a:r>
+              <a:rPr lang="en-US" sz="1400" dirty="0">
+                <a:solidFill>
+                  <a:schemeClr val="tx1"/>
+                </a:solidFill>
+              </a:rPr>
+              <a:t> → chọn </a:t>
+            </a:r>
+            <a:pPr indent="0" marL="0">
+              <a:buNone/>
+            </a:pPr>
+            <a:r>
+              <a:rPr lang="en-US" sz="1400" b="1" dirty="0">
+                <a:solidFill>
+                  <a:schemeClr val="tx1"/>
+                </a:solidFill>
+              </a:rPr>
+              <a:t>Vấn đề khác</a:t>
+            </a:r>
+            <a:endParaRPr lang="en-US" sz="1400" dirty="0"/>
+          </a:p>
+        </p:txBody>
+      </p:sp>
+      <p:sp>
+        <p:nvSpPr>
+          <p:cNvPr id="9" name="So 3"/>
+          <p:cNvSpPr/>
+          <p:nvPr/>
+        </p:nvSpPr>
+        <p:spPr>
+          <a:xfrm>
+            <a:off x="457200" y="2569464"/>
+            <a:ext cx="365760" cy="365760"/>
+          </a:xfrm>
+          <a:prstGeom prst="ellipse">
+            <a:avLst/>
+          </a:prstGeom>
+          <a:solidFill>
+            <a:schemeClr val="tx2"/>
+          </a:solidFill>
+          <a:ln/>
+        </p:spPr>
+      </p:sp>
+      <p:sp>
+        <p:nvSpPr>
+          <p:cNvPr id="10" name="Text 8"/>
+          <p:cNvSpPr txBox="1"/>
+          <p:nvPr/>
+        </p:nvSpPr>
+        <p:spPr>
+          <a:xfrm>
+            <a:off x="457200" y="2569464"/>
+            <a:ext cx="365760" cy="365760"/>
+          </a:xfrm>
+          <a:prstGeom prst="rect">
+            <a:avLst/>
+          </a:prstGeom>
+          <a:noFill/>
+          <a:ln/>
+        </p:spPr>
+        <p:txBody>
+          <a:bodyPr wrap="square" lIns="0" tIns="0" rIns="0" bIns="0" rtlCol="0" anchor="ctr"/>
+          <a:lstStyle/>
+          <a:p>
+            <a:pPr algn="ctr" indent="0" marL="0">
+              <a:buNone/>
+            </a:pPr>
+            <a:r>
+              <a:rPr lang="en-US" sz="1600" b="1" dirty="0">
+                <a:solidFill>
+                  <a:schemeClr val="bg1"/>
+                </a:solidFill>
+              </a:rPr>
+              <a:t>3</a:t>
+            </a:r>
+            <a:endParaRPr lang="en-US" sz="1600" dirty="0"/>
+          </a:p>
+        </p:txBody>
+      </p:sp>
+      <p:sp>
+        <p:nvSpPr>
+          <p:cNvPr id="11" name="Text 9"/>
+          <p:cNvSpPr txBox="1"/>
+          <p:nvPr/>
+        </p:nvSpPr>
+        <p:spPr>
+          <a:xfrm>
+            <a:off x="960120" y="2532888"/>
+            <a:ext cx="4343400" cy="658368"/>
+          </a:xfrm>
+          <a:prstGeom prst="rect">
+            <a:avLst/>
+          </a:prstGeom>
+          <a:noFill/>
+          <a:ln/>
+        </p:spPr>
+        <p:txBody>
+          <a:bodyPr wrap="square" lIns="0" tIns="0" rIns="0" bIns="0" rtlCol="0" anchor="t"/>
+          <a:lstStyle/>
+          <a:p>
+            <a:pPr indent="0" marL="0">
+              <a:buNone/>
+            </a:pPr>
+            <a:r>
+              <a:rPr lang="en-US" sz="1400" dirty="0">
+                <a:solidFill>
+                  <a:schemeClr val="tx1"/>
+                </a:solidFill>
+              </a:rPr>
+              <a:t>Ghi </a:t>
+            </a:r>
+            <a:pPr indent="0" marL="0">
+              <a:buNone/>
+            </a:pPr>
+            <a:r>
+              <a:rPr lang="en-US" sz="1400" b="1" dirty="0">
+                <a:solidFill>
+                  <a:schemeClr val="tx1"/>
+                </a:solidFill>
+              </a:rPr>
+              <a:t>lớp – GĐ – buổi – ngày</a:t>
+            </a:r>
+            <a:pPr indent="0" marL="0">
+              <a:buNone/>
+            </a:pPr>
+            <a:r>
+              <a:rPr lang="en-US" sz="1400" dirty="0">
+                <a:solidFill>
+                  <a:schemeClr val="tx1"/>
+                </a:solidFill>
+              </a:rPr>
+              <a:t>, việc đã xảy ra, rồi </a:t>
+            </a:r>
+            <a:pPr indent="0" marL="0">
+              <a:buNone/>
+            </a:pPr>
+            <a:r>
+              <a:rPr lang="en-US" sz="1400" b="1" dirty="0">
+                <a:solidFill>
+                  <a:schemeClr val="tx1"/>
+                </a:solidFill>
+              </a:rPr>
+              <a:t>dán link Drive</a:t>
+            </a:r>
+            <a:endParaRPr lang="en-US" sz="1400" dirty="0"/>
+          </a:p>
+        </p:txBody>
+      </p:sp>
+      <p:sp>
+        <p:nvSpPr>
+          <p:cNvPr id="12" name="So 4"/>
+          <p:cNvSpPr/>
+          <p:nvPr/>
+        </p:nvSpPr>
+        <p:spPr>
+          <a:xfrm>
+            <a:off x="457200" y="3282696"/>
+            <a:ext cx="365760" cy="365760"/>
+          </a:xfrm>
+          <a:prstGeom prst="ellipse">
+            <a:avLst/>
+          </a:prstGeom>
+          <a:solidFill>
+            <a:schemeClr val="tx2"/>
+          </a:solidFill>
+          <a:ln/>
+        </p:spPr>
+      </p:sp>
+      <p:sp>
+        <p:nvSpPr>
+          <p:cNvPr id="13" name="Text 11"/>
+          <p:cNvSpPr txBox="1"/>
+          <p:nvPr/>
+        </p:nvSpPr>
+        <p:spPr>
+          <a:xfrm>
+            <a:off x="457200" y="3282696"/>
+            <a:ext cx="365760" cy="365760"/>
+          </a:xfrm>
+          <a:prstGeom prst="rect">
+            <a:avLst/>
+          </a:prstGeom>
+          <a:noFill/>
+          <a:ln/>
+        </p:spPr>
+        <p:txBody>
+          <a:bodyPr wrap="square" lIns="0" tIns="0" rIns="0" bIns="0" rtlCol="0" anchor="ctr"/>
+          <a:lstStyle/>
+          <a:p>
+            <a:pPr algn="ctr" indent="0" marL="0">
+              <a:buNone/>
+            </a:pPr>
+            <a:r>
+              <a:rPr lang="en-US" sz="1600" b="1" dirty="0">
+                <a:solidFill>
+                  <a:schemeClr val="bg1"/>
+                </a:solidFill>
+              </a:rPr>
+              <a:t>4</a:t>
+            </a:r>
+            <a:endParaRPr lang="en-US" sz="1600" dirty="0"/>
+          </a:p>
+        </p:txBody>
+      </p:sp>
+      <p:sp>
+        <p:nvSpPr>
+          <p:cNvPr id="14" name="Text 12"/>
+          <p:cNvSpPr txBox="1"/>
+          <p:nvPr/>
+        </p:nvSpPr>
+        <p:spPr>
+          <a:xfrm>
+            <a:off x="960120" y="3246120"/>
+            <a:ext cx="4343400" cy="658368"/>
+          </a:xfrm>
+          <a:prstGeom prst="rect">
+            <a:avLst/>
+          </a:prstGeom>
+          <a:noFill/>
+          <a:ln/>
+        </p:spPr>
+        <p:txBody>
+          <a:bodyPr wrap="square" lIns="0" tIns="0" rIns="0" bIns="0" rtlCol="0" anchor="t"/>
+          <a:lstStyle/>
+          <a:p>
+            <a:pPr indent="0" marL="0">
+              <a:buNone/>
+            </a:pPr>
+            <a:r>
+              <a:rPr lang="en-US" sz="1400" dirty="0">
+                <a:solidFill>
+                  <a:schemeClr val="tx1"/>
+                </a:solidFill>
+              </a:rPr>
+              <a:t>Bấm </a:t>
+            </a:r>
+            <a:pPr indent="0" marL="0">
+              <a:buNone/>
+            </a:pPr>
+            <a:r>
+              <a:rPr lang="en-US" sz="1400" b="1" dirty="0">
+                <a:solidFill>
+                  <a:schemeClr val="tx1"/>
+                </a:solidFill>
+              </a:rPr>
+              <a:t>Gửi yêu cầu</a:t>
+            </a:r>
+            <a:pPr indent="0" marL="0">
+              <a:buNone/>
+            </a:pPr>
+            <a:r>
+              <a:rPr lang="en-US" sz="1400" dirty="0">
+                <a:solidFill>
+                  <a:schemeClr val="tx1"/>
+                </a:solidFill>
+              </a:rPr>
+              <a:t> – câu trả lời hiện ngay dưới trang Hỗ trợ</a:t>
+            </a:r>
+            <a:endParaRPr lang="en-US" sz="1400" dirty="0"/>
+          </a:p>
+        </p:txBody>
+      </p:sp>
+      <p:sp>
+        <p:nvSpPr>
+          <p:cNvPr id="15" name="Khung hv-yeu-cau"/>
+          <p:cNvSpPr/>
+          <p:nvPr/>
+        </p:nvSpPr>
+        <p:spPr>
+          <a:xfrm>
+            <a:off x="6108192" y="1033272"/>
+            <a:ext cx="2505456" cy="3358896"/>
+          </a:xfrm>
+          <a:prstGeom prst="roundRect">
+            <a:avLst>
+              <a:gd name="adj" fmla="val 4380"/>
+            </a:avLst>
+          </a:prstGeom>
+          <a:solidFill>
+            <a:schemeClr val="tx1"/>
+          </a:solidFill>
+          <a:ln/>
+          <a:effectLst>
+            <a:outerShdw sx="100000" sy="100000" kx="0" ky="0" algn="bl" rotWithShape="0" blurRad="76200" dist="25400" dir="5400000">
+              <a:srgbClr val="1B2A2F">
+                <a:alpha val="25000"/>
+              </a:srgbClr>
+            </a:outerShdw>
+          </a:effectLst>
+        </p:spPr>
+      </p:sp>
+      <p:pic>
+        <p:nvPicPr>
+          <p:cNvPr id="16" name="Anh hv-yeu-cau" descr="Trang Yêu cầu hỗ trợ đã chọn Vấn đề khác và dán link Google Drive">    </p:cNvPr>
+          <p:cNvPicPr>
+            <a:picLocks noChangeAspect="1"/>
+          </p:cNvPicPr>
+          <p:nvPr/>
+        </p:nvPicPr>
+        <p:blipFill>
+          <a:blip r:embed="rId1"/>
+          <a:stretch>
+            <a:fillRect/>
+          </a:stretch>
+        </p:blipFill>
+        <p:spPr>
+          <a:xfrm>
+            <a:off x="6172200" y="1097280"/>
+            <a:ext cx="2377440" cy="3230880"/>
+          </a:xfrm>
+          <a:prstGeom prst="rect">
+            <a:avLst/>
+          </a:prstGeom>
+        </p:spPr>
+      </p:pic>
+      <p:sp>
+        <p:nvSpPr>
+          <p:cNvPr id="17" name="So 2"/>
+          <p:cNvSpPr/>
+          <p:nvPr/>
+        </p:nvSpPr>
+        <p:spPr>
+          <a:xfrm>
+            <a:off x="5751576" y="2340254"/>
+            <a:ext cx="292608" cy="292608"/>
+          </a:xfrm>
+          <a:prstGeom prst="ellipse">
+            <a:avLst/>
+          </a:prstGeom>
+          <a:solidFill>
+            <a:schemeClr val="accent2"/>
+          </a:solidFill>
+          <a:ln/>
+        </p:spPr>
+      </p:sp>
+      <p:sp>
+        <p:nvSpPr>
+          <p:cNvPr id="18" name="Text 15"/>
+          <p:cNvSpPr txBox="1"/>
+          <p:nvPr/>
+        </p:nvSpPr>
+        <p:spPr>
+          <a:xfrm>
+            <a:off x="5751576" y="2340254"/>
+            <a:ext cx="292608" cy="292608"/>
+          </a:xfrm>
+          <a:prstGeom prst="rect">
+            <a:avLst/>
+          </a:prstGeom>
+          <a:noFill/>
+          <a:ln/>
+        </p:spPr>
+        <p:txBody>
+          <a:bodyPr wrap="square" lIns="0" tIns="0" rIns="0" bIns="0" rtlCol="0" anchor="ctr"/>
+          <a:lstStyle/>
+          <a:p>
+            <a:pPr algn="ctr" indent="0" marL="0">
+              <a:buNone/>
+            </a:pPr>
+            <a:r>
+              <a:rPr lang="en-US" sz="1300" b="1" dirty="0">
+                <a:solidFill>
+                  <a:schemeClr val="bg1"/>
+                </a:solidFill>
+              </a:rPr>
+              <a:t>2</a:t>
+            </a:r>
+            <a:endParaRPr lang="en-US" sz="1300" dirty="0"/>
+          </a:p>
+        </p:txBody>
+      </p:sp>
+      <p:sp>
+        <p:nvSpPr>
+          <p:cNvPr id="19" name="So 3"/>
+          <p:cNvSpPr/>
+          <p:nvPr/>
+        </p:nvSpPr>
+        <p:spPr>
+          <a:xfrm>
+            <a:off x="5751576" y="3277210"/>
+            <a:ext cx="292608" cy="292608"/>
+          </a:xfrm>
+          <a:prstGeom prst="ellipse">
+            <a:avLst/>
+          </a:prstGeom>
+          <a:solidFill>
+            <a:schemeClr val="accent2"/>
+          </a:solidFill>
+          <a:ln/>
+        </p:spPr>
+      </p:sp>
+      <p:sp>
+        <p:nvSpPr>
+          <p:cNvPr id="20" name="Text 17"/>
+          <p:cNvSpPr txBox="1"/>
+          <p:nvPr/>
+        </p:nvSpPr>
+        <p:spPr>
+          <a:xfrm>
+            <a:off x="5751576" y="3277210"/>
+            <a:ext cx="292608" cy="292608"/>
+          </a:xfrm>
+          <a:prstGeom prst="rect">
+            <a:avLst/>
+          </a:prstGeom>
+          <a:noFill/>
+          <a:ln/>
+        </p:spPr>
+        <p:txBody>
+          <a:bodyPr wrap="square" lIns="0" tIns="0" rIns="0" bIns="0" rtlCol="0" anchor="ctr"/>
+          <a:lstStyle/>
+          <a:p>
+            <a:pPr algn="ctr" indent="0" marL="0">
+              <a:buNone/>
+            </a:pPr>
+            <a:r>
+              <a:rPr lang="en-US" sz="1300" b="1" dirty="0">
+                <a:solidFill>
+                  <a:schemeClr val="bg1"/>
+                </a:solidFill>
+              </a:rPr>
+              <a:t>3</a:t>
+            </a:r>
+            <a:endParaRPr lang="en-US" sz="1300" dirty="0"/>
+          </a:p>
+        </p:txBody>
+      </p:sp>
+      <p:sp>
+        <p:nvSpPr>
+          <p:cNvPr id="21" name="So 4"/>
+          <p:cNvSpPr/>
+          <p:nvPr/>
+        </p:nvSpPr>
+        <p:spPr>
+          <a:xfrm>
+            <a:off x="5751576" y="3923386"/>
+            <a:ext cx="292608" cy="292608"/>
+          </a:xfrm>
+          <a:prstGeom prst="ellipse">
+            <a:avLst/>
+          </a:prstGeom>
+          <a:solidFill>
+            <a:schemeClr val="accent2"/>
+          </a:solidFill>
+          <a:ln/>
+        </p:spPr>
+      </p:sp>
+      <p:sp>
+        <p:nvSpPr>
+          <p:cNvPr id="22" name="Text 19"/>
+          <p:cNvSpPr txBox="1"/>
+          <p:nvPr/>
+        </p:nvSpPr>
+        <p:spPr>
+          <a:xfrm>
+            <a:off x="5751576" y="3923386"/>
+            <a:ext cx="292608" cy="292608"/>
+          </a:xfrm>
+          <a:prstGeom prst="rect">
+            <a:avLst/>
+          </a:prstGeom>
+          <a:noFill/>
+          <a:ln/>
+        </p:spPr>
+        <p:txBody>
+          <a:bodyPr wrap="square" lIns="0" tIns="0" rIns="0" bIns="0" rtlCol="0" anchor="ctr"/>
+          <a:lstStyle/>
+          <a:p>
+            <a:pPr algn="ctr" indent="0" marL="0">
+              <a:buNone/>
+            </a:pPr>
+            <a:r>
+              <a:rPr lang="en-US" sz="1300" b="1" dirty="0">
+                <a:solidFill>
+                  <a:schemeClr val="bg1"/>
+                </a:solidFill>
+              </a:rPr>
+              <a:t>4</a:t>
+            </a:r>
+            <a:endParaRPr lang="en-US" sz="1300" dirty="0"/>
+          </a:p>
+        </p:txBody>
+      </p:sp>
+      <p:sp>
+        <p:nvSpPr>
+          <p:cNvPr id="25" name="Slide Number Placeholder 0"/>
+          <p:cNvSpPr>
+            <a:spLocks noGrp="1"/>
+          </p:cNvSpPr>
+          <p:nvPr>
+            <p:ph type="sldNum" sz="quarter" idx="4294967295"/>
+          </p:nvPr>
+        </p:nvSpPr>
+        <p:spPr>
+          <a:xfrm>
+            <a:off x="8229600" y="4754880"/>
+            <a:ext cx="457200" cy="228600"/>
+          </a:xfrm>
+          <a:prstGeom prst="rect">
+            <a:avLst/>
+          </a:prstGeom>
+          <a:extLst>
+            <a:ext uri="{C572A759-6A51-4108-AA02-DFA0A04FC94B}">
+              <ma14:wrappingTextBoxFlag xmlns:ma14="http://schemas.microsoft.com/office/mac/drawingml/2011/main" val="0"/>
+            </a:ext>
+          </a:extLst>
+        </p:spPr>
+        <p:txBody>
+          <a:bodyPr/>
+          <a:lstStyle>
+            <a:lvl1pPr>
+              <a:defRPr sz="1000">
+                <a:solidFill>
+                  <a:schemeClr val="accent5"/>
+                </a:solidFill>
+              </a:defRPr>
+            </a:lvl1pPr>
+          </a:lstStyle>
+          <a:p>
+            <a:pPr algn="r"/>
+            <a:fld id="{F7021451-1387-4CA6-816F-3879F97B5CBC}" type="slidenum">
+              <a:rPr b="0" lang="en-US"/>
+              <a:t>7</a:t>
+            </a:fld>
+            <a:endParaRPr lang="en-US"/>
+          </a:p>
+        </p:txBody>
+      </p:sp>
+    </p:spTree>
+  </p:cSld>
+  <p:clrMapOvr>
+    <a:masterClrMapping/>
+  </p:clrMapOvr>
+</p:sld>
+</file>
+
+<file path=ppt/slides/slide8.xml><?xml version="1.0" encoding="utf-8"?>
+<p:sld xmlns:a="http://schemas.openxmlformats.org/drawingml/2006/main" xmlns:r="http://schemas.openxmlformats.org/officeDocument/2006/relationships" xmlns:p="http://schemas.openxmlformats.org/presentationml/2006/main">
+  <p:cSld name="Slide 8">
+    <p:spTree>
+      <p:nvGrpSpPr>
+        <p:cNvPr id="1" name=""/>
+        <p:cNvGrpSpPr/>
+        <p:nvPr/>
+      </p:nvGrpSpPr>
+      <p:grpSpPr>
+        <a:xfrm>
+          <a:off x="0" y="0"/>
+          <a:ext cx="0" cy="0"/>
+          <a:chOff x="0" y="0"/>
+          <a:chExt cx="0" cy="0"/>
+        </a:xfrm>
+      </p:grpSpPr>
+      <p:sp>
+        <p:nvSpPr>
+          <p:cNvPr id="2" name="Text 1"/>
+          <p:cNvSpPr/>
+          <p:nvPr>
+            <p:ph idx="101" type="title" hasCustomPrompt="1"/>
+          </p:nvPr>
+        </p:nvSpPr>
+        <p:spPr>
+          <a:xfrm>
+            <a:off x="457200" y="274320"/>
+            <a:ext cx="8229600" cy="640080"/>
+          </a:xfrm>
+          <a:prstGeom prst="rect">
+            <a:avLst/>
+          </a:prstGeom>
+          <a:noFill/>
+          <a:ln/>
+        </p:spPr>
+        <p:txBody>
+          <a:bodyPr wrap="square" lIns="0" tIns="0" rIns="0" bIns="0" rtlCol="0" anchor="ctr"/>
+          <a:lstStyle/>
+          <a:p>
+            <a:pPr algn="l" indent="0" marL="0">
+              <a:buNone/>
+            </a:pPr>
+            <a:r>
+              <a:rPr lang="en-US" sz="2800" b="1" dirty="0">
+                <a:solidFill>
+                  <a:schemeClr val="tx2"/>
+                </a:solidFill>
+              </a:rPr>
+              <a:t>Bước 4 – Xem lại kết quả trên trang Lớp học</a:t>
+            </a:r>
+            <a:endParaRPr lang="en-US" sz="2800" dirty="0"/>
+          </a:p>
+        </p:txBody>
+      </p:sp>
+      <p:sp>
+        <p:nvSpPr>
+          <p:cNvPr id="3" name="Text 1"/>
+          <p:cNvSpPr txBox="1"/>
+          <p:nvPr/>
+        </p:nvSpPr>
+        <p:spPr>
+          <a:xfrm>
+            <a:off x="457200" y="1143000"/>
+            <a:ext cx="3566160" cy="320040"/>
+          </a:xfrm>
+          <a:prstGeom prst="rect">
+            <a:avLst/>
+          </a:prstGeom>
+          <a:noFill/>
+          <a:ln/>
+        </p:spPr>
+        <p:txBody>
+          <a:bodyPr wrap="square" lIns="0" tIns="0" rIns="0" bIns="0" rtlCol="0" anchor="ctr"/>
+          <a:lstStyle/>
+          <a:p>
+            <a:pPr indent="0" marL="0">
+              <a:buNone/>
+            </a:pPr>
+            <a:r>
+              <a:rPr lang="en-US" sz="1500" b="1" dirty="0">
+                <a:solidFill>
+                  <a:schemeClr val="accent3"/>
+                </a:solidFill>
+              </a:rPr>
+              <a:t>Trước</a:t>
+            </a:r>
+            <a:endParaRPr lang="en-US" sz="1500" dirty="0"/>
+          </a:p>
+        </p:txBody>
+      </p:sp>
+      <p:sp>
+        <p:nvSpPr>
+          <p:cNvPr id="4" name="Khung hv-buoi2-truoc"/>
+          <p:cNvSpPr/>
+          <p:nvPr/>
+        </p:nvSpPr>
+        <p:spPr>
+          <a:xfrm>
+            <a:off x="466344" y="1517904"/>
+            <a:ext cx="3547872" cy="1414272"/>
+          </a:xfrm>
+          <a:prstGeom prst="roundRect">
+            <a:avLst>
+              <a:gd name="adj" fmla="val 3879"/>
+            </a:avLst>
+          </a:prstGeom>
+          <a:solidFill>
+            <a:schemeClr val="bg1"/>
+          </a:solidFill>
+          <a:ln w="12700">
+            <a:solidFill>
+              <a:schemeClr val="accent6"/>
+            </a:solidFill>
+            <a:prstDash val="solid"/>
+          </a:ln>
+        </p:spPr>
+      </p:sp>
+      <p:pic>
+        <p:nvPicPr>
+          <p:cNvPr id="5" name="Anh hv-buoi2-truoc" descr="Buổi 2 hiện nhãn Vắng">    </p:cNvPr>
+          <p:cNvPicPr>
+            <a:picLocks noChangeAspect="1"/>
+          </p:cNvPicPr>
+          <p:nvPr/>
+        </p:nvPicPr>
+        <p:blipFill>
+          <a:blip r:embed="rId1"/>
+          <a:stretch>
+            <a:fillRect/>
+          </a:stretch>
+        </p:blipFill>
+        <p:spPr>
+          <a:xfrm>
+            <a:off x="502920" y="1554480"/>
+            <a:ext cx="3474720" cy="1341120"/>
+          </a:xfrm>
+          <a:prstGeom prst="rect">
+            <a:avLst/>
+          </a:prstGeom>
+        </p:spPr>
+      </p:pic>
+      <p:sp>
+        <p:nvSpPr>
+          <p:cNvPr id="6" name="Mui ten"/>
+          <p:cNvSpPr/>
+          <p:nvPr/>
+        </p:nvSpPr>
+        <p:spPr>
+          <a:xfrm>
+            <a:off x="4206240" y="2103120"/>
+            <a:ext cx="640080" cy="274320"/>
+          </a:xfrm>
+          <a:prstGeom prst="rightArrow">
+            <a:avLst/>
+          </a:prstGeom>
+          <a:solidFill>
+            <a:schemeClr val="accent6"/>
+          </a:solidFill>
+          <a:ln/>
+        </p:spPr>
+      </p:sp>
+      <p:sp>
+        <p:nvSpPr>
+          <p:cNvPr id="7" name="Text 4"/>
+          <p:cNvSpPr txBox="1"/>
+          <p:nvPr/>
+        </p:nvSpPr>
+        <p:spPr>
+          <a:xfrm>
+            <a:off x="5074920" y="1143000"/>
+            <a:ext cx="3611880" cy="320040"/>
+          </a:xfrm>
+          <a:prstGeom prst="rect">
+            <a:avLst/>
+          </a:prstGeom>
+          <a:noFill/>
+          <a:ln/>
+        </p:spPr>
+        <p:txBody>
+          <a:bodyPr wrap="square" lIns="0" tIns="0" rIns="0" bIns="0" rtlCol="0" anchor="ctr"/>
+          <a:lstStyle/>
+          <a:p>
+            <a:pPr indent="0" marL="0">
+              <a:buNone/>
+            </a:pPr>
+            <a:r>
+              <a:rPr lang="en-US" sz="1500" b="1" dirty="0">
+                <a:solidFill>
+                  <a:schemeClr val="accent1"/>
+                </a:solidFill>
+              </a:rPr>
+              <a:t>Sau khi người hỗ trợ bổ sung</a:t>
+            </a:r>
+            <a:endParaRPr lang="en-US" sz="1500" dirty="0"/>
+          </a:p>
+        </p:txBody>
+      </p:sp>
+      <p:sp>
+        <p:nvSpPr>
+          <p:cNvPr id="8" name="Khung hv-buoi2-sau"/>
+          <p:cNvSpPr/>
+          <p:nvPr/>
+        </p:nvSpPr>
+        <p:spPr>
+          <a:xfrm>
+            <a:off x="5084064" y="1517904"/>
+            <a:ext cx="3593592" cy="1266521"/>
+          </a:xfrm>
+          <a:prstGeom prst="roundRect">
+            <a:avLst>
+              <a:gd name="adj" fmla="val 4332"/>
+            </a:avLst>
+          </a:prstGeom>
+          <a:solidFill>
+            <a:schemeClr val="bg1"/>
+          </a:solidFill>
+          <a:ln w="12700">
+            <a:solidFill>
+              <a:schemeClr val="accent6"/>
+            </a:solidFill>
+            <a:prstDash val="solid"/>
+          </a:ln>
+        </p:spPr>
+      </p:sp>
+      <p:pic>
+        <p:nvPicPr>
+          <p:cNvPr id="9" name="Anh hv-buoi2-sau" descr="Buổi 2 hiện nhãn Có mặt">    </p:cNvPr>
+          <p:cNvPicPr>
+            <a:picLocks noChangeAspect="1"/>
+          </p:cNvPicPr>
+          <p:nvPr/>
+        </p:nvPicPr>
+        <p:blipFill>
+          <a:blip r:embed="rId2"/>
+          <a:stretch>
+            <a:fillRect/>
+          </a:stretch>
+        </p:blipFill>
+        <p:spPr>
+          <a:xfrm>
+            <a:off x="5120640" y="1554480"/>
+            <a:ext cx="3520440" cy="1193369"/>
+          </a:xfrm>
+          <a:prstGeom prst="rect">
+            <a:avLst/>
+          </a:prstGeom>
+        </p:spPr>
+      </p:pic>
+      <p:sp>
+        <p:nvSpPr>
+          <p:cNvPr id="10" name="Luu y thoi gian"/>
+          <p:cNvSpPr/>
+          <p:nvPr/>
+        </p:nvSpPr>
+        <p:spPr>
+          <a:xfrm>
+            <a:off x="457200" y="3291840"/>
+            <a:ext cx="8229600" cy="1188720"/>
+          </a:xfrm>
+          <a:prstGeom prst="roundRect">
+            <a:avLst>
+              <a:gd name="adj" fmla="val 6154"/>
+            </a:avLst>
+          </a:prstGeom>
+          <a:solidFill>
+            <a:schemeClr val="bg2"/>
+          </a:solidFill>
+          <a:ln/>
+        </p:spPr>
+      </p:sp>
+      <p:sp>
+        <p:nvSpPr>
+          <p:cNvPr id="11" name="Text 7"/>
+          <p:cNvSpPr txBox="1"/>
+          <p:nvPr/>
+        </p:nvSpPr>
+        <p:spPr>
+          <a:xfrm>
+            <a:off x="640080" y="3291840"/>
+            <a:ext cx="7863840" cy="1188720"/>
+          </a:xfrm>
+          <a:prstGeom prst="rect">
+            <a:avLst/>
+          </a:prstGeom>
+          <a:noFill/>
+          <a:ln/>
+        </p:spPr>
+        <p:txBody>
+          <a:bodyPr wrap="square" lIns="0" tIns="0" rIns="0" bIns="0" rtlCol="0" anchor="ctr"/>
+          <a:lstStyle/>
+          <a:p>
+            <a:pPr indent="0" marL="0">
+              <a:spcAft>
+                <a:spcPts val="600"/>
+              </a:spcAft>
+              <a:buNone/>
+            </a:pPr>
+            <a:r>
+              <a:rPr lang="en-US" sz="1400" b="1" dirty="0">
+                <a:solidFill>
+                  <a:schemeClr val="tx1"/>
+                </a:solidFill>
+              </a:rPr>
+              <a:t>Không giới hạn thời gian đề nghị, </a:t>
+            </a:r>
+            <a:pPr indent="0" marL="0">
+              <a:spcAft>
+                <a:spcPts val="600"/>
+              </a:spcAft>
+              <a:buNone/>
+            </a:pPr>
+            <a:r>
+              <a:rPr lang="en-US" sz="1400" dirty="0">
+                <a:solidFill>
+                  <a:schemeClr val="tx1"/>
+                </a:solidFill>
+              </a:rPr>
+              <a:t>nhưng nên gửi sớm (trong tuần học) để dễ đối chiếu với giảng viên.</a:t>
+            </a:r>
+            <a:endParaRPr lang="en-US" sz="1400" dirty="0"/>
+          </a:p>
+          <a:p>
+            <a:pPr indent="0" marL="0">
+              <a:spcAft>
+                <a:spcPts val="600"/>
+              </a:spcAft>
+              <a:buNone/>
+            </a:pPr>
+            <a:r>
+              <a:rPr lang="en-US" sz="1400" b="1" dirty="0">
+                <a:solidFill>
+                  <a:schemeClr val="tx1"/>
+                </a:solidFill>
+              </a:rPr>
+              <a:t>Chưa thấy nhãn đổi sau vài ngày làm việc? </a:t>
+            </a:r>
+            <a:pPr indent="0" marL="0">
+              <a:spcAft>
+                <a:spcPts val="600"/>
+              </a:spcAft>
+              <a:buNone/>
+            </a:pPr>
+            <a:r>
+              <a:rPr lang="en-US" sz="1400" dirty="0">
+                <a:solidFill>
+                  <a:schemeClr val="tx1"/>
+                </a:solidFill>
+              </a:rPr>
+              <a:t>Nhắn lại người hỗ trợ, nêu ngày đã gửi đề nghị.</a:t>
+            </a:r>
+            <a:endParaRPr lang="en-US" sz="1400" dirty="0"/>
+          </a:p>
+        </p:txBody>
+      </p:sp>
+      <p:sp>
+        <p:nvSpPr>
+          <p:cNvPr id="25" name="Slide Number Placeholder 0"/>
+          <p:cNvSpPr>
+            <a:spLocks noGrp="1"/>
+          </p:cNvSpPr>
+          <p:nvPr>
+            <p:ph type="sldNum" sz="quarter" idx="4294967295"/>
+          </p:nvPr>
+        </p:nvSpPr>
+        <p:spPr>
+          <a:xfrm>
+            <a:off x="8229600" y="4754880"/>
+            <a:ext cx="457200" cy="228600"/>
+          </a:xfrm>
+          <a:prstGeom prst="rect">
+            <a:avLst/>
+          </a:prstGeom>
+          <a:extLst>
+            <a:ext uri="{C572A759-6A51-4108-AA02-DFA0A04FC94B}">
+              <ma14:wrappingTextBoxFlag xmlns:ma14="http://schemas.microsoft.com/office/mac/drawingml/2011/main" val="0"/>
+            </a:ext>
+          </a:extLst>
+        </p:spPr>
+        <p:txBody>
+          <a:bodyPr/>
+          <a:lstStyle>
+            <a:lvl1pPr>
+              <a:defRPr sz="1000">
+                <a:solidFill>
+                  <a:schemeClr val="accent5"/>
+                </a:solidFill>
+              </a:defRPr>
+            </a:lvl1pPr>
+          </a:lstStyle>
+          <a:p>
+            <a:pPr algn="r"/>
+            <a:fld id="{F7021451-1387-4CA6-816F-3879F97B5CBC}" type="slidenum">
+              <a:rPr b="0" lang="en-US"/>
+              <a:t>8</a:t>
+            </a:fld>
+            <a:endParaRPr lang="en-US"/>
+          </a:p>
+        </p:txBody>
+      </p:sp>
+    </p:spTree>
+  </p:cSld>
+  <p:clrMapOvr>
+    <a:masterClrMapping/>
+  </p:clrMapOvr>
+</p:sld>
+</file>
+
+<file path=ppt/slides/slide9.xml><?xml version="1.0" encoding="utf-8"?>
+<p:sld xmlns:a="http://schemas.openxmlformats.org/drawingml/2006/main" xmlns:r="http://schemas.openxmlformats.org/officeDocument/2006/relationships" xmlns:p="http://schemas.openxmlformats.org/presentationml/2006/main">
+  <p:cSld name="Slide 9">
     <p:spTree>
       <p:nvGrpSpPr>
         <p:cNvPr id="1" name=""/>

--- a/docs/huong-dan-diem-danh-bo-sung-hoc-vien.pptx
+++ b/docs/huong-dan-diem-danh-bo-sung-hoc-vien.pptx
@@ -14,9 +14,10 @@
     <p:sldId id="262" r:id="rId8"/>
     <p:sldId id="263" r:id="rId9"/>
     <p:sldId id="264" r:id="rId10"/>
+    <p:sldId id="265" r:id="rId11"/>
   </p:sldIdLst>
   <p:notesMasterIdLst>
-    <p:notesMasterId r:id="rId11"/>
+    <p:notesMasterId r:id="rId12"/>
   </p:notesMasterIdLst>
   <p:sldSz cx="9144000" cy="5143500"/>
   <p:notesSz cx="5143500" cy="9144000"/>
@@ -115,29 +116,30 @@
   <p:extLst>
     <p:ext uri="{521415D9-36F7-43E2-AB2F-B90AF26B5E84}">
       <p14:sectionLst xmlns:p14="http://schemas.microsoft.com/office/powerpoint/2010/main">
-        <p14:section name="Mở đầu" id="{655928b9-579a-6a03-3cfb-96287cff8bbf}">
+        <p14:section name="Mở đầu" id="{1b8f0df9-e87b-4633-4b5f-6cde57ca72b3}">
           <p14:sldIdLst>
             <p14:sldId id="256"/>
           </p14:sldIdLst>
         </p14:section>
-        <p14:section name="Kiểm tra" id="{05e6acf1-97f6-a52a-1432-22e24c61f39d}">
+        <p14:section name="Kiểm tra" id="{8edee8df-8700-e570-a52d-a24d218ac17a}">
           <p14:sldIdLst>
             <p14:sldId id="257"/>
             <p14:sldId id="258"/>
+            <p14:sldId id="259"/>
           </p14:sldIdLst>
         </p14:section>
-        <p14:section name="Gửi minh chứng" id="{b846cd29-05b0-4941-620c-b285ee32f0cc}">
+        <p14:section name="Gửi minh chứng" id="{0f1b20cf-e6ea-8c34-c045-228c310ae3e8}">
           <p14:sldIdLst>
-            <p14:sldId id="259"/>
             <p14:sldId id="260"/>
             <p14:sldId id="261"/>
             <p14:sldId id="262"/>
+            <p14:sldId id="263"/>
           </p14:sldIdLst>
         </p14:section>
-        <p14:section name="Kết quả" id="{9fcd1b88-f1c6-456d-6484-9cc8e26eb97f}">
+        <p14:section name="Kết quả" id="{cb1392cd-da15-9a2d-80e7-430004f7d72c}">
           <p14:sldIdLst>
-            <p14:sldId id="263"/>
             <p14:sldId id="264"/>
+            <p14:sldId id="265"/>
           </p14:sldIdLst>
         </p14:section>
       </p14:sectionLst>
@@ -544,7 +546,7 @@
           <a:p>
             <a:r>
               <a:rPr lang="en-US" dirty="0"/>
-              <a:t>4 bước: kiểm tra trạng thái, chuẩn bị minh chứng, gửi cho người hỗ trợ (Zalo hoặc mục Hỗ trợ kèm link Google Drive), xem lại kết quả. Ảnh minh họa dùng dữ liệu giả.</a:t>
+              <a:t>4 bước: kiểm tra trạng thái, chuẩn bị minh chứng, gửi cho người hỗ trợ (Zalo hoặc mục Hỗ trợ kèm link Google Drive), xem lại kết quả. Ảnh minh họa dùng dữ liệu giả; giao diện máy tính và điện thoại đặt song song.</a:t>
             </a:r>
             <a:endParaRPr lang="en-US" dirty="0"/>
           </a:p>
@@ -568,6 +570,94 @@
             <a:fld id="{F7021451-1387-4CA6-816F-3879F97B5CBC}" type="slidenum">
               <a:rPr lang="en-US"/>
               <a:t>1</a:t>
+            </a:fld>
+            <a:endParaRPr lang="en-US"/>
+          </a:p>
+        </p:txBody>
+      </p:sp>
+    </p:spTree>
+    <p:extLst>
+      <p:ext uri="{BB962C8B-B14F-4D97-AF65-F5344CB8AC3E}">
+        <p14:creationId xmlns:p14="http://schemas.microsoft.com/office/powerpoint/2010/main" val="1024086991"/>
+      </p:ext>
+    </p:extLst>
+  </p:cSld>
+  <p:clrMapOvr>
+    <a:masterClrMapping/>
+  </p:clrMapOvr>
+</p:notes>
+</file>
+
+<file path=ppt/notesSlides/notesSlide10.xml><?xml version="1.0" encoding="utf-8"?>
+<p:notes xmlns:a="http://schemas.openxmlformats.org/drawingml/2006/main" xmlns:r="http://schemas.openxmlformats.org/officeDocument/2006/relationships" xmlns:p="http://schemas.openxmlformats.org/presentationml/2006/main">
+  <p:cSld>
+    <p:spTree>
+      <p:nvGrpSpPr>
+        <p:cNvPr id="1" name=""/>
+        <p:cNvGrpSpPr/>
+        <p:nvPr/>
+      </p:nvGrpSpPr>
+      <p:grpSpPr>
+        <a:xfrm>
+          <a:off x="0" y="0"/>
+          <a:ext cx="0" cy="0"/>
+          <a:chOff x="0" y="0"/>
+          <a:chExt cx="0" cy="0"/>
+        </a:xfrm>
+      </p:grpSpPr>
+      <p:sp>
+        <p:nvSpPr>
+          <p:cNvPr id="2" name="Slide Image Placeholder 1"/>
+          <p:cNvSpPr>
+            <a:spLocks noGrp="1" noRot="1" noChangeAspect="1"/>
+          </p:cNvSpPr>
+          <p:nvPr>
+            <p:ph type="sldImg"/>
+          </p:nvPr>
+        </p:nvSpPr>
+        <p:spPr/>
+      </p:sp>
+      <p:sp>
+        <p:nvSpPr>
+          <p:cNvPr id="3" name="Notes Placeholder 2"/>
+          <p:cNvSpPr>
+            <a:spLocks noGrp="1"/>
+          </p:cNvSpPr>
+          <p:nvPr>
+            <p:ph type="body" idx="1"/>
+          </p:nvPr>
+        </p:nvSpPr>
+        <p:spPr/>
+        <p:txBody>
+          <a:bodyPr/>
+          <a:lstStyle/>
+          <a:p>
+            <a:r>
+              <a:rPr lang="en-US" dirty="0"/>
+              <a:t/>
+            </a:r>
+            <a:endParaRPr lang="en-US" dirty="0"/>
+          </a:p>
+        </p:txBody>
+      </p:sp>
+      <p:sp>
+        <p:nvSpPr>
+          <p:cNvPr id="4" name="Slide Number Placeholder 3"/>
+          <p:cNvSpPr>
+            <a:spLocks noGrp="1"/>
+          </p:cNvSpPr>
+          <p:nvPr>
+            <p:ph type="sldNum" sz="quarter" idx="10"/>
+          </p:nvPr>
+        </p:nvSpPr>
+        <p:spPr/>
+        <p:txBody>
+          <a:bodyPr/>
+          <a:lstStyle/>
+          <a:p>
+            <a:fld id="{F7021451-1387-4CA6-816F-3879F97B5CBC}" type="slidenum">
+              <a:rPr lang="en-US"/>
+              <a:t>10</a:t>
             </a:fld>
             <a:endParaRPr lang="en-US"/>
           </a:p>
@@ -1537,8 +1627,8 @@
         </p:nvSpPr>
         <p:spPr>
           <a:xfrm>
-            <a:off x="457200" y="4754880"/>
-            <a:ext cx="5486400" cy="228600"/>
+            <a:off x="457200" y="4800600"/>
+            <a:ext cx="5486400" cy="201168"/>
           </a:xfrm>
           <a:prstGeom prst="rect">
             <a:avLst/>
@@ -1575,8 +1665,8 @@
         </p:nvSpPr>
         <p:spPr>
           <a:xfrm>
-            <a:off x="457200" y="274320"/>
-            <a:ext cx="8229600" cy="640080"/>
+            <a:off x="457200" y="228600"/>
+            <a:ext cx="8229600" cy="594360"/>
           </a:xfrm>
           <a:prstGeom prst="rect">
             <a:avLst/>
@@ -1616,8 +1706,8 @@
         </p:nvSpPr>
         <p:spPr>
           <a:xfrm>
-            <a:off x="8229600" y="4754880"/>
-            <a:ext cx="457200" cy="228600"/>
+            <a:off x="8229600" y="4800600"/>
+            <a:ext cx="457200" cy="201168"/>
           </a:xfrm>
           <a:prstGeom prst="rect">
             <a:avLst/>
@@ -1793,8 +1883,8 @@
         </p:nvSpPr>
         <p:spPr>
           <a:xfrm>
-            <a:off x="8229600" y="4754880"/>
-            <a:ext cx="457200" cy="228600"/>
+            <a:off x="8229600" y="4800600"/>
+            <a:ext cx="457200" cy="201168"/>
           </a:xfrm>
           <a:prstGeom prst="rect">
             <a:avLst/>
@@ -2402,6 +2492,581 @@
 </p:sld>
 </file>
 
+<file path=ppt/slides/slide10.xml><?xml version="1.0" encoding="utf-8"?>
+<p:sld xmlns:a="http://schemas.openxmlformats.org/drawingml/2006/main" xmlns:r="http://schemas.openxmlformats.org/officeDocument/2006/relationships" xmlns:p="http://schemas.openxmlformats.org/presentationml/2006/main">
+  <p:cSld name="Slide 10">
+    <p:spTree>
+      <p:nvGrpSpPr>
+        <p:cNvPr id="1" name=""/>
+        <p:cNvGrpSpPr/>
+        <p:nvPr/>
+      </p:nvGrpSpPr>
+      <p:grpSpPr>
+        <a:xfrm>
+          <a:off x="0" y="0"/>
+          <a:ext cx="0" cy="0"/>
+          <a:chOff x="0" y="0"/>
+          <a:chExt cx="0" cy="0"/>
+        </a:xfrm>
+      </p:grpSpPr>
+      <p:sp>
+        <p:nvSpPr>
+          <p:cNvPr id="2" name="Text 1"/>
+          <p:cNvSpPr/>
+          <p:nvPr>
+            <p:ph idx="101" type="title" hasCustomPrompt="1"/>
+          </p:nvPr>
+        </p:nvSpPr>
+        <p:spPr>
+          <a:xfrm>
+            <a:off x="457200" y="274320"/>
+            <a:ext cx="8229600" cy="640080"/>
+          </a:xfrm>
+          <a:prstGeom prst="rect">
+            <a:avLst/>
+          </a:prstGeom>
+          <a:noFill/>
+          <a:ln/>
+        </p:spPr>
+        <p:txBody>
+          <a:bodyPr wrap="square" lIns="0" tIns="0" rIns="0" bIns="0" rtlCol="0" anchor="ctr"/>
+          <a:lstStyle/>
+          <a:p>
+            <a:pPr algn="l" indent="0" marL="0">
+              <a:buNone/>
+            </a:pPr>
+            <a:r>
+              <a:rPr lang="en-US" sz="2800" b="1" dirty="0">
+                <a:solidFill>
+                  <a:schemeClr val="bg1"/>
+                </a:solidFill>
+              </a:rPr>
+              <a:t>Để không phải bổ sung lần sau</a:t>
+            </a:r>
+            <a:endParaRPr lang="en-US" sz="2800" dirty="0"/>
+          </a:p>
+        </p:txBody>
+      </p:sp>
+      <p:sp>
+        <p:nvSpPr>
+          <p:cNvPr id="3" name="So 1"/>
+          <p:cNvSpPr/>
+          <p:nvPr/>
+        </p:nvSpPr>
+        <p:spPr>
+          <a:xfrm>
+            <a:off x="457200" y="1188720"/>
+            <a:ext cx="384048" cy="384048"/>
+          </a:xfrm>
+          <a:prstGeom prst="ellipse">
+            <a:avLst/>
+          </a:prstGeom>
+          <a:solidFill>
+            <a:schemeClr val="accent6"/>
+          </a:solidFill>
+          <a:ln/>
+        </p:spPr>
+      </p:sp>
+      <p:sp>
+        <p:nvSpPr>
+          <p:cNvPr id="4" name="Text 2"/>
+          <p:cNvSpPr txBox="1"/>
+          <p:nvPr/>
+        </p:nvSpPr>
+        <p:spPr>
+          <a:xfrm>
+            <a:off x="457200" y="1188720"/>
+            <a:ext cx="384048" cy="384048"/>
+          </a:xfrm>
+          <a:prstGeom prst="rect">
+            <a:avLst/>
+          </a:prstGeom>
+          <a:noFill/>
+          <a:ln/>
+        </p:spPr>
+        <p:txBody>
+          <a:bodyPr wrap="square" lIns="0" tIns="0" rIns="0" bIns="0" rtlCol="0" anchor="ctr"/>
+          <a:lstStyle/>
+          <a:p>
+            <a:pPr algn="ctr" indent="0" marL="0">
+              <a:buNone/>
+            </a:pPr>
+            <a:r>
+              <a:rPr lang="en-US" sz="1600" b="1" dirty="0">
+                <a:solidFill>
+                  <a:schemeClr val="tx2"/>
+                </a:solidFill>
+              </a:rPr>
+              <a:t>1</a:t>
+            </a:r>
+            <a:endParaRPr lang="en-US" sz="1600" dirty="0"/>
+          </a:p>
+        </p:txBody>
+      </p:sp>
+      <p:sp>
+        <p:nvSpPr>
+          <p:cNvPr id="5" name="Text 3"/>
+          <p:cNvSpPr txBox="1"/>
+          <p:nvPr/>
+        </p:nvSpPr>
+        <p:spPr>
+          <a:xfrm>
+            <a:off x="1005840" y="1170432"/>
+            <a:ext cx="3383280" cy="411480"/>
+          </a:xfrm>
+          <a:prstGeom prst="rect">
+            <a:avLst/>
+          </a:prstGeom>
+          <a:noFill/>
+          <a:ln/>
+        </p:spPr>
+        <p:txBody>
+          <a:bodyPr wrap="square" lIns="0" tIns="0" rIns="0" bIns="0" rtlCol="0" anchor="t"/>
+          <a:lstStyle/>
+          <a:p>
+            <a:pPr indent="0" marL="0">
+              <a:buNone/>
+            </a:pPr>
+            <a:r>
+              <a:rPr lang="en-US" sz="1700" b="1" dirty="0">
+                <a:solidFill>
+                  <a:schemeClr val="bg1"/>
+                </a:solidFill>
+              </a:rPr>
+              <a:t>Bấm đúng nút, đúng buổi</a:t>
+            </a:r>
+            <a:endParaRPr lang="en-US" sz="1700" dirty="0"/>
+          </a:p>
+        </p:txBody>
+      </p:sp>
+      <p:sp>
+        <p:nvSpPr>
+          <p:cNvPr id="6" name="Text 4"/>
+          <p:cNvSpPr txBox="1"/>
+          <p:nvPr/>
+        </p:nvSpPr>
+        <p:spPr>
+          <a:xfrm>
+            <a:off x="1005840" y="1600200"/>
+            <a:ext cx="3383280" cy="1005840"/>
+          </a:xfrm>
+          <a:prstGeom prst="rect">
+            <a:avLst/>
+          </a:prstGeom>
+          <a:noFill/>
+          <a:ln/>
+        </p:spPr>
+        <p:txBody>
+          <a:bodyPr wrap="square" lIns="0" tIns="0" rIns="0" bIns="0" rtlCol="0" anchor="t"/>
+          <a:lstStyle/>
+          <a:p>
+            <a:pPr indent="0" marL="0">
+              <a:buNone/>
+            </a:pPr>
+            <a:r>
+              <a:rPr lang="en-US" sz="1400" dirty="0">
+                <a:solidFill>
+                  <a:schemeClr val="bg2"/>
+                </a:solidFill>
+              </a:rPr>
+              <a:t>Mỗi buổi Zoom bấm “Điểm danh &amp; vào Zoom” của chính buổi đó, trong khung giờ mở điểm danh</a:t>
+            </a:r>
+            <a:endParaRPr lang="en-US" sz="1400" dirty="0"/>
+          </a:p>
+        </p:txBody>
+      </p:sp>
+      <p:sp>
+        <p:nvSpPr>
+          <p:cNvPr id="7" name="So 2"/>
+          <p:cNvSpPr/>
+          <p:nvPr/>
+        </p:nvSpPr>
+        <p:spPr>
+          <a:xfrm>
+            <a:off x="4663440" y="1188720"/>
+            <a:ext cx="384048" cy="384048"/>
+          </a:xfrm>
+          <a:prstGeom prst="ellipse">
+            <a:avLst/>
+          </a:prstGeom>
+          <a:solidFill>
+            <a:schemeClr val="accent6"/>
+          </a:solidFill>
+          <a:ln/>
+        </p:spPr>
+      </p:sp>
+      <p:sp>
+        <p:nvSpPr>
+          <p:cNvPr id="8" name="Text 6"/>
+          <p:cNvSpPr txBox="1"/>
+          <p:nvPr/>
+        </p:nvSpPr>
+        <p:spPr>
+          <a:xfrm>
+            <a:off x="4663440" y="1188720"/>
+            <a:ext cx="384048" cy="384048"/>
+          </a:xfrm>
+          <a:prstGeom prst="rect">
+            <a:avLst/>
+          </a:prstGeom>
+          <a:noFill/>
+          <a:ln/>
+        </p:spPr>
+        <p:txBody>
+          <a:bodyPr wrap="square" lIns="0" tIns="0" rIns="0" bIns="0" rtlCol="0" anchor="ctr"/>
+          <a:lstStyle/>
+          <a:p>
+            <a:pPr algn="ctr" indent="0" marL="0">
+              <a:buNone/>
+            </a:pPr>
+            <a:r>
+              <a:rPr lang="en-US" sz="1600" b="1" dirty="0">
+                <a:solidFill>
+                  <a:schemeClr val="tx2"/>
+                </a:solidFill>
+              </a:rPr>
+              <a:t>2</a:t>
+            </a:r>
+            <a:endParaRPr lang="en-US" sz="1600" dirty="0"/>
+          </a:p>
+        </p:txBody>
+      </p:sp>
+      <p:sp>
+        <p:nvSpPr>
+          <p:cNvPr id="9" name="Text 7"/>
+          <p:cNvSpPr txBox="1"/>
+          <p:nvPr/>
+        </p:nvSpPr>
+        <p:spPr>
+          <a:xfrm>
+            <a:off x="5212080" y="1170432"/>
+            <a:ext cx="3383280" cy="411480"/>
+          </a:xfrm>
+          <a:prstGeom prst="rect">
+            <a:avLst/>
+          </a:prstGeom>
+          <a:noFill/>
+          <a:ln/>
+        </p:spPr>
+        <p:txBody>
+          <a:bodyPr wrap="square" lIns="0" tIns="0" rIns="0" bIns="0" rtlCol="0" anchor="t"/>
+          <a:lstStyle/>
+          <a:p>
+            <a:pPr indent="0" marL="0">
+              <a:buNone/>
+            </a:pPr>
+            <a:r>
+              <a:rPr lang="en-US" sz="1700" b="1" dirty="0">
+                <a:solidFill>
+                  <a:schemeClr val="bg1"/>
+                </a:solidFill>
+              </a:rPr>
+              <a:t>Không dùng link khác</a:t>
+            </a:r>
+            <a:endParaRPr lang="en-US" sz="1700" dirty="0"/>
+          </a:p>
+        </p:txBody>
+      </p:sp>
+      <p:sp>
+        <p:nvSpPr>
+          <p:cNvPr id="10" name="Text 8"/>
+          <p:cNvSpPr txBox="1"/>
+          <p:nvPr/>
+        </p:nvSpPr>
+        <p:spPr>
+          <a:xfrm>
+            <a:off x="5212080" y="1600200"/>
+            <a:ext cx="3383280" cy="1005840"/>
+          </a:xfrm>
+          <a:prstGeom prst="rect">
+            <a:avLst/>
+          </a:prstGeom>
+          <a:noFill/>
+          <a:ln/>
+        </p:spPr>
+        <p:txBody>
+          <a:bodyPr wrap="square" lIns="0" tIns="0" rIns="0" bIns="0" rtlCol="0" anchor="t"/>
+          <a:lstStyle/>
+          <a:p>
+            <a:pPr indent="0" marL="0">
+              <a:buNone/>
+            </a:pPr>
+            <a:r>
+              <a:rPr lang="en-US" sz="1400" dirty="0">
+                <a:solidFill>
+                  <a:schemeClr val="bg2"/>
+                </a:solidFill>
+              </a:rPr>
+              <a:t>Vào bằng link khác hoặc ở lại phòng từ buổi trước sẽ không được ghi nhận</a:t>
+            </a:r>
+            <a:endParaRPr lang="en-US" sz="1400" dirty="0"/>
+          </a:p>
+        </p:txBody>
+      </p:sp>
+      <p:sp>
+        <p:nvSpPr>
+          <p:cNvPr id="11" name="So 3"/>
+          <p:cNvSpPr/>
+          <p:nvPr/>
+        </p:nvSpPr>
+        <p:spPr>
+          <a:xfrm>
+            <a:off x="457200" y="2880360"/>
+            <a:ext cx="384048" cy="384048"/>
+          </a:xfrm>
+          <a:prstGeom prst="ellipse">
+            <a:avLst/>
+          </a:prstGeom>
+          <a:solidFill>
+            <a:schemeClr val="accent6"/>
+          </a:solidFill>
+          <a:ln/>
+        </p:spPr>
+      </p:sp>
+      <p:sp>
+        <p:nvSpPr>
+          <p:cNvPr id="12" name="Text 10"/>
+          <p:cNvSpPr txBox="1"/>
+          <p:nvPr/>
+        </p:nvSpPr>
+        <p:spPr>
+          <a:xfrm>
+            <a:off x="457200" y="2880360"/>
+            <a:ext cx="384048" cy="384048"/>
+          </a:xfrm>
+          <a:prstGeom prst="rect">
+            <a:avLst/>
+          </a:prstGeom>
+          <a:noFill/>
+          <a:ln/>
+        </p:spPr>
+        <p:txBody>
+          <a:bodyPr wrap="square" lIns="0" tIns="0" rIns="0" bIns="0" rtlCol="0" anchor="ctr"/>
+          <a:lstStyle/>
+          <a:p>
+            <a:pPr algn="ctr" indent="0" marL="0">
+              <a:buNone/>
+            </a:pPr>
+            <a:r>
+              <a:rPr lang="en-US" sz="1600" b="1" dirty="0">
+                <a:solidFill>
+                  <a:schemeClr val="tx2"/>
+                </a:solidFill>
+              </a:rPr>
+              <a:t>3</a:t>
+            </a:r>
+            <a:endParaRPr lang="en-US" sz="1600" dirty="0"/>
+          </a:p>
+        </p:txBody>
+      </p:sp>
+      <p:sp>
+        <p:nvSpPr>
+          <p:cNvPr id="13" name="Text 11"/>
+          <p:cNvSpPr txBox="1"/>
+          <p:nvPr/>
+        </p:nvSpPr>
+        <p:spPr>
+          <a:xfrm>
+            <a:off x="1005840" y="2862072"/>
+            <a:ext cx="3383280" cy="411480"/>
+          </a:xfrm>
+          <a:prstGeom prst="rect">
+            <a:avLst/>
+          </a:prstGeom>
+          <a:noFill/>
+          <a:ln/>
+        </p:spPr>
+        <p:txBody>
+          <a:bodyPr wrap="square" lIns="0" tIns="0" rIns="0" bIns="0" rtlCol="0" anchor="t"/>
+          <a:lstStyle/>
+          <a:p>
+            <a:pPr indent="0" marL="0">
+              <a:buNone/>
+            </a:pPr>
+            <a:r>
+              <a:rPr lang="en-US" sz="1700" b="1" dirty="0">
+                <a:solidFill>
+                  <a:schemeClr val="bg1"/>
+                </a:solidFill>
+              </a:rPr>
+              <a:t>Lớp trực tiếp</a:t>
+            </a:r>
+            <a:endParaRPr lang="en-US" sz="1700" dirty="0"/>
+          </a:p>
+        </p:txBody>
+      </p:sp>
+      <p:sp>
+        <p:nvSpPr>
+          <p:cNvPr id="14" name="Text 12"/>
+          <p:cNvSpPr txBox="1"/>
+          <p:nvPr/>
+        </p:nvSpPr>
+        <p:spPr>
+          <a:xfrm>
+            <a:off x="1005840" y="3291840"/>
+            <a:ext cx="3383280" cy="1005840"/>
+          </a:xfrm>
+          <a:prstGeom prst="rect">
+            <a:avLst/>
+          </a:prstGeom>
+          <a:noFill/>
+          <a:ln/>
+        </p:spPr>
+        <p:txBody>
+          <a:bodyPr wrap="square" lIns="0" tIns="0" rIns="0" bIns="0" rtlCol="0" anchor="t"/>
+          <a:lstStyle/>
+          <a:p>
+            <a:pPr indent="0" marL="0">
+              <a:buNone/>
+            </a:pPr>
+            <a:r>
+              <a:rPr lang="en-US" sz="1400" dirty="0">
+                <a:solidFill>
+                  <a:schemeClr val="bg2"/>
+                </a:solidFill>
+              </a:rPr>
+              <a:t>Ký tên đầy đủ vào danh sách khi đến lớp</a:t>
+            </a:r>
+            <a:endParaRPr lang="en-US" sz="1400" dirty="0"/>
+          </a:p>
+        </p:txBody>
+      </p:sp>
+      <p:sp>
+        <p:nvSpPr>
+          <p:cNvPr id="15" name="So 4"/>
+          <p:cNvSpPr/>
+          <p:nvPr/>
+        </p:nvSpPr>
+        <p:spPr>
+          <a:xfrm>
+            <a:off x="4663440" y="2880360"/>
+            <a:ext cx="384048" cy="384048"/>
+          </a:xfrm>
+          <a:prstGeom prst="ellipse">
+            <a:avLst/>
+          </a:prstGeom>
+          <a:solidFill>
+            <a:schemeClr val="accent6"/>
+          </a:solidFill>
+          <a:ln/>
+        </p:spPr>
+      </p:sp>
+      <p:sp>
+        <p:nvSpPr>
+          <p:cNvPr id="16" name="Text 14"/>
+          <p:cNvSpPr txBox="1"/>
+          <p:nvPr/>
+        </p:nvSpPr>
+        <p:spPr>
+          <a:xfrm>
+            <a:off x="4663440" y="2880360"/>
+            <a:ext cx="384048" cy="384048"/>
+          </a:xfrm>
+          <a:prstGeom prst="rect">
+            <a:avLst/>
+          </a:prstGeom>
+          <a:noFill/>
+          <a:ln/>
+        </p:spPr>
+        <p:txBody>
+          <a:bodyPr wrap="square" lIns="0" tIns="0" rIns="0" bIns="0" rtlCol="0" anchor="ctr"/>
+          <a:lstStyle/>
+          <a:p>
+            <a:pPr algn="ctr" indent="0" marL="0">
+              <a:buNone/>
+            </a:pPr>
+            <a:r>
+              <a:rPr lang="en-US" sz="1600" b="1" dirty="0">
+                <a:solidFill>
+                  <a:schemeClr val="tx2"/>
+                </a:solidFill>
+              </a:rPr>
+              <a:t>4</a:t>
+            </a:r>
+            <a:endParaRPr lang="en-US" sz="1600" dirty="0"/>
+          </a:p>
+        </p:txBody>
+      </p:sp>
+      <p:sp>
+        <p:nvSpPr>
+          <p:cNvPr id="17" name="Text 15"/>
+          <p:cNvSpPr txBox="1"/>
+          <p:nvPr/>
+        </p:nvSpPr>
+        <p:spPr>
+          <a:xfrm>
+            <a:off x="5212080" y="2862072"/>
+            <a:ext cx="3383280" cy="411480"/>
+          </a:xfrm>
+          <a:prstGeom prst="rect">
+            <a:avLst/>
+          </a:prstGeom>
+          <a:noFill/>
+          <a:ln/>
+        </p:spPr>
+        <p:txBody>
+          <a:bodyPr wrap="square" lIns="0" tIns="0" rIns="0" bIns="0" rtlCol="0" anchor="t"/>
+          <a:lstStyle/>
+          <a:p>
+            <a:pPr indent="0" marL="0">
+              <a:buNone/>
+            </a:pPr>
+            <a:r>
+              <a:rPr lang="en-US" sz="1700" b="1" dirty="0">
+                <a:solidFill>
+                  <a:schemeClr val="bg1"/>
+                </a:solidFill>
+              </a:rPr>
+              <a:t>Biết trước sẽ vắng?</a:t>
+            </a:r>
+            <a:endParaRPr lang="en-US" sz="1700" dirty="0"/>
+          </a:p>
+        </p:txBody>
+      </p:sp>
+      <p:sp>
+        <p:nvSpPr>
+          <p:cNvPr id="18" name="Text 16"/>
+          <p:cNvSpPr txBox="1"/>
+          <p:nvPr/>
+        </p:nvSpPr>
+        <p:spPr>
+          <a:xfrm>
+            <a:off x="5212080" y="3291840"/>
+            <a:ext cx="3383280" cy="1005840"/>
+          </a:xfrm>
+          <a:prstGeom prst="rect">
+            <a:avLst/>
+          </a:prstGeom>
+          <a:noFill/>
+          <a:ln/>
+        </p:spPr>
+        <p:txBody>
+          <a:bodyPr wrap="square" lIns="0" tIns="0" rIns="0" bIns="0" rtlCol="0" anchor="t"/>
+          <a:lstStyle/>
+          <a:p>
+            <a:pPr indent="0" marL="0">
+              <a:buNone/>
+            </a:pPr>
+            <a:r>
+              <a:rPr lang="en-US" sz="1400" dirty="0">
+                <a:solidFill>
+                  <a:schemeClr val="bg2"/>
+                </a:solidFill>
+              </a:rPr>
+              <a:t>Báo người hỗ trợ trước buổi học, hoặc đề nghị đổi buổi nếu khóa có mở</a:t>
+            </a:r>
+            <a:endParaRPr lang="en-US" sz="1400" dirty="0"/>
+          </a:p>
+        </p:txBody>
+      </p:sp>
+    </p:spTree>
+  </p:cSld>
+  <p:clrMapOvr>
+    <a:masterClrMapping/>
+  </p:clrMapOvr>
+</p:sld>
+</file>
+
 <file path=ppt/slides/slide2.xml><?xml version="1.0" encoding="utf-8"?>
 <p:sld xmlns:a="http://schemas.openxmlformats.org/drawingml/2006/main" xmlns:r="http://schemas.openxmlformats.org/officeDocument/2006/relationships" xmlns:p="http://schemas.openxmlformats.org/presentationml/2006/main">
   <p:cSld name="Slide 2">
@@ -2429,8 +3094,8 @@
         </p:nvSpPr>
         <p:spPr>
           <a:xfrm>
-            <a:off x="457200" y="274320"/>
-            <a:ext cx="8229600" cy="640080"/>
+            <a:off x="457200" y="228600"/>
+            <a:ext cx="8229600" cy="594360"/>
           </a:xfrm>
           <a:prstGeom prst="rect">
             <a:avLst/>
@@ -2459,763 +3124,33 @@
       </p:sp>
       <p:sp>
         <p:nvSpPr>
-          <p:cNvPr id="3" name="So 1"/>
+          <p:cNvPr id="3" name="Khung pc-hv-lop-hoc"/>
           <p:cNvSpPr/>
           <p:nvPr/>
         </p:nvSpPr>
         <p:spPr>
           <a:xfrm>
-            <a:off x="457200" y="1143000"/>
-            <a:ext cx="365760" cy="365760"/>
-          </a:xfrm>
-          <a:prstGeom prst="ellipse">
-            <a:avLst/>
-          </a:prstGeom>
-          <a:solidFill>
-            <a:schemeClr val="tx2"/>
-          </a:solidFill>
-          <a:ln/>
-        </p:spPr>
-      </p:sp>
-      <p:sp>
-        <p:nvSpPr>
-          <p:cNvPr id="4" name="Text 2"/>
-          <p:cNvSpPr txBox="1"/>
-          <p:nvPr/>
-        </p:nvSpPr>
-        <p:spPr>
-          <a:xfrm>
-            <a:off x="457200" y="1143000"/>
-            <a:ext cx="365760" cy="365760"/>
-          </a:xfrm>
-          <a:prstGeom prst="rect">
-            <a:avLst/>
-          </a:prstGeom>
-          <a:noFill/>
-          <a:ln/>
-        </p:spPr>
-        <p:txBody>
-          <a:bodyPr wrap="square" lIns="0" tIns="0" rIns="0" bIns="0" rtlCol="0" anchor="ctr"/>
-          <a:lstStyle/>
-          <a:p>
-            <a:pPr algn="ctr" indent="0" marL="0">
-              <a:buNone/>
-            </a:pPr>
-            <a:r>
-              <a:rPr lang="en-US" sz="1600" b="1" dirty="0">
-                <a:solidFill>
-                  <a:schemeClr val="bg1"/>
-                </a:solidFill>
-              </a:rPr>
-              <a:t>1</a:t>
-            </a:r>
-            <a:endParaRPr lang="en-US" sz="1600" dirty="0"/>
-          </a:p>
-        </p:txBody>
-      </p:sp>
-      <p:sp>
-        <p:nvSpPr>
-          <p:cNvPr id="5" name="Text 3"/>
-          <p:cNvSpPr txBox="1"/>
-          <p:nvPr/>
-        </p:nvSpPr>
-        <p:spPr>
-          <a:xfrm>
-            <a:off x="960120" y="1106424"/>
-            <a:ext cx="3520440" cy="475488"/>
-          </a:xfrm>
-          <a:prstGeom prst="rect">
-            <a:avLst/>
-          </a:prstGeom>
-          <a:noFill/>
-          <a:ln/>
-        </p:spPr>
-        <p:txBody>
-          <a:bodyPr wrap="square" lIns="0" tIns="0" rIns="0" bIns="0" rtlCol="0" anchor="t"/>
-          <a:lstStyle/>
-          <a:p>
-            <a:pPr indent="0" marL="0">
-              <a:buNone/>
-            </a:pPr>
-            <a:r>
-              <a:rPr lang="en-US" sz="1400" dirty="0">
-                <a:solidFill>
-                  <a:schemeClr val="tx1"/>
-                </a:solidFill>
-              </a:rPr>
-              <a:t>Bấm menu </a:t>
-            </a:r>
-            <a:pPr indent="0" marL="0">
-              <a:buNone/>
-            </a:pPr>
-            <a:r>
-              <a:rPr lang="en-US" sz="1400" b="1" dirty="0">
-                <a:solidFill>
-                  <a:schemeClr val="tx1"/>
-                </a:solidFill>
-              </a:rPr>
-              <a:t>☰</a:t>
-            </a:r>
-            <a:pPr indent="0" marL="0">
-              <a:buNone/>
-            </a:pPr>
-            <a:r>
-              <a:rPr lang="en-US" sz="1400" dirty="0">
-                <a:solidFill>
-                  <a:schemeClr val="tx1"/>
-                </a:solidFill>
-              </a:rPr>
-              <a:t> (góc phải trên) → </a:t>
-            </a:r>
-            <a:pPr indent="0" marL="0">
-              <a:buNone/>
-            </a:pPr>
-            <a:r>
-              <a:rPr lang="en-US" sz="1400" b="1" dirty="0">
-                <a:solidFill>
-                  <a:schemeClr val="tx1"/>
-                </a:solidFill>
-              </a:rPr>
-              <a:t>Lớp học</a:t>
-            </a:r>
-            <a:endParaRPr lang="en-US" sz="1400" dirty="0"/>
-          </a:p>
-        </p:txBody>
-      </p:sp>
-      <p:sp>
-        <p:nvSpPr>
-          <p:cNvPr id="6" name="So 2"/>
-          <p:cNvSpPr/>
-          <p:nvPr/>
-        </p:nvSpPr>
-        <p:spPr>
-          <a:xfrm>
-            <a:off x="457200" y="1673352"/>
-            <a:ext cx="365760" cy="365760"/>
-          </a:xfrm>
-          <a:prstGeom prst="ellipse">
-            <a:avLst/>
-          </a:prstGeom>
-          <a:solidFill>
-            <a:schemeClr val="tx2"/>
-          </a:solidFill>
-          <a:ln/>
-        </p:spPr>
-      </p:sp>
-      <p:sp>
-        <p:nvSpPr>
-          <p:cNvPr id="7" name="Text 5"/>
-          <p:cNvSpPr txBox="1"/>
-          <p:nvPr/>
-        </p:nvSpPr>
-        <p:spPr>
-          <a:xfrm>
-            <a:off x="457200" y="1673352"/>
-            <a:ext cx="365760" cy="365760"/>
-          </a:xfrm>
-          <a:prstGeom prst="rect">
-            <a:avLst/>
-          </a:prstGeom>
-          <a:noFill/>
-          <a:ln/>
-        </p:spPr>
-        <p:txBody>
-          <a:bodyPr wrap="square" lIns="0" tIns="0" rIns="0" bIns="0" rtlCol="0" anchor="ctr"/>
-          <a:lstStyle/>
-          <a:p>
-            <a:pPr algn="ctr" indent="0" marL="0">
-              <a:buNone/>
-            </a:pPr>
-            <a:r>
-              <a:rPr lang="en-US" sz="1600" b="1" dirty="0">
-                <a:solidFill>
-                  <a:schemeClr val="bg1"/>
-                </a:solidFill>
-              </a:rPr>
-              <a:t>2</a:t>
-            </a:r>
-            <a:endParaRPr lang="en-US" sz="1600" dirty="0"/>
-          </a:p>
-        </p:txBody>
-      </p:sp>
-      <p:sp>
-        <p:nvSpPr>
-          <p:cNvPr id="8" name="Text 6"/>
-          <p:cNvSpPr txBox="1"/>
-          <p:nvPr/>
-        </p:nvSpPr>
-        <p:spPr>
-          <a:xfrm>
-            <a:off x="960120" y="1636776"/>
-            <a:ext cx="3520440" cy="475488"/>
-          </a:xfrm>
-          <a:prstGeom prst="rect">
-            <a:avLst/>
-          </a:prstGeom>
-          <a:noFill/>
-          <a:ln/>
-        </p:spPr>
-        <p:txBody>
-          <a:bodyPr wrap="square" lIns="0" tIns="0" rIns="0" bIns="0" rtlCol="0" anchor="t"/>
-          <a:lstStyle/>
-          <a:p>
-            <a:pPr indent="0" marL="0">
-              <a:buNone/>
-            </a:pPr>
-            <a:r>
-              <a:rPr lang="en-US" sz="1400" dirty="0">
-                <a:solidFill>
-                  <a:schemeClr val="tx1"/>
-                </a:solidFill>
-              </a:rPr>
-              <a:t>Cuộn tới </a:t>
-            </a:r>
-            <a:pPr indent="0" marL="0">
-              <a:buNone/>
-            </a:pPr>
-            <a:r>
-              <a:rPr lang="en-US" sz="1400" b="1" dirty="0">
-                <a:solidFill>
-                  <a:schemeClr val="tx1"/>
-                </a:solidFill>
-              </a:rPr>
-              <a:t>giai đoạn đang học</a:t>
-            </a:r>
-            <a:endParaRPr lang="en-US" sz="1400" dirty="0"/>
-          </a:p>
-        </p:txBody>
-      </p:sp>
-      <p:sp>
-        <p:nvSpPr>
-          <p:cNvPr id="9" name="So 3"/>
-          <p:cNvSpPr/>
-          <p:nvPr/>
-        </p:nvSpPr>
-        <p:spPr>
-          <a:xfrm>
-            <a:off x="457200" y="2203704"/>
-            <a:ext cx="365760" cy="365760"/>
-          </a:xfrm>
-          <a:prstGeom prst="ellipse">
-            <a:avLst/>
-          </a:prstGeom>
-          <a:solidFill>
-            <a:schemeClr val="tx2"/>
-          </a:solidFill>
-          <a:ln/>
-        </p:spPr>
-      </p:sp>
-      <p:sp>
-        <p:nvSpPr>
-          <p:cNvPr id="10" name="Text 8"/>
-          <p:cNvSpPr txBox="1"/>
-          <p:nvPr/>
-        </p:nvSpPr>
-        <p:spPr>
-          <a:xfrm>
-            <a:off x="457200" y="2203704"/>
-            <a:ext cx="365760" cy="365760"/>
-          </a:xfrm>
-          <a:prstGeom prst="rect">
-            <a:avLst/>
-          </a:prstGeom>
-          <a:noFill/>
-          <a:ln/>
-        </p:spPr>
-        <p:txBody>
-          <a:bodyPr wrap="square" lIns="0" tIns="0" rIns="0" bIns="0" rtlCol="0" anchor="ctr"/>
-          <a:lstStyle/>
-          <a:p>
-            <a:pPr algn="ctr" indent="0" marL="0">
-              <a:buNone/>
-            </a:pPr>
-            <a:r>
-              <a:rPr lang="en-US" sz="1600" b="1" dirty="0">
-                <a:solidFill>
-                  <a:schemeClr val="bg1"/>
-                </a:solidFill>
-              </a:rPr>
-              <a:t>3</a:t>
-            </a:r>
-            <a:endParaRPr lang="en-US" sz="1600" dirty="0"/>
-          </a:p>
-        </p:txBody>
-      </p:sp>
-      <p:sp>
-        <p:nvSpPr>
-          <p:cNvPr id="11" name="Text 9"/>
-          <p:cNvSpPr txBox="1"/>
-          <p:nvPr/>
-        </p:nvSpPr>
-        <p:spPr>
-          <a:xfrm>
-            <a:off x="960120" y="2167128"/>
-            <a:ext cx="3520440" cy="475488"/>
-          </a:xfrm>
-          <a:prstGeom prst="rect">
-            <a:avLst/>
-          </a:prstGeom>
-          <a:noFill/>
-          <a:ln/>
-        </p:spPr>
-        <p:txBody>
-          <a:bodyPr wrap="square" lIns="0" tIns="0" rIns="0" bIns="0" rtlCol="0" anchor="t"/>
-          <a:lstStyle/>
-          <a:p>
-            <a:pPr indent="0" marL="0">
-              <a:buNone/>
-            </a:pPr>
-            <a:r>
-              <a:rPr lang="en-US" sz="1400" dirty="0">
-                <a:solidFill>
-                  <a:schemeClr val="tx1"/>
-                </a:solidFill>
-              </a:rPr>
-              <a:t>Xem </a:t>
-            </a:r>
-            <a:pPr indent="0" marL="0">
-              <a:buNone/>
-            </a:pPr>
-            <a:r>
-              <a:rPr lang="en-US" sz="1400" b="1" dirty="0">
-                <a:solidFill>
-                  <a:schemeClr val="tx1"/>
-                </a:solidFill>
-              </a:rPr>
-              <a:t>nhãn cạnh số buổi</a:t>
-            </a:r>
-            <a:endParaRPr lang="en-US" sz="1400" dirty="0"/>
-          </a:p>
-        </p:txBody>
-      </p:sp>
-      <p:sp>
-        <p:nvSpPr>
-          <p:cNvPr id="12" name="Nhan Có mặt"/>
-          <p:cNvSpPr/>
-          <p:nvPr/>
-        </p:nvSpPr>
-        <p:spPr>
-          <a:xfrm>
-            <a:off x="457200" y="2880360"/>
-            <a:ext cx="1234440" cy="292608"/>
+            <a:off x="1428665" y="1184148"/>
+            <a:ext cx="4357025" cy="2770632"/>
           </a:xfrm>
           <a:prstGeom prst="roundRect">
             <a:avLst>
-              <a:gd name="adj" fmla="val 50000"/>
+              <a:gd name="adj" fmla="val 1320"/>
             </a:avLst>
           </a:prstGeom>
           <a:solidFill>
-            <a:schemeClr val="accent1">
-              <a:alpha val="22000"/>
-            </a:schemeClr>
+            <a:schemeClr val="bg1"/>
           </a:solidFill>
           <a:ln w="12700">
             <a:solidFill>
-              <a:schemeClr val="accent1"/>
+              <a:schemeClr val="accent6"/>
             </a:solidFill>
             <a:prstDash val="solid"/>
           </a:ln>
-        </p:spPr>
-      </p:sp>
-      <p:sp>
-        <p:nvSpPr>
-          <p:cNvPr id="13" name="Text 11"/>
-          <p:cNvSpPr txBox="1"/>
-          <p:nvPr/>
-        </p:nvSpPr>
-        <p:spPr>
-          <a:xfrm>
-            <a:off x="457200" y="2880360"/>
-            <a:ext cx="1234440" cy="292608"/>
-          </a:xfrm>
-          <a:prstGeom prst="rect">
-            <a:avLst/>
-          </a:prstGeom>
-          <a:noFill/>
-          <a:ln/>
-        </p:spPr>
-        <p:txBody>
-          <a:bodyPr wrap="square" lIns="0" tIns="0" rIns="0" bIns="0" rtlCol="0" anchor="ctr"/>
-          <a:lstStyle/>
-          <a:p>
-            <a:pPr algn="ctr" indent="0" marL="0">
-              <a:buNone/>
-            </a:pPr>
-            <a:r>
-              <a:rPr lang="en-US" sz="1200" b="1" dirty="0">
-                <a:solidFill>
-                  <a:schemeClr val="accent1"/>
-                </a:solidFill>
-              </a:rPr>
-              <a:t>Có mặt</a:t>
-            </a:r>
-            <a:endParaRPr lang="en-US" sz="1200" dirty="0"/>
-          </a:p>
-        </p:txBody>
-      </p:sp>
-      <p:sp>
-        <p:nvSpPr>
-          <p:cNvPr id="14" name="Text 12"/>
-          <p:cNvSpPr txBox="1"/>
-          <p:nvPr/>
-        </p:nvSpPr>
-        <p:spPr>
-          <a:xfrm>
-            <a:off x="1828800" y="2843784"/>
-            <a:ext cx="2651760" cy="365760"/>
-          </a:xfrm>
-          <a:prstGeom prst="rect">
-            <a:avLst/>
-          </a:prstGeom>
-          <a:noFill/>
-          <a:ln/>
-        </p:spPr>
-        <p:txBody>
-          <a:bodyPr wrap="square" lIns="0" tIns="0" rIns="0" bIns="0" rtlCol="0" anchor="ctr"/>
-          <a:lstStyle/>
-          <a:p>
-            <a:pPr indent="0" marL="0">
-              <a:buNone/>
-            </a:pPr>
-            <a:r>
-              <a:rPr lang="en-US" sz="1300" dirty="0">
-                <a:solidFill>
-                  <a:schemeClr val="tx1"/>
-                </a:solidFill>
-              </a:rPr>
-              <a:t>Đã ghi nhận</a:t>
-            </a:r>
-            <a:endParaRPr lang="en-US" sz="1300" dirty="0"/>
-          </a:p>
-        </p:txBody>
-      </p:sp>
-      <p:sp>
-        <p:nvSpPr>
-          <p:cNvPr id="15" name="Nhan Vắng"/>
-          <p:cNvSpPr/>
-          <p:nvPr/>
-        </p:nvSpPr>
-        <p:spPr>
-          <a:xfrm>
-            <a:off x="457200" y="3291840"/>
-            <a:ext cx="1234440" cy="292608"/>
-          </a:xfrm>
-          <a:prstGeom prst="roundRect">
-            <a:avLst>
-              <a:gd name="adj" fmla="val 50000"/>
-            </a:avLst>
-          </a:prstGeom>
-          <a:solidFill>
-            <a:schemeClr val="accent3">
-              <a:alpha val="22000"/>
-            </a:schemeClr>
-          </a:solidFill>
-          <a:ln w="12700">
-            <a:solidFill>
-              <a:schemeClr val="accent3"/>
-            </a:solidFill>
-            <a:prstDash val="solid"/>
-          </a:ln>
-        </p:spPr>
-      </p:sp>
-      <p:sp>
-        <p:nvSpPr>
-          <p:cNvPr id="16" name="Text 14"/>
-          <p:cNvSpPr txBox="1"/>
-          <p:nvPr/>
-        </p:nvSpPr>
-        <p:spPr>
-          <a:xfrm>
-            <a:off x="457200" y="3291840"/>
-            <a:ext cx="1234440" cy="292608"/>
-          </a:xfrm>
-          <a:prstGeom prst="rect">
-            <a:avLst/>
-          </a:prstGeom>
-          <a:noFill/>
-          <a:ln/>
-        </p:spPr>
-        <p:txBody>
-          <a:bodyPr wrap="square" lIns="0" tIns="0" rIns="0" bIns="0" rtlCol="0" anchor="ctr"/>
-          <a:lstStyle/>
-          <a:p>
-            <a:pPr algn="ctr" indent="0" marL="0">
-              <a:buNone/>
-            </a:pPr>
-            <a:r>
-              <a:rPr lang="en-US" sz="1200" b="1" dirty="0">
-                <a:solidFill>
-                  <a:schemeClr val="accent3"/>
-                </a:solidFill>
-              </a:rPr>
-              <a:t>Vắng</a:t>
-            </a:r>
-            <a:endParaRPr lang="en-US" sz="1200" dirty="0"/>
-          </a:p>
-        </p:txBody>
-      </p:sp>
-      <p:sp>
-        <p:nvSpPr>
-          <p:cNvPr id="17" name="Text 15"/>
-          <p:cNvSpPr txBox="1"/>
-          <p:nvPr/>
-        </p:nvSpPr>
-        <p:spPr>
-          <a:xfrm>
-            <a:off x="1828800" y="3255264"/>
-            <a:ext cx="2651760" cy="365760"/>
-          </a:xfrm>
-          <a:prstGeom prst="rect">
-            <a:avLst/>
-          </a:prstGeom>
-          <a:noFill/>
-          <a:ln/>
-        </p:spPr>
-        <p:txBody>
-          <a:bodyPr wrap="square" lIns="0" tIns="0" rIns="0" bIns="0" rtlCol="0" anchor="ctr"/>
-          <a:lstStyle/>
-          <a:p>
-            <a:pPr indent="0" marL="0">
-              <a:buNone/>
-            </a:pPr>
-            <a:r>
-              <a:rPr lang="en-US" sz="1300" dirty="0">
-                <a:solidFill>
-                  <a:schemeClr val="tx1"/>
-                </a:solidFill>
-              </a:rPr>
-              <a:t>Đã học thật → đề nghị bổ sung</a:t>
-            </a:r>
-            <a:endParaRPr lang="en-US" sz="1300" dirty="0"/>
-          </a:p>
-        </p:txBody>
-      </p:sp>
-      <p:sp>
-        <p:nvSpPr>
-          <p:cNvPr id="18" name="Nhan Vắng có phép"/>
-          <p:cNvSpPr/>
-          <p:nvPr/>
-        </p:nvSpPr>
-        <p:spPr>
-          <a:xfrm>
-            <a:off x="457200" y="3703320"/>
-            <a:ext cx="1234440" cy="292608"/>
-          </a:xfrm>
-          <a:prstGeom prst="roundRect">
-            <a:avLst>
-              <a:gd name="adj" fmla="val 50000"/>
-            </a:avLst>
-          </a:prstGeom>
-          <a:solidFill>
-            <a:schemeClr val="accent2">
-              <a:alpha val="22000"/>
-            </a:schemeClr>
-          </a:solidFill>
-          <a:ln w="12700">
-            <a:solidFill>
-              <a:schemeClr val="accent2"/>
-            </a:solidFill>
-            <a:prstDash val="solid"/>
-          </a:ln>
-        </p:spPr>
-      </p:sp>
-      <p:sp>
-        <p:nvSpPr>
-          <p:cNvPr id="19" name="Text 17"/>
-          <p:cNvSpPr txBox="1"/>
-          <p:nvPr/>
-        </p:nvSpPr>
-        <p:spPr>
-          <a:xfrm>
-            <a:off x="457200" y="3703320"/>
-            <a:ext cx="1234440" cy="292608"/>
-          </a:xfrm>
-          <a:prstGeom prst="rect">
-            <a:avLst/>
-          </a:prstGeom>
-          <a:noFill/>
-          <a:ln/>
-        </p:spPr>
-        <p:txBody>
-          <a:bodyPr wrap="square" lIns="0" tIns="0" rIns="0" bIns="0" rtlCol="0" anchor="ctr"/>
-          <a:lstStyle/>
-          <a:p>
-            <a:pPr algn="ctr" indent="0" marL="0">
-              <a:buNone/>
-            </a:pPr>
-            <a:r>
-              <a:rPr lang="en-US" sz="1200" b="1" dirty="0">
-                <a:solidFill>
-                  <a:schemeClr val="accent2"/>
-                </a:solidFill>
-              </a:rPr>
-              <a:t>Vắng có phép</a:t>
-            </a:r>
-            <a:endParaRPr lang="en-US" sz="1200" dirty="0"/>
-          </a:p>
-        </p:txBody>
-      </p:sp>
-      <p:sp>
-        <p:nvSpPr>
-          <p:cNvPr id="20" name="Text 18"/>
-          <p:cNvSpPr txBox="1"/>
-          <p:nvPr/>
-        </p:nvSpPr>
-        <p:spPr>
-          <a:xfrm>
-            <a:off x="1828800" y="3666744"/>
-            <a:ext cx="2651760" cy="365760"/>
-          </a:xfrm>
-          <a:prstGeom prst="rect">
-            <a:avLst/>
-          </a:prstGeom>
-          <a:noFill/>
-          <a:ln/>
-        </p:spPr>
-        <p:txBody>
-          <a:bodyPr wrap="square" lIns="0" tIns="0" rIns="0" bIns="0" rtlCol="0" anchor="ctr"/>
-          <a:lstStyle/>
-          <a:p>
-            <a:pPr indent="0" marL="0">
-              <a:buNone/>
-            </a:pPr>
-            <a:r>
-              <a:rPr lang="en-US" sz="1300" dirty="0">
-                <a:solidFill>
-                  <a:schemeClr val="tx1"/>
-                </a:solidFill>
-              </a:rPr>
-              <a:t>Lý do vắng đã được chấp nhận</a:t>
-            </a:r>
-            <a:endParaRPr lang="en-US" sz="1300" dirty="0"/>
-          </a:p>
-        </p:txBody>
-      </p:sp>
-      <p:sp>
-        <p:nvSpPr>
-          <p:cNvPr id="21" name="Nhan Không nhãn"/>
-          <p:cNvSpPr/>
-          <p:nvPr/>
-        </p:nvSpPr>
-        <p:spPr>
-          <a:xfrm>
-            <a:off x="457200" y="4114800"/>
-            <a:ext cx="1234440" cy="292608"/>
-          </a:xfrm>
-          <a:prstGeom prst="roundRect">
-            <a:avLst>
-              <a:gd name="adj" fmla="val 50000"/>
-            </a:avLst>
-          </a:prstGeom>
-          <a:solidFill>
-            <a:schemeClr val="accent5">
-              <a:alpha val="22000"/>
-            </a:schemeClr>
-          </a:solidFill>
-          <a:ln w="12700">
-            <a:solidFill>
-              <a:schemeClr val="accent5"/>
-            </a:solidFill>
-            <a:prstDash val="solid"/>
-          </a:ln>
-        </p:spPr>
-      </p:sp>
-      <p:sp>
-        <p:nvSpPr>
-          <p:cNvPr id="22" name="Text 20"/>
-          <p:cNvSpPr txBox="1"/>
-          <p:nvPr/>
-        </p:nvSpPr>
-        <p:spPr>
-          <a:xfrm>
-            <a:off x="457200" y="4114800"/>
-            <a:ext cx="1234440" cy="292608"/>
-          </a:xfrm>
-          <a:prstGeom prst="rect">
-            <a:avLst/>
-          </a:prstGeom>
-          <a:noFill/>
-          <a:ln/>
-        </p:spPr>
-        <p:txBody>
-          <a:bodyPr wrap="square" lIns="0" tIns="0" rIns="0" bIns="0" rtlCol="0" anchor="ctr"/>
-          <a:lstStyle/>
-          <a:p>
-            <a:pPr algn="ctr" indent="0" marL="0">
-              <a:buNone/>
-            </a:pPr>
-            <a:r>
-              <a:rPr lang="en-US" sz="1200" b="1" dirty="0">
-                <a:solidFill>
-                  <a:schemeClr val="accent5"/>
-                </a:solidFill>
-              </a:rPr>
-              <a:t>Không nhãn</a:t>
-            </a:r>
-            <a:endParaRPr lang="en-US" sz="1200" dirty="0"/>
-          </a:p>
-        </p:txBody>
-      </p:sp>
-      <p:sp>
-        <p:nvSpPr>
-          <p:cNvPr id="23" name="Text 21"/>
-          <p:cNvSpPr txBox="1"/>
-          <p:nvPr/>
-        </p:nvSpPr>
-        <p:spPr>
-          <a:xfrm>
-            <a:off x="1828800" y="4078224"/>
-            <a:ext cx="2651760" cy="365760"/>
-          </a:xfrm>
-          <a:prstGeom prst="rect">
-            <a:avLst/>
-          </a:prstGeom>
-          <a:noFill/>
-          <a:ln/>
-        </p:spPr>
-        <p:txBody>
-          <a:bodyPr wrap="square" lIns="0" tIns="0" rIns="0" bIns="0" rtlCol="0" anchor="ctr"/>
-          <a:lstStyle/>
-          <a:p>
-            <a:pPr indent="0" marL="0">
-              <a:buNone/>
-            </a:pPr>
-            <a:r>
-              <a:rPr lang="en-US" sz="1300" dirty="0">
-                <a:solidFill>
-                  <a:schemeClr val="tx1"/>
-                </a:solidFill>
-              </a:rPr>
-              <a:t>Chưa có kết quả điểm danh</a:t>
-            </a:r>
-            <a:endParaRPr lang="en-US" sz="1300" dirty="0"/>
-          </a:p>
-        </p:txBody>
-      </p:sp>
-      <p:sp>
-        <p:nvSpPr>
-          <p:cNvPr id="24" name="Khung hv-menu"/>
-          <p:cNvSpPr/>
-          <p:nvPr/>
-        </p:nvSpPr>
-        <p:spPr>
-          <a:xfrm>
-            <a:off x="4736592" y="1078992"/>
-            <a:ext cx="1728216" cy="2302647"/>
-          </a:xfrm>
-          <a:prstGeom prst="roundRect">
-            <a:avLst>
-              <a:gd name="adj" fmla="val 6349"/>
-            </a:avLst>
-          </a:prstGeom>
-          <a:solidFill>
-            <a:schemeClr val="tx1"/>
-          </a:solidFill>
-          <a:ln/>
           <a:effectLst>
             <a:outerShdw sx="100000" sy="100000" kx="0" ky="0" algn="bl" rotWithShape="0" blurRad="76200" dist="25400" dir="5400000">
               <a:srgbClr val="1B2A2F">
-                <a:alpha val="25000"/>
+                <a:alpha val="22000"/>
               </a:srgbClr>
             </a:outerShdw>
           </a:effectLst>
@@ -3223,7 +3158,7 @@
       </p:sp>
       <p:pic>
         <p:nvPicPr>
-          <p:cNvPr id="25" name="Anh hv-menu" descr="Menu cổng học viên, mục Lớp học">    </p:cNvPr>
+          <p:cNvPr id="4" name="Anh pc-hv-lop-hoc" descr="Trang Lớp học trên máy tính: Buổi 2 hiện nhãn Vắng">    </p:cNvPr>
           <p:cNvPicPr>
             <a:picLocks noChangeAspect="1"/>
           </p:cNvPicPr>
@@ -3237,8 +3172,8 @@
         </p:blipFill>
         <p:spPr>
           <a:xfrm>
-            <a:off x="4800600" y="1143000"/>
-            <a:ext cx="1600200" cy="2174631"/>
+            <a:off x="1451525" y="1207008"/>
+            <a:ext cx="4311305" cy="2724912"/>
           </a:xfrm>
           <a:prstGeom prst="rect">
             <a:avLst/>
@@ -3247,94 +3182,18 @@
       </p:pic>
       <p:sp>
         <p:nvSpPr>
-          <p:cNvPr id="26" name="So 1"/>
+          <p:cNvPr id="5" name="Khung m-hv-lop-hoc"/>
           <p:cNvSpPr/>
           <p:nvPr/>
         </p:nvSpPr>
         <p:spPr>
           <a:xfrm>
-            <a:off x="4379976" y="1779563"/>
-            <a:ext cx="292608" cy="292608"/>
-          </a:xfrm>
-          <a:prstGeom prst="ellipse">
-            <a:avLst/>
-          </a:prstGeom>
-          <a:solidFill>
-            <a:schemeClr val="accent2"/>
-          </a:solidFill>
-          <a:ln/>
-        </p:spPr>
-      </p:sp>
-      <p:sp>
-        <p:nvSpPr>
-          <p:cNvPr id="27" name="Text 24"/>
-          <p:cNvSpPr txBox="1"/>
-          <p:nvPr/>
-        </p:nvSpPr>
-        <p:spPr>
-          <a:xfrm>
-            <a:off x="4379976" y="1779563"/>
-            <a:ext cx="292608" cy="292608"/>
-          </a:xfrm>
-          <a:prstGeom prst="rect">
-            <a:avLst/>
-          </a:prstGeom>
-          <a:noFill/>
-          <a:ln/>
-        </p:spPr>
-        <p:txBody>
-          <a:bodyPr wrap="square" lIns="0" tIns="0" rIns="0" bIns="0" rtlCol="0" anchor="ctr"/>
-          <a:lstStyle/>
-          <a:p>
-            <a:pPr algn="ctr" indent="0" marL="0">
-              <a:buNone/>
-            </a:pPr>
-            <a:r>
-              <a:rPr lang="en-US" sz="1300" b="1" dirty="0">
-                <a:solidFill>
-                  <a:schemeClr val="bg1"/>
-                </a:solidFill>
-              </a:rPr>
-              <a:t>1</a:t>
-            </a:r>
-            <a:endParaRPr lang="en-US" sz="1300" dirty="0"/>
-          </a:p>
-        </p:txBody>
-      </p:sp>
-      <p:sp>
-        <p:nvSpPr>
-          <p:cNvPr id="28" name="Mui ten"/>
-          <p:cNvSpPr/>
-          <p:nvPr/>
-        </p:nvSpPr>
-        <p:spPr>
-          <a:xfrm>
-            <a:off x="6510528" y="2103120"/>
-            <a:ext cx="320040" cy="274320"/>
-          </a:xfrm>
-          <a:prstGeom prst="rightArrow">
-            <a:avLst/>
-          </a:prstGeom>
-          <a:solidFill>
-            <a:schemeClr val="accent6"/>
-          </a:solidFill>
-          <a:ln/>
-        </p:spPr>
-      </p:sp>
-      <p:sp>
-        <p:nvSpPr>
-          <p:cNvPr id="29" name="Khung hv-lop-hoc"/>
-          <p:cNvSpPr/>
-          <p:nvPr/>
-        </p:nvSpPr>
-        <p:spPr>
-          <a:xfrm>
-            <a:off x="6885432" y="987552"/>
-            <a:ext cx="1682496" cy="2772952"/>
+            <a:off x="6119446" y="1152144"/>
+            <a:ext cx="1627893" cy="2834640"/>
           </a:xfrm>
           <a:prstGeom prst="roundRect">
             <a:avLst>
-              <a:gd name="adj" fmla="val 6522"/>
+              <a:gd name="adj" fmla="val 5617"/>
             </a:avLst>
           </a:prstGeom>
           <a:solidFill>
@@ -3344,7 +3203,7 @@
           <a:effectLst>
             <a:outerShdw sx="100000" sy="100000" kx="0" ky="0" algn="bl" rotWithShape="0" blurRad="76200" dist="25400" dir="5400000">
               <a:srgbClr val="1B2A2F">
-                <a:alpha val="25000"/>
+                <a:alpha val="22000"/>
               </a:srgbClr>
             </a:outerShdw>
           </a:effectLst>
@@ -3352,7 +3211,7 @@
       </p:sp>
       <p:pic>
         <p:nvPicPr>
-          <p:cNvPr id="30" name="Anh hv-lop-hoc" descr="Trang Lớp học: Buổi 1 có mặt, Buổi 2 vắng, Buổi 3 chưa có nhãn">    </p:cNvPr>
+          <p:cNvPr id="6" name="Anh m-hv-lop-hoc" descr="Trang Lớp học trên điện thoại">    </p:cNvPr>
           <p:cNvPicPr>
             <a:picLocks noChangeAspect="1"/>
           </p:cNvPicPr>
@@ -3366,8 +3225,8 @@
         </p:blipFill>
         <p:spPr>
           <a:xfrm>
-            <a:off x="6949440" y="1051560"/>
-            <a:ext cx="1554480" cy="2644936"/>
+            <a:off x="6174310" y="1207008"/>
+            <a:ext cx="1518165" cy="2724912"/>
           </a:xfrm>
           <a:prstGeom prst="rect">
             <a:avLst/>
@@ -3376,14 +3235,86 @@
       </p:pic>
       <p:sp>
         <p:nvSpPr>
-          <p:cNvPr id="31" name="So 3"/>
+          <p:cNvPr id="7" name="Text 3"/>
+          <p:cNvSpPr txBox="1"/>
+          <p:nvPr/>
+        </p:nvSpPr>
+        <p:spPr>
+          <a:xfrm>
+            <a:off x="1451525" y="932688"/>
+            <a:ext cx="2743200" cy="201168"/>
+          </a:xfrm>
+          <a:prstGeom prst="rect">
+            <a:avLst/>
+          </a:prstGeom>
+          <a:noFill/>
+          <a:ln/>
+        </p:spPr>
+        <p:txBody>
+          <a:bodyPr wrap="square" lIns="0" tIns="0" rIns="0" bIns="0" rtlCol="0" anchor="ctr"/>
+          <a:lstStyle/>
+          <a:p>
+            <a:pPr indent="0" marL="0">
+              <a:buNone/>
+            </a:pPr>
+            <a:r>
+              <a:rPr lang="en-US" sz="1100" b="1" spc="100" kern="0" dirty="0">
+                <a:solidFill>
+                  <a:schemeClr val="accent5"/>
+                </a:solidFill>
+              </a:rPr>
+              <a:t>MÁY TÍNH</a:t>
+            </a:r>
+            <a:endParaRPr lang="en-US" sz="1100" dirty="0"/>
+          </a:p>
+        </p:txBody>
+      </p:sp>
+      <p:sp>
+        <p:nvSpPr>
+          <p:cNvPr id="8" name="Text 4"/>
+          <p:cNvSpPr txBox="1"/>
+          <p:nvPr/>
+        </p:nvSpPr>
+        <p:spPr>
+          <a:xfrm>
+            <a:off x="6174310" y="932688"/>
+            <a:ext cx="1828800" cy="201168"/>
+          </a:xfrm>
+          <a:prstGeom prst="rect">
+            <a:avLst/>
+          </a:prstGeom>
+          <a:noFill/>
+          <a:ln/>
+        </p:spPr>
+        <p:txBody>
+          <a:bodyPr wrap="square" lIns="0" tIns="0" rIns="0" bIns="0" rtlCol="0" anchor="ctr"/>
+          <a:lstStyle/>
+          <a:p>
+            <a:pPr indent="0" marL="0">
+              <a:buNone/>
+            </a:pPr>
+            <a:r>
+              <a:rPr lang="en-US" sz="1100" b="1" spc="100" kern="0" dirty="0">
+                <a:solidFill>
+                  <a:schemeClr val="accent5"/>
+                </a:solidFill>
+              </a:rPr>
+              <a:t>ĐIỆN THOẠI</a:t>
+            </a:r>
+            <a:endParaRPr lang="en-US" sz="1100" dirty="0"/>
+          </a:p>
+        </p:txBody>
+      </p:sp>
+      <p:sp>
+        <p:nvSpPr>
+          <p:cNvPr id="9" name="So 1"/>
           <p:cNvSpPr/>
           <p:nvPr/>
         </p:nvSpPr>
         <p:spPr>
           <a:xfrm>
-            <a:off x="8631936" y="1883882"/>
-            <a:ext cx="292608" cy="292608"/>
+            <a:off x="2792701" y="1305022"/>
+            <a:ext cx="256032" cy="256032"/>
           </a:xfrm>
           <a:prstGeom prst="ellipse">
             <a:avLst/>
@@ -3396,15 +3327,229 @@
       </p:sp>
       <p:sp>
         <p:nvSpPr>
-          <p:cNvPr id="32" name="Text 28"/>
+          <p:cNvPr id="10" name="Text 6"/>
           <p:cNvSpPr txBox="1"/>
           <p:nvPr/>
         </p:nvSpPr>
         <p:spPr>
           <a:xfrm>
-            <a:off x="8631936" y="1883882"/>
+            <a:off x="2792701" y="1305022"/>
+            <a:ext cx="256032" cy="256032"/>
+          </a:xfrm>
+          <a:prstGeom prst="rect">
+            <a:avLst/>
+          </a:prstGeom>
+          <a:noFill/>
+          <a:ln/>
+        </p:spPr>
+        <p:txBody>
+          <a:bodyPr wrap="square" lIns="0" tIns="0" rIns="0" bIns="0" rtlCol="0" anchor="ctr"/>
+          <a:lstStyle/>
+          <a:p>
+            <a:pPr algn="ctr" indent="0" marL="0">
+              <a:buNone/>
+            </a:pPr>
+            <a:r>
+              <a:rPr lang="en-US" sz="1200" b="1" dirty="0">
+                <a:solidFill>
+                  <a:schemeClr val="bg1"/>
+                </a:solidFill>
+              </a:rPr>
+              <a:t>1</a:t>
+            </a:r>
+            <a:endParaRPr lang="en-US" sz="1200" dirty="0"/>
+          </a:p>
+        </p:txBody>
+      </p:sp>
+      <p:sp>
+        <p:nvSpPr>
+          <p:cNvPr id="11" name="So 2"/>
+          <p:cNvSpPr/>
+          <p:nvPr/>
+        </p:nvSpPr>
+        <p:spPr>
+          <a:xfrm>
+            <a:off x="2704801" y="1551980"/>
+            <a:ext cx="256032" cy="256032"/>
+          </a:xfrm>
+          <a:prstGeom prst="ellipse">
+            <a:avLst/>
+          </a:prstGeom>
+          <a:solidFill>
+            <a:schemeClr val="accent2"/>
+          </a:solidFill>
+          <a:ln/>
+        </p:spPr>
+      </p:sp>
+      <p:sp>
+        <p:nvSpPr>
+          <p:cNvPr id="12" name="Text 8"/>
+          <p:cNvSpPr txBox="1"/>
+          <p:nvPr/>
+        </p:nvSpPr>
+        <p:spPr>
+          <a:xfrm>
+            <a:off x="2704801" y="1551980"/>
+            <a:ext cx="256032" cy="256032"/>
+          </a:xfrm>
+          <a:prstGeom prst="rect">
+            <a:avLst/>
+          </a:prstGeom>
+          <a:noFill/>
+          <a:ln/>
+        </p:spPr>
+        <p:txBody>
+          <a:bodyPr wrap="square" lIns="0" tIns="0" rIns="0" bIns="0" rtlCol="0" anchor="ctr"/>
+          <a:lstStyle/>
+          <a:p>
+            <a:pPr algn="ctr" indent="0" marL="0">
+              <a:buNone/>
+            </a:pPr>
+            <a:r>
+              <a:rPr lang="en-US" sz="1200" b="1" dirty="0">
+                <a:solidFill>
+                  <a:schemeClr val="bg1"/>
+                </a:solidFill>
+              </a:rPr>
+              <a:t>2</a:t>
+            </a:r>
+            <a:endParaRPr lang="en-US" sz="1200" dirty="0"/>
+          </a:p>
+        </p:txBody>
+      </p:sp>
+      <p:sp>
+        <p:nvSpPr>
+          <p:cNvPr id="13" name="To dam"/>
+          <p:cNvSpPr/>
+          <p:nvPr/>
+        </p:nvSpPr>
+        <p:spPr>
+          <a:xfrm>
+            <a:off x="3276504" y="2521328"/>
+            <a:ext cx="318116" cy="108829"/>
+          </a:xfrm>
+          <a:prstGeom prst="roundRect">
+            <a:avLst>
+              <a:gd name="adj" fmla="val 33609"/>
+            </a:avLst>
+          </a:prstGeom>
+          <a:ln w="28575">
+            <a:solidFill>
+              <a:schemeClr val="accent2"/>
+            </a:solidFill>
+            <a:prstDash val="solid"/>
+          </a:ln>
+        </p:spPr>
+      </p:sp>
+      <p:sp>
+        <p:nvSpPr>
+          <p:cNvPr id="14" name="So 3"/>
+          <p:cNvSpPr/>
+          <p:nvPr/>
+        </p:nvSpPr>
+        <p:spPr>
+          <a:xfrm>
+            <a:off x="2767587" y="2447727"/>
+            <a:ext cx="256032" cy="256032"/>
+          </a:xfrm>
+          <a:prstGeom prst="ellipse">
+            <a:avLst/>
+          </a:prstGeom>
+          <a:solidFill>
+            <a:schemeClr val="accent2"/>
+          </a:solidFill>
+          <a:ln/>
+        </p:spPr>
+      </p:sp>
+      <p:sp>
+        <p:nvSpPr>
+          <p:cNvPr id="15" name="Text 11"/>
+          <p:cNvSpPr txBox="1"/>
+          <p:nvPr/>
+        </p:nvSpPr>
+        <p:spPr>
+          <a:xfrm>
+            <a:off x="2767587" y="2447727"/>
+            <a:ext cx="256032" cy="256032"/>
+          </a:xfrm>
+          <a:prstGeom prst="rect">
+            <a:avLst/>
+          </a:prstGeom>
+          <a:noFill/>
+          <a:ln/>
+        </p:spPr>
+        <p:txBody>
+          <a:bodyPr wrap="square" lIns="0" tIns="0" rIns="0" bIns="0" rtlCol="0" anchor="ctr"/>
+          <a:lstStyle/>
+          <a:p>
+            <a:pPr algn="ctr" indent="0" marL="0">
+              <a:buNone/>
+            </a:pPr>
+            <a:r>
+              <a:rPr lang="en-US" sz="1200" b="1" dirty="0">
+                <a:solidFill>
+                  <a:schemeClr val="bg1"/>
+                </a:solidFill>
+              </a:rPr>
+              <a:t>3</a:t>
+            </a:r>
+            <a:endParaRPr lang="en-US" sz="1200" dirty="0"/>
+          </a:p>
+        </p:txBody>
+      </p:sp>
+      <p:sp>
+        <p:nvSpPr>
+          <p:cNvPr id="16" name="Buoc 1"/>
+          <p:cNvSpPr/>
+          <p:nvPr/>
+        </p:nvSpPr>
+        <p:spPr>
+          <a:xfrm>
+            <a:off x="457200" y="4114800"/>
+            <a:ext cx="2651760" cy="566928"/>
+          </a:xfrm>
+          <a:prstGeom prst="roundRect">
+            <a:avLst>
+              <a:gd name="adj" fmla="val 9677"/>
+            </a:avLst>
+          </a:prstGeom>
+          <a:solidFill>
+            <a:schemeClr val="bg2"/>
+          </a:solidFill>
+          <a:ln/>
+        </p:spPr>
+      </p:sp>
+      <p:sp>
+        <p:nvSpPr>
+          <p:cNvPr id="17" name="So 1"/>
+          <p:cNvSpPr/>
+          <p:nvPr/>
+        </p:nvSpPr>
+        <p:spPr>
+          <a:xfrm>
+            <a:off x="548640" y="4251960"/>
             <a:ext cx="292608" cy="292608"/>
           </a:xfrm>
+          <a:prstGeom prst="ellipse">
+            <a:avLst/>
+          </a:prstGeom>
+          <a:solidFill>
+            <a:schemeClr val="accent2"/>
+          </a:solidFill>
+          <a:ln/>
+        </p:spPr>
+      </p:sp>
+      <p:sp>
+        <p:nvSpPr>
+          <p:cNvPr id="18" name="Text 14"/>
+          <p:cNvSpPr txBox="1"/>
+          <p:nvPr/>
+        </p:nvSpPr>
+        <p:spPr>
+          <a:xfrm>
+            <a:off x="548640" y="4251960"/>
+            <a:ext cx="292608" cy="292608"/>
+          </a:xfrm>
           <a:prstGeom prst="rect">
             <a:avLst/>
           </a:prstGeom>
@@ -3424,9 +3569,317 @@
                   <a:schemeClr val="bg1"/>
                 </a:solidFill>
               </a:rPr>
+              <a:t>1</a:t>
+            </a:r>
+            <a:endParaRPr lang="en-US" sz="1300" dirty="0"/>
+          </a:p>
+        </p:txBody>
+      </p:sp>
+      <p:sp>
+        <p:nvSpPr>
+          <p:cNvPr id="19" name="Text 15"/>
+          <p:cNvSpPr txBox="1"/>
+          <p:nvPr/>
+        </p:nvSpPr>
+        <p:spPr>
+          <a:xfrm>
+            <a:off x="914400" y="4114800"/>
+            <a:ext cx="2103120" cy="566928"/>
+          </a:xfrm>
+          <a:prstGeom prst="rect">
+            <a:avLst/>
+          </a:prstGeom>
+          <a:noFill/>
+          <a:ln/>
+        </p:spPr>
+        <p:txBody>
+          <a:bodyPr wrap="square" lIns="0" tIns="0" rIns="0" bIns="0" rtlCol="0" anchor="ctr"/>
+          <a:lstStyle/>
+          <a:p>
+            <a:pPr indent="0" marL="0">
+              <a:buNone/>
+            </a:pPr>
+            <a:r>
+              <a:rPr lang="en-US" sz="1200" dirty="0">
+                <a:solidFill>
+                  <a:schemeClr val="tx1"/>
+                </a:solidFill>
+              </a:rPr>
+              <a:t>Mở </a:t>
+            </a:r>
+            <a:pPr indent="0" marL="0">
+              <a:buNone/>
+            </a:pPr>
+            <a:r>
+              <a:rPr lang="en-US" sz="1200" b="1" dirty="0">
+                <a:solidFill>
+                  <a:schemeClr val="tx1"/>
+                </a:solidFill>
+              </a:rPr>
+              <a:t>Lớp học</a:t>
+            </a:r>
+            <a:pPr indent="0" marL="0">
+              <a:buNone/>
+            </a:pPr>
+            <a:r>
+              <a:rPr lang="en-US" sz="1200" dirty="0">
+                <a:solidFill>
+                  <a:schemeClr val="tx1"/>
+                </a:solidFill>
+              </a:rPr>
+              <a:t> (điện thoại: menu ☰)</a:t>
+            </a:r>
+            <a:endParaRPr lang="en-US" sz="1200" dirty="0"/>
+          </a:p>
+        </p:txBody>
+      </p:sp>
+      <p:sp>
+        <p:nvSpPr>
+          <p:cNvPr id="20" name="Buoc 2"/>
+          <p:cNvSpPr/>
+          <p:nvPr/>
+        </p:nvSpPr>
+        <p:spPr>
+          <a:xfrm>
+            <a:off x="3246120" y="4114800"/>
+            <a:ext cx="2651760" cy="566928"/>
+          </a:xfrm>
+          <a:prstGeom prst="roundRect">
+            <a:avLst>
+              <a:gd name="adj" fmla="val 9677"/>
+            </a:avLst>
+          </a:prstGeom>
+          <a:solidFill>
+            <a:schemeClr val="bg2"/>
+          </a:solidFill>
+          <a:ln/>
+        </p:spPr>
+      </p:sp>
+      <p:sp>
+        <p:nvSpPr>
+          <p:cNvPr id="21" name="So 2"/>
+          <p:cNvSpPr/>
+          <p:nvPr/>
+        </p:nvSpPr>
+        <p:spPr>
+          <a:xfrm>
+            <a:off x="3337560" y="4251960"/>
+            <a:ext cx="292608" cy="292608"/>
+          </a:xfrm>
+          <a:prstGeom prst="ellipse">
+            <a:avLst/>
+          </a:prstGeom>
+          <a:solidFill>
+            <a:schemeClr val="accent2"/>
+          </a:solidFill>
+          <a:ln/>
+        </p:spPr>
+      </p:sp>
+      <p:sp>
+        <p:nvSpPr>
+          <p:cNvPr id="22" name="Text 18"/>
+          <p:cNvSpPr txBox="1"/>
+          <p:nvPr/>
+        </p:nvSpPr>
+        <p:spPr>
+          <a:xfrm>
+            <a:off x="3337560" y="4251960"/>
+            <a:ext cx="292608" cy="292608"/>
+          </a:xfrm>
+          <a:prstGeom prst="rect">
+            <a:avLst/>
+          </a:prstGeom>
+          <a:noFill/>
+          <a:ln/>
+        </p:spPr>
+        <p:txBody>
+          <a:bodyPr wrap="square" lIns="0" tIns="0" rIns="0" bIns="0" rtlCol="0" anchor="ctr"/>
+          <a:lstStyle/>
+          <a:p>
+            <a:pPr algn="ctr" indent="0" marL="0">
+              <a:buNone/>
+            </a:pPr>
+            <a:r>
+              <a:rPr lang="en-US" sz="1300" b="1" dirty="0">
+                <a:solidFill>
+                  <a:schemeClr val="bg1"/>
+                </a:solidFill>
+              </a:rPr>
+              <a:t>2</a:t>
+            </a:r>
+            <a:endParaRPr lang="en-US" sz="1300" dirty="0"/>
+          </a:p>
+        </p:txBody>
+      </p:sp>
+      <p:sp>
+        <p:nvSpPr>
+          <p:cNvPr id="23" name="Text 19"/>
+          <p:cNvSpPr txBox="1"/>
+          <p:nvPr/>
+        </p:nvSpPr>
+        <p:spPr>
+          <a:xfrm>
+            <a:off x="3703320" y="4114800"/>
+            <a:ext cx="2103120" cy="566928"/>
+          </a:xfrm>
+          <a:prstGeom prst="rect">
+            <a:avLst/>
+          </a:prstGeom>
+          <a:noFill/>
+          <a:ln/>
+        </p:spPr>
+        <p:txBody>
+          <a:bodyPr wrap="square" lIns="0" tIns="0" rIns="0" bIns="0" rtlCol="0" anchor="ctr"/>
+          <a:lstStyle/>
+          <a:p>
+            <a:pPr indent="0" marL="0">
+              <a:buNone/>
+            </a:pPr>
+            <a:r>
+              <a:rPr lang="en-US" sz="1200" dirty="0">
+                <a:solidFill>
+                  <a:schemeClr val="tx1"/>
+                </a:solidFill>
+              </a:rPr>
+              <a:t>Cuộn tới </a:t>
+            </a:r>
+            <a:pPr indent="0" marL="0">
+              <a:buNone/>
+            </a:pPr>
+            <a:r>
+              <a:rPr lang="en-US" sz="1200" b="1" dirty="0">
+                <a:solidFill>
+                  <a:schemeClr val="tx1"/>
+                </a:solidFill>
+              </a:rPr>
+              <a:t>giai đoạn đang học</a:t>
+            </a:r>
+            <a:endParaRPr lang="en-US" sz="1200" dirty="0"/>
+          </a:p>
+        </p:txBody>
+      </p:sp>
+      <p:sp>
+        <p:nvSpPr>
+          <p:cNvPr id="24" name="Buoc 3"/>
+          <p:cNvSpPr/>
+          <p:nvPr/>
+        </p:nvSpPr>
+        <p:spPr>
+          <a:xfrm>
+            <a:off x="6035040" y="4114800"/>
+            <a:ext cx="2651760" cy="566928"/>
+          </a:xfrm>
+          <a:prstGeom prst="roundRect">
+            <a:avLst>
+              <a:gd name="adj" fmla="val 9677"/>
+            </a:avLst>
+          </a:prstGeom>
+          <a:solidFill>
+            <a:schemeClr val="bg2"/>
+          </a:solidFill>
+          <a:ln/>
+        </p:spPr>
+      </p:sp>
+      <p:sp>
+        <p:nvSpPr>
+          <p:cNvPr id="25" name="So 3"/>
+          <p:cNvSpPr/>
+          <p:nvPr/>
+        </p:nvSpPr>
+        <p:spPr>
+          <a:xfrm>
+            <a:off x="6126480" y="4251960"/>
+            <a:ext cx="292608" cy="292608"/>
+          </a:xfrm>
+          <a:prstGeom prst="ellipse">
+            <a:avLst/>
+          </a:prstGeom>
+          <a:solidFill>
+            <a:schemeClr val="accent2"/>
+          </a:solidFill>
+          <a:ln/>
+        </p:spPr>
+      </p:sp>
+      <p:sp>
+        <p:nvSpPr>
+          <p:cNvPr id="26" name="Text 22"/>
+          <p:cNvSpPr txBox="1"/>
+          <p:nvPr/>
+        </p:nvSpPr>
+        <p:spPr>
+          <a:xfrm>
+            <a:off x="6126480" y="4251960"/>
+            <a:ext cx="292608" cy="292608"/>
+          </a:xfrm>
+          <a:prstGeom prst="rect">
+            <a:avLst/>
+          </a:prstGeom>
+          <a:noFill/>
+          <a:ln/>
+        </p:spPr>
+        <p:txBody>
+          <a:bodyPr wrap="square" lIns="0" tIns="0" rIns="0" bIns="0" rtlCol="0" anchor="ctr"/>
+          <a:lstStyle/>
+          <a:p>
+            <a:pPr algn="ctr" indent="0" marL="0">
+              <a:buNone/>
+            </a:pPr>
+            <a:r>
+              <a:rPr lang="en-US" sz="1300" b="1" dirty="0">
+                <a:solidFill>
+                  <a:schemeClr val="bg1"/>
+                </a:solidFill>
+              </a:rPr>
               <a:t>3</a:t>
             </a:r>
             <a:endParaRPr lang="en-US" sz="1300" dirty="0"/>
+          </a:p>
+        </p:txBody>
+      </p:sp>
+      <p:sp>
+        <p:nvSpPr>
+          <p:cNvPr id="27" name="Text 23"/>
+          <p:cNvSpPr txBox="1"/>
+          <p:nvPr/>
+        </p:nvSpPr>
+        <p:spPr>
+          <a:xfrm>
+            <a:off x="6492240" y="4114800"/>
+            <a:ext cx="2103120" cy="566928"/>
+          </a:xfrm>
+          <a:prstGeom prst="rect">
+            <a:avLst/>
+          </a:prstGeom>
+          <a:noFill/>
+          <a:ln/>
+        </p:spPr>
+        <p:txBody>
+          <a:bodyPr wrap="square" lIns="0" tIns="0" rIns="0" bIns="0" rtlCol="0" anchor="ctr"/>
+          <a:lstStyle/>
+          <a:p>
+            <a:pPr indent="0" marL="0">
+              <a:buNone/>
+            </a:pPr>
+            <a:r>
+              <a:rPr lang="en-US" sz="1200" dirty="0">
+                <a:solidFill>
+                  <a:schemeClr val="tx1"/>
+                </a:solidFill>
+              </a:rPr>
+              <a:t>Xem </a:t>
+            </a:r>
+            <a:pPr indent="0" marL="0">
+              <a:buNone/>
+            </a:pPr>
+            <a:r>
+              <a:rPr lang="en-US" sz="1200" b="1" dirty="0">
+                <a:solidFill>
+                  <a:schemeClr val="tx1"/>
+                </a:solidFill>
+              </a:rPr>
+              <a:t>nhãn cạnh số buổi</a:t>
+            </a:r>
+            <a:endParaRPr lang="en-US" sz="1200" dirty="0"/>
           </a:p>
         </p:txBody>
       </p:sp>
@@ -3442,8 +3895,8 @@
         </p:nvSpPr>
         <p:spPr>
           <a:xfrm>
-            <a:off x="8229600" y="4754880"/>
-            <a:ext cx="457200" cy="228600"/>
+            <a:off x="8229600" y="4800600"/>
+            <a:ext cx="457200" cy="201168"/>
           </a:xfrm>
           <a:prstGeom prst="rect">
             <a:avLst/>
@@ -3510,8 +3963,8 @@
         </p:nvSpPr>
         <p:spPr>
           <a:xfrm>
-            <a:off x="457200" y="274320"/>
-            <a:ext cx="8229600" cy="640080"/>
+            <a:off x="457200" y="228600"/>
+            <a:ext cx="8229600" cy="594360"/>
           </a:xfrm>
           <a:prstGeom prst="rect">
             <a:avLst/>
@@ -3532,7 +3985,7 @@
                   <a:schemeClr val="tx2"/>
                 </a:solidFill>
               </a:rPr>
-              <a:t>Khi nào nên đề nghị điểm danh bổ sung?</a:t>
+              <a:t>Ý nghĩa các nhãn điểm danh</a:t>
             </a:r>
             <a:endParaRPr lang="en-US" sz="2800" dirty="0"/>
           </a:p>
@@ -3540,18 +3993,422 @@
       </p:sp>
       <p:sp>
         <p:nvSpPr>
-          <p:cNvPr id="3" name="✓  Được xem xét"/>
+          <p:cNvPr id="3" name="Nhan Có mặt"/>
           <p:cNvSpPr/>
           <p:nvPr/>
         </p:nvSpPr>
         <p:spPr>
           <a:xfrm>
-            <a:off x="457200" y="1097280"/>
-            <a:ext cx="3977640" cy="2514600"/>
+            <a:off x="457200" y="1188720"/>
+            <a:ext cx="1554480" cy="402336"/>
           </a:xfrm>
           <a:prstGeom prst="roundRect">
             <a:avLst>
-              <a:gd name="adj" fmla="val 2909"/>
+              <a:gd name="adj" fmla="val 50000"/>
+            </a:avLst>
+          </a:prstGeom>
+          <a:solidFill>
+            <a:schemeClr val="accent1">
+              <a:alpha val="22000"/>
+            </a:schemeClr>
+          </a:solidFill>
+          <a:ln w="12700">
+            <a:solidFill>
+              <a:schemeClr val="accent1"/>
+            </a:solidFill>
+            <a:prstDash val="solid"/>
+          </a:ln>
+        </p:spPr>
+      </p:sp>
+      <p:sp>
+        <p:nvSpPr>
+          <p:cNvPr id="4" name="Text 2"/>
+          <p:cNvSpPr txBox="1"/>
+          <p:nvPr/>
+        </p:nvSpPr>
+        <p:spPr>
+          <a:xfrm>
+            <a:off x="457200" y="1188720"/>
+            <a:ext cx="1554480" cy="402336"/>
+          </a:xfrm>
+          <a:prstGeom prst="rect">
+            <a:avLst/>
+          </a:prstGeom>
+          <a:noFill/>
+          <a:ln/>
+        </p:spPr>
+        <p:txBody>
+          <a:bodyPr wrap="square" lIns="0" tIns="0" rIns="0" bIns="0" rtlCol="0" anchor="ctr"/>
+          <a:lstStyle/>
+          <a:p>
+            <a:pPr algn="ctr" indent="0" marL="0">
+              <a:buNone/>
+            </a:pPr>
+            <a:r>
+              <a:rPr lang="en-US" sz="1400" b="1" dirty="0">
+                <a:solidFill>
+                  <a:schemeClr val="accent1"/>
+                </a:solidFill>
+              </a:rPr>
+              <a:t>Có mặt</a:t>
+            </a:r>
+            <a:endParaRPr lang="en-US" sz="1400" dirty="0"/>
+          </a:p>
+        </p:txBody>
+      </p:sp>
+      <p:sp>
+        <p:nvSpPr>
+          <p:cNvPr id="5" name="Text 3"/>
+          <p:cNvSpPr txBox="1"/>
+          <p:nvPr/>
+        </p:nvSpPr>
+        <p:spPr>
+          <a:xfrm>
+            <a:off x="2240280" y="1161288"/>
+            <a:ext cx="3108960" cy="457200"/>
+          </a:xfrm>
+          <a:prstGeom prst="rect">
+            <a:avLst/>
+          </a:prstGeom>
+          <a:noFill/>
+          <a:ln/>
+        </p:spPr>
+        <p:txBody>
+          <a:bodyPr wrap="square" lIns="0" tIns="0" rIns="0" bIns="0" rtlCol="0" anchor="ctr"/>
+          <a:lstStyle/>
+          <a:p>
+            <a:pPr indent="0" marL="0">
+              <a:buNone/>
+            </a:pPr>
+            <a:r>
+              <a:rPr lang="en-US" sz="1500" dirty="0">
+                <a:solidFill>
+                  <a:schemeClr val="tx1"/>
+                </a:solidFill>
+              </a:rPr>
+              <a:t>Đã ghi nhận – không cần làm gì</a:t>
+            </a:r>
+            <a:endParaRPr lang="en-US" sz="1500" dirty="0"/>
+          </a:p>
+        </p:txBody>
+      </p:sp>
+      <p:sp>
+        <p:nvSpPr>
+          <p:cNvPr id="6" name="Nhan Vắng"/>
+          <p:cNvSpPr/>
+          <p:nvPr/>
+        </p:nvSpPr>
+        <p:spPr>
+          <a:xfrm>
+            <a:off x="457200" y="1965960"/>
+            <a:ext cx="1554480" cy="402336"/>
+          </a:xfrm>
+          <a:prstGeom prst="roundRect">
+            <a:avLst>
+              <a:gd name="adj" fmla="val 50000"/>
+            </a:avLst>
+          </a:prstGeom>
+          <a:solidFill>
+            <a:schemeClr val="accent3">
+              <a:alpha val="22000"/>
+            </a:schemeClr>
+          </a:solidFill>
+          <a:ln w="12700">
+            <a:solidFill>
+              <a:schemeClr val="accent3"/>
+            </a:solidFill>
+            <a:prstDash val="solid"/>
+          </a:ln>
+        </p:spPr>
+      </p:sp>
+      <p:sp>
+        <p:nvSpPr>
+          <p:cNvPr id="7" name="Text 5"/>
+          <p:cNvSpPr txBox="1"/>
+          <p:nvPr/>
+        </p:nvSpPr>
+        <p:spPr>
+          <a:xfrm>
+            <a:off x="457200" y="1965960"/>
+            <a:ext cx="1554480" cy="402336"/>
+          </a:xfrm>
+          <a:prstGeom prst="rect">
+            <a:avLst/>
+          </a:prstGeom>
+          <a:noFill/>
+          <a:ln/>
+        </p:spPr>
+        <p:txBody>
+          <a:bodyPr wrap="square" lIns="0" tIns="0" rIns="0" bIns="0" rtlCol="0" anchor="ctr"/>
+          <a:lstStyle/>
+          <a:p>
+            <a:pPr algn="ctr" indent="0" marL="0">
+              <a:buNone/>
+            </a:pPr>
+            <a:r>
+              <a:rPr lang="en-US" sz="1400" b="1" dirty="0">
+                <a:solidFill>
+                  <a:schemeClr val="accent3"/>
+                </a:solidFill>
+              </a:rPr>
+              <a:t>Vắng</a:t>
+            </a:r>
+            <a:endParaRPr lang="en-US" sz="1400" dirty="0"/>
+          </a:p>
+        </p:txBody>
+      </p:sp>
+      <p:sp>
+        <p:nvSpPr>
+          <p:cNvPr id="8" name="Text 6"/>
+          <p:cNvSpPr txBox="1"/>
+          <p:nvPr/>
+        </p:nvSpPr>
+        <p:spPr>
+          <a:xfrm>
+            <a:off x="2240280" y="1938528"/>
+            <a:ext cx="3108960" cy="457200"/>
+          </a:xfrm>
+          <a:prstGeom prst="rect">
+            <a:avLst/>
+          </a:prstGeom>
+          <a:noFill/>
+          <a:ln/>
+        </p:spPr>
+        <p:txBody>
+          <a:bodyPr wrap="square" lIns="0" tIns="0" rIns="0" bIns="0" rtlCol="0" anchor="ctr"/>
+          <a:lstStyle/>
+          <a:p>
+            <a:pPr indent="0" marL="0">
+              <a:buNone/>
+            </a:pPr>
+            <a:r>
+              <a:rPr lang="en-US" sz="1500" dirty="0">
+                <a:solidFill>
+                  <a:schemeClr val="tx1"/>
+                </a:solidFill>
+              </a:rPr>
+              <a:t>Đã học thực tế → đề nghị bổ sung</a:t>
+            </a:r>
+            <a:endParaRPr lang="en-US" sz="1500" dirty="0"/>
+          </a:p>
+        </p:txBody>
+      </p:sp>
+      <p:sp>
+        <p:nvSpPr>
+          <p:cNvPr id="9" name="Nhan Vắng có phép"/>
+          <p:cNvSpPr/>
+          <p:nvPr/>
+        </p:nvSpPr>
+        <p:spPr>
+          <a:xfrm>
+            <a:off x="457200" y="2743200"/>
+            <a:ext cx="1554480" cy="402336"/>
+          </a:xfrm>
+          <a:prstGeom prst="roundRect">
+            <a:avLst>
+              <a:gd name="adj" fmla="val 50000"/>
+            </a:avLst>
+          </a:prstGeom>
+          <a:solidFill>
+            <a:schemeClr val="accent2">
+              <a:alpha val="22000"/>
+            </a:schemeClr>
+          </a:solidFill>
+          <a:ln w="12700">
+            <a:solidFill>
+              <a:schemeClr val="accent2"/>
+            </a:solidFill>
+            <a:prstDash val="solid"/>
+          </a:ln>
+        </p:spPr>
+      </p:sp>
+      <p:sp>
+        <p:nvSpPr>
+          <p:cNvPr id="10" name="Text 8"/>
+          <p:cNvSpPr txBox="1"/>
+          <p:nvPr/>
+        </p:nvSpPr>
+        <p:spPr>
+          <a:xfrm>
+            <a:off x="457200" y="2743200"/>
+            <a:ext cx="1554480" cy="402336"/>
+          </a:xfrm>
+          <a:prstGeom prst="rect">
+            <a:avLst/>
+          </a:prstGeom>
+          <a:noFill/>
+          <a:ln/>
+        </p:spPr>
+        <p:txBody>
+          <a:bodyPr wrap="square" lIns="0" tIns="0" rIns="0" bIns="0" rtlCol="0" anchor="ctr"/>
+          <a:lstStyle/>
+          <a:p>
+            <a:pPr algn="ctr" indent="0" marL="0">
+              <a:buNone/>
+            </a:pPr>
+            <a:r>
+              <a:rPr lang="en-US" sz="1400" b="1" dirty="0">
+                <a:solidFill>
+                  <a:schemeClr val="accent2"/>
+                </a:solidFill>
+              </a:rPr>
+              <a:t>Vắng có phép</a:t>
+            </a:r>
+            <a:endParaRPr lang="en-US" sz="1400" dirty="0"/>
+          </a:p>
+        </p:txBody>
+      </p:sp>
+      <p:sp>
+        <p:nvSpPr>
+          <p:cNvPr id="11" name="Text 9"/>
+          <p:cNvSpPr txBox="1"/>
+          <p:nvPr/>
+        </p:nvSpPr>
+        <p:spPr>
+          <a:xfrm>
+            <a:off x="2240280" y="2715768"/>
+            <a:ext cx="3108960" cy="457200"/>
+          </a:xfrm>
+          <a:prstGeom prst="rect">
+            <a:avLst/>
+          </a:prstGeom>
+          <a:noFill/>
+          <a:ln/>
+        </p:spPr>
+        <p:txBody>
+          <a:bodyPr wrap="square" lIns="0" tIns="0" rIns="0" bIns="0" rtlCol="0" anchor="ctr"/>
+          <a:lstStyle/>
+          <a:p>
+            <a:pPr indent="0" marL="0">
+              <a:buNone/>
+            </a:pPr>
+            <a:r>
+              <a:rPr lang="en-US" sz="1500" dirty="0">
+                <a:solidFill>
+                  <a:schemeClr val="tx1"/>
+                </a:solidFill>
+              </a:rPr>
+              <a:t>Lý do vắng đã được chấp nhận</a:t>
+            </a:r>
+            <a:endParaRPr lang="en-US" sz="1500" dirty="0"/>
+          </a:p>
+        </p:txBody>
+      </p:sp>
+      <p:sp>
+        <p:nvSpPr>
+          <p:cNvPr id="12" name="Nhan Không nhãn"/>
+          <p:cNvSpPr/>
+          <p:nvPr/>
+        </p:nvSpPr>
+        <p:spPr>
+          <a:xfrm>
+            <a:off x="457200" y="3520440"/>
+            <a:ext cx="1554480" cy="402336"/>
+          </a:xfrm>
+          <a:prstGeom prst="roundRect">
+            <a:avLst>
+              <a:gd name="adj" fmla="val 50000"/>
+            </a:avLst>
+          </a:prstGeom>
+          <a:solidFill>
+            <a:schemeClr val="accent5">
+              <a:alpha val="22000"/>
+            </a:schemeClr>
+          </a:solidFill>
+          <a:ln w="12700">
+            <a:solidFill>
+              <a:schemeClr val="accent5"/>
+            </a:solidFill>
+            <a:prstDash val="solid"/>
+          </a:ln>
+        </p:spPr>
+      </p:sp>
+      <p:sp>
+        <p:nvSpPr>
+          <p:cNvPr id="13" name="Text 11"/>
+          <p:cNvSpPr txBox="1"/>
+          <p:nvPr/>
+        </p:nvSpPr>
+        <p:spPr>
+          <a:xfrm>
+            <a:off x="457200" y="3520440"/>
+            <a:ext cx="1554480" cy="402336"/>
+          </a:xfrm>
+          <a:prstGeom prst="rect">
+            <a:avLst/>
+          </a:prstGeom>
+          <a:noFill/>
+          <a:ln/>
+        </p:spPr>
+        <p:txBody>
+          <a:bodyPr wrap="square" lIns="0" tIns="0" rIns="0" bIns="0" rtlCol="0" anchor="ctr"/>
+          <a:lstStyle/>
+          <a:p>
+            <a:pPr algn="ctr" indent="0" marL="0">
+              <a:buNone/>
+            </a:pPr>
+            <a:r>
+              <a:rPr lang="en-US" sz="1400" b="1" dirty="0">
+                <a:solidFill>
+                  <a:schemeClr val="accent5"/>
+                </a:solidFill>
+              </a:rPr>
+              <a:t>Không nhãn</a:t>
+            </a:r>
+            <a:endParaRPr lang="en-US" sz="1400" dirty="0"/>
+          </a:p>
+        </p:txBody>
+      </p:sp>
+      <p:sp>
+        <p:nvSpPr>
+          <p:cNvPr id="14" name="Text 12"/>
+          <p:cNvSpPr txBox="1"/>
+          <p:nvPr/>
+        </p:nvSpPr>
+        <p:spPr>
+          <a:xfrm>
+            <a:off x="2240280" y="3493008"/>
+            <a:ext cx="3108960" cy="457200"/>
+          </a:xfrm>
+          <a:prstGeom prst="rect">
+            <a:avLst/>
+          </a:prstGeom>
+          <a:noFill/>
+          <a:ln/>
+        </p:spPr>
+        <p:txBody>
+          <a:bodyPr wrap="square" lIns="0" tIns="0" rIns="0" bIns="0" rtlCol="0" anchor="ctr"/>
+          <a:lstStyle/>
+          <a:p>
+            <a:pPr indent="0" marL="0">
+              <a:buNone/>
+            </a:pPr>
+            <a:r>
+              <a:rPr lang="en-US" sz="1500" dirty="0">
+                <a:solidFill>
+                  <a:schemeClr val="tx1"/>
+                </a:solidFill>
+              </a:rPr>
+              <a:t>Chưa có kết quả điểm danh của buổi</a:t>
+            </a:r>
+            <a:endParaRPr lang="en-US" sz="1500" dirty="0"/>
+          </a:p>
+        </p:txBody>
+      </p:sp>
+      <p:sp>
+        <p:nvSpPr>
+          <p:cNvPr id="15" name="Lưu ý"/>
+          <p:cNvSpPr/>
+          <p:nvPr/>
+        </p:nvSpPr>
+        <p:spPr>
+          <a:xfrm>
+            <a:off x="5577840" y="1143000"/>
+            <a:ext cx="3108960" cy="2011680"/>
+          </a:xfrm>
+          <a:prstGeom prst="roundRect">
+            <a:avLst>
+              <a:gd name="adj" fmla="val 3636"/>
             </a:avLst>
           </a:prstGeom>
           <a:solidFill>
@@ -3562,14 +4419,14 @@
       </p:sp>
       <p:sp>
         <p:nvSpPr>
-          <p:cNvPr id="4" name="Text 2"/>
+          <p:cNvPr id="16" name="Text 14"/>
           <p:cNvSpPr txBox="1"/>
           <p:nvPr/>
         </p:nvSpPr>
         <p:spPr>
           <a:xfrm>
-            <a:off x="594360" y="1207008"/>
-            <a:ext cx="3703320" cy="2295144"/>
+            <a:off x="5715000" y="1252728"/>
+            <a:ext cx="2834640" cy="1792224"/>
           </a:xfrm>
           <a:prstGeom prst="rect">
             <a:avLst/>
@@ -3590,10 +4447,10 @@
             <a:r>
               <a:rPr lang="en-US" sz="1600" b="1" dirty="0">
                 <a:solidFill>
-                  <a:schemeClr val="accent1"/>
-                </a:solidFill>
-              </a:rPr>
-              <a:t>✓  Được xem xét</a:t>
+                  <a:schemeClr val="tx2"/>
+                </a:solidFill>
+              </a:rPr>
+              <a:t>Lưu ý</a:t>
             </a:r>
             <a:endParaRPr lang="en-US" sz="1600" dirty="0"/>
           </a:p>
@@ -3611,7 +4468,7 @@
                   <a:schemeClr val="tx1"/>
                 </a:solidFill>
               </a:rPr>
-              <a:t>Đã học Zoom nhưng quên bấm “Điểm danh &amp; vào Zoom”, hoặc bấm sau giờ đóng</a:t>
+              <a:t>“Không nhãn” chưa phải là vắng – có thể kết quả buổi đó chưa được nhập</a:t>
             </a:r>
             <a:endParaRPr lang="en-US" sz="1600" dirty="0"/>
           </a:p>
@@ -3629,229 +4486,9 @@
                   <a:schemeClr val="tx1"/>
                 </a:solidFill>
               </a:rPr>
-              <a:t>Vào Zoom bằng link khác, hoặc ở lại phòng từ buổi trước</a:t>
+              <a:t>Vài ngày sau buổi học vẫn chưa có nhãn? Hỏi người hỗ trợ lớp/cụm</a:t>
             </a:r>
             <a:endParaRPr lang="en-US" sz="1600" dirty="0"/>
-          </a:p>
-          <a:p>
-            <a:pPr marL="177800" indent="-177800">
-              <a:spcAft>
-                <a:spcPts val="400"/>
-              </a:spcAft>
-              <a:buSzPct val="100000"/>
-              <a:buChar char="•"/>
-            </a:pPr>
-            <a:r>
-              <a:rPr lang="en-US" sz="1400" dirty="0">
-                <a:solidFill>
-                  <a:schemeClr val="tx1"/>
-                </a:solidFill>
-              </a:rPr>
-              <a:t>Lớp trực tiếp: ký tên thiếu hoặc ký muộn</a:t>
-            </a:r>
-            <a:endParaRPr lang="en-US" sz="1600" dirty="0"/>
-          </a:p>
-          <a:p>
-            <a:pPr marL="177800" indent="-177800">
-              <a:spcAft>
-                <a:spcPts val="400"/>
-              </a:spcAft>
-              <a:buSzPct val="100000"/>
-              <a:buChar char="•"/>
-            </a:pPr>
-            <a:r>
-              <a:rPr lang="en-US" sz="1400" dirty="0">
-                <a:solidFill>
-                  <a:schemeClr val="tx1"/>
-                </a:solidFill>
-              </a:rPr>
-              <a:t>Vắng có lý do chính đáng → đề nghị “Vắng có phép”</a:t>
-            </a:r>
-            <a:endParaRPr lang="en-US" sz="1600" dirty="0"/>
-          </a:p>
-        </p:txBody>
-      </p:sp>
-      <p:sp>
-        <p:nvSpPr>
-          <p:cNvPr id="5" name="✕  Không cần / không được"/>
-          <p:cNvSpPr/>
-          <p:nvPr/>
-        </p:nvSpPr>
-        <p:spPr>
-          <a:xfrm>
-            <a:off x="4709160" y="1097280"/>
-            <a:ext cx="3977640" cy="2514600"/>
-          </a:xfrm>
-          <a:prstGeom prst="roundRect">
-            <a:avLst>
-              <a:gd name="adj" fmla="val 2909"/>
-            </a:avLst>
-          </a:prstGeom>
-          <a:solidFill>
-            <a:schemeClr val="bg2"/>
-          </a:solidFill>
-          <a:ln/>
-        </p:spPr>
-      </p:sp>
-      <p:sp>
-        <p:nvSpPr>
-          <p:cNvPr id="6" name="Text 4"/>
-          <p:cNvSpPr txBox="1"/>
-          <p:nvPr/>
-        </p:nvSpPr>
-        <p:spPr>
-          <a:xfrm>
-            <a:off x="4846320" y="1207008"/>
-            <a:ext cx="3703320" cy="2295144"/>
-          </a:xfrm>
-          <a:prstGeom prst="rect">
-            <a:avLst/>
-          </a:prstGeom>
-          <a:noFill/>
-          <a:ln/>
-        </p:spPr>
-        <p:txBody>
-          <a:bodyPr wrap="square" lIns="0" tIns="0" rIns="0" bIns="0" rtlCol="0" anchor="t"/>
-          <a:lstStyle/>
-          <a:p>
-            <a:pPr indent="0" marL="0">
-              <a:spcAft>
-                <a:spcPts val="600"/>
-              </a:spcAft>
-              <a:buNone/>
-            </a:pPr>
-            <a:r>
-              <a:rPr lang="en-US" sz="1600" b="1" dirty="0">
-                <a:solidFill>
-                  <a:schemeClr val="accent3"/>
-                </a:solidFill>
-              </a:rPr>
-              <a:t>✕  Không cần / không được</a:t>
-            </a:r>
-            <a:endParaRPr lang="en-US" sz="1600" dirty="0"/>
-          </a:p>
-          <a:p>
-            <a:pPr marL="177800" indent="-177800">
-              <a:spcAft>
-                <a:spcPts val="400"/>
-              </a:spcAft>
-              <a:buSzPct val="100000"/>
-              <a:buChar char="•"/>
-            </a:pPr>
-            <a:r>
-              <a:rPr lang="en-US" sz="1400" dirty="0">
-                <a:solidFill>
-                  <a:schemeClr val="tx1"/>
-                </a:solidFill>
-              </a:rPr>
-              <a:t>Buổi đã hiện “Có mặt” (kể cả đã có mặt ở lớp cũ)</a:t>
-            </a:r>
-            <a:endParaRPr lang="en-US" sz="1600" dirty="0"/>
-          </a:p>
-          <a:p>
-            <a:pPr marL="177800" indent="-177800">
-              <a:spcAft>
-                <a:spcPts val="400"/>
-              </a:spcAft>
-              <a:buSzPct val="100000"/>
-              <a:buChar char="•"/>
-            </a:pPr>
-            <a:r>
-              <a:rPr lang="en-US" sz="1400" dirty="0">
-                <a:solidFill>
-                  <a:schemeClr val="tx1"/>
-                </a:solidFill>
-              </a:rPr>
-              <a:t>Buổi chưa diễn ra</a:t>
-            </a:r>
-            <a:endParaRPr lang="en-US" sz="1600" dirty="0"/>
-          </a:p>
-          <a:p>
-            <a:pPr marL="177800" indent="-177800">
-              <a:spcAft>
-                <a:spcPts val="400"/>
-              </a:spcAft>
-              <a:buSzPct val="100000"/>
-              <a:buChar char="•"/>
-            </a:pPr>
-            <a:r>
-              <a:rPr lang="en-US" sz="1400" dirty="0">
-                <a:solidFill>
-                  <a:schemeClr val="tx1"/>
-                </a:solidFill>
-              </a:rPr>
-              <a:t>Không có minh chứng đã tham gia hoặc lý do vắng</a:t>
-            </a:r>
-            <a:endParaRPr lang="en-US" sz="1600" dirty="0"/>
-          </a:p>
-        </p:txBody>
-      </p:sp>
-      <p:sp>
-        <p:nvSpPr>
-          <p:cNvPr id="7" name="Goi y"/>
-          <p:cNvSpPr/>
-          <p:nvPr/>
-        </p:nvSpPr>
-        <p:spPr>
-          <a:xfrm>
-            <a:off x="457200" y="3794760"/>
-            <a:ext cx="8229600" cy="685800"/>
-          </a:xfrm>
-          <a:prstGeom prst="roundRect">
-            <a:avLst>
-              <a:gd name="adj" fmla="val 10667"/>
-            </a:avLst>
-          </a:prstGeom>
-          <a:solidFill>
-            <a:schemeClr val="tx2"/>
-          </a:solidFill>
-          <a:ln/>
-        </p:spPr>
-      </p:sp>
-      <p:sp>
-        <p:nvSpPr>
-          <p:cNvPr id="8" name="Text 6"/>
-          <p:cNvSpPr txBox="1"/>
-          <p:nvPr/>
-        </p:nvSpPr>
-        <p:spPr>
-          <a:xfrm>
-            <a:off x="640080" y="3794760"/>
-            <a:ext cx="7863840" cy="685800"/>
-          </a:xfrm>
-          <a:prstGeom prst="rect">
-            <a:avLst/>
-          </a:prstGeom>
-          <a:noFill/>
-          <a:ln/>
-        </p:spPr>
-        <p:txBody>
-          <a:bodyPr wrap="square" lIns="0" tIns="0" rIns="0" bIns="0" rtlCol="0" anchor="ctr"/>
-          <a:lstStyle/>
-          <a:p>
-            <a:pPr indent="0" marL="0">
-              <a:buNone/>
-            </a:pPr>
-            <a:r>
-              <a:rPr lang="en-US" sz="1400" b="1" dirty="0">
-                <a:solidFill>
-                  <a:schemeClr val="accent6"/>
-                </a:solidFill>
-              </a:rPr>
-              <a:t>Chưa chắc buổi của mình thuộc trường hợp nào? </a:t>
-            </a:r>
-            <a:pPr indent="0" marL="0">
-              <a:buNone/>
-            </a:pPr>
-            <a:r>
-              <a:rPr lang="en-US" sz="1400" dirty="0">
-                <a:solidFill>
-                  <a:schemeClr val="bg1"/>
-                </a:solidFill>
-              </a:rPr>
-              <a:t>Cứ hỏi người hỗ trợ lớp/cụm – họ tra được từng buổi.</a:t>
-            </a:r>
-            <a:endParaRPr lang="en-US" sz="1400" dirty="0"/>
           </a:p>
         </p:txBody>
       </p:sp>
@@ -3867,8 +4504,8 @@
         </p:nvSpPr>
         <p:spPr>
           <a:xfrm>
-            <a:off x="8229600" y="4754880"/>
-            <a:ext cx="457200" cy="228600"/>
+            <a:off x="8229600" y="4800600"/>
+            <a:ext cx="457200" cy="201168"/>
           </a:xfrm>
           <a:prstGeom prst="rect">
             <a:avLst/>
@@ -3935,8 +4572,8 @@
         </p:nvSpPr>
         <p:spPr>
           <a:xfrm>
-            <a:off x="457200" y="274320"/>
-            <a:ext cx="8229600" cy="640080"/>
+            <a:off x="457200" y="228600"/>
+            <a:ext cx="8229600" cy="594360"/>
           </a:xfrm>
           <a:prstGeom prst="rect">
             <a:avLst/>
@@ -3957,7 +4594,7 @@
                   <a:schemeClr val="tx2"/>
                 </a:solidFill>
               </a:rPr>
-              <a:t>Bước 2 – Chuẩn bị thông tin và minh chứng</a:t>
+              <a:t>Khi nào nên đề nghị điểm danh bổ sung?</a:t>
             </a:r>
             <a:endParaRPr lang="en-US" sz="2800" dirty="0"/>
           </a:p>
@@ -3965,18 +4602,18 @@
       </p:sp>
       <p:sp>
         <p:nvSpPr>
-          <p:cNvPr id="3" name="Thông tin buổi học"/>
+          <p:cNvPr id="3" name="✓  Được xem xét"/>
           <p:cNvSpPr/>
           <p:nvPr/>
         </p:nvSpPr>
         <p:spPr>
           <a:xfrm>
             <a:off x="457200" y="1097280"/>
-            <a:ext cx="3977640" cy="1508760"/>
+            <a:ext cx="3977640" cy="2514600"/>
           </a:xfrm>
           <a:prstGeom prst="roundRect">
             <a:avLst>
-              <a:gd name="adj" fmla="val 4848"/>
+              <a:gd name="adj" fmla="val 2909"/>
             </a:avLst>
           </a:prstGeom>
           <a:solidFill>
@@ -3994,7 +4631,7 @@
         <p:spPr>
           <a:xfrm>
             <a:off x="594360" y="1207008"/>
-            <a:ext cx="3703320" cy="1289304"/>
+            <a:ext cx="3703320" cy="2295144"/>
           </a:xfrm>
           <a:prstGeom prst="rect">
             <a:avLst/>
@@ -4015,10 +4652,10 @@
             <a:r>
               <a:rPr lang="en-US" sz="1600" b="1" dirty="0">
                 <a:solidFill>
-                  <a:schemeClr val="tx2"/>
-                </a:solidFill>
-              </a:rPr>
-              <a:t>Thông tin buổi học</a:t>
+                  <a:schemeClr val="accent1"/>
+                </a:solidFill>
+              </a:rPr>
+              <a:t>✓  Được xem xét</a:t>
             </a:r>
             <a:endParaRPr lang="en-US" sz="1600" dirty="0"/>
           </a:p>
@@ -4036,7 +4673,7 @@
                   <a:schemeClr val="tx1"/>
                 </a:solidFill>
               </a:rPr>
-              <a:t>Họ tên, mã MOET, trường</a:t>
+              <a:t>Đã học Zoom nhưng quên bấm “Điểm danh &amp; vào Zoom”, hoặc bấm sau giờ đóng</a:t>
             </a:r>
             <a:endParaRPr lang="en-US" sz="1600" dirty="0"/>
           </a:p>
@@ -4054,68 +4691,7 @@
                   <a:schemeClr val="tx1"/>
                 </a:solidFill>
               </a:rPr>
-              <a:t>Lớp · giai đoạn · buổi số · ngày học</a:t>
-            </a:r>
-            <a:endParaRPr lang="en-US" sz="1600" dirty="0"/>
-          </a:p>
-        </p:txBody>
-      </p:sp>
-      <p:sp>
-        <p:nvSpPr>
-          <p:cNvPr id="5" name="Minh chứng (ảnh)"/>
-          <p:cNvSpPr/>
-          <p:nvPr/>
-        </p:nvSpPr>
-        <p:spPr>
-          <a:xfrm>
-            <a:off x="457200" y="2788920"/>
-            <a:ext cx="3977640" cy="1691640"/>
-          </a:xfrm>
-          <a:prstGeom prst="roundRect">
-            <a:avLst>
-              <a:gd name="adj" fmla="val 4324"/>
-            </a:avLst>
-          </a:prstGeom>
-          <a:solidFill>
-            <a:schemeClr val="bg2"/>
-          </a:solidFill>
-          <a:ln/>
-        </p:spPr>
-      </p:sp>
-      <p:sp>
-        <p:nvSpPr>
-          <p:cNvPr id="6" name="Text 4"/>
-          <p:cNvSpPr txBox="1"/>
-          <p:nvPr/>
-        </p:nvSpPr>
-        <p:spPr>
-          <a:xfrm>
-            <a:off x="594360" y="2898648"/>
-            <a:ext cx="3703320" cy="1472184"/>
-          </a:xfrm>
-          <a:prstGeom prst="rect">
-            <a:avLst/>
-          </a:prstGeom>
-          <a:noFill/>
-          <a:ln/>
-        </p:spPr>
-        <p:txBody>
-          <a:bodyPr wrap="square" lIns="0" tIns="0" rIns="0" bIns="0" rtlCol="0" anchor="t"/>
-          <a:lstStyle/>
-          <a:p>
-            <a:pPr indent="0" marL="0">
-              <a:spcAft>
-                <a:spcPts val="600"/>
-              </a:spcAft>
-              <a:buNone/>
-            </a:pPr>
-            <a:r>
-              <a:rPr lang="en-US" sz="1600" b="1" dirty="0">
-                <a:solidFill>
-                  <a:schemeClr val="tx2"/>
-                </a:solidFill>
-              </a:rPr>
-              <a:t>Minh chứng (ảnh)</a:t>
+              <a:t>Vào Zoom bằng link khác, hoặc ở lại phòng từ buổi trước</a:t>
             </a:r>
             <a:endParaRPr lang="en-US" sz="1600" dirty="0"/>
           </a:p>
@@ -4133,7 +4709,7 @@
                   <a:schemeClr val="tx1"/>
                 </a:solidFill>
               </a:rPr>
-              <a:t>Ảnh màn hình Zoom thấy tên + giờ</a:t>
+              <a:t>Lớp trực tiếp: ký tên thiếu hoặc ký muộn</a:t>
             </a:r>
             <a:endParaRPr lang="en-US" sz="1600" dirty="0"/>
           </a:p>
@@ -4151,7 +4727,68 @@
                   <a:schemeClr val="tx1"/>
                 </a:solidFill>
               </a:rPr>
-              <a:t>Ảnh danh sách ký tên / xác nhận của giảng viên</a:t>
+              <a:t>Vắng có lý do chính đáng → đề nghị “Vắng có phép”</a:t>
+            </a:r>
+            <a:endParaRPr lang="en-US" sz="1600" dirty="0"/>
+          </a:p>
+        </p:txBody>
+      </p:sp>
+      <p:sp>
+        <p:nvSpPr>
+          <p:cNvPr id="5" name="✕  Không cần / không được"/>
+          <p:cNvSpPr/>
+          <p:nvPr/>
+        </p:nvSpPr>
+        <p:spPr>
+          <a:xfrm>
+            <a:off x="4709160" y="1097280"/>
+            <a:ext cx="3977640" cy="2514600"/>
+          </a:xfrm>
+          <a:prstGeom prst="roundRect">
+            <a:avLst>
+              <a:gd name="adj" fmla="val 2909"/>
+            </a:avLst>
+          </a:prstGeom>
+          <a:solidFill>
+            <a:schemeClr val="bg2"/>
+          </a:solidFill>
+          <a:ln/>
+        </p:spPr>
+      </p:sp>
+      <p:sp>
+        <p:nvSpPr>
+          <p:cNvPr id="6" name="Text 4"/>
+          <p:cNvSpPr txBox="1"/>
+          <p:nvPr/>
+        </p:nvSpPr>
+        <p:spPr>
+          <a:xfrm>
+            <a:off x="4846320" y="1207008"/>
+            <a:ext cx="3703320" cy="2295144"/>
+          </a:xfrm>
+          <a:prstGeom prst="rect">
+            <a:avLst/>
+          </a:prstGeom>
+          <a:noFill/>
+          <a:ln/>
+        </p:spPr>
+        <p:txBody>
+          <a:bodyPr wrap="square" lIns="0" tIns="0" rIns="0" bIns="0" rtlCol="0" anchor="t"/>
+          <a:lstStyle/>
+          <a:p>
+            <a:pPr indent="0" marL="0">
+              <a:spcAft>
+                <a:spcPts val="600"/>
+              </a:spcAft>
+              <a:buNone/>
+            </a:pPr>
+            <a:r>
+              <a:rPr lang="en-US" sz="1600" b="1" dirty="0">
+                <a:solidFill>
+                  <a:schemeClr val="accent3"/>
+                </a:solidFill>
+              </a:rPr>
+              <a:t>✕  Không cần / không được</a:t>
             </a:r>
             <a:endParaRPr lang="en-US" sz="1600" dirty="0"/>
           </a:p>
@@ -4169,26 +4806,62 @@
                   <a:schemeClr val="tx1"/>
                 </a:solidFill>
               </a:rPr>
-              <a:t>Giấy tờ lý do (nếu xin vắng có phép)</a:t>
+              <a:t>Buổi đã hiện “Có mặt” (kể cả đã có mặt ở lớp cũ)</a:t>
             </a:r>
             <a:endParaRPr lang="en-US" sz="1600" dirty="0"/>
           </a:p>
-        </p:txBody>
-      </p:sp>
-      <p:sp>
-        <p:nvSpPr>
-          <p:cNvPr id="7" name="Tin nhan mau"/>
+          <a:p>
+            <a:pPr marL="177800" indent="-177800">
+              <a:spcAft>
+                <a:spcPts val="400"/>
+              </a:spcAft>
+              <a:buSzPct val="100000"/>
+              <a:buChar char="•"/>
+            </a:pPr>
+            <a:r>
+              <a:rPr lang="en-US" sz="1400" dirty="0">
+                <a:solidFill>
+                  <a:schemeClr val="tx1"/>
+                </a:solidFill>
+              </a:rPr>
+              <a:t>Buổi chưa diễn ra</a:t>
+            </a:r>
+            <a:endParaRPr lang="en-US" sz="1600" dirty="0"/>
+          </a:p>
+          <a:p>
+            <a:pPr marL="177800" indent="-177800">
+              <a:spcAft>
+                <a:spcPts val="400"/>
+              </a:spcAft>
+              <a:buSzPct val="100000"/>
+              <a:buChar char="•"/>
+            </a:pPr>
+            <a:r>
+              <a:rPr lang="en-US" sz="1400" dirty="0">
+                <a:solidFill>
+                  <a:schemeClr val="tx1"/>
+                </a:solidFill>
+              </a:rPr>
+              <a:t>Không có minh chứng đã tham gia hoặc lý do vắng</a:t>
+            </a:r>
+            <a:endParaRPr lang="en-US" sz="1600" dirty="0"/>
+          </a:p>
+        </p:txBody>
+      </p:sp>
+      <p:sp>
+        <p:nvSpPr>
+          <p:cNvPr id="7" name="Goi y"/>
           <p:cNvSpPr/>
           <p:nvPr/>
         </p:nvSpPr>
         <p:spPr>
           <a:xfrm>
-            <a:off x="4709160" y="1097280"/>
-            <a:ext cx="3977640" cy="3383280"/>
+            <a:off x="457200" y="3794760"/>
+            <a:ext cx="8229600" cy="685800"/>
           </a:xfrm>
           <a:prstGeom prst="roundRect">
             <a:avLst>
-              <a:gd name="adj" fmla="val 2162"/>
+              <a:gd name="adj" fmla="val 10667"/>
             </a:avLst>
           </a:prstGeom>
           <a:solidFill>
@@ -4205,8 +4878,8 @@
         </p:nvSpPr>
         <p:spPr>
           <a:xfrm>
-            <a:off x="4892040" y="1207008"/>
-            <a:ext cx="3657600" cy="320040"/>
+            <a:off x="640080" y="3794760"/>
+            <a:ext cx="7863840" cy="685800"/>
           </a:xfrm>
           <a:prstGeom prst="rect">
             <a:avLst/>
@@ -4227,119 +4900,18 @@
                   <a:schemeClr val="accent6"/>
                 </a:solidFill>
               </a:rPr>
-              <a:t>Tin nhắn mẫu gửi người hỗ trợ</a:t>
-            </a:r>
-            <a:endParaRPr lang="en-US" sz="1400" dirty="0"/>
-          </a:p>
-        </p:txBody>
-      </p:sp>
-      <p:sp>
-        <p:nvSpPr>
-          <p:cNvPr id="9" name="Bong bong tin nhan"/>
-          <p:cNvSpPr/>
-          <p:nvPr/>
-        </p:nvSpPr>
-        <p:spPr>
-          <a:xfrm>
-            <a:off x="4892040" y="1645920"/>
-            <a:ext cx="3611880" cy="2651760"/>
-          </a:xfrm>
-          <a:prstGeom prst="roundRect">
-            <a:avLst>
-              <a:gd name="adj" fmla="val 4138"/>
-            </a:avLst>
-          </a:prstGeom>
-          <a:solidFill>
-            <a:schemeClr val="bg1"/>
-          </a:solidFill>
-          <a:ln/>
-        </p:spPr>
-      </p:sp>
-      <p:sp>
-        <p:nvSpPr>
-          <p:cNvPr id="10" name="Text 8"/>
-          <p:cNvSpPr txBox="1"/>
-          <p:nvPr/>
-        </p:nvSpPr>
-        <p:spPr>
-          <a:xfrm>
-            <a:off x="5074920" y="1783080"/>
-            <a:ext cx="3246120" cy="2377440"/>
-          </a:xfrm>
-          <a:prstGeom prst="rect">
-            <a:avLst/>
-          </a:prstGeom>
-          <a:noFill/>
-          <a:ln/>
-        </p:spPr>
-        <p:txBody>
-          <a:bodyPr wrap="square" lIns="0" tIns="0" rIns="0" bIns="0" rtlCol="0" anchor="t"/>
-          <a:lstStyle/>
-          <a:p>
+              <a:t>Chưa chắc buổi của mình thuộc trường hợp nào? </a:t>
+            </a:r>
             <a:pPr indent="0" marL="0">
-              <a:spcAft>
-                <a:spcPts val="600"/>
-              </a:spcAft>
               <a:buNone/>
             </a:pPr>
             <a:r>
               <a:rPr lang="en-US" sz="1400" dirty="0">
                 <a:solidFill>
-                  <a:schemeClr val="tx1"/>
-                </a:solidFill>
-              </a:rPr>
-              <a:t>Em là Nguyễn Văn An, mã MOET 79xxxxxx, trường THPT …</a:t>
-            </a:r>
-            <a:endParaRPr lang="en-US" sz="1400" dirty="0"/>
-          </a:p>
-          <a:p>
-            <a:pPr indent="0" marL="0">
-              <a:spcAft>
-                <a:spcPts val="600"/>
-              </a:spcAft>
-              <a:buNone/>
-            </a:pPr>
-            <a:r>
-              <a:rPr lang="en-US" sz="1400" dirty="0">
-                <a:solidFill>
-                  <a:schemeClr val="tx1"/>
-                </a:solidFill>
-              </a:rPr>
-              <a:t>Lớp … – GĐ 2 – Buổi 2 – ngày 17/10.</a:t>
-            </a:r>
-            <a:endParaRPr lang="en-US" sz="1400" dirty="0"/>
-          </a:p>
-          <a:p>
-            <a:pPr indent="0" marL="0">
-              <a:spcAft>
-                <a:spcPts val="600"/>
-              </a:spcAft>
-              <a:buNone/>
-            </a:pPr>
-            <a:r>
-              <a:rPr lang="en-US" sz="1400" dirty="0">
-                <a:solidFill>
-                  <a:schemeClr val="tx1"/>
-                </a:solidFill>
-              </a:rPr>
-              <a:t>Em đã tham gia nhưng bị ghi vắng, nhờ Thầy/Cô điểm danh bổ sung.</a:t>
-            </a:r>
-            <a:endParaRPr lang="en-US" sz="1400" dirty="0"/>
-          </a:p>
-          <a:p>
-            <a:pPr indent="0" marL="0">
-              <a:spcAft>
-                <a:spcPts val="600"/>
-              </a:spcAft>
-              <a:buNone/>
-            </a:pPr>
-            <a:r>
-              <a:rPr lang="en-US" sz="1400" i="1" dirty="0">
-                <a:solidFill>
-                  <a:schemeClr val="accent5"/>
-                </a:solidFill>
-              </a:rPr>
-              <a:t>Minh chứng: ảnh Zoom đính kèm (hoặc link Drive).</a:t>
+                  <a:schemeClr val="bg1"/>
+                </a:solidFill>
+              </a:rPr>
+              <a:t>Cứ hỏi người hỗ trợ lớp/cụm – họ tra được từng buổi.</a:t>
             </a:r>
             <a:endParaRPr lang="en-US" sz="1400" dirty="0"/>
           </a:p>
@@ -4357,8 +4929,8 @@
         </p:nvSpPr>
         <p:spPr>
           <a:xfrm>
-            <a:off x="8229600" y="4754880"/>
-            <a:ext cx="457200" cy="228600"/>
+            <a:off x="8229600" y="4800600"/>
+            <a:ext cx="457200" cy="201168"/>
           </a:xfrm>
           <a:prstGeom prst="rect">
             <a:avLst/>
@@ -4425,8 +4997,8 @@
         </p:nvSpPr>
         <p:spPr>
           <a:xfrm>
-            <a:off x="457200" y="274320"/>
-            <a:ext cx="8229600" cy="640080"/>
+            <a:off x="457200" y="228600"/>
+            <a:ext cx="8229600" cy="594360"/>
           </a:xfrm>
           <a:prstGeom prst="rect">
             <a:avLst/>
@@ -4447,7 +5019,7 @@
                   <a:schemeClr val="tx2"/>
                 </a:solidFill>
               </a:rPr>
-              <a:t>Bước 3 – Gửi minh chứng: chọn 1 trong 2 cách</a:t>
+              <a:t>Bước 2 – Chuẩn bị thông tin và minh chứng</a:t>
             </a:r>
             <a:endParaRPr lang="en-US" sz="2800" dirty="0"/>
           </a:p>
@@ -4455,18 +5027,18 @@
       </p:sp>
       <p:sp>
         <p:nvSpPr>
-          <p:cNvPr id="3" name="Cách 1 · Zalo (nhanh nhất)"/>
+          <p:cNvPr id="3" name="Thông tin buổi học"/>
           <p:cNvSpPr/>
           <p:nvPr/>
         </p:nvSpPr>
         <p:spPr>
           <a:xfrm>
             <a:off x="457200" y="1097280"/>
-            <a:ext cx="3977640" cy="2103120"/>
+            <a:ext cx="3977640" cy="1508760"/>
           </a:xfrm>
           <a:prstGeom prst="roundRect">
             <a:avLst>
-              <a:gd name="adj" fmla="val 3478"/>
+              <a:gd name="adj" fmla="val 4848"/>
             </a:avLst>
           </a:prstGeom>
           <a:solidFill>
@@ -4484,7 +5056,7 @@
         <p:spPr>
           <a:xfrm>
             <a:off x="594360" y="1207008"/>
-            <a:ext cx="3703320" cy="1883664"/>
+            <a:ext cx="3703320" cy="1289304"/>
           </a:xfrm>
           <a:prstGeom prst="rect">
             <a:avLst/>
@@ -4505,10 +5077,10 @@
             <a:r>
               <a:rPr lang="en-US" sz="1600" b="1" dirty="0">
                 <a:solidFill>
-                  <a:schemeClr val="accent1"/>
-                </a:solidFill>
-              </a:rPr>
-              <a:t>Cách 1 · Zalo (nhanh nhất)</a:t>
+                  <a:schemeClr val="tx2"/>
+                </a:solidFill>
+              </a:rPr>
+              <a:t>Thông tin buổi học</a:t>
             </a:r>
             <a:endParaRPr lang="en-US" sz="1600" dirty="0"/>
           </a:p>
@@ -4526,7 +5098,7 @@
                   <a:schemeClr val="tx1"/>
                 </a:solidFill>
               </a:rPr>
-              <a:t>Nhắn người hỗ trợ lớp/cụm theo tin nhắn mẫu</a:t>
+              <a:t>Họ tên, mã MOET, trường</a:t>
             </a:r>
             <a:endParaRPr lang="en-US" sz="1600" dirty="0"/>
           </a:p>
@@ -4544,7 +5116,68 @@
                   <a:schemeClr val="tx1"/>
                 </a:solidFill>
               </a:rPr>
-              <a:t>Gửi ảnh trực tiếp trong Zalo – không cần chia sẻ quyền</a:t>
+              <a:t>Lớp · giai đoạn · buổi số · ngày học</a:t>
+            </a:r>
+            <a:endParaRPr lang="en-US" sz="1600" dirty="0"/>
+          </a:p>
+        </p:txBody>
+      </p:sp>
+      <p:sp>
+        <p:nvSpPr>
+          <p:cNvPr id="5" name="Minh chứng (ảnh)"/>
+          <p:cNvSpPr/>
+          <p:nvPr/>
+        </p:nvSpPr>
+        <p:spPr>
+          <a:xfrm>
+            <a:off x="457200" y="2788920"/>
+            <a:ext cx="3977640" cy="1691640"/>
+          </a:xfrm>
+          <a:prstGeom prst="roundRect">
+            <a:avLst>
+              <a:gd name="adj" fmla="val 4324"/>
+            </a:avLst>
+          </a:prstGeom>
+          <a:solidFill>
+            <a:schemeClr val="bg2"/>
+          </a:solidFill>
+          <a:ln/>
+        </p:spPr>
+      </p:sp>
+      <p:sp>
+        <p:nvSpPr>
+          <p:cNvPr id="6" name="Text 4"/>
+          <p:cNvSpPr txBox="1"/>
+          <p:nvPr/>
+        </p:nvSpPr>
+        <p:spPr>
+          <a:xfrm>
+            <a:off x="594360" y="2898648"/>
+            <a:ext cx="3703320" cy="1472184"/>
+          </a:xfrm>
+          <a:prstGeom prst="rect">
+            <a:avLst/>
+          </a:prstGeom>
+          <a:noFill/>
+          <a:ln/>
+        </p:spPr>
+        <p:txBody>
+          <a:bodyPr wrap="square" lIns="0" tIns="0" rIns="0" bIns="0" rtlCol="0" anchor="t"/>
+          <a:lstStyle/>
+          <a:p>
+            <a:pPr indent="0" marL="0">
+              <a:spcAft>
+                <a:spcPts val="600"/>
+              </a:spcAft>
+              <a:buNone/>
+            </a:pPr>
+            <a:r>
+              <a:rPr lang="en-US" sz="1600" b="1" dirty="0">
+                <a:solidFill>
+                  <a:schemeClr val="tx2"/>
+                </a:solidFill>
+              </a:rPr>
+              <a:t>Minh chứng (ảnh)</a:t>
             </a:r>
             <a:endParaRPr lang="en-US" sz="1600" dirty="0"/>
           </a:p>
@@ -4562,68 +5195,7 @@
                   <a:schemeClr val="tx1"/>
                 </a:solidFill>
               </a:rPr>
-              <a:t>Người hỗ trợ trả lời ngay trên Zalo</a:t>
-            </a:r>
-            <a:endParaRPr lang="en-US" sz="1600" dirty="0"/>
-          </a:p>
-        </p:txBody>
-      </p:sp>
-      <p:sp>
-        <p:nvSpPr>
-          <p:cNvPr id="5" name="Cách 2 · Mục Hỗ trợ trên cổng"/>
-          <p:cNvSpPr/>
-          <p:nvPr/>
-        </p:nvSpPr>
-        <p:spPr>
-          <a:xfrm>
-            <a:off x="4709160" y="1097280"/>
-            <a:ext cx="3977640" cy="2103120"/>
-          </a:xfrm>
-          <a:prstGeom prst="roundRect">
-            <a:avLst>
-              <a:gd name="adj" fmla="val 3478"/>
-            </a:avLst>
-          </a:prstGeom>
-          <a:solidFill>
-            <a:schemeClr val="bg2"/>
-          </a:solidFill>
-          <a:ln/>
-        </p:spPr>
-      </p:sp>
-      <p:sp>
-        <p:nvSpPr>
-          <p:cNvPr id="6" name="Text 4"/>
-          <p:cNvSpPr txBox="1"/>
-          <p:nvPr/>
-        </p:nvSpPr>
-        <p:spPr>
-          <a:xfrm>
-            <a:off x="4846320" y="1207008"/>
-            <a:ext cx="3703320" cy="1883664"/>
-          </a:xfrm>
-          <a:prstGeom prst="rect">
-            <a:avLst/>
-          </a:prstGeom>
-          <a:noFill/>
-          <a:ln/>
-        </p:spPr>
-        <p:txBody>
-          <a:bodyPr wrap="square" lIns="0" tIns="0" rIns="0" bIns="0" rtlCol="0" anchor="t"/>
-          <a:lstStyle/>
-          <a:p>
-            <a:pPr indent="0" marL="0">
-              <a:spcAft>
-                <a:spcPts val="600"/>
-              </a:spcAft>
-              <a:buNone/>
-            </a:pPr>
-            <a:r>
-              <a:rPr lang="en-US" sz="1600" b="1" dirty="0">
-                <a:solidFill>
-                  <a:schemeClr val="tx2"/>
-                </a:solidFill>
-              </a:rPr>
-              <a:t>Cách 2 · Mục Hỗ trợ trên cổng</a:t>
+              <a:t>Ảnh màn hình Zoom thấy tên + giờ</a:t>
             </a:r>
             <a:endParaRPr lang="en-US" sz="1600" dirty="0"/>
           </a:p>
@@ -4641,7 +5213,7 @@
                   <a:schemeClr val="tx1"/>
                 </a:solidFill>
               </a:rPr>
-              <a:t>Ô nội dung chỉ nhận chữ – không đính kèm ảnh</a:t>
+              <a:t>Ảnh danh sách ký tên / xác nhận của giảng viên</a:t>
             </a:r>
             <a:endParaRPr lang="en-US" sz="1600" dirty="0"/>
           </a:p>
@@ -4659,50 +5231,30 @@
                   <a:schemeClr val="tx1"/>
                 </a:solidFill>
               </a:rPr>
-              <a:t>Tải ảnh lên Google Drive, mở chia sẻ, dán link vào nội dung (trang sau)</a:t>
+              <a:t>Giấy tờ lý do (nếu xin vắng có phép)</a:t>
             </a:r>
             <a:endParaRPr lang="en-US" sz="1600" dirty="0"/>
           </a:p>
-          <a:p>
-            <a:pPr marL="177800" indent="-177800">
-              <a:spcAft>
-                <a:spcPts val="400"/>
-              </a:spcAft>
-              <a:buSzPct val="100000"/>
-              <a:buChar char="•"/>
-            </a:pPr>
-            <a:r>
-              <a:rPr lang="en-US" sz="1400" dirty="0">
-                <a:solidFill>
-                  <a:schemeClr val="tx1"/>
-                </a:solidFill>
-              </a:rPr>
-              <a:t>Câu trả lời hiện ngay trong mục Hỗ trợ</a:t>
-            </a:r>
-            <a:endParaRPr lang="en-US" sz="1600" dirty="0"/>
-          </a:p>
-        </p:txBody>
-      </p:sp>
-      <p:sp>
-        <p:nvSpPr>
-          <p:cNvPr id="7" name="Canh bao giay to"/>
+        </p:txBody>
+      </p:sp>
+      <p:sp>
+        <p:nvSpPr>
+          <p:cNvPr id="7" name="Tin nhan mau"/>
           <p:cNvSpPr/>
           <p:nvPr/>
         </p:nvSpPr>
         <p:spPr>
           <a:xfrm>
-            <a:off x="457200" y="3429000"/>
-            <a:ext cx="8229600" cy="685800"/>
+            <a:off x="4709160" y="1097280"/>
+            <a:ext cx="3977640" cy="3383280"/>
           </a:xfrm>
           <a:prstGeom prst="roundRect">
             <a:avLst>
-              <a:gd name="adj" fmla="val 10667"/>
+              <a:gd name="adj" fmla="val 2162"/>
             </a:avLst>
           </a:prstGeom>
           <a:solidFill>
-            <a:schemeClr val="accent3">
-              <a:alpha val="15000"/>
-            </a:schemeClr>
+            <a:schemeClr val="tx2"/>
           </a:solidFill>
           <a:ln/>
         </p:spPr>
@@ -4715,8 +5267,8 @@
         </p:nvSpPr>
         <p:spPr>
           <a:xfrm>
-            <a:off x="640080" y="3429000"/>
-            <a:ext cx="7863840" cy="685800"/>
+            <a:off x="4892040" y="1207008"/>
+            <a:ext cx="3657600" cy="320040"/>
           </a:xfrm>
           <a:prstGeom prst="rect">
             <a:avLst/>
@@ -4734,12 +5286,62 @@
             <a:r>
               <a:rPr lang="en-US" sz="1400" b="1" dirty="0">
                 <a:solidFill>
-                  <a:schemeClr val="accent3"/>
-                </a:solidFill>
-              </a:rPr>
-              <a:t>Không gửi ảnh CCCD hay giấy tờ tùy thân. </a:t>
-            </a:r>
+                  <a:schemeClr val="accent6"/>
+                </a:solidFill>
+              </a:rPr>
+              <a:t>Tin nhắn mẫu gửi người hỗ trợ</a:t>
+            </a:r>
+            <a:endParaRPr lang="en-US" sz="1400" dirty="0"/>
+          </a:p>
+        </p:txBody>
+      </p:sp>
+      <p:sp>
+        <p:nvSpPr>
+          <p:cNvPr id="9" name="Bong bong tin nhan"/>
+          <p:cNvSpPr/>
+          <p:nvPr/>
+        </p:nvSpPr>
+        <p:spPr>
+          <a:xfrm>
+            <a:off x="4892040" y="1645920"/>
+            <a:ext cx="3611880" cy="2651760"/>
+          </a:xfrm>
+          <a:prstGeom prst="roundRect">
+            <a:avLst>
+              <a:gd name="adj" fmla="val 4138"/>
+            </a:avLst>
+          </a:prstGeom>
+          <a:solidFill>
+            <a:schemeClr val="bg1"/>
+          </a:solidFill>
+          <a:ln/>
+        </p:spPr>
+      </p:sp>
+      <p:sp>
+        <p:nvSpPr>
+          <p:cNvPr id="10" name="Text 8"/>
+          <p:cNvSpPr txBox="1"/>
+          <p:nvPr/>
+        </p:nvSpPr>
+        <p:spPr>
+          <a:xfrm>
+            <a:off x="5074920" y="1783080"/>
+            <a:ext cx="3246120" cy="2377440"/>
+          </a:xfrm>
+          <a:prstGeom prst="rect">
+            <a:avLst/>
+          </a:prstGeom>
+          <a:noFill/>
+          <a:ln/>
+        </p:spPr>
+        <p:txBody>
+          <a:bodyPr wrap="square" lIns="0" tIns="0" rIns="0" bIns="0" rtlCol="0" anchor="t"/>
+          <a:lstStyle/>
+          <a:p>
             <a:pPr indent="0" marL="0">
+              <a:spcAft>
+                <a:spcPts val="600"/>
+              </a:spcAft>
               <a:buNone/>
             </a:pPr>
             <a:r>
@@ -4748,7 +5350,58 @@
                   <a:schemeClr val="tx1"/>
                 </a:solidFill>
               </a:rPr>
-              <a:t>Chỉ cần ảnh chứng minh đã tham gia buổi học hoặc lý do vắng.</a:t>
+              <a:t>Em là Nguyễn Văn An, mã MOET 79xxxxxx, trường THPT …</a:t>
+            </a:r>
+            <a:endParaRPr lang="en-US" sz="1400" dirty="0"/>
+          </a:p>
+          <a:p>
+            <a:pPr indent="0" marL="0">
+              <a:spcAft>
+                <a:spcPts val="600"/>
+              </a:spcAft>
+              <a:buNone/>
+            </a:pPr>
+            <a:r>
+              <a:rPr lang="en-US" sz="1400" dirty="0">
+                <a:solidFill>
+                  <a:schemeClr val="tx1"/>
+                </a:solidFill>
+              </a:rPr>
+              <a:t>Lớp … – GĐ 2 – Buổi 2 – ngày 17/10.</a:t>
+            </a:r>
+            <a:endParaRPr lang="en-US" sz="1400" dirty="0"/>
+          </a:p>
+          <a:p>
+            <a:pPr indent="0" marL="0">
+              <a:spcAft>
+                <a:spcPts val="600"/>
+              </a:spcAft>
+              <a:buNone/>
+            </a:pPr>
+            <a:r>
+              <a:rPr lang="en-US" sz="1400" dirty="0">
+                <a:solidFill>
+                  <a:schemeClr val="tx1"/>
+                </a:solidFill>
+              </a:rPr>
+              <a:t>Em đã tham gia nhưng bị ghi vắng, nhờ Thầy/Cô điểm danh bổ sung.</a:t>
+            </a:r>
+            <a:endParaRPr lang="en-US" sz="1400" dirty="0"/>
+          </a:p>
+          <a:p>
+            <a:pPr indent="0" marL="0">
+              <a:spcAft>
+                <a:spcPts val="600"/>
+              </a:spcAft>
+              <a:buNone/>
+            </a:pPr>
+            <a:r>
+              <a:rPr lang="en-US" sz="1400" i="1" dirty="0">
+                <a:solidFill>
+                  <a:schemeClr val="accent5"/>
+                </a:solidFill>
+              </a:rPr>
+              <a:t>Minh chứng: ảnh Zoom đính kèm (hoặc link Drive).</a:t>
             </a:r>
             <a:endParaRPr lang="en-US" sz="1400" dirty="0"/>
           </a:p>
@@ -4766,8 +5419,8 @@
         </p:nvSpPr>
         <p:spPr>
           <a:xfrm>
-            <a:off x="8229600" y="4754880"/>
-            <a:ext cx="457200" cy="228600"/>
+            <a:off x="8229600" y="4800600"/>
+            <a:ext cx="457200" cy="201168"/>
           </a:xfrm>
           <a:prstGeom prst="rect">
             <a:avLst/>
@@ -4834,8 +5487,8 @@
         </p:nvSpPr>
         <p:spPr>
           <a:xfrm>
-            <a:off x="457200" y="274320"/>
-            <a:ext cx="8229600" cy="640080"/>
+            <a:off x="457200" y="228600"/>
+            <a:ext cx="8229600" cy="594360"/>
           </a:xfrm>
           <a:prstGeom prst="rect">
             <a:avLst/>
@@ -4856,7 +5509,7 @@
                   <a:schemeClr val="tx2"/>
                 </a:solidFill>
               </a:rPr>
-              <a:t>Lấy link Google Drive đúng cách</a:t>
+              <a:t>Bước 3 – Gửi minh chứng: chọn 1 trong 2 cách</a:t>
             </a:r>
             <a:endParaRPr lang="en-US" sz="2800" dirty="0"/>
           </a:p>
@@ -4864,1013 +5517,253 @@
       </p:sp>
       <p:sp>
         <p:nvSpPr>
-          <p:cNvPr id="3" name="So 1"/>
+          <p:cNvPr id="3" name="Cách 1 · Zalo (nhanh nhất)"/>
           <p:cNvSpPr/>
           <p:nvPr/>
         </p:nvSpPr>
         <p:spPr>
           <a:xfrm>
-            <a:off x="457200" y="1143000"/>
-            <a:ext cx="365760" cy="365760"/>
-          </a:xfrm>
-          <a:prstGeom prst="ellipse">
-            <a:avLst/>
-          </a:prstGeom>
-          <a:solidFill>
-            <a:schemeClr val="tx2"/>
-          </a:solidFill>
-          <a:ln/>
-        </p:spPr>
-      </p:sp>
-      <p:sp>
-        <p:nvSpPr>
-          <p:cNvPr id="4" name="Text 2"/>
-          <p:cNvSpPr txBox="1"/>
-          <p:nvPr/>
-        </p:nvSpPr>
-        <p:spPr>
-          <a:xfrm>
-            <a:off x="457200" y="1143000"/>
-            <a:ext cx="365760" cy="365760"/>
-          </a:xfrm>
-          <a:prstGeom prst="rect">
-            <a:avLst/>
-          </a:prstGeom>
-          <a:noFill/>
-          <a:ln/>
-        </p:spPr>
-        <p:txBody>
-          <a:bodyPr wrap="square" lIns="0" tIns="0" rIns="0" bIns="0" rtlCol="0" anchor="ctr"/>
-          <a:lstStyle/>
-          <a:p>
-            <a:pPr algn="ctr" indent="0" marL="0">
-              <a:buNone/>
-            </a:pPr>
-            <a:r>
-              <a:rPr lang="en-US" sz="1600" b="1" dirty="0">
-                <a:solidFill>
-                  <a:schemeClr val="bg1"/>
-                </a:solidFill>
-              </a:rPr>
-              <a:t>1</a:t>
-            </a:r>
-            <a:endParaRPr lang="en-US" sz="1600" dirty="0"/>
-          </a:p>
-        </p:txBody>
-      </p:sp>
-      <p:sp>
-        <p:nvSpPr>
-          <p:cNvPr id="5" name="Text 3"/>
-          <p:cNvSpPr txBox="1"/>
-          <p:nvPr/>
-        </p:nvSpPr>
-        <p:spPr>
-          <a:xfrm>
-            <a:off x="960120" y="1106424"/>
-            <a:ext cx="3611880" cy="548640"/>
-          </a:xfrm>
-          <a:prstGeom prst="rect">
-            <a:avLst/>
-          </a:prstGeom>
-          <a:noFill/>
-          <a:ln/>
-        </p:spPr>
-        <p:txBody>
-          <a:bodyPr wrap="square" lIns="0" tIns="0" rIns="0" bIns="0" rtlCol="0" anchor="t"/>
-          <a:lstStyle/>
-          <a:p>
-            <a:pPr indent="0" marL="0">
-              <a:buNone/>
-            </a:pPr>
-            <a:r>
-              <a:rPr lang="en-US" sz="1400" dirty="0">
-                <a:solidFill>
-                  <a:schemeClr val="tx1"/>
-                </a:solidFill>
-              </a:rPr>
-              <a:t>Google Drive → </a:t>
-            </a:r>
-            <a:pPr indent="0" marL="0">
-              <a:buNone/>
-            </a:pPr>
-            <a:r>
-              <a:rPr lang="en-US" sz="1400" b="1" dirty="0">
-                <a:solidFill>
-                  <a:schemeClr val="tx1"/>
-                </a:solidFill>
-              </a:rPr>
-              <a:t>+ Mới → Tải tệp lên</a:t>
-            </a:r>
-            <a:pPr indent="0" marL="0">
-              <a:buNone/>
-            </a:pPr>
-            <a:r>
-              <a:rPr lang="en-US" sz="1400" dirty="0">
-                <a:solidFill>
-                  <a:schemeClr val="tx1"/>
-                </a:solidFill>
-              </a:rPr>
-              <a:t> → chọn ảnh</a:t>
-            </a:r>
-            <a:endParaRPr lang="en-US" sz="1400" dirty="0"/>
-          </a:p>
-        </p:txBody>
-      </p:sp>
-      <p:sp>
-        <p:nvSpPr>
-          <p:cNvPr id="6" name="So 2"/>
-          <p:cNvSpPr/>
-          <p:nvPr/>
-        </p:nvSpPr>
-        <p:spPr>
-          <a:xfrm>
-            <a:off x="457200" y="1746504"/>
-            <a:ext cx="365760" cy="365760"/>
-          </a:xfrm>
-          <a:prstGeom prst="ellipse">
-            <a:avLst/>
-          </a:prstGeom>
-          <a:solidFill>
-            <a:schemeClr val="tx2"/>
-          </a:solidFill>
-          <a:ln/>
-        </p:spPr>
-      </p:sp>
-      <p:sp>
-        <p:nvSpPr>
-          <p:cNvPr id="7" name="Text 5"/>
-          <p:cNvSpPr txBox="1"/>
-          <p:nvPr/>
-        </p:nvSpPr>
-        <p:spPr>
-          <a:xfrm>
-            <a:off x="457200" y="1746504"/>
-            <a:ext cx="365760" cy="365760"/>
-          </a:xfrm>
-          <a:prstGeom prst="rect">
-            <a:avLst/>
-          </a:prstGeom>
-          <a:noFill/>
-          <a:ln/>
-        </p:spPr>
-        <p:txBody>
-          <a:bodyPr wrap="square" lIns="0" tIns="0" rIns="0" bIns="0" rtlCol="0" anchor="ctr"/>
-          <a:lstStyle/>
-          <a:p>
-            <a:pPr algn="ctr" indent="0" marL="0">
-              <a:buNone/>
-            </a:pPr>
-            <a:r>
-              <a:rPr lang="en-US" sz="1600" b="1" dirty="0">
-                <a:solidFill>
-                  <a:schemeClr val="bg1"/>
-                </a:solidFill>
-              </a:rPr>
-              <a:t>2</a:t>
-            </a:r>
-            <a:endParaRPr lang="en-US" sz="1600" dirty="0"/>
-          </a:p>
-        </p:txBody>
-      </p:sp>
-      <p:sp>
-        <p:nvSpPr>
-          <p:cNvPr id="8" name="Text 6"/>
-          <p:cNvSpPr txBox="1"/>
-          <p:nvPr/>
-        </p:nvSpPr>
-        <p:spPr>
-          <a:xfrm>
-            <a:off x="960120" y="1709928"/>
-            <a:ext cx="3611880" cy="548640"/>
-          </a:xfrm>
-          <a:prstGeom prst="rect">
-            <a:avLst/>
-          </a:prstGeom>
-          <a:noFill/>
-          <a:ln/>
-        </p:spPr>
-        <p:txBody>
-          <a:bodyPr wrap="square" lIns="0" tIns="0" rIns="0" bIns="0" rtlCol="0" anchor="t"/>
-          <a:lstStyle/>
-          <a:p>
-            <a:pPr indent="0" marL="0">
-              <a:buNone/>
-            </a:pPr>
-            <a:r>
-              <a:rPr lang="en-US" sz="1400" dirty="0">
-                <a:solidFill>
-                  <a:schemeClr val="tx1"/>
-                </a:solidFill>
-              </a:rPr>
-              <a:t>Chạm </a:t>
-            </a:r>
-            <a:pPr indent="0" marL="0">
-              <a:buNone/>
-            </a:pPr>
-            <a:r>
-              <a:rPr lang="en-US" sz="1400" b="1" dirty="0">
-                <a:solidFill>
-                  <a:schemeClr val="tx1"/>
-                </a:solidFill>
-              </a:rPr>
-              <a:t>⋮</a:t>
-            </a:r>
-            <a:pPr indent="0" marL="0">
-              <a:buNone/>
-            </a:pPr>
-            <a:r>
-              <a:rPr lang="en-US" sz="1400" dirty="0">
-                <a:solidFill>
-                  <a:schemeClr val="tx1"/>
-                </a:solidFill>
-              </a:rPr>
-              <a:t> cạnh ảnh → </a:t>
-            </a:r>
-            <a:pPr indent="0" marL="0">
-              <a:buNone/>
-            </a:pPr>
-            <a:r>
-              <a:rPr lang="en-US" sz="1400" b="1" dirty="0">
-                <a:solidFill>
-                  <a:schemeClr val="tx1"/>
-                </a:solidFill>
-              </a:rPr>
-              <a:t>Chia sẻ</a:t>
-            </a:r>
-            <a:endParaRPr lang="en-US" sz="1400" dirty="0"/>
-          </a:p>
-        </p:txBody>
-      </p:sp>
-      <p:sp>
-        <p:nvSpPr>
-          <p:cNvPr id="9" name="So 3"/>
-          <p:cNvSpPr/>
-          <p:nvPr/>
-        </p:nvSpPr>
-        <p:spPr>
-          <a:xfrm>
-            <a:off x="457200" y="2350008"/>
-            <a:ext cx="365760" cy="365760"/>
-          </a:xfrm>
-          <a:prstGeom prst="ellipse">
-            <a:avLst/>
-          </a:prstGeom>
-          <a:solidFill>
-            <a:schemeClr val="tx2"/>
-          </a:solidFill>
-          <a:ln/>
-        </p:spPr>
-      </p:sp>
-      <p:sp>
-        <p:nvSpPr>
-          <p:cNvPr id="10" name="Text 8"/>
-          <p:cNvSpPr txBox="1"/>
-          <p:nvPr/>
-        </p:nvSpPr>
-        <p:spPr>
-          <a:xfrm>
-            <a:off x="457200" y="2350008"/>
-            <a:ext cx="365760" cy="365760"/>
-          </a:xfrm>
-          <a:prstGeom prst="rect">
-            <a:avLst/>
-          </a:prstGeom>
-          <a:noFill/>
-          <a:ln/>
-        </p:spPr>
-        <p:txBody>
-          <a:bodyPr wrap="square" lIns="0" tIns="0" rIns="0" bIns="0" rtlCol="0" anchor="ctr"/>
-          <a:lstStyle/>
-          <a:p>
-            <a:pPr algn="ctr" indent="0" marL="0">
-              <a:buNone/>
-            </a:pPr>
-            <a:r>
-              <a:rPr lang="en-US" sz="1600" b="1" dirty="0">
-                <a:solidFill>
-                  <a:schemeClr val="bg1"/>
-                </a:solidFill>
-              </a:rPr>
-              <a:t>3</a:t>
-            </a:r>
-            <a:endParaRPr lang="en-US" sz="1600" dirty="0"/>
-          </a:p>
-        </p:txBody>
-      </p:sp>
-      <p:sp>
-        <p:nvSpPr>
-          <p:cNvPr id="11" name="Text 9"/>
-          <p:cNvSpPr txBox="1"/>
-          <p:nvPr/>
-        </p:nvSpPr>
-        <p:spPr>
-          <a:xfrm>
-            <a:off x="960120" y="2313432"/>
-            <a:ext cx="3611880" cy="548640"/>
-          </a:xfrm>
-          <a:prstGeom prst="rect">
-            <a:avLst/>
-          </a:prstGeom>
-          <a:noFill/>
-          <a:ln/>
-        </p:spPr>
-        <p:txBody>
-          <a:bodyPr wrap="square" lIns="0" tIns="0" rIns="0" bIns="0" rtlCol="0" anchor="t"/>
-          <a:lstStyle/>
-          <a:p>
-            <a:pPr indent="0" marL="0">
-              <a:buNone/>
-            </a:pPr>
-            <a:r>
-              <a:rPr lang="en-US" sz="1400" dirty="0">
-                <a:solidFill>
-                  <a:schemeClr val="tx1"/>
-                </a:solidFill>
-              </a:rPr>
-              <a:t>Mục </a:t>
-            </a:r>
-            <a:pPr indent="0" marL="0">
-              <a:buNone/>
-            </a:pPr>
-            <a:r>
-              <a:rPr lang="en-US" sz="1400" b="1" dirty="0">
-                <a:solidFill>
-                  <a:schemeClr val="tx1"/>
-                </a:solidFill>
-              </a:rPr>
-              <a:t>Quyền truy cập chung</a:t>
-            </a:r>
-            <a:pPr indent="0" marL="0">
-              <a:buNone/>
-            </a:pPr>
-            <a:r>
-              <a:rPr lang="en-US" sz="1400" dirty="0">
-                <a:solidFill>
-                  <a:schemeClr val="tx1"/>
-                </a:solidFill>
-              </a:rPr>
-              <a:t>: đổi “Bị hạn chế” thành </a:t>
-            </a:r>
-            <a:pPr indent="0" marL="0">
-              <a:buNone/>
-            </a:pPr>
-            <a:r>
-              <a:rPr lang="en-US" sz="1400" b="1" dirty="0">
-                <a:solidFill>
-                  <a:schemeClr val="tx1"/>
-                </a:solidFill>
-              </a:rPr>
-              <a:t>“Bất kỳ ai có đường liên kết”</a:t>
-            </a:r>
-            <a:endParaRPr lang="en-US" sz="1400" dirty="0"/>
-          </a:p>
-        </p:txBody>
-      </p:sp>
-      <p:sp>
-        <p:nvSpPr>
-          <p:cNvPr id="12" name="So 4"/>
-          <p:cNvSpPr/>
-          <p:nvPr/>
-        </p:nvSpPr>
-        <p:spPr>
-          <a:xfrm>
-            <a:off x="457200" y="2953512"/>
-            <a:ext cx="365760" cy="365760"/>
-          </a:xfrm>
-          <a:prstGeom prst="ellipse">
-            <a:avLst/>
-          </a:prstGeom>
-          <a:solidFill>
-            <a:schemeClr val="tx2"/>
-          </a:solidFill>
-          <a:ln/>
-        </p:spPr>
-      </p:sp>
-      <p:sp>
-        <p:nvSpPr>
-          <p:cNvPr id="13" name="Text 11"/>
-          <p:cNvSpPr txBox="1"/>
-          <p:nvPr/>
-        </p:nvSpPr>
-        <p:spPr>
-          <a:xfrm>
-            <a:off x="457200" y="2953512"/>
-            <a:ext cx="365760" cy="365760"/>
-          </a:xfrm>
-          <a:prstGeom prst="rect">
-            <a:avLst/>
-          </a:prstGeom>
-          <a:noFill/>
-          <a:ln/>
-        </p:spPr>
-        <p:txBody>
-          <a:bodyPr wrap="square" lIns="0" tIns="0" rIns="0" bIns="0" rtlCol="0" anchor="ctr"/>
-          <a:lstStyle/>
-          <a:p>
-            <a:pPr algn="ctr" indent="0" marL="0">
-              <a:buNone/>
-            </a:pPr>
-            <a:r>
-              <a:rPr lang="en-US" sz="1600" b="1" dirty="0">
-                <a:solidFill>
-                  <a:schemeClr val="bg1"/>
-                </a:solidFill>
-              </a:rPr>
-              <a:t>4</a:t>
-            </a:r>
-            <a:endParaRPr lang="en-US" sz="1600" dirty="0"/>
-          </a:p>
-        </p:txBody>
-      </p:sp>
-      <p:sp>
-        <p:nvSpPr>
-          <p:cNvPr id="14" name="Text 12"/>
-          <p:cNvSpPr txBox="1"/>
-          <p:nvPr/>
-        </p:nvSpPr>
-        <p:spPr>
-          <a:xfrm>
-            <a:off x="960120" y="2916936"/>
-            <a:ext cx="3611880" cy="548640"/>
-          </a:xfrm>
-          <a:prstGeom prst="rect">
-            <a:avLst/>
-          </a:prstGeom>
-          <a:noFill/>
-          <a:ln/>
-        </p:spPr>
-        <p:txBody>
-          <a:bodyPr wrap="square" lIns="0" tIns="0" rIns="0" bIns="0" rtlCol="0" anchor="t"/>
-          <a:lstStyle/>
-          <a:p>
-            <a:pPr indent="0" marL="0">
-              <a:buNone/>
-            </a:pPr>
-            <a:r>
-              <a:rPr lang="en-US" sz="1400" dirty="0">
-                <a:solidFill>
-                  <a:schemeClr val="tx1"/>
-                </a:solidFill>
-              </a:rPr>
-              <a:t>Bấm </a:t>
-            </a:r>
-            <a:pPr indent="0" marL="0">
-              <a:buNone/>
-            </a:pPr>
-            <a:r>
-              <a:rPr lang="en-US" sz="1400" b="1" dirty="0">
-                <a:solidFill>
-                  <a:schemeClr val="tx1"/>
-                </a:solidFill>
-              </a:rPr>
-              <a:t>Sao chép đường liên kết</a:t>
-            </a:r>
-            <a:pPr indent="0" marL="0">
-              <a:buNone/>
-            </a:pPr>
-            <a:r>
-              <a:rPr lang="en-US" sz="1400" dirty="0">
-                <a:solidFill>
-                  <a:schemeClr val="tx1"/>
-                </a:solidFill>
-              </a:rPr>
-              <a:t> → Xong</a:t>
-            </a:r>
-            <a:endParaRPr lang="en-US" sz="1400" dirty="0"/>
-          </a:p>
-        </p:txBody>
-      </p:sp>
-      <p:sp>
-        <p:nvSpPr>
-          <p:cNvPr id="15" name="So 5"/>
-          <p:cNvSpPr/>
-          <p:nvPr/>
-        </p:nvSpPr>
-        <p:spPr>
-          <a:xfrm>
-            <a:off x="457200" y="3557016"/>
-            <a:ext cx="365760" cy="365760"/>
-          </a:xfrm>
-          <a:prstGeom prst="ellipse">
-            <a:avLst/>
-          </a:prstGeom>
-          <a:solidFill>
-            <a:schemeClr val="tx2"/>
-          </a:solidFill>
-          <a:ln/>
-        </p:spPr>
-      </p:sp>
-      <p:sp>
-        <p:nvSpPr>
-          <p:cNvPr id="16" name="Text 14"/>
-          <p:cNvSpPr txBox="1"/>
-          <p:nvPr/>
-        </p:nvSpPr>
-        <p:spPr>
-          <a:xfrm>
-            <a:off x="457200" y="3557016"/>
-            <a:ext cx="365760" cy="365760"/>
-          </a:xfrm>
-          <a:prstGeom prst="rect">
-            <a:avLst/>
-          </a:prstGeom>
-          <a:noFill/>
-          <a:ln/>
-        </p:spPr>
-        <p:txBody>
-          <a:bodyPr wrap="square" lIns="0" tIns="0" rIns="0" bIns="0" rtlCol="0" anchor="ctr"/>
-          <a:lstStyle/>
-          <a:p>
-            <a:pPr algn="ctr" indent="0" marL="0">
-              <a:buNone/>
-            </a:pPr>
-            <a:r>
-              <a:rPr lang="en-US" sz="1600" b="1" dirty="0">
-                <a:solidFill>
-                  <a:schemeClr val="bg1"/>
-                </a:solidFill>
-              </a:rPr>
-              <a:t>5</a:t>
-            </a:r>
-            <a:endParaRPr lang="en-US" sz="1600" dirty="0"/>
-          </a:p>
-        </p:txBody>
-      </p:sp>
-      <p:sp>
-        <p:nvSpPr>
-          <p:cNvPr id="17" name="Text 15"/>
-          <p:cNvSpPr txBox="1"/>
-          <p:nvPr/>
-        </p:nvSpPr>
-        <p:spPr>
-          <a:xfrm>
-            <a:off x="960120" y="3520440"/>
-            <a:ext cx="3611880" cy="548640"/>
-          </a:xfrm>
-          <a:prstGeom prst="rect">
-            <a:avLst/>
-          </a:prstGeom>
-          <a:noFill/>
-          <a:ln/>
-        </p:spPr>
-        <p:txBody>
-          <a:bodyPr wrap="square" lIns="0" tIns="0" rIns="0" bIns="0" rtlCol="0" anchor="t"/>
-          <a:lstStyle/>
-          <a:p>
-            <a:pPr indent="0" marL="0">
-              <a:buNone/>
-            </a:pPr>
-            <a:r>
-              <a:rPr lang="en-US" sz="1400" dirty="0">
-                <a:solidFill>
-                  <a:schemeClr val="tx1"/>
-                </a:solidFill>
-              </a:rPr>
-              <a:t>Dán link vào nội dung yêu cầu hỗ trợ</a:t>
-            </a:r>
-            <a:endParaRPr lang="en-US" sz="1400" dirty="0"/>
-          </a:p>
-        </p:txBody>
-      </p:sp>
-      <p:sp>
-        <p:nvSpPr>
-          <p:cNvPr id="18" name="Text 16"/>
-          <p:cNvSpPr txBox="1"/>
-          <p:nvPr/>
-        </p:nvSpPr>
-        <p:spPr>
-          <a:xfrm>
-            <a:off x="4846320" y="1097280"/>
-            <a:ext cx="3840480" cy="274320"/>
-          </a:xfrm>
-          <a:prstGeom prst="rect">
-            <a:avLst/>
-          </a:prstGeom>
-          <a:noFill/>
-          <a:ln/>
-        </p:spPr>
-        <p:txBody>
-          <a:bodyPr wrap="square" lIns="0" tIns="0" rIns="0" bIns="0" rtlCol="0" anchor="ctr"/>
-          <a:lstStyle/>
-          <a:p>
-            <a:pPr indent="0" marL="0">
-              <a:buNone/>
-            </a:pPr>
-            <a:r>
-              <a:rPr lang="en-US" sz="1100" i="1" dirty="0">
-                <a:solidFill>
-                  <a:schemeClr val="accent5"/>
-                </a:solidFill>
-              </a:rPr>
-              <a:t>Minh họa hộp thoại Chia sẻ của Google Drive</a:t>
-            </a:r>
-            <a:endParaRPr lang="en-US" sz="1100" dirty="0"/>
-          </a:p>
-        </p:txBody>
-      </p:sp>
-      <p:sp>
-        <p:nvSpPr>
-          <p:cNvPr id="19" name="Hop thoai chia se"/>
-          <p:cNvSpPr/>
-          <p:nvPr/>
-        </p:nvSpPr>
-        <p:spPr>
-          <a:xfrm>
-            <a:off x="4846320" y="1417320"/>
-            <a:ext cx="3840480" cy="1965960"/>
+            <a:off x="457200" y="1097280"/>
+            <a:ext cx="3977640" cy="2103120"/>
           </a:xfrm>
           <a:prstGeom prst="roundRect">
             <a:avLst>
-              <a:gd name="adj" fmla="val 4651"/>
-            </a:avLst>
-          </a:prstGeom>
-          <a:solidFill>
-            <a:schemeClr val="bg1"/>
-          </a:solidFill>
-          <a:ln w="12700">
-            <a:solidFill>
-              <a:schemeClr val="accent6"/>
-            </a:solidFill>
-            <a:prstDash val="solid"/>
-          </a:ln>
-          <a:effectLst>
-            <a:outerShdw sx="100000" sy="100000" kx="0" ky="0" algn="bl" rotWithShape="0" blurRad="101600" dist="25400" dir="5400000">
-              <a:srgbClr val="1B2A2F">
-                <a:alpha val="20000"/>
-              </a:srgbClr>
-            </a:outerShdw>
-          </a:effectLst>
-        </p:spPr>
-      </p:sp>
-      <p:sp>
-        <p:nvSpPr>
-          <p:cNvPr id="20" name="Text 18"/>
-          <p:cNvSpPr txBox="1"/>
-          <p:nvPr/>
-        </p:nvSpPr>
-        <p:spPr>
-          <a:xfrm>
-            <a:off x="5029200" y="1527048"/>
-            <a:ext cx="3474720" cy="320040"/>
-          </a:xfrm>
-          <a:prstGeom prst="rect">
-            <a:avLst/>
-          </a:prstGeom>
-          <a:noFill/>
-          <a:ln/>
-        </p:spPr>
-        <p:txBody>
-          <a:bodyPr wrap="square" lIns="0" tIns="0" rIns="0" bIns="0" rtlCol="0" anchor="ctr"/>
-          <a:lstStyle/>
-          <a:p>
-            <a:pPr indent="0" marL="0">
-              <a:buNone/>
-            </a:pPr>
-            <a:r>
-              <a:rPr lang="en-US" sz="1400" b="1" dirty="0">
-                <a:solidFill>
-                  <a:schemeClr val="tx1"/>
-                </a:solidFill>
-              </a:rPr>
-              <a:t>Chia sẻ “anh-zoom-buoi2.jpg”</a:t>
-            </a:r>
-            <a:endParaRPr lang="en-US" sz="1400" dirty="0"/>
-          </a:p>
-        </p:txBody>
-      </p:sp>
-      <p:sp>
-        <p:nvSpPr>
-          <p:cNvPr id="21" name="Text 19"/>
-          <p:cNvSpPr txBox="1"/>
-          <p:nvPr/>
-        </p:nvSpPr>
-        <p:spPr>
-          <a:xfrm>
-            <a:off x="5029200" y="1920240"/>
-            <a:ext cx="3474720" cy="228600"/>
-          </a:xfrm>
-          <a:prstGeom prst="rect">
-            <a:avLst/>
-          </a:prstGeom>
-          <a:noFill/>
-          <a:ln/>
-        </p:spPr>
-        <p:txBody>
-          <a:bodyPr wrap="square" lIns="0" tIns="0" rIns="0" bIns="0" rtlCol="0" anchor="ctr"/>
-          <a:lstStyle/>
-          <a:p>
-            <a:pPr indent="0" marL="0">
-              <a:buNone/>
-            </a:pPr>
-            <a:r>
-              <a:rPr lang="en-US" sz="1200" b="1" dirty="0">
-                <a:solidFill>
-                  <a:schemeClr val="tx1"/>
-                </a:solidFill>
-              </a:rPr>
-              <a:t>Quyền truy cập chung</a:t>
-            </a:r>
-            <a:endParaRPr lang="en-US" sz="1200" dirty="0"/>
-          </a:p>
-        </p:txBody>
-      </p:sp>
-      <p:sp>
-        <p:nvSpPr>
-          <p:cNvPr id="22" name="Bieu tuong"/>
-          <p:cNvSpPr/>
-          <p:nvPr/>
-        </p:nvSpPr>
-        <p:spPr>
-          <a:xfrm>
-            <a:off x="5029200" y="2240280"/>
-            <a:ext cx="329184" cy="329184"/>
-          </a:xfrm>
-          <a:prstGeom prst="ellipse">
-            <a:avLst/>
-          </a:prstGeom>
-          <a:solidFill>
-            <a:schemeClr val="accent1">
-              <a:alpha val="30000"/>
-            </a:schemeClr>
-          </a:solidFill>
-          <a:ln/>
-        </p:spPr>
-      </p:sp>
-      <p:sp>
-        <p:nvSpPr>
-          <p:cNvPr id="23" name="Chon quyen"/>
-          <p:cNvSpPr/>
-          <p:nvPr/>
-        </p:nvSpPr>
-        <p:spPr>
-          <a:xfrm>
-            <a:off x="5449824" y="2212848"/>
-            <a:ext cx="2331720" cy="329184"/>
-          </a:xfrm>
-          <a:prstGeom prst="roundRect">
-            <a:avLst>
-              <a:gd name="adj" fmla="val 13889"/>
+              <a:gd name="adj" fmla="val 3478"/>
             </a:avLst>
           </a:prstGeom>
           <a:solidFill>
             <a:schemeClr val="bg2"/>
           </a:solidFill>
-          <a:ln w="25400">
-            <a:solidFill>
-              <a:schemeClr val="accent2"/>
-            </a:solidFill>
-            <a:prstDash val="solid"/>
-          </a:ln>
-        </p:spPr>
-      </p:sp>
-      <p:sp>
-        <p:nvSpPr>
-          <p:cNvPr id="24" name="Text 22"/>
+          <a:ln/>
+        </p:spPr>
+      </p:sp>
+      <p:sp>
+        <p:nvSpPr>
+          <p:cNvPr id="4" name="Text 2"/>
           <p:cNvSpPr txBox="1"/>
           <p:nvPr/>
         </p:nvSpPr>
         <p:spPr>
           <a:xfrm>
-            <a:off x="5504688" y="2212848"/>
-            <a:ext cx="2240280" cy="329184"/>
-          </a:xfrm>
-          <a:prstGeom prst="rect">
-            <a:avLst/>
-          </a:prstGeom>
-          <a:noFill/>
-          <a:ln/>
-        </p:spPr>
-        <p:txBody>
-          <a:bodyPr wrap="square" lIns="0" tIns="0" rIns="0" bIns="0" rtlCol="0" anchor="ctr"/>
+            <a:off x="594360" y="1207008"/>
+            <a:ext cx="3703320" cy="1883664"/>
+          </a:xfrm>
+          <a:prstGeom prst="rect">
+            <a:avLst/>
+          </a:prstGeom>
+          <a:noFill/>
+          <a:ln/>
+        </p:spPr>
+        <p:txBody>
+          <a:bodyPr wrap="square" lIns="0" tIns="0" rIns="0" bIns="0" rtlCol="0" anchor="t"/>
           <a:lstStyle/>
           <a:p>
             <a:pPr indent="0" marL="0">
-              <a:buNone/>
-            </a:pPr>
-            <a:r>
-              <a:rPr lang="en-US" sz="1200" b="1" dirty="0">
+              <a:spcAft>
+                <a:spcPts val="600"/>
+              </a:spcAft>
+              <a:buNone/>
+            </a:pPr>
+            <a:r>
+              <a:rPr lang="en-US" sz="1600" b="1" dirty="0">
+                <a:solidFill>
+                  <a:schemeClr val="accent1"/>
+                </a:solidFill>
+              </a:rPr>
+              <a:t>Cách 1 · Zalo (nhanh nhất)</a:t>
+            </a:r>
+            <a:endParaRPr lang="en-US" sz="1600" dirty="0"/>
+          </a:p>
+          <a:p>
+            <a:pPr marL="177800" indent="-177800">
+              <a:spcAft>
+                <a:spcPts val="400"/>
+              </a:spcAft>
+              <a:buSzPct val="100000"/>
+              <a:buChar char="•"/>
+            </a:pPr>
+            <a:r>
+              <a:rPr lang="en-US" sz="1400" dirty="0">
                 <a:solidFill>
                   <a:schemeClr val="tx1"/>
                 </a:solidFill>
               </a:rPr>
-              <a:t>Bất kỳ ai có đường liên kết ▾</a:t>
-            </a:r>
-            <a:endParaRPr lang="en-US" sz="1200" dirty="0"/>
-          </a:p>
-        </p:txBody>
-      </p:sp>
-      <p:sp>
-        <p:nvSpPr>
-          <p:cNvPr id="25" name="Text 23"/>
-          <p:cNvSpPr txBox="1"/>
-          <p:nvPr/>
-        </p:nvSpPr>
-        <p:spPr>
-          <a:xfrm>
-            <a:off x="7818120" y="2212848"/>
-            <a:ext cx="822960" cy="329184"/>
-          </a:xfrm>
-          <a:prstGeom prst="rect">
-            <a:avLst/>
-          </a:prstGeom>
-          <a:noFill/>
-          <a:ln/>
-        </p:spPr>
-        <p:txBody>
-          <a:bodyPr wrap="square" lIns="0" tIns="0" rIns="0" bIns="0" rtlCol="0" anchor="ctr"/>
-          <a:lstStyle/>
-          <a:p>
-            <a:pPr indent="0" marL="0">
-              <a:buNone/>
-            </a:pPr>
-            <a:r>
-              <a:rPr lang="en-US" sz="1100" dirty="0">
+              <a:t>Nhắn người hỗ trợ lớp/cụm theo tin nhắn mẫu</a:t>
+            </a:r>
+            <a:endParaRPr lang="en-US" sz="1600" dirty="0"/>
+          </a:p>
+          <a:p>
+            <a:pPr marL="177800" indent="-177800">
+              <a:spcAft>
+                <a:spcPts val="400"/>
+              </a:spcAft>
+              <a:buSzPct val="100000"/>
+              <a:buChar char="•"/>
+            </a:pPr>
+            <a:r>
+              <a:rPr lang="en-US" sz="1400" dirty="0">
                 <a:solidFill>
                   <a:schemeClr val="tx1"/>
                 </a:solidFill>
               </a:rPr>
-              <a:t>Người xem ▾</a:t>
-            </a:r>
-            <a:endParaRPr lang="en-US" sz="1100" dirty="0"/>
-          </a:p>
-        </p:txBody>
-      </p:sp>
-      <p:sp>
-        <p:nvSpPr>
-          <p:cNvPr id="26" name="Text 24"/>
-          <p:cNvSpPr txBox="1"/>
-          <p:nvPr/>
-        </p:nvSpPr>
-        <p:spPr>
-          <a:xfrm>
-            <a:off x="5449824" y="2560320"/>
-            <a:ext cx="3108960" cy="228600"/>
-          </a:xfrm>
-          <a:prstGeom prst="rect">
-            <a:avLst/>
-          </a:prstGeom>
-          <a:noFill/>
-          <a:ln/>
-        </p:spPr>
-        <p:txBody>
-          <a:bodyPr wrap="square" lIns="0" tIns="0" rIns="0" bIns="0" rtlCol="0" anchor="ctr"/>
-          <a:lstStyle/>
-          <a:p>
-            <a:pPr indent="0" marL="0">
-              <a:buNone/>
-            </a:pPr>
-            <a:r>
-              <a:rPr lang="en-US" sz="1000" dirty="0">
-                <a:solidFill>
-                  <a:schemeClr val="accent5"/>
-                </a:solidFill>
-              </a:rPr>
-              <a:t>Bất kỳ ai có đường liên kết đều có thể xem</a:t>
-            </a:r>
-            <a:endParaRPr lang="en-US" sz="1000" dirty="0"/>
-          </a:p>
-        </p:txBody>
-      </p:sp>
-      <p:sp>
-        <p:nvSpPr>
-          <p:cNvPr id="27" name="Nut sao chep"/>
+              <a:t>Gửi ảnh trực tiếp trong Zalo – không cần chia sẻ quyền</a:t>
+            </a:r>
+            <a:endParaRPr lang="en-US" sz="1600" dirty="0"/>
+          </a:p>
+          <a:p>
+            <a:pPr marL="177800" indent="-177800">
+              <a:spcAft>
+                <a:spcPts val="400"/>
+              </a:spcAft>
+              <a:buSzPct val="100000"/>
+              <a:buChar char="•"/>
+            </a:pPr>
+            <a:r>
+              <a:rPr lang="en-US" sz="1400" dirty="0">
+                <a:solidFill>
+                  <a:schemeClr val="tx1"/>
+                </a:solidFill>
+              </a:rPr>
+              <a:t>Người hỗ trợ trả lời ngay trên Zalo</a:t>
+            </a:r>
+            <a:endParaRPr lang="en-US" sz="1600" dirty="0"/>
+          </a:p>
+        </p:txBody>
+      </p:sp>
+      <p:sp>
+        <p:nvSpPr>
+          <p:cNvPr id="5" name="Cách 2 · Mục Hỗ trợ trên cổng"/>
           <p:cNvSpPr/>
           <p:nvPr/>
         </p:nvSpPr>
         <p:spPr>
           <a:xfrm>
-            <a:off x="5029200" y="2926080"/>
-            <a:ext cx="1920240" cy="329184"/>
+            <a:off x="4709160" y="1097280"/>
+            <a:ext cx="3977640" cy="2103120"/>
           </a:xfrm>
           <a:prstGeom prst="roundRect">
             <a:avLst>
-              <a:gd name="adj" fmla="val 50000"/>
+              <a:gd name="adj" fmla="val 3478"/>
             </a:avLst>
           </a:prstGeom>
           <a:solidFill>
-            <a:schemeClr val="bg1"/>
+            <a:schemeClr val="bg2"/>
           </a:solidFill>
-          <a:ln w="25400">
-            <a:solidFill>
-              <a:schemeClr val="accent2"/>
-            </a:solidFill>
-            <a:prstDash val="solid"/>
-          </a:ln>
-        </p:spPr>
-      </p:sp>
-      <p:sp>
-        <p:nvSpPr>
-          <p:cNvPr id="28" name="Text 26"/>
+          <a:ln/>
+        </p:spPr>
+      </p:sp>
+      <p:sp>
+        <p:nvSpPr>
+          <p:cNvPr id="6" name="Text 4"/>
           <p:cNvSpPr txBox="1"/>
           <p:nvPr/>
         </p:nvSpPr>
         <p:spPr>
           <a:xfrm>
-            <a:off x="5029200" y="2926080"/>
-            <a:ext cx="1920240" cy="329184"/>
-          </a:xfrm>
-          <a:prstGeom prst="rect">
-            <a:avLst/>
-          </a:prstGeom>
-          <a:noFill/>
-          <a:ln/>
-        </p:spPr>
-        <p:txBody>
-          <a:bodyPr wrap="square" lIns="0" tIns="0" rIns="0" bIns="0" rtlCol="0" anchor="ctr"/>
-          <a:lstStyle/>
-          <a:p>
-            <a:pPr algn="ctr" indent="0" marL="0">
-              <a:buNone/>
-            </a:pPr>
-            <a:r>
-              <a:rPr lang="en-US" sz="1100" b="1" dirty="0">
+            <a:off x="4846320" y="1207008"/>
+            <a:ext cx="3703320" cy="1883664"/>
+          </a:xfrm>
+          <a:prstGeom prst="rect">
+            <a:avLst/>
+          </a:prstGeom>
+          <a:noFill/>
+          <a:ln/>
+        </p:spPr>
+        <p:txBody>
+          <a:bodyPr wrap="square" lIns="0" tIns="0" rIns="0" bIns="0" rtlCol="0" anchor="t"/>
+          <a:lstStyle/>
+          <a:p>
+            <a:pPr indent="0" marL="0">
+              <a:spcAft>
+                <a:spcPts val="600"/>
+              </a:spcAft>
+              <a:buNone/>
+            </a:pPr>
+            <a:r>
+              <a:rPr lang="en-US" sz="1600" b="1" dirty="0">
                 <a:solidFill>
                   <a:schemeClr val="tx2"/>
                 </a:solidFill>
               </a:rPr>
-              <a:t>Sao chép đường liên kết</a:t>
-            </a:r>
-            <a:endParaRPr lang="en-US" sz="1100" dirty="0"/>
-          </a:p>
-        </p:txBody>
-      </p:sp>
-      <p:sp>
-        <p:nvSpPr>
-          <p:cNvPr id="29" name="Nut xong"/>
+              <a:t>Cách 2 · Mục Hỗ trợ trên cổng</a:t>
+            </a:r>
+            <a:endParaRPr lang="en-US" sz="1600" dirty="0"/>
+          </a:p>
+          <a:p>
+            <a:pPr marL="177800" indent="-177800">
+              <a:spcAft>
+                <a:spcPts val="400"/>
+              </a:spcAft>
+              <a:buSzPct val="100000"/>
+              <a:buChar char="•"/>
+            </a:pPr>
+            <a:r>
+              <a:rPr lang="en-US" sz="1400" dirty="0">
+                <a:solidFill>
+                  <a:schemeClr val="tx1"/>
+                </a:solidFill>
+              </a:rPr>
+              <a:t>Ô nội dung chỉ nhận chữ – không đính kèm ảnh</a:t>
+            </a:r>
+            <a:endParaRPr lang="en-US" sz="1600" dirty="0"/>
+          </a:p>
+          <a:p>
+            <a:pPr marL="177800" indent="-177800">
+              <a:spcAft>
+                <a:spcPts val="400"/>
+              </a:spcAft>
+              <a:buSzPct val="100000"/>
+              <a:buChar char="•"/>
+            </a:pPr>
+            <a:r>
+              <a:rPr lang="en-US" sz="1400" dirty="0">
+                <a:solidFill>
+                  <a:schemeClr val="tx1"/>
+                </a:solidFill>
+              </a:rPr>
+              <a:t>Tải ảnh lên Google Drive, mở chia sẻ, dán link vào nội dung (trang sau)</a:t>
+            </a:r>
+            <a:endParaRPr lang="en-US" sz="1600" dirty="0"/>
+          </a:p>
+          <a:p>
+            <a:pPr marL="177800" indent="-177800">
+              <a:spcAft>
+                <a:spcPts val="400"/>
+              </a:spcAft>
+              <a:buSzPct val="100000"/>
+              <a:buChar char="•"/>
+            </a:pPr>
+            <a:r>
+              <a:rPr lang="en-US" sz="1400" dirty="0">
+                <a:solidFill>
+                  <a:schemeClr val="tx1"/>
+                </a:solidFill>
+              </a:rPr>
+              <a:t>Câu trả lời hiện ngay trong mục Hỗ trợ</a:t>
+            </a:r>
+            <a:endParaRPr lang="en-US" sz="1600" dirty="0"/>
+          </a:p>
+        </p:txBody>
+      </p:sp>
+      <p:sp>
+        <p:nvSpPr>
+          <p:cNvPr id="7" name="Canh bao giay to"/>
           <p:cNvSpPr/>
           <p:nvPr/>
         </p:nvSpPr>
         <p:spPr>
           <a:xfrm>
-            <a:off x="7772400" y="2926080"/>
-            <a:ext cx="731520" cy="329184"/>
+            <a:off x="457200" y="3429000"/>
+            <a:ext cx="8229600" cy="685800"/>
           </a:xfrm>
           <a:prstGeom prst="roundRect">
             <a:avLst>
-              <a:gd name="adj" fmla="val 50000"/>
+              <a:gd name="adj" fmla="val 10667"/>
             </a:avLst>
           </a:prstGeom>
           <a:solidFill>
-            <a:schemeClr val="tx2"/>
-          </a:solidFill>
-          <a:ln/>
-        </p:spPr>
-      </p:sp>
-      <p:sp>
-        <p:nvSpPr>
-          <p:cNvPr id="30" name="Text 28"/>
-          <p:cNvSpPr txBox="1"/>
-          <p:nvPr/>
-        </p:nvSpPr>
-        <p:spPr>
-          <a:xfrm>
-            <a:off x="7772400" y="2926080"/>
-            <a:ext cx="731520" cy="329184"/>
-          </a:xfrm>
-          <a:prstGeom prst="rect">
-            <a:avLst/>
-          </a:prstGeom>
-          <a:noFill/>
-          <a:ln/>
-        </p:spPr>
-        <p:txBody>
-          <a:bodyPr wrap="square" lIns="0" tIns="0" rIns="0" bIns="0" rtlCol="0" anchor="ctr"/>
-          <a:lstStyle/>
-          <a:p>
-            <a:pPr algn="ctr" indent="0" marL="0">
-              <a:buNone/>
-            </a:pPr>
-            <a:r>
-              <a:rPr lang="en-US" sz="1100" b="1" dirty="0">
-                <a:solidFill>
-                  <a:schemeClr val="bg1"/>
-                </a:solidFill>
-              </a:rPr>
-              <a:t>Xong</a:t>
-            </a:r>
-            <a:endParaRPr lang="en-US" sz="1100" dirty="0"/>
-          </a:p>
-        </p:txBody>
-      </p:sp>
-      <p:sp>
-        <p:nvSpPr>
-          <p:cNvPr id="31" name="Luu y chia se"/>
-          <p:cNvSpPr/>
-          <p:nvPr/>
-        </p:nvSpPr>
-        <p:spPr>
-          <a:xfrm>
-            <a:off x="4846320" y="3566160"/>
-            <a:ext cx="3840480" cy="960120"/>
-          </a:xfrm>
-          <a:prstGeom prst="roundRect">
-            <a:avLst>
-              <a:gd name="adj" fmla="val 7619"/>
-            </a:avLst>
-          </a:prstGeom>
-          <a:solidFill>
-            <a:schemeClr val="accent2">
-              <a:alpha val="18000"/>
+            <a:schemeClr val="accent3">
+              <a:alpha val="15000"/>
             </a:schemeClr>
           </a:solidFill>
           <a:ln/>
@@ -5878,14 +5771,14 @@
       </p:sp>
       <p:sp>
         <p:nvSpPr>
-          <p:cNvPr id="32" name="Text 30"/>
+          <p:cNvPr id="8" name="Text 6"/>
           <p:cNvSpPr txBox="1"/>
           <p:nvPr/>
         </p:nvSpPr>
         <p:spPr>
           <a:xfrm>
-            <a:off x="4983480" y="3566160"/>
-            <a:ext cx="3566160" cy="960120"/>
+            <a:off x="640080" y="3429000"/>
+            <a:ext cx="7863840" cy="685800"/>
           </a:xfrm>
           <a:prstGeom prst="rect">
             <a:avLst/>
@@ -5901,28 +5794,25 @@
               <a:buNone/>
             </a:pPr>
             <a:r>
-              <a:rPr lang="en-US" sz="1200" b="1" dirty="0">
+              <a:rPr lang="en-US" sz="1400" b="1" dirty="0">
+                <a:solidFill>
+                  <a:schemeClr val="accent3"/>
+                </a:solidFill>
+              </a:rPr>
+              <a:t>Không gửi ảnh CCCD hay giấy tờ tùy thân. </a:t>
+            </a:r>
+            <a:pPr indent="0" marL="0">
+              <a:buNone/>
+            </a:pPr>
+            <a:r>
+              <a:rPr lang="en-US" sz="1400" dirty="0">
                 <a:solidFill>
                   <a:schemeClr val="tx1"/>
                 </a:solidFill>
               </a:rPr>
-              <a:t>Để “Bị hạn chế” thì người hỗ trợ không mở được ảnh.</a:t>
-            </a:r>
-            <a:endParaRPr lang="en-US" sz="1200" dirty="0"/>
-          </a:p>
-          <a:p>
-            <a:pPr indent="0" marL="0">
-              <a:buNone/>
-            </a:pPr>
-            <a:r>
-              <a:rPr lang="en-US" sz="1200" dirty="0">
-                <a:solidFill>
-                  <a:schemeClr val="tx1"/>
-                </a:solidFill>
-              </a:rPr>
-              <a:t>Tự kiểm tra: mở link trong tab ẩn danh. Xử lý xong có thể đổi lại “Bị hạn chế”.</a:t>
-            </a:r>
-            <a:endParaRPr lang="en-US" sz="1200" dirty="0"/>
+              <a:t>Chỉ cần ảnh chứng minh đã tham gia buổi học hoặc lý do vắng.</a:t>
+            </a:r>
+            <a:endParaRPr lang="en-US" sz="1400" dirty="0"/>
           </a:p>
         </p:txBody>
       </p:sp>
@@ -5938,8 +5828,8 @@
         </p:nvSpPr>
         <p:spPr>
           <a:xfrm>
-            <a:off x="8229600" y="4754880"/>
-            <a:ext cx="457200" cy="228600"/>
+            <a:off x="8229600" y="4800600"/>
+            <a:ext cx="457200" cy="201168"/>
           </a:xfrm>
           <a:prstGeom prst="rect">
             <a:avLst/>
@@ -6006,8 +5896,8 @@
         </p:nvSpPr>
         <p:spPr>
           <a:xfrm>
-            <a:off x="457200" y="274320"/>
-            <a:ext cx="8229600" cy="640080"/>
+            <a:off x="457200" y="228600"/>
+            <a:ext cx="8229600" cy="594360"/>
           </a:xfrm>
           <a:prstGeom prst="rect">
             <a:avLst/>
@@ -6028,7 +5918,7 @@
                   <a:schemeClr val="tx2"/>
                 </a:solidFill>
               </a:rPr>
-              <a:t>Cách 2 – Gửi trên cổng, mục Hỗ trợ</a:t>
+              <a:t>Lấy link Google Drive đúng cách</a:t>
             </a:r>
             <a:endParaRPr lang="en-US" sz="2800" dirty="0"/>
           </a:p>
@@ -6099,7 +5989,7 @@
         <p:spPr>
           <a:xfrm>
             <a:off x="960120" y="1106424"/>
-            <a:ext cx="4343400" cy="658368"/>
+            <a:ext cx="3611880" cy="548640"/>
           </a:xfrm>
           <a:prstGeom prst="rect">
             <a:avLst/>
@@ -6120,7 +6010,7 @@
                   <a:schemeClr val="tx1"/>
                 </a:solidFill>
               </a:rPr>
-              <a:t>Bấm menu </a:t>
+              <a:t>Google Drive → </a:t>
             </a:r>
             <a:pPr indent="0" marL="0">
               <a:buNone/>
@@ -6131,7 +6021,7 @@
                   <a:schemeClr val="tx1"/>
                 </a:solidFill>
               </a:rPr>
-              <a:t>☰</a:t>
+              <a:t>+ Mới → Tải tệp lên</a:t>
             </a:r>
             <a:pPr indent="0" marL="0">
               <a:buNone/>
@@ -6142,18 +6032,7 @@
                   <a:schemeClr val="tx1"/>
                 </a:solidFill>
               </a:rPr>
-              <a:t> → </a:t>
-            </a:r>
-            <a:pPr indent="0" marL="0">
-              <a:buNone/>
-            </a:pPr>
-            <a:r>
-              <a:rPr lang="en-US" sz="1400" b="1" dirty="0">
-                <a:solidFill>
-                  <a:schemeClr val="tx1"/>
-                </a:solidFill>
-              </a:rPr>
-              <a:t>Hỗ trợ</a:t>
+              <a:t> → chọn ảnh</a:t>
             </a:r>
             <a:endParaRPr lang="en-US" sz="1400" dirty="0"/>
           </a:p>
@@ -6167,7 +6046,7 @@
         </p:nvSpPr>
         <p:spPr>
           <a:xfrm>
-            <a:off x="457200" y="1856232"/>
+            <a:off x="457200" y="1746504"/>
             <a:ext cx="365760" cy="365760"/>
           </a:xfrm>
           <a:prstGeom prst="ellipse">
@@ -6187,7 +6066,7 @@
         </p:nvSpPr>
         <p:spPr>
           <a:xfrm>
-            <a:off x="457200" y="1856232"/>
+            <a:off x="457200" y="1746504"/>
             <a:ext cx="365760" cy="365760"/>
           </a:xfrm>
           <a:prstGeom prst="rect">
@@ -6223,8 +6102,8 @@
         </p:nvSpPr>
         <p:spPr>
           <a:xfrm>
-            <a:off x="960120" y="1819656"/>
-            <a:ext cx="4343400" cy="658368"/>
+            <a:off x="960120" y="1709928"/>
+            <a:ext cx="3611880" cy="548640"/>
           </a:xfrm>
           <a:prstGeom prst="rect">
             <a:avLst/>
@@ -6245,7 +6124,7 @@
                   <a:schemeClr val="tx1"/>
                 </a:solidFill>
               </a:rPr>
-              <a:t>Ô “Vấn đề Thầy/Cô đang gặp”: gõ </a:t>
+              <a:t>Chạm </a:t>
             </a:r>
             <a:pPr indent="0" marL="0">
               <a:buNone/>
@@ -6256,7 +6135,7 @@
                   <a:schemeClr val="tx1"/>
                 </a:solidFill>
               </a:rPr>
-              <a:t>khác</a:t>
+              <a:t>⋮</a:t>
             </a:r>
             <a:pPr indent="0" marL="0">
               <a:buNone/>
@@ -6267,7 +6146,7 @@
                   <a:schemeClr val="tx1"/>
                 </a:solidFill>
               </a:rPr>
-              <a:t> → chọn </a:t>
+              <a:t> cạnh ảnh → </a:t>
             </a:r>
             <a:pPr indent="0" marL="0">
               <a:buNone/>
@@ -6278,7 +6157,7 @@
                   <a:schemeClr val="tx1"/>
                 </a:solidFill>
               </a:rPr>
-              <a:t>Vấn đề khác</a:t>
+              <a:t>Chia sẻ</a:t>
             </a:r>
             <a:endParaRPr lang="en-US" sz="1400" dirty="0"/>
           </a:p>
@@ -6292,7 +6171,7 @@
         </p:nvSpPr>
         <p:spPr>
           <a:xfrm>
-            <a:off x="457200" y="2569464"/>
+            <a:off x="457200" y="2350008"/>
             <a:ext cx="365760" cy="365760"/>
           </a:xfrm>
           <a:prstGeom prst="ellipse">
@@ -6312,7 +6191,7 @@
         </p:nvSpPr>
         <p:spPr>
           <a:xfrm>
-            <a:off x="457200" y="2569464"/>
+            <a:off x="457200" y="2350008"/>
             <a:ext cx="365760" cy="365760"/>
           </a:xfrm>
           <a:prstGeom prst="rect">
@@ -6348,8 +6227,8 @@
         </p:nvSpPr>
         <p:spPr>
           <a:xfrm>
-            <a:off x="960120" y="2532888"/>
-            <a:ext cx="4343400" cy="658368"/>
+            <a:off x="960120" y="2313432"/>
+            <a:ext cx="3611880" cy="548640"/>
           </a:xfrm>
           <a:prstGeom prst="rect">
             <a:avLst/>
@@ -6370,7 +6249,7 @@
                   <a:schemeClr val="tx1"/>
                 </a:solidFill>
               </a:rPr>
-              <a:t>Ghi </a:t>
+              <a:t>Mục </a:t>
             </a:r>
             <a:pPr indent="0" marL="0">
               <a:buNone/>
@@ -6381,7 +6260,7 @@
                   <a:schemeClr val="tx1"/>
                 </a:solidFill>
               </a:rPr>
-              <a:t>lớp – GĐ – buổi – ngày</a:t>
+              <a:t>Quyền truy cập chung</a:t>
             </a:r>
             <a:pPr indent="0" marL="0">
               <a:buNone/>
@@ -6392,7 +6271,7 @@
                   <a:schemeClr val="tx1"/>
                 </a:solidFill>
               </a:rPr>
-              <a:t>, việc đã xảy ra, rồi </a:t>
+              <a:t>: đổi “Bị hạn chế” thành </a:t>
             </a:r>
             <a:pPr indent="0" marL="0">
               <a:buNone/>
@@ -6403,7 +6282,7 @@
                   <a:schemeClr val="tx1"/>
                 </a:solidFill>
               </a:rPr>
-              <a:t>dán link Drive</a:t>
+              <a:t>“Bất kỳ ai có đường liên kết”</a:t>
             </a:r>
             <a:endParaRPr lang="en-US" sz="1400" dirty="0"/>
           </a:p>
@@ -6417,7 +6296,7 @@
         </p:nvSpPr>
         <p:spPr>
           <a:xfrm>
-            <a:off x="457200" y="3282696"/>
+            <a:off x="457200" y="2953512"/>
             <a:ext cx="365760" cy="365760"/>
           </a:xfrm>
           <a:prstGeom prst="ellipse">
@@ -6437,7 +6316,7 @@
         </p:nvSpPr>
         <p:spPr>
           <a:xfrm>
-            <a:off x="457200" y="3282696"/>
+            <a:off x="457200" y="2953512"/>
             <a:ext cx="365760" cy="365760"/>
           </a:xfrm>
           <a:prstGeom prst="rect">
@@ -6473,8 +6352,8 @@
         </p:nvSpPr>
         <p:spPr>
           <a:xfrm>
-            <a:off x="960120" y="3246120"/>
-            <a:ext cx="4343400" cy="658368"/>
+            <a:off x="960120" y="2916936"/>
+            <a:ext cx="3611880" cy="548640"/>
           </a:xfrm>
           <a:prstGeom prst="rect">
             <a:avLst/>
@@ -6506,7 +6385,7 @@
                   <a:schemeClr val="tx1"/>
                 </a:solidFill>
               </a:rPr>
-              <a:t>Gửi yêu cầu</a:t>
+              <a:t>Sao chép đường liên kết</a:t>
             </a:r>
             <a:pPr indent="0" marL="0">
               <a:buNone/>
@@ -6517,7 +6396,7 @@
                   <a:schemeClr val="tx1"/>
                 </a:solidFill>
               </a:rPr>
-              <a:t> – câu trả lời hiện ngay dưới trang Hỗ trợ</a:t>
+              <a:t> → Xong</a:t>
             </a:r>
             <a:endParaRPr lang="en-US" sz="1400" dirty="0"/>
           </a:p>
@@ -6525,87 +6404,297 @@
       </p:sp>
       <p:sp>
         <p:nvSpPr>
-          <p:cNvPr id="15" name="Khung hv-yeu-cau"/>
+          <p:cNvPr id="15" name="So 5"/>
           <p:cNvSpPr/>
           <p:nvPr/>
         </p:nvSpPr>
         <p:spPr>
           <a:xfrm>
-            <a:off x="6108192" y="1033272"/>
-            <a:ext cx="2505456" cy="3358896"/>
+            <a:off x="457200" y="3557016"/>
+            <a:ext cx="365760" cy="365760"/>
+          </a:xfrm>
+          <a:prstGeom prst="ellipse">
+            <a:avLst/>
+          </a:prstGeom>
+          <a:solidFill>
+            <a:schemeClr val="tx2"/>
+          </a:solidFill>
+          <a:ln/>
+        </p:spPr>
+      </p:sp>
+      <p:sp>
+        <p:nvSpPr>
+          <p:cNvPr id="16" name="Text 14"/>
+          <p:cNvSpPr txBox="1"/>
+          <p:nvPr/>
+        </p:nvSpPr>
+        <p:spPr>
+          <a:xfrm>
+            <a:off x="457200" y="3557016"/>
+            <a:ext cx="365760" cy="365760"/>
+          </a:xfrm>
+          <a:prstGeom prst="rect">
+            <a:avLst/>
+          </a:prstGeom>
+          <a:noFill/>
+          <a:ln/>
+        </p:spPr>
+        <p:txBody>
+          <a:bodyPr wrap="square" lIns="0" tIns="0" rIns="0" bIns="0" rtlCol="0" anchor="ctr"/>
+          <a:lstStyle/>
+          <a:p>
+            <a:pPr algn="ctr" indent="0" marL="0">
+              <a:buNone/>
+            </a:pPr>
+            <a:r>
+              <a:rPr lang="en-US" sz="1600" b="1" dirty="0">
+                <a:solidFill>
+                  <a:schemeClr val="bg1"/>
+                </a:solidFill>
+              </a:rPr>
+              <a:t>5</a:t>
+            </a:r>
+            <a:endParaRPr lang="en-US" sz="1600" dirty="0"/>
+          </a:p>
+        </p:txBody>
+      </p:sp>
+      <p:sp>
+        <p:nvSpPr>
+          <p:cNvPr id="17" name="Text 15"/>
+          <p:cNvSpPr txBox="1"/>
+          <p:nvPr/>
+        </p:nvSpPr>
+        <p:spPr>
+          <a:xfrm>
+            <a:off x="960120" y="3520440"/>
+            <a:ext cx="3611880" cy="548640"/>
+          </a:xfrm>
+          <a:prstGeom prst="rect">
+            <a:avLst/>
+          </a:prstGeom>
+          <a:noFill/>
+          <a:ln/>
+        </p:spPr>
+        <p:txBody>
+          <a:bodyPr wrap="square" lIns="0" tIns="0" rIns="0" bIns="0" rtlCol="0" anchor="t"/>
+          <a:lstStyle/>
+          <a:p>
+            <a:pPr indent="0" marL="0">
+              <a:buNone/>
+            </a:pPr>
+            <a:r>
+              <a:rPr lang="en-US" sz="1400" dirty="0">
+                <a:solidFill>
+                  <a:schemeClr val="tx1"/>
+                </a:solidFill>
+              </a:rPr>
+              <a:t>Dán link vào nội dung yêu cầu hỗ trợ</a:t>
+            </a:r>
+            <a:endParaRPr lang="en-US" sz="1400" dirty="0"/>
+          </a:p>
+        </p:txBody>
+      </p:sp>
+      <p:sp>
+        <p:nvSpPr>
+          <p:cNvPr id="18" name="Text 16"/>
+          <p:cNvSpPr txBox="1"/>
+          <p:nvPr/>
+        </p:nvSpPr>
+        <p:spPr>
+          <a:xfrm>
+            <a:off x="4846320" y="1097280"/>
+            <a:ext cx="3840480" cy="274320"/>
+          </a:xfrm>
+          <a:prstGeom prst="rect">
+            <a:avLst/>
+          </a:prstGeom>
+          <a:noFill/>
+          <a:ln/>
+        </p:spPr>
+        <p:txBody>
+          <a:bodyPr wrap="square" lIns="0" tIns="0" rIns="0" bIns="0" rtlCol="0" anchor="ctr"/>
+          <a:lstStyle/>
+          <a:p>
+            <a:pPr indent="0" marL="0">
+              <a:buNone/>
+            </a:pPr>
+            <a:r>
+              <a:rPr lang="en-US" sz="1100" i="1" dirty="0">
+                <a:solidFill>
+                  <a:schemeClr val="accent5"/>
+                </a:solidFill>
+              </a:rPr>
+              <a:t>Minh họa hộp thoại Chia sẻ của Google Drive</a:t>
+            </a:r>
+            <a:endParaRPr lang="en-US" sz="1100" dirty="0"/>
+          </a:p>
+        </p:txBody>
+      </p:sp>
+      <p:sp>
+        <p:nvSpPr>
+          <p:cNvPr id="19" name="Hop thoai chia se"/>
+          <p:cNvSpPr/>
+          <p:nvPr/>
+        </p:nvSpPr>
+        <p:spPr>
+          <a:xfrm>
+            <a:off x="4846320" y="1417320"/>
+            <a:ext cx="3840480" cy="1965960"/>
           </a:xfrm>
           <a:prstGeom prst="roundRect">
             <a:avLst>
-              <a:gd name="adj" fmla="val 4380"/>
+              <a:gd name="adj" fmla="val 4651"/>
             </a:avLst>
           </a:prstGeom>
           <a:solidFill>
-            <a:schemeClr val="tx1"/>
+            <a:schemeClr val="bg1"/>
           </a:solidFill>
-          <a:ln/>
+          <a:ln w="12700">
+            <a:solidFill>
+              <a:schemeClr val="accent6"/>
+            </a:solidFill>
+            <a:prstDash val="solid"/>
+          </a:ln>
           <a:effectLst>
-            <a:outerShdw sx="100000" sy="100000" kx="0" ky="0" algn="bl" rotWithShape="0" blurRad="76200" dist="25400" dir="5400000">
+            <a:outerShdw sx="100000" sy="100000" kx="0" ky="0" algn="bl" rotWithShape="0" blurRad="101600" dist="25400" dir="5400000">
               <a:srgbClr val="1B2A2F">
-                <a:alpha val="25000"/>
+                <a:alpha val="20000"/>
               </a:srgbClr>
             </a:outerShdw>
           </a:effectLst>
         </p:spPr>
       </p:sp>
-      <p:pic>
-        <p:nvPicPr>
-          <p:cNvPr id="16" name="Anh hv-yeu-cau" descr="Trang Yêu cầu hỗ trợ đã chọn Vấn đề khác và dán link Google Drive">    </p:cNvPr>
-          <p:cNvPicPr>
-            <a:picLocks noChangeAspect="1"/>
-          </p:cNvPicPr>
-          <p:nvPr/>
-        </p:nvPicPr>
-        <p:blipFill>
-          <a:blip r:embed="rId1"/>
-          <a:stretch>
-            <a:fillRect/>
-          </a:stretch>
-        </p:blipFill>
-        <p:spPr>
-          <a:xfrm>
-            <a:off x="6172200" y="1097280"/>
-            <a:ext cx="2377440" cy="3230880"/>
-          </a:xfrm>
-          <a:prstGeom prst="rect">
-            <a:avLst/>
-          </a:prstGeom>
-        </p:spPr>
-      </p:pic>
-      <p:sp>
-        <p:nvSpPr>
-          <p:cNvPr id="17" name="So 2"/>
+      <p:sp>
+        <p:nvSpPr>
+          <p:cNvPr id="20" name="Text 18"/>
+          <p:cNvSpPr txBox="1"/>
+          <p:nvPr/>
+        </p:nvSpPr>
+        <p:spPr>
+          <a:xfrm>
+            <a:off x="5029200" y="1527048"/>
+            <a:ext cx="3474720" cy="320040"/>
+          </a:xfrm>
+          <a:prstGeom prst="rect">
+            <a:avLst/>
+          </a:prstGeom>
+          <a:noFill/>
+          <a:ln/>
+        </p:spPr>
+        <p:txBody>
+          <a:bodyPr wrap="square" lIns="0" tIns="0" rIns="0" bIns="0" rtlCol="0" anchor="ctr"/>
+          <a:lstStyle/>
+          <a:p>
+            <a:pPr indent="0" marL="0">
+              <a:buNone/>
+            </a:pPr>
+            <a:r>
+              <a:rPr lang="en-US" sz="1400" b="1" dirty="0">
+                <a:solidFill>
+                  <a:schemeClr val="tx1"/>
+                </a:solidFill>
+              </a:rPr>
+              <a:t>Chia sẻ “anh-zoom-buoi2.jpg”</a:t>
+            </a:r>
+            <a:endParaRPr lang="en-US" sz="1400" dirty="0"/>
+          </a:p>
+        </p:txBody>
+      </p:sp>
+      <p:sp>
+        <p:nvSpPr>
+          <p:cNvPr id="21" name="Text 19"/>
+          <p:cNvSpPr txBox="1"/>
+          <p:nvPr/>
+        </p:nvSpPr>
+        <p:spPr>
+          <a:xfrm>
+            <a:off x="5029200" y="1920240"/>
+            <a:ext cx="3474720" cy="228600"/>
+          </a:xfrm>
+          <a:prstGeom prst="rect">
+            <a:avLst/>
+          </a:prstGeom>
+          <a:noFill/>
+          <a:ln/>
+        </p:spPr>
+        <p:txBody>
+          <a:bodyPr wrap="square" lIns="0" tIns="0" rIns="0" bIns="0" rtlCol="0" anchor="ctr"/>
+          <a:lstStyle/>
+          <a:p>
+            <a:pPr indent="0" marL="0">
+              <a:buNone/>
+            </a:pPr>
+            <a:r>
+              <a:rPr lang="en-US" sz="1200" b="1" dirty="0">
+                <a:solidFill>
+                  <a:schemeClr val="tx1"/>
+                </a:solidFill>
+              </a:rPr>
+              <a:t>Quyền truy cập chung</a:t>
+            </a:r>
+            <a:endParaRPr lang="en-US" sz="1200" dirty="0"/>
+          </a:p>
+        </p:txBody>
+      </p:sp>
+      <p:sp>
+        <p:nvSpPr>
+          <p:cNvPr id="22" name="Bieu tuong"/>
           <p:cNvSpPr/>
           <p:nvPr/>
         </p:nvSpPr>
         <p:spPr>
           <a:xfrm>
-            <a:off x="5751576" y="2340254"/>
-            <a:ext cx="292608" cy="292608"/>
+            <a:off x="5029200" y="2240280"/>
+            <a:ext cx="329184" cy="329184"/>
           </a:xfrm>
           <a:prstGeom prst="ellipse">
             <a:avLst/>
           </a:prstGeom>
           <a:solidFill>
-            <a:schemeClr val="accent2"/>
+            <a:schemeClr val="accent1">
+              <a:alpha val="30000"/>
+            </a:schemeClr>
           </a:solidFill>
           <a:ln/>
         </p:spPr>
       </p:sp>
       <p:sp>
         <p:nvSpPr>
-          <p:cNvPr id="18" name="Text 15"/>
+          <p:cNvPr id="23" name="Chon quyen"/>
+          <p:cNvSpPr/>
+          <p:nvPr/>
+        </p:nvSpPr>
+        <p:spPr>
+          <a:xfrm>
+            <a:off x="5449824" y="2212848"/>
+            <a:ext cx="2331720" cy="329184"/>
+          </a:xfrm>
+          <a:prstGeom prst="roundRect">
+            <a:avLst>
+              <a:gd name="adj" fmla="val 13889"/>
+            </a:avLst>
+          </a:prstGeom>
+          <a:solidFill>
+            <a:schemeClr val="bg2"/>
+          </a:solidFill>
+          <a:ln w="25400">
+            <a:solidFill>
+              <a:schemeClr val="accent2"/>
+            </a:solidFill>
+            <a:prstDash val="solid"/>
+          </a:ln>
+        </p:spPr>
+      </p:sp>
+      <p:sp>
+        <p:nvSpPr>
+          <p:cNvPr id="24" name="Text 22"/>
           <p:cNvSpPr txBox="1"/>
           <p:nvPr/>
         </p:nvSpPr>
         <p:spPr>
           <a:xfrm>
-            <a:off x="5751576" y="2340254"/>
-            <a:ext cx="292608" cy="292608"/>
+            <a:off x="5504688" y="2212848"/>
+            <a:ext cx="2240280" cy="329184"/>
           </a:xfrm>
           <a:prstGeom prst="rect">
             <a:avLst/>
@@ -6617,51 +6706,248 @@
           <a:bodyPr wrap="square" lIns="0" tIns="0" rIns="0" bIns="0" rtlCol="0" anchor="ctr"/>
           <a:lstStyle/>
           <a:p>
+            <a:pPr indent="0" marL="0">
+              <a:buNone/>
+            </a:pPr>
+            <a:r>
+              <a:rPr lang="en-US" sz="1200" b="1" dirty="0">
+                <a:solidFill>
+                  <a:schemeClr val="tx1"/>
+                </a:solidFill>
+              </a:rPr>
+              <a:t>Bất kỳ ai có đường liên kết ▾</a:t>
+            </a:r>
+            <a:endParaRPr lang="en-US" sz="1200" dirty="0"/>
+          </a:p>
+        </p:txBody>
+      </p:sp>
+      <p:sp>
+        <p:nvSpPr>
+          <p:cNvPr id="25" name="Text 23"/>
+          <p:cNvSpPr txBox="1"/>
+          <p:nvPr/>
+        </p:nvSpPr>
+        <p:spPr>
+          <a:xfrm>
+            <a:off x="7818120" y="2212848"/>
+            <a:ext cx="822960" cy="329184"/>
+          </a:xfrm>
+          <a:prstGeom prst="rect">
+            <a:avLst/>
+          </a:prstGeom>
+          <a:noFill/>
+          <a:ln/>
+        </p:spPr>
+        <p:txBody>
+          <a:bodyPr wrap="square" lIns="0" tIns="0" rIns="0" bIns="0" rtlCol="0" anchor="ctr"/>
+          <a:lstStyle/>
+          <a:p>
+            <a:pPr indent="0" marL="0">
+              <a:buNone/>
+            </a:pPr>
+            <a:r>
+              <a:rPr lang="en-US" sz="1100" dirty="0">
+                <a:solidFill>
+                  <a:schemeClr val="tx1"/>
+                </a:solidFill>
+              </a:rPr>
+              <a:t>Người xem ▾</a:t>
+            </a:r>
+            <a:endParaRPr lang="en-US" sz="1100" dirty="0"/>
+          </a:p>
+        </p:txBody>
+      </p:sp>
+      <p:sp>
+        <p:nvSpPr>
+          <p:cNvPr id="26" name="Text 24"/>
+          <p:cNvSpPr txBox="1"/>
+          <p:nvPr/>
+        </p:nvSpPr>
+        <p:spPr>
+          <a:xfrm>
+            <a:off x="5449824" y="2560320"/>
+            <a:ext cx="3108960" cy="228600"/>
+          </a:xfrm>
+          <a:prstGeom prst="rect">
+            <a:avLst/>
+          </a:prstGeom>
+          <a:noFill/>
+          <a:ln/>
+        </p:spPr>
+        <p:txBody>
+          <a:bodyPr wrap="square" lIns="0" tIns="0" rIns="0" bIns="0" rtlCol="0" anchor="ctr"/>
+          <a:lstStyle/>
+          <a:p>
+            <a:pPr indent="0" marL="0">
+              <a:buNone/>
+            </a:pPr>
+            <a:r>
+              <a:rPr lang="en-US" sz="1000" dirty="0">
+                <a:solidFill>
+                  <a:schemeClr val="accent5"/>
+                </a:solidFill>
+              </a:rPr>
+              <a:t>Bất kỳ ai có đường liên kết đều có thể xem</a:t>
+            </a:r>
+            <a:endParaRPr lang="en-US" sz="1000" dirty="0"/>
+          </a:p>
+        </p:txBody>
+      </p:sp>
+      <p:sp>
+        <p:nvSpPr>
+          <p:cNvPr id="27" name="Nut sao chep"/>
+          <p:cNvSpPr/>
+          <p:nvPr/>
+        </p:nvSpPr>
+        <p:spPr>
+          <a:xfrm>
+            <a:off x="5029200" y="2926080"/>
+            <a:ext cx="1920240" cy="329184"/>
+          </a:xfrm>
+          <a:prstGeom prst="roundRect">
+            <a:avLst>
+              <a:gd name="adj" fmla="val 50000"/>
+            </a:avLst>
+          </a:prstGeom>
+          <a:solidFill>
+            <a:schemeClr val="bg1"/>
+          </a:solidFill>
+          <a:ln w="25400">
+            <a:solidFill>
+              <a:schemeClr val="accent2"/>
+            </a:solidFill>
+            <a:prstDash val="solid"/>
+          </a:ln>
+        </p:spPr>
+      </p:sp>
+      <p:sp>
+        <p:nvSpPr>
+          <p:cNvPr id="28" name="Text 26"/>
+          <p:cNvSpPr txBox="1"/>
+          <p:nvPr/>
+        </p:nvSpPr>
+        <p:spPr>
+          <a:xfrm>
+            <a:off x="5029200" y="2926080"/>
+            <a:ext cx="1920240" cy="329184"/>
+          </a:xfrm>
+          <a:prstGeom prst="rect">
+            <a:avLst/>
+          </a:prstGeom>
+          <a:noFill/>
+          <a:ln/>
+        </p:spPr>
+        <p:txBody>
+          <a:bodyPr wrap="square" lIns="0" tIns="0" rIns="0" bIns="0" rtlCol="0" anchor="ctr"/>
+          <a:lstStyle/>
+          <a:p>
             <a:pPr algn="ctr" indent="0" marL="0">
               <a:buNone/>
             </a:pPr>
             <a:r>
-              <a:rPr lang="en-US" sz="1300" b="1" dirty="0">
+              <a:rPr lang="en-US" sz="1100" b="1" dirty="0">
+                <a:solidFill>
+                  <a:schemeClr val="tx2"/>
+                </a:solidFill>
+              </a:rPr>
+              <a:t>Sao chép đường liên kết</a:t>
+            </a:r>
+            <a:endParaRPr lang="en-US" sz="1100" dirty="0"/>
+          </a:p>
+        </p:txBody>
+      </p:sp>
+      <p:sp>
+        <p:nvSpPr>
+          <p:cNvPr id="29" name="Nut xong"/>
+          <p:cNvSpPr/>
+          <p:nvPr/>
+        </p:nvSpPr>
+        <p:spPr>
+          <a:xfrm>
+            <a:off x="7772400" y="2926080"/>
+            <a:ext cx="731520" cy="329184"/>
+          </a:xfrm>
+          <a:prstGeom prst="roundRect">
+            <a:avLst>
+              <a:gd name="adj" fmla="val 50000"/>
+            </a:avLst>
+          </a:prstGeom>
+          <a:solidFill>
+            <a:schemeClr val="tx2"/>
+          </a:solidFill>
+          <a:ln/>
+        </p:spPr>
+      </p:sp>
+      <p:sp>
+        <p:nvSpPr>
+          <p:cNvPr id="30" name="Text 28"/>
+          <p:cNvSpPr txBox="1"/>
+          <p:nvPr/>
+        </p:nvSpPr>
+        <p:spPr>
+          <a:xfrm>
+            <a:off x="7772400" y="2926080"/>
+            <a:ext cx="731520" cy="329184"/>
+          </a:xfrm>
+          <a:prstGeom prst="rect">
+            <a:avLst/>
+          </a:prstGeom>
+          <a:noFill/>
+          <a:ln/>
+        </p:spPr>
+        <p:txBody>
+          <a:bodyPr wrap="square" lIns="0" tIns="0" rIns="0" bIns="0" rtlCol="0" anchor="ctr"/>
+          <a:lstStyle/>
+          <a:p>
+            <a:pPr algn="ctr" indent="0" marL="0">
+              <a:buNone/>
+            </a:pPr>
+            <a:r>
+              <a:rPr lang="en-US" sz="1100" b="1" dirty="0">
                 <a:solidFill>
                   <a:schemeClr val="bg1"/>
                 </a:solidFill>
               </a:rPr>
-              <a:t>2</a:t>
-            </a:r>
-            <a:endParaRPr lang="en-US" sz="1300" dirty="0"/>
-          </a:p>
-        </p:txBody>
-      </p:sp>
-      <p:sp>
-        <p:nvSpPr>
-          <p:cNvPr id="19" name="So 3"/>
+              <a:t>Xong</a:t>
+            </a:r>
+            <a:endParaRPr lang="en-US" sz="1100" dirty="0"/>
+          </a:p>
+        </p:txBody>
+      </p:sp>
+      <p:sp>
+        <p:nvSpPr>
+          <p:cNvPr id="31" name="Luu y chia se"/>
           <p:cNvSpPr/>
           <p:nvPr/>
         </p:nvSpPr>
         <p:spPr>
           <a:xfrm>
-            <a:off x="5751576" y="3277210"/>
-            <a:ext cx="292608" cy="292608"/>
-          </a:xfrm>
-          <a:prstGeom prst="ellipse">
-            <a:avLst/>
+            <a:off x="4846320" y="3566160"/>
+            <a:ext cx="3840480" cy="960120"/>
+          </a:xfrm>
+          <a:prstGeom prst="roundRect">
+            <a:avLst>
+              <a:gd name="adj" fmla="val 7619"/>
+            </a:avLst>
           </a:prstGeom>
           <a:solidFill>
-            <a:schemeClr val="accent2"/>
+            <a:schemeClr val="accent2">
+              <a:alpha val="18000"/>
+            </a:schemeClr>
           </a:solidFill>
           <a:ln/>
         </p:spPr>
       </p:sp>
       <p:sp>
         <p:nvSpPr>
-          <p:cNvPr id="20" name="Text 17"/>
+          <p:cNvPr id="32" name="Text 30"/>
           <p:cNvSpPr txBox="1"/>
           <p:nvPr/>
         </p:nvSpPr>
         <p:spPr>
           <a:xfrm>
-            <a:off x="5751576" y="3277210"/>
-            <a:ext cx="292608" cy="292608"/>
+            <a:off x="4983480" y="3566160"/>
+            <a:ext cx="3566160" cy="960120"/>
           </a:xfrm>
           <a:prstGeom prst="rect">
             <a:avLst/>
@@ -6673,74 +6959,32 @@
           <a:bodyPr wrap="square" lIns="0" tIns="0" rIns="0" bIns="0" rtlCol="0" anchor="ctr"/>
           <a:lstStyle/>
           <a:p>
-            <a:pPr algn="ctr" indent="0" marL="0">
-              <a:buNone/>
-            </a:pPr>
-            <a:r>
-              <a:rPr lang="en-US" sz="1300" b="1" dirty="0">
-                <a:solidFill>
-                  <a:schemeClr val="bg1"/>
-                </a:solidFill>
-              </a:rPr>
-              <a:t>3</a:t>
-            </a:r>
-            <a:endParaRPr lang="en-US" sz="1300" dirty="0"/>
-          </a:p>
-        </p:txBody>
-      </p:sp>
-      <p:sp>
-        <p:nvSpPr>
-          <p:cNvPr id="21" name="So 4"/>
-          <p:cNvSpPr/>
-          <p:nvPr/>
-        </p:nvSpPr>
-        <p:spPr>
-          <a:xfrm>
-            <a:off x="5751576" y="3923386"/>
-            <a:ext cx="292608" cy="292608"/>
-          </a:xfrm>
-          <a:prstGeom prst="ellipse">
-            <a:avLst/>
-          </a:prstGeom>
-          <a:solidFill>
-            <a:schemeClr val="accent2"/>
-          </a:solidFill>
-          <a:ln/>
-        </p:spPr>
-      </p:sp>
-      <p:sp>
-        <p:nvSpPr>
-          <p:cNvPr id="22" name="Text 19"/>
-          <p:cNvSpPr txBox="1"/>
-          <p:nvPr/>
-        </p:nvSpPr>
-        <p:spPr>
-          <a:xfrm>
-            <a:off x="5751576" y="3923386"/>
-            <a:ext cx="292608" cy="292608"/>
-          </a:xfrm>
-          <a:prstGeom prst="rect">
-            <a:avLst/>
-          </a:prstGeom>
-          <a:noFill/>
-          <a:ln/>
-        </p:spPr>
-        <p:txBody>
-          <a:bodyPr wrap="square" lIns="0" tIns="0" rIns="0" bIns="0" rtlCol="0" anchor="ctr"/>
-          <a:lstStyle/>
-          <a:p>
-            <a:pPr algn="ctr" indent="0" marL="0">
-              <a:buNone/>
-            </a:pPr>
-            <a:r>
-              <a:rPr lang="en-US" sz="1300" b="1" dirty="0">
-                <a:solidFill>
-                  <a:schemeClr val="bg1"/>
-                </a:solidFill>
-              </a:rPr>
-              <a:t>4</a:t>
-            </a:r>
-            <a:endParaRPr lang="en-US" sz="1300" dirty="0"/>
+            <a:pPr indent="0" marL="0">
+              <a:buNone/>
+            </a:pPr>
+            <a:r>
+              <a:rPr lang="en-US" sz="1200" b="1" dirty="0">
+                <a:solidFill>
+                  <a:schemeClr val="tx1"/>
+                </a:solidFill>
+              </a:rPr>
+              <a:t>Để “Bị hạn chế” thì người hỗ trợ không mở được ảnh.</a:t>
+            </a:r>
+            <a:endParaRPr lang="en-US" sz="1200" dirty="0"/>
+          </a:p>
+          <a:p>
+            <a:pPr indent="0" marL="0">
+              <a:buNone/>
+            </a:pPr>
+            <a:r>
+              <a:rPr lang="en-US" sz="1200" dirty="0">
+                <a:solidFill>
+                  <a:schemeClr val="tx1"/>
+                </a:solidFill>
+              </a:rPr>
+              <a:t>Tự kiểm tra: mở link trong tab ẩn danh. Xử lý xong có thể đổi lại “Bị hạn chế”.</a:t>
+            </a:r>
+            <a:endParaRPr lang="en-US" sz="1200" dirty="0"/>
           </a:p>
         </p:txBody>
       </p:sp>
@@ -6756,8 +7000,8 @@
         </p:nvSpPr>
         <p:spPr>
           <a:xfrm>
-            <a:off x="8229600" y="4754880"/>
-            <a:ext cx="457200" cy="228600"/>
+            <a:off x="8229600" y="4800600"/>
+            <a:ext cx="457200" cy="201168"/>
           </a:xfrm>
           <a:prstGeom prst="rect">
             <a:avLst/>
@@ -6824,8 +7068,8 @@
         </p:nvSpPr>
         <p:spPr>
           <a:xfrm>
-            <a:off x="457200" y="274320"/>
-            <a:ext cx="8229600" cy="640080"/>
+            <a:off x="457200" y="228600"/>
+            <a:ext cx="8229600" cy="594360"/>
           </a:xfrm>
           <a:prstGeom prst="rect">
             <a:avLst/>
@@ -6846,7 +7090,7 @@
                   <a:schemeClr val="tx2"/>
                 </a:solidFill>
               </a:rPr>
-              <a:t>Bước 4 – Xem lại kết quả trên trang Lớp học</a:t>
+              <a:t>Cách 2 – Gửi trên cổng, mục Hỗ trợ</a:t>
             </a:r>
             <a:endParaRPr lang="en-US" sz="2800" dirty="0"/>
           </a:p>
@@ -6854,54 +7098,18 @@
       </p:sp>
       <p:sp>
         <p:nvSpPr>
-          <p:cNvPr id="3" name="Text 1"/>
-          <p:cNvSpPr txBox="1"/>
-          <p:nvPr/>
-        </p:nvSpPr>
-        <p:spPr>
-          <a:xfrm>
-            <a:off x="457200" y="1143000"/>
-            <a:ext cx="3566160" cy="320040"/>
-          </a:xfrm>
-          <a:prstGeom prst="rect">
-            <a:avLst/>
-          </a:prstGeom>
-          <a:noFill/>
-          <a:ln/>
-        </p:spPr>
-        <p:txBody>
-          <a:bodyPr wrap="square" lIns="0" tIns="0" rIns="0" bIns="0" rtlCol="0" anchor="ctr"/>
-          <a:lstStyle/>
-          <a:p>
-            <a:pPr indent="0" marL="0">
-              <a:buNone/>
-            </a:pPr>
-            <a:r>
-              <a:rPr lang="en-US" sz="1500" b="1" dirty="0">
-                <a:solidFill>
-                  <a:schemeClr val="accent3"/>
-                </a:solidFill>
-              </a:rPr>
-              <a:t>Trước</a:t>
-            </a:r>
-            <a:endParaRPr lang="en-US" sz="1500" dirty="0"/>
-          </a:p>
-        </p:txBody>
-      </p:sp>
-      <p:sp>
-        <p:nvSpPr>
-          <p:cNvPr id="4" name="Khung hv-buoi2-truoc"/>
+          <p:cNvPr id="3" name="Khung pc-hv-yeu-cau"/>
           <p:cNvSpPr/>
           <p:nvPr/>
         </p:nvSpPr>
         <p:spPr>
           <a:xfrm>
-            <a:off x="466344" y="1517904"/>
-            <a:ext cx="3547872" cy="1414272"/>
+            <a:off x="449095" y="1184148"/>
+            <a:ext cx="5829207" cy="2770632"/>
           </a:xfrm>
           <a:prstGeom prst="roundRect">
             <a:avLst>
-              <a:gd name="adj" fmla="val 3879"/>
+              <a:gd name="adj" fmla="val 1320"/>
             </a:avLst>
           </a:prstGeom>
           <a:solidFill>
@@ -6913,11 +7121,18 @@
             </a:solidFill>
             <a:prstDash val="solid"/>
           </a:ln>
+          <a:effectLst>
+            <a:outerShdw sx="100000" sy="100000" kx="0" ky="0" algn="bl" rotWithShape="0" blurRad="76200" dist="25400" dir="5400000">
+              <a:srgbClr val="1B2A2F">
+                <a:alpha val="22000"/>
+              </a:srgbClr>
+            </a:outerShdw>
+          </a:effectLst>
         </p:spPr>
       </p:sp>
       <p:pic>
         <p:nvPicPr>
-          <p:cNvPr id="5" name="Anh hv-buoi2-truoc" descr="Buổi 2 hiện nhãn Vắng">    </p:cNvPr>
+          <p:cNvPr id="4" name="Anh pc-hv-yeu-cau" descr="Trang Yêu cầu hỗ trợ trên máy tính, đã chọn Vấn đề khác và dán link Drive">    </p:cNvPr>
           <p:cNvPicPr>
             <a:picLocks noChangeAspect="1"/>
           </p:cNvPicPr>
@@ -6931,8 +7146,8 @@
         </p:blipFill>
         <p:spPr>
           <a:xfrm>
-            <a:off x="502920" y="1554480"/>
-            <a:ext cx="3474720" cy="1341120"/>
+            <a:off x="471955" y="1207008"/>
+            <a:ext cx="5783487" cy="2724912"/>
           </a:xfrm>
           <a:prstGeom prst="rect">
             <a:avLst/>
@@ -6941,90 +7156,36 @@
       </p:pic>
       <p:sp>
         <p:nvSpPr>
-          <p:cNvPr id="6" name="Mui ten"/>
+          <p:cNvPr id="5" name="Khung m-hv-yeu-cau"/>
           <p:cNvSpPr/>
           <p:nvPr/>
         </p:nvSpPr>
         <p:spPr>
           <a:xfrm>
-            <a:off x="4206240" y="2103120"/>
-            <a:ext cx="640080" cy="274320"/>
-          </a:xfrm>
-          <a:prstGeom prst="rightArrow">
-            <a:avLst/>
-          </a:prstGeom>
-          <a:solidFill>
-            <a:schemeClr val="accent6"/>
-          </a:solidFill>
-          <a:ln/>
-        </p:spPr>
-      </p:sp>
-      <p:sp>
-        <p:nvSpPr>
-          <p:cNvPr id="7" name="Text 4"/>
-          <p:cNvSpPr txBox="1"/>
-          <p:nvPr/>
-        </p:nvSpPr>
-        <p:spPr>
-          <a:xfrm>
-            <a:off x="5074920" y="1143000"/>
-            <a:ext cx="3611880" cy="320040"/>
-          </a:xfrm>
-          <a:prstGeom prst="rect">
-            <a:avLst/>
-          </a:prstGeom>
-          <a:noFill/>
-          <a:ln/>
-        </p:spPr>
-        <p:txBody>
-          <a:bodyPr wrap="square" lIns="0" tIns="0" rIns="0" bIns="0" rtlCol="0" anchor="ctr"/>
-          <a:lstStyle/>
-          <a:p>
-            <a:pPr indent="0" marL="0">
-              <a:buNone/>
-            </a:pPr>
-            <a:r>
-              <a:rPr lang="en-US" sz="1500" b="1" dirty="0">
-                <a:solidFill>
-                  <a:schemeClr val="accent1"/>
-                </a:solidFill>
-              </a:rPr>
-              <a:t>Sau khi người hỗ trợ bổ sung</a:t>
-            </a:r>
-            <a:endParaRPr lang="en-US" sz="1500" dirty="0"/>
-          </a:p>
-        </p:txBody>
-      </p:sp>
-      <p:sp>
-        <p:nvSpPr>
-          <p:cNvPr id="8" name="Khung hv-buoi2-sau"/>
-          <p:cNvSpPr/>
-          <p:nvPr/>
-        </p:nvSpPr>
-        <p:spPr>
-          <a:xfrm>
-            <a:off x="5084064" y="1517904"/>
-            <a:ext cx="3593592" cy="1266521"/>
+            <a:off x="6612057" y="1152144"/>
+            <a:ext cx="2114852" cy="2834640"/>
           </a:xfrm>
           <a:prstGeom prst="roundRect">
             <a:avLst>
-              <a:gd name="adj" fmla="val 4332"/>
+              <a:gd name="adj" fmla="val 4324"/>
             </a:avLst>
           </a:prstGeom>
           <a:solidFill>
-            <a:schemeClr val="bg1"/>
+            <a:schemeClr val="tx1"/>
           </a:solidFill>
-          <a:ln w="12700">
-            <a:solidFill>
-              <a:schemeClr val="accent6"/>
-            </a:solidFill>
-            <a:prstDash val="solid"/>
-          </a:ln>
+          <a:ln/>
+          <a:effectLst>
+            <a:outerShdw sx="100000" sy="100000" kx="0" ky="0" algn="bl" rotWithShape="0" blurRad="76200" dist="25400" dir="5400000">
+              <a:srgbClr val="1B2A2F">
+                <a:alpha val="22000"/>
+              </a:srgbClr>
+            </a:outerShdw>
+          </a:effectLst>
         </p:spPr>
       </p:sp>
       <p:pic>
         <p:nvPicPr>
-          <p:cNvPr id="9" name="Anh hv-buoi2-sau" descr="Buổi 2 hiện nhãn Có mặt">    </p:cNvPr>
+          <p:cNvPr id="6" name="Anh m-hv-yeu-cau" descr="Trang Yêu cầu hỗ trợ trên điện thoại">    </p:cNvPr>
           <p:cNvPicPr>
             <a:picLocks noChangeAspect="1"/>
           </p:cNvPicPr>
@@ -7038,8 +7199,8 @@
         </p:blipFill>
         <p:spPr>
           <a:xfrm>
-            <a:off x="5120640" y="1554480"/>
-            <a:ext cx="3520440" cy="1193369"/>
+            <a:off x="6666921" y="1207008"/>
+            <a:ext cx="2005124" cy="2724912"/>
           </a:xfrm>
           <a:prstGeom prst="rect">
             <a:avLst/>
@@ -7048,18 +7209,314 @@
       </p:pic>
       <p:sp>
         <p:nvSpPr>
-          <p:cNvPr id="10" name="Luu y thoi gian"/>
+          <p:cNvPr id="7" name="Text 3"/>
+          <p:cNvSpPr txBox="1"/>
+          <p:nvPr/>
+        </p:nvSpPr>
+        <p:spPr>
+          <a:xfrm>
+            <a:off x="471955" y="932688"/>
+            <a:ext cx="2743200" cy="201168"/>
+          </a:xfrm>
+          <a:prstGeom prst="rect">
+            <a:avLst/>
+          </a:prstGeom>
+          <a:noFill/>
+          <a:ln/>
+        </p:spPr>
+        <p:txBody>
+          <a:bodyPr wrap="square" lIns="0" tIns="0" rIns="0" bIns="0" rtlCol="0" anchor="ctr"/>
+          <a:lstStyle/>
+          <a:p>
+            <a:pPr indent="0" marL="0">
+              <a:buNone/>
+            </a:pPr>
+            <a:r>
+              <a:rPr lang="en-US" sz="1100" b="1" spc="100" kern="0" dirty="0">
+                <a:solidFill>
+                  <a:schemeClr val="accent5"/>
+                </a:solidFill>
+              </a:rPr>
+              <a:t>MÁY TÍNH</a:t>
+            </a:r>
+            <a:endParaRPr lang="en-US" sz="1100" dirty="0"/>
+          </a:p>
+        </p:txBody>
+      </p:sp>
+      <p:sp>
+        <p:nvSpPr>
+          <p:cNvPr id="8" name="Text 4"/>
+          <p:cNvSpPr txBox="1"/>
+          <p:nvPr/>
+        </p:nvSpPr>
+        <p:spPr>
+          <a:xfrm>
+            <a:off x="6666921" y="932688"/>
+            <a:ext cx="1828800" cy="201168"/>
+          </a:xfrm>
+          <a:prstGeom prst="rect">
+            <a:avLst/>
+          </a:prstGeom>
+          <a:noFill/>
+          <a:ln/>
+        </p:spPr>
+        <p:txBody>
+          <a:bodyPr wrap="square" lIns="0" tIns="0" rIns="0" bIns="0" rtlCol="0" anchor="ctr"/>
+          <a:lstStyle/>
+          <a:p>
+            <a:pPr indent="0" marL="0">
+              <a:buNone/>
+            </a:pPr>
+            <a:r>
+              <a:rPr lang="en-US" sz="1100" b="1" spc="100" kern="0" dirty="0">
+                <a:solidFill>
+                  <a:schemeClr val="accent5"/>
+                </a:solidFill>
+              </a:rPr>
+              <a:t>ĐIỆN THOẠI</a:t>
+            </a:r>
+            <a:endParaRPr lang="en-US" sz="1100" dirty="0"/>
+          </a:p>
+        </p:txBody>
+      </p:sp>
+      <p:sp>
+        <p:nvSpPr>
+          <p:cNvPr id="9" name="So 1"/>
           <p:cNvSpPr/>
           <p:nvPr/>
         </p:nvSpPr>
         <p:spPr>
           <a:xfrm>
-            <a:off x="457200" y="3291840"/>
-            <a:ext cx="8229600" cy="1188720"/>
+            <a:off x="4219987" y="1368166"/>
+            <a:ext cx="256032" cy="256032"/>
+          </a:xfrm>
+          <a:prstGeom prst="ellipse">
+            <a:avLst/>
+          </a:prstGeom>
+          <a:solidFill>
+            <a:schemeClr val="accent2"/>
+          </a:solidFill>
+          <a:ln/>
+        </p:spPr>
+      </p:sp>
+      <p:sp>
+        <p:nvSpPr>
+          <p:cNvPr id="10" name="Text 6"/>
+          <p:cNvSpPr txBox="1"/>
+          <p:nvPr/>
+        </p:nvSpPr>
+        <p:spPr>
+          <a:xfrm>
+            <a:off x="4219987" y="1368166"/>
+            <a:ext cx="256032" cy="256032"/>
+          </a:xfrm>
+          <a:prstGeom prst="rect">
+            <a:avLst/>
+          </a:prstGeom>
+          <a:noFill/>
+          <a:ln/>
+        </p:spPr>
+        <p:txBody>
+          <a:bodyPr wrap="square" lIns="0" tIns="0" rIns="0" bIns="0" rtlCol="0" anchor="ctr"/>
+          <a:lstStyle/>
+          <a:p>
+            <a:pPr algn="ctr" indent="0" marL="0">
+              <a:buNone/>
+            </a:pPr>
+            <a:r>
+              <a:rPr lang="en-US" sz="1200" b="1" dirty="0">
+                <a:solidFill>
+                  <a:schemeClr val="bg1"/>
+                </a:solidFill>
+              </a:rPr>
+              <a:t>1</a:t>
+            </a:r>
+            <a:endParaRPr lang="en-US" sz="1200" dirty="0"/>
+          </a:p>
+        </p:txBody>
+      </p:sp>
+      <p:sp>
+        <p:nvSpPr>
+          <p:cNvPr id="11" name="So 2"/>
+          <p:cNvSpPr/>
+          <p:nvPr/>
+        </p:nvSpPr>
+        <p:spPr>
+          <a:xfrm>
+            <a:off x="2112351" y="2419204"/>
+            <a:ext cx="256032" cy="256032"/>
+          </a:xfrm>
+          <a:prstGeom prst="ellipse">
+            <a:avLst/>
+          </a:prstGeom>
+          <a:solidFill>
+            <a:schemeClr val="accent2"/>
+          </a:solidFill>
+          <a:ln/>
+        </p:spPr>
+      </p:sp>
+      <p:sp>
+        <p:nvSpPr>
+          <p:cNvPr id="12" name="Text 8"/>
+          <p:cNvSpPr txBox="1"/>
+          <p:nvPr/>
+        </p:nvSpPr>
+        <p:spPr>
+          <a:xfrm>
+            <a:off x="2112351" y="2419204"/>
+            <a:ext cx="256032" cy="256032"/>
+          </a:xfrm>
+          <a:prstGeom prst="rect">
+            <a:avLst/>
+          </a:prstGeom>
+          <a:noFill/>
+          <a:ln/>
+        </p:spPr>
+        <p:txBody>
+          <a:bodyPr wrap="square" lIns="0" tIns="0" rIns="0" bIns="0" rtlCol="0" anchor="ctr"/>
+          <a:lstStyle/>
+          <a:p>
+            <a:pPr algn="ctr" indent="0" marL="0">
+              <a:buNone/>
+            </a:pPr>
+            <a:r>
+              <a:rPr lang="en-US" sz="1200" b="1" dirty="0">
+                <a:solidFill>
+                  <a:schemeClr val="bg1"/>
+                </a:solidFill>
+              </a:rPr>
+              <a:t>2</a:t>
+            </a:r>
+            <a:endParaRPr lang="en-US" sz="1200" dirty="0"/>
+          </a:p>
+        </p:txBody>
+      </p:sp>
+      <p:sp>
+        <p:nvSpPr>
+          <p:cNvPr id="13" name="So 3"/>
+          <p:cNvSpPr/>
+          <p:nvPr/>
+        </p:nvSpPr>
+        <p:spPr>
+          <a:xfrm>
+            <a:off x="2112351" y="3086529"/>
+            <a:ext cx="256032" cy="256032"/>
+          </a:xfrm>
+          <a:prstGeom prst="ellipse">
+            <a:avLst/>
+          </a:prstGeom>
+          <a:solidFill>
+            <a:schemeClr val="accent2"/>
+          </a:solidFill>
+          <a:ln/>
+        </p:spPr>
+      </p:sp>
+      <p:sp>
+        <p:nvSpPr>
+          <p:cNvPr id="14" name="Text 10"/>
+          <p:cNvSpPr txBox="1"/>
+          <p:nvPr/>
+        </p:nvSpPr>
+        <p:spPr>
+          <a:xfrm>
+            <a:off x="2112351" y="3086529"/>
+            <a:ext cx="256032" cy="256032"/>
+          </a:xfrm>
+          <a:prstGeom prst="rect">
+            <a:avLst/>
+          </a:prstGeom>
+          <a:noFill/>
+          <a:ln/>
+        </p:spPr>
+        <p:txBody>
+          <a:bodyPr wrap="square" lIns="0" tIns="0" rIns="0" bIns="0" rtlCol="0" anchor="ctr"/>
+          <a:lstStyle/>
+          <a:p>
+            <a:pPr algn="ctr" indent="0" marL="0">
+              <a:buNone/>
+            </a:pPr>
+            <a:r>
+              <a:rPr lang="en-US" sz="1200" b="1" dirty="0">
+                <a:solidFill>
+                  <a:schemeClr val="bg1"/>
+                </a:solidFill>
+              </a:rPr>
+              <a:t>3</a:t>
+            </a:r>
+            <a:endParaRPr lang="en-US" sz="1200" dirty="0"/>
+          </a:p>
+        </p:txBody>
+      </p:sp>
+      <p:sp>
+        <p:nvSpPr>
+          <p:cNvPr id="15" name="So 4"/>
+          <p:cNvSpPr/>
+          <p:nvPr/>
+        </p:nvSpPr>
+        <p:spPr>
+          <a:xfrm>
+            <a:off x="2112351" y="3492485"/>
+            <a:ext cx="256032" cy="256032"/>
+          </a:xfrm>
+          <a:prstGeom prst="ellipse">
+            <a:avLst/>
+          </a:prstGeom>
+          <a:solidFill>
+            <a:schemeClr val="accent2"/>
+          </a:solidFill>
+          <a:ln/>
+        </p:spPr>
+      </p:sp>
+      <p:sp>
+        <p:nvSpPr>
+          <p:cNvPr id="16" name="Text 12"/>
+          <p:cNvSpPr txBox="1"/>
+          <p:nvPr/>
+        </p:nvSpPr>
+        <p:spPr>
+          <a:xfrm>
+            <a:off x="2112351" y="3492485"/>
+            <a:ext cx="256032" cy="256032"/>
+          </a:xfrm>
+          <a:prstGeom prst="rect">
+            <a:avLst/>
+          </a:prstGeom>
+          <a:noFill/>
+          <a:ln/>
+        </p:spPr>
+        <p:txBody>
+          <a:bodyPr wrap="square" lIns="0" tIns="0" rIns="0" bIns="0" rtlCol="0" anchor="ctr"/>
+          <a:lstStyle/>
+          <a:p>
+            <a:pPr algn="ctr" indent="0" marL="0">
+              <a:buNone/>
+            </a:pPr>
+            <a:r>
+              <a:rPr lang="en-US" sz="1200" b="1" dirty="0">
+                <a:solidFill>
+                  <a:schemeClr val="bg1"/>
+                </a:solidFill>
+              </a:rPr>
+              <a:t>4</a:t>
+            </a:r>
+            <a:endParaRPr lang="en-US" sz="1200" dirty="0"/>
+          </a:p>
+        </p:txBody>
+      </p:sp>
+      <p:sp>
+        <p:nvSpPr>
+          <p:cNvPr id="17" name="Buoc 1"/>
+          <p:cNvSpPr/>
+          <p:nvPr/>
+        </p:nvSpPr>
+        <p:spPr>
+          <a:xfrm>
+            <a:off x="457200" y="4114800"/>
+            <a:ext cx="1954530" cy="566928"/>
           </a:xfrm>
           <a:prstGeom prst="roundRect">
             <a:avLst>
-              <a:gd name="adj" fmla="val 6154"/>
+              <a:gd name="adj" fmla="val 9677"/>
             </a:avLst>
           </a:prstGeom>
           <a:solidFill>
@@ -7070,14 +7527,34 @@
       </p:sp>
       <p:sp>
         <p:nvSpPr>
-          <p:cNvPr id="11" name="Text 7"/>
+          <p:cNvPr id="18" name="So 1"/>
+          <p:cNvSpPr/>
+          <p:nvPr/>
+        </p:nvSpPr>
+        <p:spPr>
+          <a:xfrm>
+            <a:off x="548640" y="4251960"/>
+            <a:ext cx="292608" cy="292608"/>
+          </a:xfrm>
+          <a:prstGeom prst="ellipse">
+            <a:avLst/>
+          </a:prstGeom>
+          <a:solidFill>
+            <a:schemeClr val="accent2"/>
+          </a:solidFill>
+          <a:ln/>
+        </p:spPr>
+      </p:sp>
+      <p:sp>
+        <p:nvSpPr>
+          <p:cNvPr id="19" name="Text 15"/>
           <p:cNvSpPr txBox="1"/>
           <p:nvPr/>
         </p:nvSpPr>
         <p:spPr>
           <a:xfrm>
-            <a:off x="640080" y="3291840"/>
-            <a:ext cx="7863840" cy="1188720"/>
+            <a:off x="548640" y="4251960"/>
+            <a:ext cx="292608" cy="292608"/>
           </a:xfrm>
           <a:prstGeom prst="rect">
             <a:avLst/>
@@ -7089,66 +7566,451 @@
           <a:bodyPr wrap="square" lIns="0" tIns="0" rIns="0" bIns="0" rtlCol="0" anchor="ctr"/>
           <a:lstStyle/>
           <a:p>
+            <a:pPr algn="ctr" indent="0" marL="0">
+              <a:buNone/>
+            </a:pPr>
+            <a:r>
+              <a:rPr lang="en-US" sz="1300" b="1" dirty="0">
+                <a:solidFill>
+                  <a:schemeClr val="bg1"/>
+                </a:solidFill>
+              </a:rPr>
+              <a:t>1</a:t>
+            </a:r>
+            <a:endParaRPr lang="en-US" sz="1300" dirty="0"/>
+          </a:p>
+        </p:txBody>
+      </p:sp>
+      <p:sp>
+        <p:nvSpPr>
+          <p:cNvPr id="20" name="Text 16"/>
+          <p:cNvSpPr txBox="1"/>
+          <p:nvPr/>
+        </p:nvSpPr>
+        <p:spPr>
+          <a:xfrm>
+            <a:off x="914400" y="4114800"/>
+            <a:ext cx="1405890" cy="566928"/>
+          </a:xfrm>
+          <a:prstGeom prst="rect">
+            <a:avLst/>
+          </a:prstGeom>
+          <a:noFill/>
+          <a:ln/>
+        </p:spPr>
+        <p:txBody>
+          <a:bodyPr wrap="square" lIns="0" tIns="0" rIns="0" bIns="0" rtlCol="0" anchor="ctr"/>
+          <a:lstStyle/>
+          <a:p>
             <a:pPr indent="0" marL="0">
-              <a:spcAft>
-                <a:spcPts val="600"/>
-              </a:spcAft>
-              <a:buNone/>
-            </a:pPr>
-            <a:r>
-              <a:rPr lang="en-US" sz="1400" b="1" dirty="0">
+              <a:buNone/>
+            </a:pPr>
+            <a:r>
+              <a:rPr lang="en-US" sz="1200" dirty="0">
                 <a:solidFill>
                   <a:schemeClr val="tx1"/>
                 </a:solidFill>
               </a:rPr>
-              <a:t>Không giới hạn thời gian đề nghị, </a:t>
+              <a:t>Mở </a:t>
             </a:r>
             <a:pPr indent="0" marL="0">
-              <a:spcAft>
-                <a:spcPts val="600"/>
-              </a:spcAft>
-              <a:buNone/>
-            </a:pPr>
-            <a:r>
-              <a:rPr lang="en-US" sz="1400" dirty="0">
+              <a:buNone/>
+            </a:pPr>
+            <a:r>
+              <a:rPr lang="en-US" sz="1200" b="1" dirty="0">
                 <a:solidFill>
                   <a:schemeClr val="tx1"/>
                 </a:solidFill>
               </a:rPr>
-              <a:t>nhưng nên gửi sớm (trong tuần học) để dễ đối chiếu với giảng viên.</a:t>
-            </a:r>
-            <a:endParaRPr lang="en-US" sz="1400" dirty="0"/>
-          </a:p>
-          <a:p>
+              <a:t>Hỗ trợ</a:t>
+            </a:r>
             <a:pPr indent="0" marL="0">
-              <a:spcAft>
-                <a:spcPts val="600"/>
-              </a:spcAft>
-              <a:buNone/>
-            </a:pPr>
-            <a:r>
-              <a:rPr lang="en-US" sz="1400" b="1" dirty="0">
+              <a:buNone/>
+            </a:pPr>
+            <a:r>
+              <a:rPr lang="en-US" sz="1200" dirty="0">
                 <a:solidFill>
                   <a:schemeClr val="tx1"/>
                 </a:solidFill>
               </a:rPr>
-              <a:t>Chưa thấy nhãn đổi sau vài ngày làm việc? </a:t>
-            </a:r>
+              <a:t> (điện thoại: ☰)</a:t>
+            </a:r>
+            <a:endParaRPr lang="en-US" sz="1200" dirty="0"/>
+          </a:p>
+        </p:txBody>
+      </p:sp>
+      <p:sp>
+        <p:nvSpPr>
+          <p:cNvPr id="21" name="Buoc 2"/>
+          <p:cNvSpPr/>
+          <p:nvPr/>
+        </p:nvSpPr>
+        <p:spPr>
+          <a:xfrm>
+            <a:off x="2548890" y="4114800"/>
+            <a:ext cx="1954530" cy="566928"/>
+          </a:xfrm>
+          <a:prstGeom prst="roundRect">
+            <a:avLst>
+              <a:gd name="adj" fmla="val 9677"/>
+            </a:avLst>
+          </a:prstGeom>
+          <a:solidFill>
+            <a:schemeClr val="bg2"/>
+          </a:solidFill>
+          <a:ln/>
+        </p:spPr>
+      </p:sp>
+      <p:sp>
+        <p:nvSpPr>
+          <p:cNvPr id="22" name="So 2"/>
+          <p:cNvSpPr/>
+          <p:nvPr/>
+        </p:nvSpPr>
+        <p:spPr>
+          <a:xfrm>
+            <a:off x="2640330" y="4251960"/>
+            <a:ext cx="292608" cy="292608"/>
+          </a:xfrm>
+          <a:prstGeom prst="ellipse">
+            <a:avLst/>
+          </a:prstGeom>
+          <a:solidFill>
+            <a:schemeClr val="accent2"/>
+          </a:solidFill>
+          <a:ln/>
+        </p:spPr>
+      </p:sp>
+      <p:sp>
+        <p:nvSpPr>
+          <p:cNvPr id="23" name="Text 19"/>
+          <p:cNvSpPr txBox="1"/>
+          <p:nvPr/>
+        </p:nvSpPr>
+        <p:spPr>
+          <a:xfrm>
+            <a:off x="2640330" y="4251960"/>
+            <a:ext cx="292608" cy="292608"/>
+          </a:xfrm>
+          <a:prstGeom prst="rect">
+            <a:avLst/>
+          </a:prstGeom>
+          <a:noFill/>
+          <a:ln/>
+        </p:spPr>
+        <p:txBody>
+          <a:bodyPr wrap="square" lIns="0" tIns="0" rIns="0" bIns="0" rtlCol="0" anchor="ctr"/>
+          <a:lstStyle/>
+          <a:p>
+            <a:pPr algn="ctr" indent="0" marL="0">
+              <a:buNone/>
+            </a:pPr>
+            <a:r>
+              <a:rPr lang="en-US" sz="1300" b="1" dirty="0">
+                <a:solidFill>
+                  <a:schemeClr val="bg1"/>
+                </a:solidFill>
+              </a:rPr>
+              <a:t>2</a:t>
+            </a:r>
+            <a:endParaRPr lang="en-US" sz="1300" dirty="0"/>
+          </a:p>
+        </p:txBody>
+      </p:sp>
+      <p:sp>
+        <p:nvSpPr>
+          <p:cNvPr id="24" name="Text 20"/>
+          <p:cNvSpPr txBox="1"/>
+          <p:nvPr/>
+        </p:nvSpPr>
+        <p:spPr>
+          <a:xfrm>
+            <a:off x="3006090" y="4114800"/>
+            <a:ext cx="1405890" cy="566928"/>
+          </a:xfrm>
+          <a:prstGeom prst="rect">
+            <a:avLst/>
+          </a:prstGeom>
+          <a:noFill/>
+          <a:ln/>
+        </p:spPr>
+        <p:txBody>
+          <a:bodyPr wrap="square" lIns="0" tIns="0" rIns="0" bIns="0" rtlCol="0" anchor="ctr"/>
+          <a:lstStyle/>
+          <a:p>
             <a:pPr indent="0" marL="0">
-              <a:spcAft>
-                <a:spcPts val="600"/>
-              </a:spcAft>
-              <a:buNone/>
-            </a:pPr>
-            <a:r>
-              <a:rPr lang="en-US" sz="1400" dirty="0">
+              <a:buNone/>
+            </a:pPr>
+            <a:r>
+              <a:rPr lang="en-US" sz="1200" dirty="0">
                 <a:solidFill>
                   <a:schemeClr val="tx1"/>
                 </a:solidFill>
               </a:rPr>
-              <a:t>Nhắn lại người hỗ trợ, nêu ngày đã gửi đề nghị.</a:t>
-            </a:r>
-            <a:endParaRPr lang="en-US" sz="1400" dirty="0"/>
+              <a:t>Gõ “khác” → chọn </a:t>
+            </a:r>
+            <a:pPr indent="0" marL="0">
+              <a:buNone/>
+            </a:pPr>
+            <a:r>
+              <a:rPr lang="en-US" sz="1200" b="1" dirty="0">
+                <a:solidFill>
+                  <a:schemeClr val="tx1"/>
+                </a:solidFill>
+              </a:rPr>
+              <a:t>Vấn đề khác</a:t>
+            </a:r>
+            <a:endParaRPr lang="en-US" sz="1200" dirty="0"/>
+          </a:p>
+        </p:txBody>
+      </p:sp>
+      <p:sp>
+        <p:nvSpPr>
+          <p:cNvPr id="25" name="Buoc 3"/>
+          <p:cNvSpPr/>
+          <p:nvPr/>
+        </p:nvSpPr>
+        <p:spPr>
+          <a:xfrm>
+            <a:off x="4640580" y="4114800"/>
+            <a:ext cx="1954530" cy="566928"/>
+          </a:xfrm>
+          <a:prstGeom prst="roundRect">
+            <a:avLst>
+              <a:gd name="adj" fmla="val 9677"/>
+            </a:avLst>
+          </a:prstGeom>
+          <a:solidFill>
+            <a:schemeClr val="bg2"/>
+          </a:solidFill>
+          <a:ln/>
+        </p:spPr>
+      </p:sp>
+      <p:sp>
+        <p:nvSpPr>
+          <p:cNvPr id="26" name="So 3"/>
+          <p:cNvSpPr/>
+          <p:nvPr/>
+        </p:nvSpPr>
+        <p:spPr>
+          <a:xfrm>
+            <a:off x="4732020" y="4251960"/>
+            <a:ext cx="292608" cy="292608"/>
+          </a:xfrm>
+          <a:prstGeom prst="ellipse">
+            <a:avLst/>
+          </a:prstGeom>
+          <a:solidFill>
+            <a:schemeClr val="accent2"/>
+          </a:solidFill>
+          <a:ln/>
+        </p:spPr>
+      </p:sp>
+      <p:sp>
+        <p:nvSpPr>
+          <p:cNvPr id="27" name="Text 23"/>
+          <p:cNvSpPr txBox="1"/>
+          <p:nvPr/>
+        </p:nvSpPr>
+        <p:spPr>
+          <a:xfrm>
+            <a:off x="4732020" y="4251960"/>
+            <a:ext cx="292608" cy="292608"/>
+          </a:xfrm>
+          <a:prstGeom prst="rect">
+            <a:avLst/>
+          </a:prstGeom>
+          <a:noFill/>
+          <a:ln/>
+        </p:spPr>
+        <p:txBody>
+          <a:bodyPr wrap="square" lIns="0" tIns="0" rIns="0" bIns="0" rtlCol="0" anchor="ctr"/>
+          <a:lstStyle/>
+          <a:p>
+            <a:pPr algn="ctr" indent="0" marL="0">
+              <a:buNone/>
+            </a:pPr>
+            <a:r>
+              <a:rPr lang="en-US" sz="1300" b="1" dirty="0">
+                <a:solidFill>
+                  <a:schemeClr val="bg1"/>
+                </a:solidFill>
+              </a:rPr>
+              <a:t>3</a:t>
+            </a:r>
+            <a:endParaRPr lang="en-US" sz="1300" dirty="0"/>
+          </a:p>
+        </p:txBody>
+      </p:sp>
+      <p:sp>
+        <p:nvSpPr>
+          <p:cNvPr id="28" name="Text 24"/>
+          <p:cNvSpPr txBox="1"/>
+          <p:nvPr/>
+        </p:nvSpPr>
+        <p:spPr>
+          <a:xfrm>
+            <a:off x="5097780" y="4114800"/>
+            <a:ext cx="1405890" cy="566928"/>
+          </a:xfrm>
+          <a:prstGeom prst="rect">
+            <a:avLst/>
+          </a:prstGeom>
+          <a:noFill/>
+          <a:ln/>
+        </p:spPr>
+        <p:txBody>
+          <a:bodyPr wrap="square" lIns="0" tIns="0" rIns="0" bIns="0" rtlCol="0" anchor="ctr"/>
+          <a:lstStyle/>
+          <a:p>
+            <a:pPr indent="0" marL="0">
+              <a:buNone/>
+            </a:pPr>
+            <a:r>
+              <a:rPr lang="en-US" sz="1200" dirty="0">
+                <a:solidFill>
+                  <a:schemeClr val="tx1"/>
+                </a:solidFill>
+              </a:rPr>
+              <a:t>Ghi lớp–GĐ–buổi–ngày, </a:t>
+            </a:r>
+            <a:pPr indent="0" marL="0">
+              <a:buNone/>
+            </a:pPr>
+            <a:r>
+              <a:rPr lang="en-US" sz="1200" b="1" dirty="0">
+                <a:solidFill>
+                  <a:schemeClr val="tx1"/>
+                </a:solidFill>
+              </a:rPr>
+              <a:t>dán link Drive</a:t>
+            </a:r>
+            <a:endParaRPr lang="en-US" sz="1200" dirty="0"/>
+          </a:p>
+        </p:txBody>
+      </p:sp>
+      <p:sp>
+        <p:nvSpPr>
+          <p:cNvPr id="29" name="Buoc 4"/>
+          <p:cNvSpPr/>
+          <p:nvPr/>
+        </p:nvSpPr>
+        <p:spPr>
+          <a:xfrm>
+            <a:off x="6732270" y="4114800"/>
+            <a:ext cx="1954530" cy="566928"/>
+          </a:xfrm>
+          <a:prstGeom prst="roundRect">
+            <a:avLst>
+              <a:gd name="adj" fmla="val 9677"/>
+            </a:avLst>
+          </a:prstGeom>
+          <a:solidFill>
+            <a:schemeClr val="bg2"/>
+          </a:solidFill>
+          <a:ln/>
+        </p:spPr>
+      </p:sp>
+      <p:sp>
+        <p:nvSpPr>
+          <p:cNvPr id="30" name="So 4"/>
+          <p:cNvSpPr/>
+          <p:nvPr/>
+        </p:nvSpPr>
+        <p:spPr>
+          <a:xfrm>
+            <a:off x="6823710" y="4251960"/>
+            <a:ext cx="292608" cy="292608"/>
+          </a:xfrm>
+          <a:prstGeom prst="ellipse">
+            <a:avLst/>
+          </a:prstGeom>
+          <a:solidFill>
+            <a:schemeClr val="accent2"/>
+          </a:solidFill>
+          <a:ln/>
+        </p:spPr>
+      </p:sp>
+      <p:sp>
+        <p:nvSpPr>
+          <p:cNvPr id="31" name="Text 27"/>
+          <p:cNvSpPr txBox="1"/>
+          <p:nvPr/>
+        </p:nvSpPr>
+        <p:spPr>
+          <a:xfrm>
+            <a:off x="6823710" y="4251960"/>
+            <a:ext cx="292608" cy="292608"/>
+          </a:xfrm>
+          <a:prstGeom prst="rect">
+            <a:avLst/>
+          </a:prstGeom>
+          <a:noFill/>
+          <a:ln/>
+        </p:spPr>
+        <p:txBody>
+          <a:bodyPr wrap="square" lIns="0" tIns="0" rIns="0" bIns="0" rtlCol="0" anchor="ctr"/>
+          <a:lstStyle/>
+          <a:p>
+            <a:pPr algn="ctr" indent="0" marL="0">
+              <a:buNone/>
+            </a:pPr>
+            <a:r>
+              <a:rPr lang="en-US" sz="1300" b="1" dirty="0">
+                <a:solidFill>
+                  <a:schemeClr val="bg1"/>
+                </a:solidFill>
+              </a:rPr>
+              <a:t>4</a:t>
+            </a:r>
+            <a:endParaRPr lang="en-US" sz="1300" dirty="0"/>
+          </a:p>
+        </p:txBody>
+      </p:sp>
+      <p:sp>
+        <p:nvSpPr>
+          <p:cNvPr id="32" name="Text 28"/>
+          <p:cNvSpPr txBox="1"/>
+          <p:nvPr/>
+        </p:nvSpPr>
+        <p:spPr>
+          <a:xfrm>
+            <a:off x="7189470" y="4114800"/>
+            <a:ext cx="1405890" cy="566928"/>
+          </a:xfrm>
+          <a:prstGeom prst="rect">
+            <a:avLst/>
+          </a:prstGeom>
+          <a:noFill/>
+          <a:ln/>
+        </p:spPr>
+        <p:txBody>
+          <a:bodyPr wrap="square" lIns="0" tIns="0" rIns="0" bIns="0" rtlCol="0" anchor="ctr"/>
+          <a:lstStyle/>
+          <a:p>
+            <a:pPr indent="0" marL="0">
+              <a:buNone/>
+            </a:pPr>
+            <a:r>
+              <a:rPr lang="en-US" sz="1200" dirty="0">
+                <a:solidFill>
+                  <a:schemeClr val="tx1"/>
+                </a:solidFill>
+              </a:rPr>
+              <a:t>Bấm </a:t>
+            </a:r>
+            <a:pPr indent="0" marL="0">
+              <a:buNone/>
+            </a:pPr>
+            <a:r>
+              <a:rPr lang="en-US" sz="1200" b="1" dirty="0">
+                <a:solidFill>
+                  <a:schemeClr val="tx1"/>
+                </a:solidFill>
+              </a:rPr>
+              <a:t>Gửi yêu cầu</a:t>
+            </a:r>
+            <a:endParaRPr lang="en-US" sz="1200" dirty="0"/>
           </a:p>
         </p:txBody>
       </p:sp>
@@ -7164,8 +8026,8 @@
         </p:nvSpPr>
         <p:spPr>
           <a:xfrm>
-            <a:off x="8229600" y="4754880"/>
-            <a:ext cx="457200" cy="228600"/>
+            <a:off x="8229600" y="4800600"/>
+            <a:ext cx="457200" cy="201168"/>
           </a:xfrm>
           <a:prstGeom prst="rect">
             <a:avLst/>
@@ -7232,8 +8094,8 @@
         </p:nvSpPr>
         <p:spPr>
           <a:xfrm>
-            <a:off x="457200" y="274320"/>
-            <a:ext cx="8229600" cy="640080"/>
+            <a:off x="457200" y="228600"/>
+            <a:ext cx="8229600" cy="594360"/>
           </a:xfrm>
           <a:prstGeom prst="rect">
             <a:avLst/>
@@ -7251,45 +8113,410 @@
             <a:r>
               <a:rPr lang="en-US" sz="2800" b="1" dirty="0">
                 <a:solidFill>
+                  <a:schemeClr val="tx2"/>
+                </a:solidFill>
+              </a:rPr>
+              <a:t>Bước 4 – Xem lại kết quả trên trang Lớp học</a:t>
+            </a:r>
+            <a:endParaRPr lang="en-US" sz="2800" dirty="0"/>
+          </a:p>
+        </p:txBody>
+      </p:sp>
+      <p:sp>
+        <p:nvSpPr>
+          <p:cNvPr id="3" name="Khung pc-hv-sau"/>
+          <p:cNvSpPr/>
+          <p:nvPr/>
+        </p:nvSpPr>
+        <p:spPr>
+          <a:xfrm>
+            <a:off x="1428665" y="1184148"/>
+            <a:ext cx="4357025" cy="2770632"/>
+          </a:xfrm>
+          <a:prstGeom prst="roundRect">
+            <a:avLst>
+              <a:gd name="adj" fmla="val 1320"/>
+            </a:avLst>
+          </a:prstGeom>
+          <a:solidFill>
+            <a:schemeClr val="bg1"/>
+          </a:solidFill>
+          <a:ln w="12700">
+            <a:solidFill>
+              <a:schemeClr val="accent6"/>
+            </a:solidFill>
+            <a:prstDash val="solid"/>
+          </a:ln>
+          <a:effectLst>
+            <a:outerShdw sx="100000" sy="100000" kx="0" ky="0" algn="bl" rotWithShape="0" blurRad="76200" dist="25400" dir="5400000">
+              <a:srgbClr val="1B2A2F">
+                <a:alpha val="22000"/>
+              </a:srgbClr>
+            </a:outerShdw>
+          </a:effectLst>
+        </p:spPr>
+      </p:sp>
+      <p:pic>
+        <p:nvPicPr>
+          <p:cNvPr id="4" name="Anh pc-hv-sau" descr="Trang Lớp học trên máy tính: Buổi 2 đã chuyển Có mặt">    </p:cNvPr>
+          <p:cNvPicPr>
+            <a:picLocks noChangeAspect="1"/>
+          </p:cNvPicPr>
+          <p:nvPr/>
+        </p:nvPicPr>
+        <p:blipFill>
+          <a:blip r:embed="rId1"/>
+          <a:stretch>
+            <a:fillRect/>
+          </a:stretch>
+        </p:blipFill>
+        <p:spPr>
+          <a:xfrm>
+            <a:off x="1451525" y="1207008"/>
+            <a:ext cx="4311305" cy="2724912"/>
+          </a:xfrm>
+          <a:prstGeom prst="rect">
+            <a:avLst/>
+          </a:prstGeom>
+        </p:spPr>
+      </p:pic>
+      <p:sp>
+        <p:nvSpPr>
+          <p:cNvPr id="5" name="Khung m-hv-sau"/>
+          <p:cNvSpPr/>
+          <p:nvPr/>
+        </p:nvSpPr>
+        <p:spPr>
+          <a:xfrm>
+            <a:off x="6119446" y="1152144"/>
+            <a:ext cx="1627893" cy="2834640"/>
+          </a:xfrm>
+          <a:prstGeom prst="roundRect">
+            <a:avLst>
+              <a:gd name="adj" fmla="val 5617"/>
+            </a:avLst>
+          </a:prstGeom>
+          <a:solidFill>
+            <a:schemeClr val="tx1"/>
+          </a:solidFill>
+          <a:ln/>
+          <a:effectLst>
+            <a:outerShdw sx="100000" sy="100000" kx="0" ky="0" algn="bl" rotWithShape="0" blurRad="76200" dist="25400" dir="5400000">
+              <a:srgbClr val="1B2A2F">
+                <a:alpha val="22000"/>
+              </a:srgbClr>
+            </a:outerShdw>
+          </a:effectLst>
+        </p:spPr>
+      </p:sp>
+      <p:pic>
+        <p:nvPicPr>
+          <p:cNvPr id="6" name="Anh m-hv-sau" descr="Trang Lớp học trên điện thoại sau khi bổ sung">    </p:cNvPr>
+          <p:cNvPicPr>
+            <a:picLocks noChangeAspect="1"/>
+          </p:cNvPicPr>
+          <p:nvPr/>
+        </p:nvPicPr>
+        <p:blipFill>
+          <a:blip r:embed="rId2"/>
+          <a:stretch>
+            <a:fillRect/>
+          </a:stretch>
+        </p:blipFill>
+        <p:spPr>
+          <a:xfrm>
+            <a:off x="6174310" y="1207008"/>
+            <a:ext cx="1518165" cy="2724912"/>
+          </a:xfrm>
+          <a:prstGeom prst="rect">
+            <a:avLst/>
+          </a:prstGeom>
+        </p:spPr>
+      </p:pic>
+      <p:sp>
+        <p:nvSpPr>
+          <p:cNvPr id="7" name="Text 3"/>
+          <p:cNvSpPr txBox="1"/>
+          <p:nvPr/>
+        </p:nvSpPr>
+        <p:spPr>
+          <a:xfrm>
+            <a:off x="1451525" y="932688"/>
+            <a:ext cx="2743200" cy="201168"/>
+          </a:xfrm>
+          <a:prstGeom prst="rect">
+            <a:avLst/>
+          </a:prstGeom>
+          <a:noFill/>
+          <a:ln/>
+        </p:spPr>
+        <p:txBody>
+          <a:bodyPr wrap="square" lIns="0" tIns="0" rIns="0" bIns="0" rtlCol="0" anchor="ctr"/>
+          <a:lstStyle/>
+          <a:p>
+            <a:pPr indent="0" marL="0">
+              <a:buNone/>
+            </a:pPr>
+            <a:r>
+              <a:rPr lang="en-US" sz="1100" b="1" spc="100" kern="0" dirty="0">
+                <a:solidFill>
+                  <a:schemeClr val="accent5"/>
+                </a:solidFill>
+              </a:rPr>
+              <a:t>MÁY TÍNH</a:t>
+            </a:r>
+            <a:endParaRPr lang="en-US" sz="1100" dirty="0"/>
+          </a:p>
+        </p:txBody>
+      </p:sp>
+      <p:sp>
+        <p:nvSpPr>
+          <p:cNvPr id="8" name="Text 4"/>
+          <p:cNvSpPr txBox="1"/>
+          <p:nvPr/>
+        </p:nvSpPr>
+        <p:spPr>
+          <a:xfrm>
+            <a:off x="6174310" y="932688"/>
+            <a:ext cx="1828800" cy="201168"/>
+          </a:xfrm>
+          <a:prstGeom prst="rect">
+            <a:avLst/>
+          </a:prstGeom>
+          <a:noFill/>
+          <a:ln/>
+        </p:spPr>
+        <p:txBody>
+          <a:bodyPr wrap="square" lIns="0" tIns="0" rIns="0" bIns="0" rtlCol="0" anchor="ctr"/>
+          <a:lstStyle/>
+          <a:p>
+            <a:pPr indent="0" marL="0">
+              <a:buNone/>
+            </a:pPr>
+            <a:r>
+              <a:rPr lang="en-US" sz="1100" b="1" spc="100" kern="0" dirty="0">
+                <a:solidFill>
+                  <a:schemeClr val="accent5"/>
+                </a:solidFill>
+              </a:rPr>
+              <a:t>ĐIỆN THOẠI</a:t>
+            </a:r>
+            <a:endParaRPr lang="en-US" sz="1100" dirty="0"/>
+          </a:p>
+        </p:txBody>
+      </p:sp>
+      <p:sp>
+        <p:nvSpPr>
+          <p:cNvPr id="9" name="To dam"/>
+          <p:cNvSpPr/>
+          <p:nvPr/>
+        </p:nvSpPr>
+        <p:spPr>
+          <a:xfrm>
+            <a:off x="3276504" y="2521328"/>
+            <a:ext cx="318116" cy="108829"/>
+          </a:xfrm>
+          <a:prstGeom prst="roundRect">
+            <a:avLst>
+              <a:gd name="adj" fmla="val 33609"/>
+            </a:avLst>
+          </a:prstGeom>
+          <a:ln w="28575">
+            <a:solidFill>
+              <a:schemeClr val="accent2"/>
+            </a:solidFill>
+            <a:prstDash val="solid"/>
+          </a:ln>
+        </p:spPr>
+      </p:sp>
+      <p:sp>
+        <p:nvSpPr>
+          <p:cNvPr id="10" name="Buoc 1"/>
+          <p:cNvSpPr/>
+          <p:nvPr/>
+        </p:nvSpPr>
+        <p:spPr>
+          <a:xfrm>
+            <a:off x="457200" y="4114800"/>
+            <a:ext cx="4046220" cy="566928"/>
+          </a:xfrm>
+          <a:prstGeom prst="roundRect">
+            <a:avLst>
+              <a:gd name="adj" fmla="val 9677"/>
+            </a:avLst>
+          </a:prstGeom>
+          <a:solidFill>
+            <a:schemeClr val="bg2"/>
+          </a:solidFill>
+          <a:ln/>
+        </p:spPr>
+      </p:sp>
+      <p:sp>
+        <p:nvSpPr>
+          <p:cNvPr id="11" name="So 1"/>
+          <p:cNvSpPr/>
+          <p:nvPr/>
+        </p:nvSpPr>
+        <p:spPr>
+          <a:xfrm>
+            <a:off x="548640" y="4251960"/>
+            <a:ext cx="292608" cy="292608"/>
+          </a:xfrm>
+          <a:prstGeom prst="ellipse">
+            <a:avLst/>
+          </a:prstGeom>
+          <a:solidFill>
+            <a:schemeClr val="accent2"/>
+          </a:solidFill>
+          <a:ln/>
+        </p:spPr>
+      </p:sp>
+      <p:sp>
+        <p:nvSpPr>
+          <p:cNvPr id="12" name="Text 8"/>
+          <p:cNvSpPr txBox="1"/>
+          <p:nvPr/>
+        </p:nvSpPr>
+        <p:spPr>
+          <a:xfrm>
+            <a:off x="548640" y="4251960"/>
+            <a:ext cx="292608" cy="292608"/>
+          </a:xfrm>
+          <a:prstGeom prst="rect">
+            <a:avLst/>
+          </a:prstGeom>
+          <a:noFill/>
+          <a:ln/>
+        </p:spPr>
+        <p:txBody>
+          <a:bodyPr wrap="square" lIns="0" tIns="0" rIns="0" bIns="0" rtlCol="0" anchor="ctr"/>
+          <a:lstStyle/>
+          <a:p>
+            <a:pPr algn="ctr" indent="0" marL="0">
+              <a:buNone/>
+            </a:pPr>
+            <a:r>
+              <a:rPr lang="en-US" sz="1300" b="1" dirty="0">
+                <a:solidFill>
                   <a:schemeClr val="bg1"/>
                 </a:solidFill>
               </a:rPr>
-              <a:t>Để không phải bổ sung lần sau</a:t>
-            </a:r>
-            <a:endParaRPr lang="en-US" sz="2800" dirty="0"/>
-          </a:p>
-        </p:txBody>
-      </p:sp>
-      <p:sp>
-        <p:nvSpPr>
-          <p:cNvPr id="3" name="So 1"/>
+              <a:t>1</a:t>
+            </a:r>
+            <a:endParaRPr lang="en-US" sz="1300" dirty="0"/>
+          </a:p>
+        </p:txBody>
+      </p:sp>
+      <p:sp>
+        <p:nvSpPr>
+          <p:cNvPr id="13" name="Text 9"/>
+          <p:cNvSpPr txBox="1"/>
+          <p:nvPr/>
+        </p:nvSpPr>
+        <p:spPr>
+          <a:xfrm>
+            <a:off x="914400" y="4114800"/>
+            <a:ext cx="3497580" cy="566928"/>
+          </a:xfrm>
+          <a:prstGeom prst="rect">
+            <a:avLst/>
+          </a:prstGeom>
+          <a:noFill/>
+          <a:ln/>
+        </p:spPr>
+        <p:txBody>
+          <a:bodyPr wrap="square" lIns="0" tIns="0" rIns="0" bIns="0" rtlCol="0" anchor="ctr"/>
+          <a:lstStyle/>
+          <a:p>
+            <a:pPr indent="0" marL="0">
+              <a:buNone/>
+            </a:pPr>
+            <a:r>
+              <a:rPr lang="en-US" sz="1200" dirty="0">
+                <a:solidFill>
+                  <a:schemeClr val="tx1"/>
+                </a:solidFill>
+              </a:rPr>
+              <a:t>Nhãn buổi đã bổ sung chuyển </a:t>
+            </a:r>
+            <a:pPr indent="0" marL="0">
+              <a:buNone/>
+            </a:pPr>
+            <a:r>
+              <a:rPr lang="en-US" sz="1200" b="1" dirty="0">
+                <a:solidFill>
+                  <a:schemeClr val="accent1"/>
+                </a:solidFill>
+              </a:rPr>
+              <a:t>Có mặt</a:t>
+            </a:r>
+            <a:pPr indent="0" marL="0">
+              <a:buNone/>
+            </a:pPr>
+            <a:r>
+              <a:rPr lang="en-US" sz="1200" dirty="0">
+                <a:solidFill>
+                  <a:schemeClr val="tx1"/>
+                </a:solidFill>
+              </a:rPr>
+              <a:t> (hoặc Vắng có phép)</a:t>
+            </a:r>
+            <a:endParaRPr lang="en-US" sz="1200" dirty="0"/>
+          </a:p>
+        </p:txBody>
+      </p:sp>
+      <p:sp>
+        <p:nvSpPr>
+          <p:cNvPr id="14" name="Buoc 2"/>
           <p:cNvSpPr/>
           <p:nvPr/>
         </p:nvSpPr>
         <p:spPr>
           <a:xfrm>
-            <a:off x="457200" y="1188720"/>
-            <a:ext cx="384048" cy="384048"/>
+            <a:off x="4640580" y="4114800"/>
+            <a:ext cx="4046220" cy="566928"/>
+          </a:xfrm>
+          <a:prstGeom prst="roundRect">
+            <a:avLst>
+              <a:gd name="adj" fmla="val 9677"/>
+            </a:avLst>
+          </a:prstGeom>
+          <a:solidFill>
+            <a:schemeClr val="bg2"/>
+          </a:solidFill>
+          <a:ln/>
+        </p:spPr>
+      </p:sp>
+      <p:sp>
+        <p:nvSpPr>
+          <p:cNvPr id="15" name="So 2"/>
+          <p:cNvSpPr/>
+          <p:nvPr/>
+        </p:nvSpPr>
+        <p:spPr>
+          <a:xfrm>
+            <a:off x="4732020" y="4251960"/>
+            <a:ext cx="292608" cy="292608"/>
           </a:xfrm>
           <a:prstGeom prst="ellipse">
             <a:avLst/>
           </a:prstGeom>
           <a:solidFill>
-            <a:schemeClr val="accent6"/>
+            <a:schemeClr val="accent2"/>
           </a:solidFill>
           <a:ln/>
         </p:spPr>
       </p:sp>
       <p:sp>
         <p:nvSpPr>
-          <p:cNvPr id="4" name="Text 2"/>
+          <p:cNvPr id="16" name="Text 12"/>
           <p:cNvSpPr txBox="1"/>
           <p:nvPr/>
         </p:nvSpPr>
         <p:spPr>
           <a:xfrm>
-            <a:off x="457200" y="1188720"/>
-            <a:ext cx="384048" cy="384048"/>
+            <a:off x="4732020" y="4251960"/>
+            <a:ext cx="292608" cy="292608"/>
           </a:xfrm>
           <a:prstGeom prst="rect">
             <a:avLst/>
@@ -7305,470 +8532,106 @@
               <a:buNone/>
             </a:pPr>
             <a:r>
-              <a:rPr lang="en-US" sz="1600" b="1" dirty="0">
-                <a:solidFill>
-                  <a:schemeClr val="tx2"/>
-                </a:solidFill>
-              </a:rPr>
-              <a:t>1</a:t>
-            </a:r>
-            <a:endParaRPr lang="en-US" sz="1600" dirty="0"/>
-          </a:p>
-        </p:txBody>
-      </p:sp>
-      <p:sp>
-        <p:nvSpPr>
-          <p:cNvPr id="5" name="Text 3"/>
+              <a:rPr lang="en-US" sz="1300" b="1" dirty="0">
+                <a:solidFill>
+                  <a:schemeClr val="bg1"/>
+                </a:solidFill>
+              </a:rPr>
+              <a:t>2</a:t>
+            </a:r>
+            <a:endParaRPr lang="en-US" sz="1300" dirty="0"/>
+          </a:p>
+        </p:txBody>
+      </p:sp>
+      <p:sp>
+        <p:nvSpPr>
+          <p:cNvPr id="17" name="Text 13"/>
           <p:cNvSpPr txBox="1"/>
           <p:nvPr/>
         </p:nvSpPr>
         <p:spPr>
           <a:xfrm>
-            <a:off x="1005840" y="1170432"/>
-            <a:ext cx="3383280" cy="411480"/>
-          </a:xfrm>
-          <a:prstGeom prst="rect">
-            <a:avLst/>
-          </a:prstGeom>
-          <a:noFill/>
-          <a:ln/>
-        </p:spPr>
-        <p:txBody>
-          <a:bodyPr wrap="square" lIns="0" tIns="0" rIns="0" bIns="0" rtlCol="0" anchor="t"/>
+            <a:off x="5097780" y="4114800"/>
+            <a:ext cx="3497580" cy="566928"/>
+          </a:xfrm>
+          <a:prstGeom prst="rect">
+            <a:avLst/>
+          </a:prstGeom>
+          <a:noFill/>
+          <a:ln/>
+        </p:spPr>
+        <p:txBody>
+          <a:bodyPr wrap="square" lIns="0" tIns="0" rIns="0" bIns="0" rtlCol="0" anchor="ctr"/>
           <a:lstStyle/>
           <a:p>
             <a:pPr indent="0" marL="0">
               <a:buNone/>
             </a:pPr>
             <a:r>
-              <a:rPr lang="en-US" sz="1700" b="1" dirty="0">
-                <a:solidFill>
-                  <a:schemeClr val="bg1"/>
-                </a:solidFill>
-              </a:rPr>
-              <a:t>Bấm đúng nút, đúng buổi</a:t>
-            </a:r>
-            <a:endParaRPr lang="en-US" sz="1700" dirty="0"/>
-          </a:p>
-        </p:txBody>
-      </p:sp>
-      <p:sp>
-        <p:nvSpPr>
-          <p:cNvPr id="6" name="Text 4"/>
-          <p:cNvSpPr txBox="1"/>
-          <p:nvPr/>
-        </p:nvSpPr>
-        <p:spPr>
-          <a:xfrm>
-            <a:off x="1005840" y="1600200"/>
-            <a:ext cx="3383280" cy="1005840"/>
-          </a:xfrm>
-          <a:prstGeom prst="rect">
-            <a:avLst/>
-          </a:prstGeom>
-          <a:noFill/>
-          <a:ln/>
-        </p:spPr>
-        <p:txBody>
-          <a:bodyPr wrap="square" lIns="0" tIns="0" rIns="0" bIns="0" rtlCol="0" anchor="t"/>
-          <a:lstStyle/>
-          <a:p>
+              <a:rPr lang="en-US" sz="1200" dirty="0">
+                <a:solidFill>
+                  <a:schemeClr val="tx1"/>
+                </a:solidFill>
+              </a:rPr>
+              <a:t>Chưa đổi sau vài ngày làm việc? </a:t>
+            </a:r>
             <a:pPr indent="0" marL="0">
               <a:buNone/>
             </a:pPr>
             <a:r>
-              <a:rPr lang="en-US" sz="1400" dirty="0">
-                <a:solidFill>
-                  <a:schemeClr val="bg2"/>
-                </a:solidFill>
-              </a:rPr>
-              <a:t>Mỗi buổi Zoom bấm “Điểm danh &amp; vào Zoom” của chính buổi đó, trong khung giờ mở điểm danh</a:t>
-            </a:r>
-            <a:endParaRPr lang="en-US" sz="1400" dirty="0"/>
-          </a:p>
-        </p:txBody>
-      </p:sp>
-      <p:sp>
-        <p:nvSpPr>
-          <p:cNvPr id="7" name="So 2"/>
-          <p:cNvSpPr/>
-          <p:nvPr/>
-        </p:nvSpPr>
-        <p:spPr>
-          <a:xfrm>
-            <a:off x="4663440" y="1188720"/>
-            <a:ext cx="384048" cy="384048"/>
-          </a:xfrm>
-          <a:prstGeom prst="ellipse">
-            <a:avLst/>
-          </a:prstGeom>
-          <a:solidFill>
-            <a:schemeClr val="accent6"/>
-          </a:solidFill>
-          <a:ln/>
-        </p:spPr>
-      </p:sp>
-      <p:sp>
-        <p:nvSpPr>
-          <p:cNvPr id="8" name="Text 6"/>
-          <p:cNvSpPr txBox="1"/>
-          <p:nvPr/>
-        </p:nvSpPr>
-        <p:spPr>
-          <a:xfrm>
-            <a:off x="4663440" y="1188720"/>
-            <a:ext cx="384048" cy="384048"/>
-          </a:xfrm>
-          <a:prstGeom prst="rect">
-            <a:avLst/>
-          </a:prstGeom>
-          <a:noFill/>
-          <a:ln/>
-        </p:spPr>
-        <p:txBody>
-          <a:bodyPr wrap="square" lIns="0" tIns="0" rIns="0" bIns="0" rtlCol="0" anchor="ctr"/>
-          <a:lstStyle/>
-          <a:p>
-            <a:pPr algn="ctr" indent="0" marL="0">
-              <a:buNone/>
-            </a:pPr>
-            <a:r>
-              <a:rPr lang="en-US" sz="1600" b="1" dirty="0">
-                <a:solidFill>
-                  <a:schemeClr val="tx2"/>
-                </a:solidFill>
-              </a:rPr>
-              <a:t>2</a:t>
-            </a:r>
-            <a:endParaRPr lang="en-US" sz="1600" dirty="0"/>
-          </a:p>
-        </p:txBody>
-      </p:sp>
-      <p:sp>
-        <p:nvSpPr>
-          <p:cNvPr id="9" name="Text 7"/>
-          <p:cNvSpPr txBox="1"/>
-          <p:nvPr/>
-        </p:nvSpPr>
-        <p:spPr>
-          <a:xfrm>
-            <a:off x="5212080" y="1170432"/>
-            <a:ext cx="3383280" cy="411480"/>
-          </a:xfrm>
-          <a:prstGeom prst="rect">
-            <a:avLst/>
-          </a:prstGeom>
-          <a:noFill/>
-          <a:ln/>
-        </p:spPr>
-        <p:txBody>
-          <a:bodyPr wrap="square" lIns="0" tIns="0" rIns="0" bIns="0" rtlCol="0" anchor="t"/>
-          <a:lstStyle/>
-          <a:p>
-            <a:pPr indent="0" marL="0">
-              <a:buNone/>
-            </a:pPr>
-            <a:r>
-              <a:rPr lang="en-US" sz="1700" b="1" dirty="0">
-                <a:solidFill>
-                  <a:schemeClr val="bg1"/>
-                </a:solidFill>
-              </a:rPr>
-              <a:t>Không dùng link khác</a:t>
-            </a:r>
-            <a:endParaRPr lang="en-US" sz="1700" dirty="0"/>
-          </a:p>
-        </p:txBody>
-      </p:sp>
-      <p:sp>
-        <p:nvSpPr>
-          <p:cNvPr id="10" name="Text 8"/>
-          <p:cNvSpPr txBox="1"/>
-          <p:nvPr/>
-        </p:nvSpPr>
-        <p:spPr>
-          <a:xfrm>
-            <a:off x="5212080" y="1600200"/>
-            <a:ext cx="3383280" cy="1005840"/>
-          </a:xfrm>
-          <a:prstGeom prst="rect">
-            <a:avLst/>
-          </a:prstGeom>
-          <a:noFill/>
-          <a:ln/>
-        </p:spPr>
-        <p:txBody>
-          <a:bodyPr wrap="square" lIns="0" tIns="0" rIns="0" bIns="0" rtlCol="0" anchor="t"/>
-          <a:lstStyle/>
-          <a:p>
-            <a:pPr indent="0" marL="0">
-              <a:buNone/>
-            </a:pPr>
-            <a:r>
-              <a:rPr lang="en-US" sz="1400" dirty="0">
-                <a:solidFill>
-                  <a:schemeClr val="bg2"/>
-                </a:solidFill>
-              </a:rPr>
-              <a:t>Vào bằng link khác hoặc ở lại phòng từ buổi trước sẽ không được ghi nhận</a:t>
-            </a:r>
-            <a:endParaRPr lang="en-US" sz="1400" dirty="0"/>
-          </a:p>
-        </p:txBody>
-      </p:sp>
-      <p:sp>
-        <p:nvSpPr>
-          <p:cNvPr id="11" name="So 3"/>
-          <p:cNvSpPr/>
-          <p:nvPr/>
-        </p:nvSpPr>
-        <p:spPr>
-          <a:xfrm>
-            <a:off x="457200" y="2880360"/>
-            <a:ext cx="384048" cy="384048"/>
-          </a:xfrm>
-          <a:prstGeom prst="ellipse">
-            <a:avLst/>
-          </a:prstGeom>
-          <a:solidFill>
-            <a:schemeClr val="accent6"/>
-          </a:solidFill>
-          <a:ln/>
-        </p:spPr>
-      </p:sp>
-      <p:sp>
-        <p:nvSpPr>
-          <p:cNvPr id="12" name="Text 10"/>
-          <p:cNvSpPr txBox="1"/>
-          <p:nvPr/>
-        </p:nvSpPr>
-        <p:spPr>
-          <a:xfrm>
-            <a:off x="457200" y="2880360"/>
-            <a:ext cx="384048" cy="384048"/>
-          </a:xfrm>
-          <a:prstGeom prst="rect">
-            <a:avLst/>
-          </a:prstGeom>
-          <a:noFill/>
-          <a:ln/>
-        </p:spPr>
-        <p:txBody>
-          <a:bodyPr wrap="square" lIns="0" tIns="0" rIns="0" bIns="0" rtlCol="0" anchor="ctr"/>
-          <a:lstStyle/>
-          <a:p>
-            <a:pPr algn="ctr" indent="0" marL="0">
-              <a:buNone/>
-            </a:pPr>
-            <a:r>
-              <a:rPr lang="en-US" sz="1600" b="1" dirty="0">
-                <a:solidFill>
-                  <a:schemeClr val="tx2"/>
-                </a:solidFill>
-              </a:rPr>
-              <a:t>3</a:t>
-            </a:r>
-            <a:endParaRPr lang="en-US" sz="1600" dirty="0"/>
-          </a:p>
-        </p:txBody>
-      </p:sp>
-      <p:sp>
-        <p:nvSpPr>
-          <p:cNvPr id="13" name="Text 11"/>
-          <p:cNvSpPr txBox="1"/>
-          <p:nvPr/>
-        </p:nvSpPr>
-        <p:spPr>
-          <a:xfrm>
-            <a:off x="1005840" y="2862072"/>
-            <a:ext cx="3383280" cy="411480"/>
-          </a:xfrm>
-          <a:prstGeom prst="rect">
-            <a:avLst/>
-          </a:prstGeom>
-          <a:noFill/>
-          <a:ln/>
-        </p:spPr>
-        <p:txBody>
-          <a:bodyPr wrap="square" lIns="0" tIns="0" rIns="0" bIns="0" rtlCol="0" anchor="t"/>
-          <a:lstStyle/>
-          <a:p>
-            <a:pPr indent="0" marL="0">
-              <a:buNone/>
-            </a:pPr>
-            <a:r>
-              <a:rPr lang="en-US" sz="1700" b="1" dirty="0">
-                <a:solidFill>
-                  <a:schemeClr val="bg1"/>
-                </a:solidFill>
-              </a:rPr>
-              <a:t>Lớp trực tiếp</a:t>
-            </a:r>
-            <a:endParaRPr lang="en-US" sz="1700" dirty="0"/>
-          </a:p>
-        </p:txBody>
-      </p:sp>
-      <p:sp>
-        <p:nvSpPr>
-          <p:cNvPr id="14" name="Text 12"/>
-          <p:cNvSpPr txBox="1"/>
-          <p:nvPr/>
-        </p:nvSpPr>
-        <p:spPr>
-          <a:xfrm>
-            <a:off x="1005840" y="3291840"/>
-            <a:ext cx="3383280" cy="1005840"/>
-          </a:xfrm>
-          <a:prstGeom prst="rect">
-            <a:avLst/>
-          </a:prstGeom>
-          <a:noFill/>
-          <a:ln/>
-        </p:spPr>
-        <p:txBody>
-          <a:bodyPr wrap="square" lIns="0" tIns="0" rIns="0" bIns="0" rtlCol="0" anchor="t"/>
-          <a:lstStyle/>
-          <a:p>
-            <a:pPr indent="0" marL="0">
-              <a:buNone/>
-            </a:pPr>
-            <a:r>
-              <a:rPr lang="en-US" sz="1400" dirty="0">
-                <a:solidFill>
-                  <a:schemeClr val="bg2"/>
-                </a:solidFill>
-              </a:rPr>
-              <a:t>Ký tên đầy đủ vào danh sách khi đến lớp</a:t>
-            </a:r>
-            <a:endParaRPr lang="en-US" sz="1400" dirty="0"/>
-          </a:p>
-        </p:txBody>
-      </p:sp>
-      <p:sp>
-        <p:nvSpPr>
-          <p:cNvPr id="15" name="So 4"/>
-          <p:cNvSpPr/>
-          <p:nvPr/>
-        </p:nvSpPr>
-        <p:spPr>
-          <a:xfrm>
-            <a:off x="4663440" y="2880360"/>
-            <a:ext cx="384048" cy="384048"/>
-          </a:xfrm>
-          <a:prstGeom prst="ellipse">
-            <a:avLst/>
-          </a:prstGeom>
-          <a:solidFill>
-            <a:schemeClr val="accent6"/>
-          </a:solidFill>
-          <a:ln/>
-        </p:spPr>
-      </p:sp>
-      <p:sp>
-        <p:nvSpPr>
-          <p:cNvPr id="16" name="Text 14"/>
-          <p:cNvSpPr txBox="1"/>
-          <p:nvPr/>
-        </p:nvSpPr>
-        <p:spPr>
-          <a:xfrm>
-            <a:off x="4663440" y="2880360"/>
-            <a:ext cx="384048" cy="384048"/>
-          </a:xfrm>
-          <a:prstGeom prst="rect">
-            <a:avLst/>
-          </a:prstGeom>
-          <a:noFill/>
-          <a:ln/>
-        </p:spPr>
-        <p:txBody>
-          <a:bodyPr wrap="square" lIns="0" tIns="0" rIns="0" bIns="0" rtlCol="0" anchor="ctr"/>
-          <a:lstStyle/>
-          <a:p>
-            <a:pPr algn="ctr" indent="0" marL="0">
-              <a:buNone/>
-            </a:pPr>
-            <a:r>
-              <a:rPr lang="en-US" sz="1600" b="1" dirty="0">
-                <a:solidFill>
-                  <a:schemeClr val="tx2"/>
-                </a:solidFill>
-              </a:rPr>
-              <a:t>4</a:t>
-            </a:r>
-            <a:endParaRPr lang="en-US" sz="1600" dirty="0"/>
-          </a:p>
-        </p:txBody>
-      </p:sp>
-      <p:sp>
-        <p:nvSpPr>
-          <p:cNvPr id="17" name="Text 15"/>
-          <p:cNvSpPr txBox="1"/>
-          <p:nvPr/>
-        </p:nvSpPr>
-        <p:spPr>
-          <a:xfrm>
-            <a:off x="5212080" y="2862072"/>
-            <a:ext cx="3383280" cy="411480"/>
-          </a:xfrm>
-          <a:prstGeom prst="rect">
-            <a:avLst/>
-          </a:prstGeom>
-          <a:noFill/>
-          <a:ln/>
-        </p:spPr>
-        <p:txBody>
-          <a:bodyPr wrap="square" lIns="0" tIns="0" rIns="0" bIns="0" rtlCol="0" anchor="t"/>
-          <a:lstStyle/>
-          <a:p>
-            <a:pPr indent="0" marL="0">
-              <a:buNone/>
-            </a:pPr>
-            <a:r>
-              <a:rPr lang="en-US" sz="1700" b="1" dirty="0">
-                <a:solidFill>
-                  <a:schemeClr val="bg1"/>
-                </a:solidFill>
-              </a:rPr>
-              <a:t>Biết trước sẽ vắng?</a:t>
-            </a:r>
-            <a:endParaRPr lang="en-US" sz="1700" dirty="0"/>
-          </a:p>
-        </p:txBody>
-      </p:sp>
-      <p:sp>
-        <p:nvSpPr>
-          <p:cNvPr id="18" name="Text 16"/>
-          <p:cNvSpPr txBox="1"/>
-          <p:nvPr/>
-        </p:nvSpPr>
-        <p:spPr>
-          <a:xfrm>
-            <a:off x="5212080" y="3291840"/>
-            <a:ext cx="3383280" cy="1005840"/>
-          </a:xfrm>
-          <a:prstGeom prst="rect">
-            <a:avLst/>
-          </a:prstGeom>
-          <a:noFill/>
-          <a:ln/>
-        </p:spPr>
-        <p:txBody>
-          <a:bodyPr wrap="square" lIns="0" tIns="0" rIns="0" bIns="0" rtlCol="0" anchor="t"/>
-          <a:lstStyle/>
-          <a:p>
-            <a:pPr indent="0" marL="0">
-              <a:buNone/>
-            </a:pPr>
-            <a:r>
-              <a:rPr lang="en-US" sz="1400" dirty="0">
-                <a:solidFill>
-                  <a:schemeClr val="bg2"/>
-                </a:solidFill>
-              </a:rPr>
-              <a:t>Báo người hỗ trợ trước buổi học, hoặc đề nghị đổi buổi nếu khóa có mở</a:t>
-            </a:r>
-            <a:endParaRPr lang="en-US" sz="1400" dirty="0"/>
+              <a:rPr lang="en-US" sz="1200" b="1" dirty="0">
+                <a:solidFill>
+                  <a:schemeClr val="tx1"/>
+                </a:solidFill>
+              </a:rPr>
+              <a:t>Nhắn lại người hỗ trợ</a:t>
+            </a:r>
+            <a:endParaRPr lang="en-US" sz="1200" dirty="0"/>
+          </a:p>
+        </p:txBody>
+      </p:sp>
+      <p:sp>
+        <p:nvSpPr>
+          <p:cNvPr id="25" name="Slide Number Placeholder 0"/>
+          <p:cNvSpPr>
+            <a:spLocks noGrp="1"/>
+          </p:cNvSpPr>
+          <p:nvPr>
+            <p:ph type="sldNum" sz="quarter" idx="4294967295"/>
+          </p:nvPr>
+        </p:nvSpPr>
+        <p:spPr>
+          <a:xfrm>
+            <a:off x="8229600" y="4800600"/>
+            <a:ext cx="457200" cy="201168"/>
+          </a:xfrm>
+          <a:prstGeom prst="rect">
+            <a:avLst/>
+          </a:prstGeom>
+          <a:extLst>
+            <a:ext uri="{C572A759-6A51-4108-AA02-DFA0A04FC94B}">
+              <ma14:wrappingTextBoxFlag xmlns:ma14="http://schemas.microsoft.com/office/mac/drawingml/2011/main" val="0"/>
+            </a:ext>
+          </a:extLst>
+        </p:spPr>
+        <p:txBody>
+          <a:bodyPr/>
+          <a:lstStyle>
+            <a:lvl1pPr>
+              <a:defRPr sz="1000">
+                <a:solidFill>
+                  <a:schemeClr val="accent5"/>
+                </a:solidFill>
+              </a:defRPr>
+            </a:lvl1pPr>
+          </a:lstStyle>
+          <a:p>
+            <a:pPr algn="r"/>
+            <a:fld id="{F7021451-1387-4CA6-816F-3879F97B5CBC}" type="slidenum">
+              <a:rPr b="0" lang="en-US"/>
+              <a:t>9</a:t>
+            </a:fld>
+            <a:endParaRPr lang="en-US"/>
           </a:p>
         </p:txBody>
       </p:sp>
